--- a/proposal/BAT_올리브영_2026_올더베러_마케팅제안_클린재설계_HAN.pptx
+++ b/proposal/BAT_올리브영_2026_올더베러_마케팅제안_클린재설계_HAN.pptx
@@ -3286,8 +3286,8 @@
         </p:nvSpPr>
         <p:spPr>
           <a:xfrm>
-            <a:off x="822960" y="2148840"/>
-            <a:ext cx="5029200" cy="1417320"/>
+            <a:off x="822960" y="2103120"/>
+            <a:ext cx="5029200" cy="1463040"/>
           </a:xfrm>
           <a:prstGeom prst="roundRect">
             <a:avLst>
@@ -3334,7 +3334,7 @@
         </p:nvSpPr>
         <p:spPr>
           <a:xfrm>
-            <a:off x="1078992" y="2404872"/>
+            <a:off x="1078992" y="2359152"/>
             <a:ext cx="457200" cy="457200"/>
           </a:xfrm>
           <a:prstGeom prst="ellipse">
@@ -3378,7 +3378,7 @@
         </p:nvSpPr>
         <p:spPr>
           <a:xfrm>
-            <a:off x="1691640" y="2404872"/>
+            <a:off x="1691640" y="2359152"/>
             <a:ext cx="4023360" cy="365760"/>
           </a:xfrm>
           <a:prstGeom prst="rect">
@@ -3414,8 +3414,8 @@
         </p:nvSpPr>
         <p:spPr>
           <a:xfrm>
-            <a:off x="1097280" y="3017520"/>
-            <a:ext cx="4480560" cy="411479"/>
+            <a:off x="1097280" y="2971800"/>
+            <a:ext cx="4480560" cy="457200"/>
           </a:xfrm>
           <a:prstGeom prst="rect">
             <a:avLst/>
@@ -3437,7 +3437,7 @@
                 <a:latin typeface="Pretendard"/>
                 <a:ea typeface="Pretendard"/>
               </a:rPr>
-              <a:t>올영세일 운영·타겟·IP 매체로 ROAS를 만들고, 고CPM 위기를 구매잠재·어드밴티지로 재구성</a:t>
+              <a:t>올영세일 운영·타겟·IP 매체로 ROAS 견인. 올영세일 메타 고CPM 위기를 OFF→구매잠재(기프트카드·쿠폰)·어드밴티지 재구성으로 대응</a:t>
             </a:r>
           </a:p>
         </p:txBody>
@@ -3450,8 +3450,8 @@
         </p:nvSpPr>
         <p:spPr>
           <a:xfrm>
-            <a:off x="6336792" y="2148840"/>
-            <a:ext cx="5029200" cy="1417320"/>
+            <a:off x="6336792" y="2103120"/>
+            <a:ext cx="5029200" cy="1463040"/>
           </a:xfrm>
           <a:prstGeom prst="roundRect">
             <a:avLst>
@@ -3498,7 +3498,7 @@
         </p:nvSpPr>
         <p:spPr>
           <a:xfrm>
-            <a:off x="6592824" y="2404872"/>
+            <a:off x="6592824" y="2359152"/>
             <a:ext cx="457200" cy="457200"/>
           </a:xfrm>
           <a:prstGeom prst="ellipse">
@@ -3542,7 +3542,7 @@
         </p:nvSpPr>
         <p:spPr>
           <a:xfrm>
-            <a:off x="7205472" y="2404872"/>
+            <a:off x="7205472" y="2359152"/>
             <a:ext cx="4023360" cy="365760"/>
           </a:xfrm>
           <a:prstGeom prst="rect">
@@ -3578,8 +3578,8 @@
         </p:nvSpPr>
         <p:spPr>
           <a:xfrm>
-            <a:off x="6611112" y="3017520"/>
-            <a:ext cx="4480560" cy="411479"/>
+            <a:off x="6611112" y="2971800"/>
+            <a:ext cx="4480560" cy="457200"/>
           </a:xfrm>
           <a:prstGeom prst="rect">
             <a:avLst/>
@@ -3601,7 +3601,7 @@
                 <a:latin typeface="Pretendard"/>
                 <a:ea typeface="Pretendard"/>
               </a:rPr>
-              <a:t>파이썬 크롤러·R 분석으로 리뷰·VOC를 직접 수집 — 올더베러 VOC 1,104건 딥다이브 구현</a:t>
+              <a:t>파이썬 크롤러 자체 개발 + R 빈도·키워드 분석으로 리뷰·VOC 직접 수집. ‘상황·목적’ 분류 → 올더베러 1,104건 딥다이브 대시보드 구현</a:t>
             </a:r>
           </a:p>
         </p:txBody>
@@ -3615,7 +3615,7 @@
         <p:spPr>
           <a:xfrm>
             <a:off x="822960" y="3703320"/>
-            <a:ext cx="5029200" cy="1417320"/>
+            <a:ext cx="5029200" cy="1463040"/>
           </a:xfrm>
           <a:prstGeom prst="roundRect">
             <a:avLst>
@@ -3743,7 +3743,7 @@
         <p:spPr>
           <a:xfrm>
             <a:off x="1097280" y="4572000"/>
-            <a:ext cx="4480560" cy="411479"/>
+            <a:ext cx="4480560" cy="457200"/>
           </a:xfrm>
           <a:prstGeom prst="rect">
             <a:avLst/>
@@ -3765,7 +3765,7 @@
                 <a:latin typeface="Pretendard"/>
                 <a:ea typeface="Pretendard"/>
               </a:rPr>
-              <a:t>감도×성과를 잇는 소재 시스템 — 목적 중심 분류 + 비주얼 키워드화로 컨펌·QC 효율화</a:t>
+              <a:t>감도×성과를 잇는 소재 시스템 — 목적 중심 분류(USP형/프로모션형) + 비주얼 키워드화(CLEAN·COOL·DYNAMIC)로 컨펌·QC 혼선 해소</a:t>
             </a:r>
           </a:p>
         </p:txBody>
@@ -3779,7 +3779,7 @@
         <p:spPr>
           <a:xfrm>
             <a:off x="6336792" y="3703320"/>
-            <a:ext cx="5029200" cy="1417320"/>
+            <a:ext cx="5029200" cy="1463040"/>
           </a:xfrm>
           <a:prstGeom prst="roundRect">
             <a:avLst>
@@ -3907,7 +3907,7 @@
         <p:spPr>
           <a:xfrm>
             <a:off x="6611112" y="4572000"/>
-            <a:ext cx="4480560" cy="411479"/>
+            <a:ext cx="4480560" cy="457200"/>
           </a:xfrm>
           <a:prstGeom prst="rect">
             <a:avLst/>
@@ -3929,7 +3929,7 @@
                 <a:latin typeface="Pretendard"/>
                 <a:ea typeface="Pretendard"/>
               </a:rPr>
-              <a:t>맞춤 크리에이터·시딩으로 바이럴·전환 — 역발상 훅·실시간 QC로 ROAS 개선</a:t>
+              <a:t>바이오힐보 US 시딩·산리오 콜라보·IP 모델 맞춤 매체 발굴 — ‘노인 필터’ 역발상 훅·나노 시딩·실시간 QC·부정댓글 모니터링</a:t>
             </a:r>
           </a:p>
         </p:txBody>
@@ -3942,7 +3942,7 @@
         </p:nvSpPr>
         <p:spPr>
           <a:xfrm>
-            <a:off x="841248" y="5349240"/>
+            <a:off x="841248" y="5413248"/>
             <a:ext cx="2615184" cy="640080"/>
           </a:xfrm>
           <a:prstGeom prst="rect">
@@ -3958,7 +3958,7 @@
           <a:p>
             <a:pPr algn="ctr"/>
             <a:r>
-              <a:rPr sz="1900" b="1" spc="-100">
+              <a:rPr sz="1800" b="1" spc="-100">
                 <a:solidFill>
                   <a:srgbClr val="3D2B1B"/>
                 </a:solidFill>
@@ -3978,7 +3978,7 @@
         </p:nvSpPr>
         <p:spPr>
           <a:xfrm>
-            <a:off x="841248" y="6025896"/>
+            <a:off x="841248" y="6089904"/>
             <a:ext cx="2615184" cy="457200"/>
           </a:xfrm>
           <a:prstGeom prst="rect">
@@ -4001,7 +4001,7 @@
                 <a:latin typeface="Pretendard"/>
                 <a:ea typeface="Pretendard"/>
               </a:rPr>
-              <a:t>올영세일</a:t>
+              <a:t>올영세일 운영</a:t>
             </a:r>
           </a:p>
         </p:txBody>
@@ -4014,7 +4014,7 @@
         </p:nvSpPr>
         <p:spPr>
           <a:xfrm>
-            <a:off x="3511296" y="5349240"/>
+            <a:off x="3511296" y="5413248"/>
             <a:ext cx="2615184" cy="640080"/>
           </a:xfrm>
           <a:prstGeom prst="rect">
@@ -4030,7 +4030,7 @@
           <a:p>
             <a:pPr algn="ctr"/>
             <a:r>
-              <a:rPr sz="1900" b="1" spc="-100">
+              <a:rPr sz="1800" b="1" spc="-100">
                 <a:solidFill>
                   <a:srgbClr val="3D2B1B"/>
                 </a:solidFill>
@@ -4050,7 +4050,7 @@
         </p:nvSpPr>
         <p:spPr>
           <a:xfrm>
-            <a:off x="3511296" y="6025896"/>
+            <a:off x="3511296" y="6089904"/>
             <a:ext cx="2615184" cy="457200"/>
           </a:xfrm>
           <a:prstGeom prst="rect">
@@ -4073,7 +4073,7 @@
                 <a:latin typeface="Pretendard"/>
                 <a:ea typeface="Pretendard"/>
               </a:rPr>
-              <a:t>브링그린</a:t>
+              <a:t>브링그린(15배)</a:t>
             </a:r>
           </a:p>
         </p:txBody>
@@ -4086,7 +4086,7 @@
         </p:nvSpPr>
         <p:spPr>
           <a:xfrm>
-            <a:off x="6181344" y="5349240"/>
+            <a:off x="6181344" y="5413248"/>
             <a:ext cx="2615184" cy="640080"/>
           </a:xfrm>
           <a:prstGeom prst="rect">
@@ -4102,7 +4102,7 @@
           <a:p>
             <a:pPr algn="ctr"/>
             <a:r>
-              <a:rPr sz="1900" b="1" spc="-100">
+              <a:rPr sz="1800" b="1" spc="-100">
                 <a:solidFill>
                   <a:srgbClr val="3D2B1B"/>
                 </a:solidFill>
@@ -4122,7 +4122,7 @@
         </p:nvSpPr>
         <p:spPr>
           <a:xfrm>
-            <a:off x="6181344" y="6025896"/>
+            <a:off x="6181344" y="6089904"/>
             <a:ext cx="2615184" cy="457200"/>
           </a:xfrm>
           <a:prstGeom prst="rect">
@@ -4145,7 +4145,7 @@
                 <a:latin typeface="Pretendard"/>
                 <a:ea typeface="Pretendard"/>
               </a:rPr>
-              <a:t>바이오힐보</a:t>
+              <a:t>바이오힐보 ROAS 515%</a:t>
             </a:r>
           </a:p>
         </p:txBody>
@@ -4158,7 +4158,7 @@
         </p:nvSpPr>
         <p:spPr>
           <a:xfrm>
-            <a:off x="8851392" y="5349240"/>
+            <a:off x="8851392" y="5413248"/>
             <a:ext cx="2615184" cy="640080"/>
           </a:xfrm>
           <a:prstGeom prst="rect">
@@ -4174,7 +4174,7 @@
           <a:p>
             <a:pPr algn="ctr"/>
             <a:r>
-              <a:rPr sz="1900" b="1" spc="-100">
+              <a:rPr sz="1800" b="1" spc="-100">
                 <a:solidFill>
                   <a:srgbClr val="3D2B1B"/>
                 </a:solidFill>
@@ -4194,7 +4194,7 @@
         </p:nvSpPr>
         <p:spPr>
           <a:xfrm>
-            <a:off x="8851392" y="6025896"/>
+            <a:off x="8851392" y="6089904"/>
             <a:ext cx="2615184" cy="457200"/>
           </a:xfrm>
           <a:prstGeom prst="rect">
@@ -4225,6 +4225,42 @@
       <p:sp>
         <p:nvSpPr>
           <p:cNvPr id="30" name="TextBox 29"/>
+          <p:cNvSpPr txBox="1"/>
+          <p:nvPr/>
+        </p:nvSpPr>
+        <p:spPr>
+          <a:xfrm>
+            <a:off x="822960" y="6355080"/>
+            <a:ext cx="10543032" cy="274320"/>
+          </a:xfrm>
+          <a:prstGeom prst="rect">
+            <a:avLst/>
+          </a:prstGeom>
+          <a:noFill/>
+        </p:spPr>
+        <p:txBody>
+          <a:bodyPr wrap="square" anchor="t" lIns="0" rIns="0" tIns="0" bIns="0">
+            <a:spAutoFit/>
+          </a:bodyPr>
+          <a:lstStyle/>
+          <a:p>
+            <a:pPr algn="l"/>
+            <a:r>
+              <a:rPr sz="850" b="0" spc="-100">
+                <a:solidFill>
+                  <a:srgbClr val="868680"/>
+                </a:solidFill>
+                <a:latin typeface="Pretendard"/>
+                <a:ea typeface="Pretendard"/>
+              </a:rPr>
+              <a:t>대표 케이스 — 올영세일 사전 캠페인 목표 검증 · 웨이크메이크 산리오 스프레이AI(장바구니 ROAS 1,180%) · 인스티즈 노출 733만 · 틱톡 75만뷰 CPV 3원</a:t>
+            </a:r>
+          </a:p>
+        </p:txBody>
+      </p:sp>
+      <p:sp>
+        <p:nvSpPr>
+          <p:cNvPr id="31" name="TextBox 30"/>
           <p:cNvSpPr txBox="1"/>
           <p:nvPr/>
         </p:nvSpPr>
@@ -9246,6 +9282,42 @@
       <p:sp>
         <p:nvSpPr>
           <p:cNvPr id="36" name="TextBox 35"/>
+          <p:cNvSpPr txBox="1"/>
+          <p:nvPr/>
+        </p:nvSpPr>
+        <p:spPr>
+          <a:xfrm>
+            <a:off x="822960" y="6537960"/>
+            <a:ext cx="10543032" cy="274320"/>
+          </a:xfrm>
+          <a:prstGeom prst="rect">
+            <a:avLst/>
+          </a:prstGeom>
+          <a:noFill/>
+        </p:spPr>
+        <p:txBody>
+          <a:bodyPr wrap="square" anchor="t" lIns="0" rIns="0" tIns="0" bIns="0">
+            <a:spAutoFit/>
+          </a:bodyPr>
+          <a:lstStyle/>
+          <a:p>
+            <a:pPr algn="l"/>
+            <a:r>
+              <a:rPr sz="850" b="0" spc="-100">
+                <a:solidFill>
+                  <a:srgbClr val="868680"/>
+                </a:solidFill>
+                <a:latin typeface="Pretendard"/>
+                <a:ea typeface="Pretendard"/>
+              </a:rPr>
+              <a:t>근거 — 식품 등의 표시·광고에 관한 법률 · 한국건강기능식품협회 자율심의 · 공정위 추천·보증 심사지침(유료광고·협찬 표시)</a:t>
+            </a:r>
+          </a:p>
+        </p:txBody>
+      </p:sp>
+      <p:sp>
+        <p:nvSpPr>
+          <p:cNvPr id="37" name="TextBox 36"/>
           <p:cNvSpPr txBox="1"/>
           <p:nvPr/>
         </p:nvSpPr>
@@ -15867,6 +15939,42 @@
       <p:sp>
         <p:nvSpPr>
           <p:cNvPr id="35" name="TextBox 34"/>
+          <p:cNvSpPr txBox="1"/>
+          <p:nvPr/>
+        </p:nvSpPr>
+        <p:spPr>
+          <a:xfrm>
+            <a:off x="822960" y="6492240"/>
+            <a:ext cx="10543032" cy="274320"/>
+          </a:xfrm>
+          <a:prstGeom prst="rect">
+            <a:avLst/>
+          </a:prstGeom>
+          <a:noFill/>
+        </p:spPr>
+        <p:txBody>
+          <a:bodyPr wrap="square" anchor="t" lIns="0" rIns="0" tIns="0" bIns="0">
+            <a:spAutoFit/>
+          </a:bodyPr>
+          <a:lstStyle/>
+          <a:p>
+            <a:pPr algn="l"/>
+            <a:r>
+              <a:rPr sz="850" b="0" spc="-100">
+                <a:solidFill>
+                  <a:srgbClr val="868680"/>
+                </a:solidFill>
+                <a:latin typeface="Pretendard"/>
+                <a:ea typeface="Pretendard"/>
+              </a:rPr>
+              <a:t>※ GEO=생성형 AI 답변 출처 선택 최적화 / AEO=AI 요약 답변 출처 반영 최적화 · 2026 검색 트렌드 + BAT 내부 프로토콜 기반</a:t>
+            </a:r>
+          </a:p>
+        </p:txBody>
+      </p:sp>
+      <p:sp>
+        <p:nvSpPr>
+          <p:cNvPr id="36" name="TextBox 35"/>
           <p:cNvSpPr txBox="1"/>
           <p:nvPr/>
         </p:nvSpPr>
@@ -32789,8 +32897,8 @@
         </p:nvSpPr>
         <p:spPr>
           <a:xfrm>
-            <a:off x="822960" y="5074920"/>
-            <a:ext cx="2560320" cy="640080"/>
+            <a:off x="822960" y="5120640"/>
+            <a:ext cx="1737360" cy="640080"/>
           </a:xfrm>
           <a:prstGeom prst="rect">
             <a:avLst/>
@@ -32805,7 +32913,7 @@
           <a:p>
             <a:pPr algn="ctr"/>
             <a:r>
-              <a:rPr sz="3200" b="1" spc="-100">
+              <a:rPr sz="1800" b="1" spc="-100">
                 <a:solidFill>
                   <a:srgbClr val="3D2B1B"/>
                 </a:solidFill>
@@ -32825,8 +32933,8 @@
         </p:nvSpPr>
         <p:spPr>
           <a:xfrm>
-            <a:off x="822960" y="5751576"/>
-            <a:ext cx="2560320" cy="457200"/>
+            <a:off x="822960" y="5797296"/>
+            <a:ext cx="1737360" cy="457200"/>
           </a:xfrm>
           <a:prstGeom prst="rect">
             <a:avLst/>
@@ -32861,8 +32969,8 @@
         </p:nvSpPr>
         <p:spPr>
           <a:xfrm>
-            <a:off x="3566160" y="5074920"/>
-            <a:ext cx="2560320" cy="640080"/>
+            <a:off x="2596896" y="5120640"/>
+            <a:ext cx="1737360" cy="640080"/>
           </a:xfrm>
           <a:prstGeom prst="rect">
             <a:avLst/>
@@ -32877,7 +32985,7 @@
           <a:p>
             <a:pPr algn="ctr"/>
             <a:r>
-              <a:rPr sz="3200" b="1" spc="-100">
+              <a:rPr sz="1800" b="1" spc="-100">
                 <a:solidFill>
                   <a:srgbClr val="3D2B1B"/>
                 </a:solidFill>
@@ -32897,8 +33005,8 @@
         </p:nvSpPr>
         <p:spPr>
           <a:xfrm>
-            <a:off x="3566160" y="5751576"/>
-            <a:ext cx="2560320" cy="457200"/>
+            <a:off x="2596896" y="5797296"/>
+            <a:ext cx="1737360" cy="457200"/>
           </a:xfrm>
           <a:prstGeom prst="rect">
             <a:avLst/>
@@ -32920,7 +33028,7 @@
                 <a:latin typeface="Pretendard"/>
                 <a:ea typeface="Pretendard"/>
               </a:rPr>
-              <a:t>시딩 전체 조회수</a:t>
+              <a:t>전체 조회수</a:t>
             </a:r>
           </a:p>
         </p:txBody>
@@ -32933,8 +33041,8 @@
         </p:nvSpPr>
         <p:spPr>
           <a:xfrm>
-            <a:off x="6309360" y="5074920"/>
-            <a:ext cx="2560320" cy="640080"/>
+            <a:off x="4370832" y="5120640"/>
+            <a:ext cx="1737360" cy="640080"/>
           </a:xfrm>
           <a:prstGeom prst="rect">
             <a:avLst/>
@@ -32949,7 +33057,7 @@
           <a:p>
             <a:pPr algn="ctr"/>
             <a:r>
-              <a:rPr sz="3200" b="1" spc="-100">
+              <a:rPr sz="1800" b="1" spc="-100">
                 <a:solidFill>
                   <a:srgbClr val="3D2B1B"/>
                 </a:solidFill>
@@ -32969,8 +33077,8 @@
         </p:nvSpPr>
         <p:spPr>
           <a:xfrm>
-            <a:off x="6309360" y="5751576"/>
-            <a:ext cx="2560320" cy="457200"/>
+            <a:off x="4370832" y="5797296"/>
+            <a:ext cx="1737360" cy="457200"/>
           </a:xfrm>
           <a:prstGeom prst="rect">
             <a:avLst/>
@@ -33005,8 +33113,8 @@
         </p:nvSpPr>
         <p:spPr>
           <a:xfrm>
-            <a:off x="9052560" y="5074920"/>
-            <a:ext cx="2560320" cy="640080"/>
+            <a:off x="6144768" y="5120640"/>
+            <a:ext cx="1737360" cy="640080"/>
           </a:xfrm>
           <a:prstGeom prst="rect">
             <a:avLst/>
@@ -33021,13 +33129,85 @@
           <a:p>
             <a:pPr algn="ctr"/>
             <a:r>
-              <a:rPr sz="3200" b="1" spc="-100">
+              <a:rPr sz="1800" b="1" spc="-100">
                 <a:solidFill>
                   <a:srgbClr val="3D2B1B"/>
                 </a:solidFill>
                 <a:latin typeface="Pretendard"/>
                 <a:ea typeface="Pretendard"/>
               </a:rPr>
+              <a:t>450+</a:t>
+            </a:r>
+          </a:p>
+        </p:txBody>
+      </p:sp>
+      <p:sp>
+        <p:nvSpPr>
+          <p:cNvPr id="14" name="TextBox 13"/>
+          <p:cNvSpPr txBox="1"/>
+          <p:nvPr/>
+        </p:nvSpPr>
+        <p:spPr>
+          <a:xfrm>
+            <a:off x="6144768" y="5797296"/>
+            <a:ext cx="1737360" cy="457200"/>
+          </a:xfrm>
+          <a:prstGeom prst="rect">
+            <a:avLst/>
+          </a:prstGeom>
+          <a:noFill/>
+        </p:spPr>
+        <p:txBody>
+          <a:bodyPr wrap="square" anchor="t" lIns="0" rIns="0" tIns="0" bIns="0">
+            <a:spAutoFit/>
+          </a:bodyPr>
+          <a:lstStyle/>
+          <a:p>
+            <a:pPr algn="ctr"/>
+            <a:r>
+              <a:rPr sz="1150" b="0" spc="-100">
+                <a:solidFill>
+                  <a:srgbClr val="141412"/>
+                </a:solidFill>
+                <a:latin typeface="Pretendard"/>
+                <a:ea typeface="Pretendard"/>
+              </a:rPr>
+              <a:t>#오늘도배러 해시태그</a:t>
+            </a:r>
+          </a:p>
+        </p:txBody>
+      </p:sp>
+      <p:sp>
+        <p:nvSpPr>
+          <p:cNvPr id="15" name="TextBox 14"/>
+          <p:cNvSpPr txBox="1"/>
+          <p:nvPr/>
+        </p:nvSpPr>
+        <p:spPr>
+          <a:xfrm>
+            <a:off x="7918704" y="5120640"/>
+            <a:ext cx="1737360" cy="640080"/>
+          </a:xfrm>
+          <a:prstGeom prst="rect">
+            <a:avLst/>
+          </a:prstGeom>
+          <a:noFill/>
+        </p:spPr>
+        <p:txBody>
+          <a:bodyPr wrap="none" anchor="t" lIns="0" rIns="0" tIns="0" bIns="0">
+            <a:spAutoFit/>
+          </a:bodyPr>
+          <a:lstStyle/>
+          <a:p>
+            <a:pPr algn="ctr"/>
+            <a:r>
+              <a:rPr sz="1800" b="1" spc="-100">
+                <a:solidFill>
+                  <a:srgbClr val="3D2B1B"/>
+                </a:solidFill>
+                <a:latin typeface="Pretendard"/>
+                <a:ea typeface="Pretendard"/>
+              </a:rPr>
               <a:t>1,000+</a:t>
             </a:r>
           </a:p>
@@ -33035,14 +33215,14 @@
       </p:sp>
       <p:sp>
         <p:nvSpPr>
-          <p:cNvPr id="14" name="TextBox 13"/>
-          <p:cNvSpPr txBox="1"/>
-          <p:nvPr/>
-        </p:nvSpPr>
-        <p:spPr>
-          <a:xfrm>
-            <a:off x="9052560" y="5751576"/>
-            <a:ext cx="2560320" cy="457200"/>
+          <p:cNvPr id="16" name="TextBox 15"/>
+          <p:cNvSpPr txBox="1"/>
+          <p:nvPr/>
+        </p:nvSpPr>
+        <p:spPr>
+          <a:xfrm>
+            <a:off x="7918704" y="5797296"/>
+            <a:ext cx="1737360" cy="457200"/>
           </a:xfrm>
           <a:prstGeom prst="rect">
             <a:avLst/>
@@ -33071,7 +33251,115 @@
       </p:sp>
       <p:sp>
         <p:nvSpPr>
-          <p:cNvPr id="15" name="TextBox 14"/>
+          <p:cNvPr id="17" name="TextBox 16"/>
+          <p:cNvSpPr txBox="1"/>
+          <p:nvPr/>
+        </p:nvSpPr>
+        <p:spPr>
+          <a:xfrm>
+            <a:off x="9692640" y="5120640"/>
+            <a:ext cx="1737360" cy="640080"/>
+          </a:xfrm>
+          <a:prstGeom prst="rect">
+            <a:avLst/>
+          </a:prstGeom>
+          <a:noFill/>
+        </p:spPr>
+        <p:txBody>
+          <a:bodyPr wrap="none" anchor="t" lIns="0" rIns="0" tIns="0" bIns="0">
+            <a:spAutoFit/>
+          </a:bodyPr>
+          <a:lstStyle/>
+          <a:p>
+            <a:pPr algn="ctr"/>
+            <a:r>
+              <a:rPr sz="1800" b="1" spc="-100">
+                <a:solidFill>
+                  <a:srgbClr val="3D2B1B"/>
+                </a:solidFill>
+                <a:latin typeface="Pretendard"/>
+                <a:ea typeface="Pretendard"/>
+              </a:rPr>
+              <a:t>50+</a:t>
+            </a:r>
+          </a:p>
+        </p:txBody>
+      </p:sp>
+      <p:sp>
+        <p:nvSpPr>
+          <p:cNvPr id="18" name="TextBox 17"/>
+          <p:cNvSpPr txBox="1"/>
+          <p:nvPr/>
+        </p:nvSpPr>
+        <p:spPr>
+          <a:xfrm>
+            <a:off x="9692640" y="5797296"/>
+            <a:ext cx="1737360" cy="457200"/>
+          </a:xfrm>
+          <a:prstGeom prst="rect">
+            <a:avLst/>
+          </a:prstGeom>
+          <a:noFill/>
+        </p:spPr>
+        <p:txBody>
+          <a:bodyPr wrap="square" anchor="t" lIns="0" rIns="0" tIns="0" bIns="0">
+            <a:spAutoFit/>
+          </a:bodyPr>
+          <a:lstStyle/>
+          <a:p>
+            <a:pPr algn="ctr"/>
+            <a:r>
+              <a:rPr sz="1150" b="0" spc="-100">
+                <a:solidFill>
+                  <a:srgbClr val="141412"/>
+                </a:solidFill>
+                <a:latin typeface="Pretendard"/>
+                <a:ea typeface="Pretendard"/>
+              </a:rPr>
+              <a:t>어필리에이트 구동</a:t>
+            </a:r>
+          </a:p>
+        </p:txBody>
+      </p:sp>
+      <p:sp>
+        <p:nvSpPr>
+          <p:cNvPr id="19" name="TextBox 18"/>
+          <p:cNvSpPr txBox="1"/>
+          <p:nvPr/>
+        </p:nvSpPr>
+        <p:spPr>
+          <a:xfrm>
+            <a:off x="822960" y="6035040"/>
+            <a:ext cx="10543032" cy="274320"/>
+          </a:xfrm>
+          <a:prstGeom prst="rect">
+            <a:avLst/>
+          </a:prstGeom>
+          <a:noFill/>
+        </p:spPr>
+        <p:txBody>
+          <a:bodyPr wrap="square" anchor="t" lIns="0" rIns="0" tIns="0" bIns="0">
+            <a:spAutoFit/>
+          </a:bodyPr>
+          <a:lstStyle/>
+          <a:p>
+            <a:pPr algn="l"/>
+            <a:r>
+              <a:rPr sz="850" b="0" spc="-100">
+                <a:solidFill>
+                  <a:srgbClr val="868680"/>
+                </a:solidFill>
+                <a:latin typeface="Pretendard"/>
+                <a:ea typeface="Pretendard"/>
+              </a:rPr>
+              <a:t>측정 — 인스타 해시태그·콘텐츠 집계 / 네이버·구글 검색량·SNS 언급량 / 올영 카테고리 랭킹·월간 리포트 / VOC 딥다이브·CRM</a:t>
+            </a:r>
+          </a:p>
+        </p:txBody>
+      </p:sp>
+      <p:sp>
+        <p:nvSpPr>
+          <p:cNvPr id="20" name="TextBox 19"/>
           <p:cNvSpPr txBox="1"/>
           <p:nvPr/>
         </p:nvSpPr>
@@ -36919,44 +37207,8 @@
         </p:nvSpPr>
         <p:spPr>
           <a:xfrm>
-            <a:off x="1188720" y="2148840"/>
-            <a:ext cx="3017520" cy="640080"/>
-          </a:xfrm>
-          <a:prstGeom prst="rect">
-            <a:avLst/>
-          </a:prstGeom>
-          <a:noFill/>
-        </p:spPr>
-        <p:txBody>
-          <a:bodyPr wrap="none" anchor="t" lIns="0" rIns="0" tIns="0" bIns="0">
-            <a:spAutoFit/>
-          </a:bodyPr>
-          <a:lstStyle/>
-          <a:p>
-            <a:pPr algn="ctr"/>
-            <a:r>
-              <a:rPr sz="3200" b="1" spc="-100">
-                <a:solidFill>
-                  <a:srgbClr val="3D2B1B"/>
-                </a:solidFill>
-                <a:latin typeface="Pretendard"/>
-                <a:ea typeface="Pretendard"/>
-              </a:rPr>
-              <a:t>6.23%</a:t>
-            </a:r>
-          </a:p>
-        </p:txBody>
-      </p:sp>
-      <p:sp>
-        <p:nvSpPr>
-          <p:cNvPr id="7" name="TextBox 6"/>
-          <p:cNvSpPr txBox="1"/>
-          <p:nvPr/>
-        </p:nvSpPr>
-        <p:spPr>
-          <a:xfrm>
-            <a:off x="1188720" y="2825496"/>
-            <a:ext cx="3017520" cy="457200"/>
+            <a:off x="822960" y="2011680"/>
+            <a:ext cx="5760720" cy="292608"/>
           </a:xfrm>
           <a:prstGeom prst="rect">
             <a:avLst/>
@@ -36969,174 +37221,427 @@
           </a:bodyPr>
           <a:lstStyle/>
           <a:p>
-            <a:pPr algn="ctr"/>
-            <a:r>
-              <a:rPr sz="1150" b="0" spc="-100">
+            <a:pPr algn="l"/>
+            <a:r>
+              <a:rPr sz="1250" b="1" spc="-100">
                 <a:solidFill>
                   <a:srgbClr val="141412"/>
                 </a:solidFill>
                 <a:latin typeface="Pretendard"/>
                 <a:ea typeface="Pretendard"/>
               </a:rPr>
-              <a:t>나노 인게이지먼트 (전 티어 최고)</a:t>
-            </a:r>
-          </a:p>
-        </p:txBody>
-      </p:sp>
-      <p:sp>
-        <p:nvSpPr>
-          <p:cNvPr id="8" name="TextBox 7"/>
-          <p:cNvSpPr txBox="1"/>
-          <p:nvPr/>
-        </p:nvSpPr>
-        <p:spPr>
-          <a:xfrm>
-            <a:off x="4572000" y="2148840"/>
-            <a:ext cx="3017520" cy="640080"/>
-          </a:xfrm>
-          <a:prstGeom prst="rect">
-            <a:avLst/>
-          </a:prstGeom>
-          <a:noFill/>
-        </p:spPr>
-        <p:txBody>
-          <a:bodyPr wrap="none" anchor="t" lIns="0" rIns="0" tIns="0" bIns="0">
-            <a:spAutoFit/>
-          </a:bodyPr>
-          <a:lstStyle/>
-          <a:p>
-            <a:pPr algn="ctr"/>
-            <a:r>
-              <a:rPr sz="3200" b="1" spc="-100">
-                <a:solidFill>
-                  <a:srgbClr val="3D2B1B"/>
-                </a:solidFill>
-                <a:latin typeface="Pretendard"/>
-                <a:ea typeface="Pretendard"/>
-              </a:rPr>
-              <a:t>2~3배</a:t>
-            </a:r>
-          </a:p>
-        </p:txBody>
-      </p:sp>
-      <p:sp>
-        <p:nvSpPr>
-          <p:cNvPr id="9" name="TextBox 8"/>
-          <p:cNvSpPr txBox="1"/>
-          <p:nvPr/>
-        </p:nvSpPr>
-        <p:spPr>
-          <a:xfrm>
-            <a:off x="4572000" y="2825496"/>
-            <a:ext cx="3017520" cy="457200"/>
-          </a:xfrm>
-          <a:prstGeom prst="rect">
-            <a:avLst/>
-          </a:prstGeom>
-          <a:noFill/>
-        </p:spPr>
-        <p:txBody>
-          <a:bodyPr wrap="square" anchor="t" lIns="0" rIns="0" tIns="0" bIns="0">
-            <a:spAutoFit/>
-          </a:bodyPr>
-          <a:lstStyle/>
-          <a:p>
-            <a:pPr algn="ctr"/>
-            <a:r>
-              <a:rPr sz="1150" b="0" spc="-100">
-                <a:solidFill>
-                  <a:srgbClr val="141412"/>
-                </a:solidFill>
-                <a:latin typeface="Pretendard"/>
-                <a:ea typeface="Pretendard"/>
-              </a:rPr>
-              <a:t>나노·마이크로 전환율 (vs 매크로)</a:t>
-            </a:r>
-          </a:p>
-        </p:txBody>
-      </p:sp>
-      <p:sp>
-        <p:nvSpPr>
-          <p:cNvPr id="10" name="TextBox 9"/>
-          <p:cNvSpPr txBox="1"/>
-          <p:nvPr/>
-        </p:nvSpPr>
-        <p:spPr>
-          <a:xfrm>
-            <a:off x="7955280" y="2148840"/>
-            <a:ext cx="3017520" cy="640080"/>
-          </a:xfrm>
-          <a:prstGeom prst="rect">
-            <a:avLst/>
-          </a:prstGeom>
-          <a:noFill/>
-        </p:spPr>
-        <p:txBody>
-          <a:bodyPr wrap="none" anchor="t" lIns="0" rIns="0" tIns="0" bIns="0">
-            <a:spAutoFit/>
-          </a:bodyPr>
-          <a:lstStyle/>
-          <a:p>
-            <a:pPr algn="ctr"/>
-            <a:r>
-              <a:rPr sz="3200" b="1" spc="-100">
-                <a:solidFill>
-                  <a:srgbClr val="3D2B1B"/>
-                </a:solidFill>
-                <a:latin typeface="Pretendard"/>
-                <a:ea typeface="Pretendard"/>
-              </a:rPr>
-              <a:t>73%</a:t>
-            </a:r>
-          </a:p>
-        </p:txBody>
-      </p:sp>
-      <p:sp>
-        <p:nvSpPr>
-          <p:cNvPr id="11" name="TextBox 10"/>
-          <p:cNvSpPr txBox="1"/>
-          <p:nvPr/>
-        </p:nvSpPr>
-        <p:spPr>
-          <a:xfrm>
-            <a:off x="7955280" y="2825496"/>
-            <a:ext cx="3017520" cy="457200"/>
-          </a:xfrm>
-          <a:prstGeom prst="rect">
-            <a:avLst/>
-          </a:prstGeom>
-          <a:noFill/>
-        </p:spPr>
-        <p:txBody>
-          <a:bodyPr wrap="square" anchor="t" lIns="0" rIns="0" tIns="0" bIns="0">
-            <a:spAutoFit/>
-          </a:bodyPr>
-          <a:lstStyle/>
-          <a:p>
-            <a:pPr algn="ctr"/>
-            <a:r>
-              <a:rPr sz="1150" b="0" spc="-100">
-                <a:solidFill>
-                  <a:srgbClr val="141412"/>
-                </a:solidFill>
-                <a:latin typeface="Pretendard"/>
-                <a:ea typeface="Pretendard"/>
-              </a:rPr>
-              <a:t>마이크로·미드 우선 선택 브랜드</a:t>
-            </a:r>
-          </a:p>
-        </p:txBody>
-      </p:sp>
-      <p:sp>
-        <p:nvSpPr>
-          <p:cNvPr id="12" name="Rounded Rectangle 11"/>
+              <a:t>한눈 비교 — 메가·매크로 vs 마이크로·나노 (2026)</a:t>
+            </a:r>
+          </a:p>
+        </p:txBody>
+      </p:sp>
+      <p:graphicFrame>
+        <p:nvGraphicFramePr>
+          <p:cNvPr id="7" name="Table 6"/>
+          <p:cNvGraphicFramePr>
+            <a:graphicFrameLocks noGrp="1"/>
+          </p:cNvGraphicFramePr>
+          <p:nvPr/>
+        </p:nvGraphicFramePr>
+        <p:xfrm>
+          <a:off x="822960" y="2359152"/>
+          <a:ext cx="5760718" cy="2834640"/>
+        </p:xfrm>
+        <a:graphic>
+          <a:graphicData uri="http://schemas.openxmlformats.org/drawingml/2006/table">
+            <a:tbl>
+              <a:tblPr>
+                <a:tableStyleId>{5C22544A-7EE6-4342-B048-85BDC9FD1C3A}</a:tableStyleId>
+              </a:tblPr>
+              <a:tblGrid>
+                <a:gridCol w="1468418"/>
+                <a:gridCol w="1807284"/>
+                <a:gridCol w="2485016"/>
+              </a:tblGrid>
+              <a:tr h="566928">
+                <a:tc>
+                  <a:txBody>
+                    <a:bodyPr wrap="square"/>
+                    <a:lstStyle/>
+                    <a:p>
+                      <a:pPr algn="l"/>
+                      <a:r>
+                        <a:rPr sz="1000" b="1" spc="-100">
+                          <a:solidFill>
+                            <a:srgbClr val="FFFFFF"/>
+                          </a:solidFill>
+                          <a:latin typeface="Pretendard"/>
+                          <a:ea typeface="Pretendard"/>
+                        </a:rPr>
+                        <a:t>지표</a:t>
+                      </a:r>
+                    </a:p>
+                  </a:txBody>
+                  <a:tcPr marL="63500" marR="63500" marT="25400" marB="25400" anchor="ctr">
+                    <a:solidFill>
+                      <a:srgbClr val="3D2B1B"/>
+                    </a:solidFill>
+                  </a:tcPr>
+                </a:tc>
+                <a:tc>
+                  <a:txBody>
+                    <a:bodyPr wrap="square"/>
+                    <a:lstStyle/>
+                    <a:p>
+                      <a:pPr algn="l"/>
+                      <a:r>
+                        <a:rPr sz="1000" b="1" spc="-100">
+                          <a:solidFill>
+                            <a:srgbClr val="FFFFFF"/>
+                          </a:solidFill>
+                          <a:latin typeface="Pretendard"/>
+                          <a:ea typeface="Pretendard"/>
+                        </a:rPr>
+                        <a:t>메가·매크로</a:t>
+                      </a:r>
+                    </a:p>
+                  </a:txBody>
+                  <a:tcPr marL="63500" marR="63500" marT="25400" marB="25400" anchor="ctr">
+                    <a:solidFill>
+                      <a:srgbClr val="3D2B1B"/>
+                    </a:solidFill>
+                  </a:tcPr>
+                </a:tc>
+                <a:tc>
+                  <a:txBody>
+                    <a:bodyPr wrap="square"/>
+                    <a:lstStyle/>
+                    <a:p>
+                      <a:pPr algn="l"/>
+                      <a:r>
+                        <a:rPr sz="1000" b="1" spc="-100">
+                          <a:solidFill>
+                            <a:srgbClr val="FFFFFF"/>
+                          </a:solidFill>
+                          <a:latin typeface="Pretendard"/>
+                          <a:ea typeface="Pretendard"/>
+                        </a:rPr>
+                        <a:t>마이크로·나노 ★</a:t>
+                      </a:r>
+                    </a:p>
+                  </a:txBody>
+                  <a:tcPr marL="63500" marR="63500" marT="25400" marB="25400" anchor="ctr">
+                    <a:solidFill>
+                      <a:srgbClr val="3D2B1B"/>
+                    </a:solidFill>
+                  </a:tcPr>
+                </a:tc>
+              </a:tr>
+              <a:tr h="566928">
+                <a:tc>
+                  <a:txBody>
+                    <a:bodyPr wrap="square"/>
+                    <a:lstStyle/>
+                    <a:p>
+                      <a:pPr algn="l"/>
+                      <a:r>
+                        <a:rPr sz="950" b="1" spc="-100">
+                          <a:solidFill>
+                            <a:srgbClr val="141412"/>
+                          </a:solidFill>
+                          <a:latin typeface="Pretendard"/>
+                          <a:ea typeface="Pretendard"/>
+                        </a:rPr>
+                        <a:t>인게이지먼트</a:t>
+                      </a:r>
+                    </a:p>
+                  </a:txBody>
+                  <a:tcPr marL="63500" marR="63500" marT="25400" marB="25400" anchor="ctr">
+                    <a:solidFill>
+                      <a:srgbClr val="FFFFFF"/>
+                    </a:solidFill>
+                  </a:tcPr>
+                </a:tc>
+                <a:tc>
+                  <a:txBody>
+                    <a:bodyPr wrap="square"/>
+                    <a:lstStyle/>
+                    <a:p>
+                      <a:pPr algn="l"/>
+                      <a:r>
+                        <a:rPr sz="950" b="0" spc="-100">
+                          <a:solidFill>
+                            <a:srgbClr val="141412"/>
+                          </a:solidFill>
+                          <a:latin typeface="Pretendard"/>
+                          <a:ea typeface="Pretendard"/>
+                        </a:rPr>
+                        <a:t>평균 1%대</a:t>
+                      </a:r>
+                    </a:p>
+                  </a:txBody>
+                  <a:tcPr marL="63500" marR="63500" marT="25400" marB="25400" anchor="ctr">
+                    <a:solidFill>
+                      <a:srgbClr val="FFFFFF"/>
+                    </a:solidFill>
+                  </a:tcPr>
+                </a:tc>
+                <a:tc>
+                  <a:txBody>
+                    <a:bodyPr wrap="square"/>
+                    <a:lstStyle/>
+                    <a:p>
+                      <a:pPr algn="l"/>
+                      <a:r>
+                        <a:rPr sz="950" b="0" spc="-100">
+                          <a:solidFill>
+                            <a:srgbClr val="141412"/>
+                          </a:solidFill>
+                          <a:latin typeface="Pretendard"/>
+                          <a:ea typeface="Pretendard"/>
+                        </a:rPr>
+                        <a:t>나노 6.23% (전 티어 최고)</a:t>
+                      </a:r>
+                    </a:p>
+                  </a:txBody>
+                  <a:tcPr marL="63500" marR="63500" marT="25400" marB="25400" anchor="ctr">
+                    <a:solidFill>
+                      <a:srgbClr val="FFFFFF"/>
+                    </a:solidFill>
+                  </a:tcPr>
+                </a:tc>
+              </a:tr>
+              <a:tr h="566928">
+                <a:tc>
+                  <a:txBody>
+                    <a:bodyPr wrap="square"/>
+                    <a:lstStyle/>
+                    <a:p>
+                      <a:pPr algn="l"/>
+                      <a:r>
+                        <a:rPr sz="950" b="1" spc="-100">
+                          <a:solidFill>
+                            <a:srgbClr val="141412"/>
+                          </a:solidFill>
+                          <a:latin typeface="Pretendard"/>
+                          <a:ea typeface="Pretendard"/>
+                        </a:rPr>
+                        <a:t>전환율</a:t>
+                      </a:r>
+                    </a:p>
+                  </a:txBody>
+                  <a:tcPr marL="63500" marR="63500" marT="25400" marB="25400" anchor="ctr">
+                    <a:solidFill>
+                      <a:srgbClr val="F3F2E7"/>
+                    </a:solidFill>
+                  </a:tcPr>
+                </a:tc>
+                <a:tc>
+                  <a:txBody>
+                    <a:bodyPr wrap="square"/>
+                    <a:lstStyle/>
+                    <a:p>
+                      <a:pPr algn="l"/>
+                      <a:r>
+                        <a:rPr sz="950" b="0" spc="-100">
+                          <a:solidFill>
+                            <a:srgbClr val="141412"/>
+                          </a:solidFill>
+                          <a:latin typeface="Pretendard"/>
+                          <a:ea typeface="Pretendard"/>
+                        </a:rPr>
+                        <a:t>상대적으로 낮음</a:t>
+                      </a:r>
+                    </a:p>
+                  </a:txBody>
+                  <a:tcPr marL="63500" marR="63500" marT="25400" marB="25400" anchor="ctr">
+                    <a:solidFill>
+                      <a:srgbClr val="F3F2E7"/>
+                    </a:solidFill>
+                  </a:tcPr>
+                </a:tc>
+                <a:tc>
+                  <a:txBody>
+                    <a:bodyPr wrap="square"/>
+                    <a:lstStyle/>
+                    <a:p>
+                      <a:pPr algn="l"/>
+                      <a:r>
+                        <a:rPr sz="950" b="0" spc="-100">
+                          <a:solidFill>
+                            <a:srgbClr val="141412"/>
+                          </a:solidFill>
+                          <a:latin typeface="Pretendard"/>
+                          <a:ea typeface="Pretendard"/>
+                        </a:rPr>
+                        <a:t>매크로 대비 2~3배</a:t>
+                      </a:r>
+                    </a:p>
+                  </a:txBody>
+                  <a:tcPr marL="63500" marR="63500" marT="25400" marB="25400" anchor="ctr">
+                    <a:solidFill>
+                      <a:srgbClr val="F3F2E7"/>
+                    </a:solidFill>
+                  </a:tcPr>
+                </a:tc>
+              </a:tr>
+              <a:tr h="566928">
+                <a:tc>
+                  <a:txBody>
+                    <a:bodyPr wrap="square"/>
+                    <a:lstStyle/>
+                    <a:p>
+                      <a:pPr algn="l"/>
+                      <a:r>
+                        <a:rPr sz="950" b="1" spc="-100">
+                          <a:solidFill>
+                            <a:srgbClr val="141412"/>
+                          </a:solidFill>
+                          <a:latin typeface="Pretendard"/>
+                          <a:ea typeface="Pretendard"/>
+                        </a:rPr>
+                        <a:t>진성도·신뢰</a:t>
+                      </a:r>
+                    </a:p>
+                  </a:txBody>
+                  <a:tcPr marL="63500" marR="63500" marT="25400" marB="25400" anchor="ctr">
+                    <a:solidFill>
+                      <a:srgbClr val="FFFFFF"/>
+                    </a:solidFill>
+                  </a:tcPr>
+                </a:tc>
+                <a:tc>
+                  <a:txBody>
+                    <a:bodyPr wrap="square"/>
+                    <a:lstStyle/>
+                    <a:p>
+                      <a:pPr algn="l"/>
+                      <a:r>
+                        <a:rPr sz="950" b="0" spc="-100">
+                          <a:solidFill>
+                            <a:srgbClr val="141412"/>
+                          </a:solidFill>
+                          <a:latin typeface="Pretendard"/>
+                          <a:ea typeface="Pretendard"/>
+                        </a:rPr>
+                        <a:t>광고로 인식·낮음</a:t>
+                      </a:r>
+                    </a:p>
+                  </a:txBody>
+                  <a:tcPr marL="63500" marR="63500" marT="25400" marB="25400" anchor="ctr">
+                    <a:solidFill>
+                      <a:srgbClr val="FFFFFF"/>
+                    </a:solidFill>
+                  </a:tcPr>
+                </a:tc>
+                <a:tc>
+                  <a:txBody>
+                    <a:bodyPr wrap="square"/>
+                    <a:lstStyle/>
+                    <a:p>
+                      <a:pPr algn="l"/>
+                      <a:r>
+                        <a:rPr sz="950" b="0" spc="-100">
+                          <a:solidFill>
+                            <a:srgbClr val="141412"/>
+                          </a:solidFill>
+                          <a:latin typeface="Pretendard"/>
+                          <a:ea typeface="Pretendard"/>
+                        </a:rPr>
+                        <a:t>나노 최고·진성 리뷰 접근</a:t>
+                      </a:r>
+                    </a:p>
+                  </a:txBody>
+                  <a:tcPr marL="63500" marR="63500" marT="25400" marB="25400" anchor="ctr">
+                    <a:solidFill>
+                      <a:srgbClr val="FFFFFF"/>
+                    </a:solidFill>
+                  </a:tcPr>
+                </a:tc>
+              </a:tr>
+              <a:tr h="566928">
+                <a:tc>
+                  <a:txBody>
+                    <a:bodyPr wrap="square"/>
+                    <a:lstStyle/>
+                    <a:p>
+                      <a:pPr algn="l"/>
+                      <a:r>
+                        <a:rPr sz="950" b="1" spc="-100">
+                          <a:solidFill>
+                            <a:srgbClr val="141412"/>
+                          </a:solidFill>
+                          <a:latin typeface="Pretendard"/>
+                          <a:ea typeface="Pretendard"/>
+                        </a:rPr>
+                        <a:t>비용·ROI</a:t>
+                      </a:r>
+                    </a:p>
+                  </a:txBody>
+                  <a:tcPr marL="63500" marR="63500" marT="25400" marB="25400" anchor="ctr">
+                    <a:solidFill>
+                      <a:srgbClr val="F3F2E7"/>
+                    </a:solidFill>
+                  </a:tcPr>
+                </a:tc>
+                <a:tc>
+                  <a:txBody>
+                    <a:bodyPr wrap="square"/>
+                    <a:lstStyle/>
+                    <a:p>
+                      <a:pPr algn="l"/>
+                      <a:r>
+                        <a:rPr sz="950" b="0" spc="-100">
+                          <a:solidFill>
+                            <a:srgbClr val="141412"/>
+                          </a:solidFill>
+                          <a:latin typeface="Pretendard"/>
+                          <a:ea typeface="Pretendard"/>
+                        </a:rPr>
+                        <a:t>고비용·단발성</a:t>
+                      </a:r>
+                    </a:p>
+                  </a:txBody>
+                  <a:tcPr marL="63500" marR="63500" marT="25400" marB="25400" anchor="ctr">
+                    <a:solidFill>
+                      <a:srgbClr val="F3F2E7"/>
+                    </a:solidFill>
+                  </a:tcPr>
+                </a:tc>
+                <a:tc>
+                  <a:txBody>
+                    <a:bodyPr wrap="square"/>
+                    <a:lstStyle/>
+                    <a:p>
+                      <a:pPr algn="l"/>
+                      <a:r>
+                        <a:rPr sz="950" b="0" spc="-100">
+                          <a:solidFill>
+                            <a:srgbClr val="141412"/>
+                          </a:solidFill>
+                          <a:latin typeface="Pretendard"/>
+                          <a:ea typeface="Pretendard"/>
+                        </a:rPr>
+                        <a:t>73% 우선 선택·ROI 우수</a:t>
+                      </a:r>
+                    </a:p>
+                  </a:txBody>
+                  <a:tcPr marL="63500" marR="63500" marT="25400" marB="25400" anchor="ctr">
+                    <a:solidFill>
+                      <a:srgbClr val="F3F2E7"/>
+                    </a:solidFill>
+                  </a:tcPr>
+                </a:tc>
+              </a:tr>
+            </a:tbl>
+          </a:graphicData>
+        </a:graphic>
+      </p:graphicFrame>
+      <p:sp>
+        <p:nvSpPr>
+          <p:cNvPr id="8" name="Rounded Rectangle 7"/>
           <p:cNvSpPr/>
           <p:nvPr/>
         </p:nvSpPr>
         <p:spPr>
           <a:xfrm>
-            <a:off x="822960" y="3703320"/>
-            <a:ext cx="3346704" cy="2194560"/>
+            <a:off x="6858000" y="2359152"/>
+            <a:ext cx="4480560" cy="1060704"/>
           </a:xfrm>
           <a:prstGeom prst="roundRect">
             <a:avLst>
@@ -37177,14 +37682,14 @@
       </p:sp>
       <p:sp>
         <p:nvSpPr>
-          <p:cNvPr id="13" name="Rectangle 12"/>
+          <p:cNvPr id="9" name="Rectangle 8"/>
           <p:cNvSpPr/>
           <p:nvPr/>
         </p:nvSpPr>
         <p:spPr>
           <a:xfrm>
-            <a:off x="822960" y="3703320"/>
-            <a:ext cx="3346704" cy="548640"/>
+            <a:off x="6858000" y="2359152"/>
+            <a:ext cx="82296" cy="1060704"/>
           </a:xfrm>
           <a:prstGeom prst="rect">
             <a:avLst/>
@@ -37221,31 +37726,31 @@
       </p:sp>
       <p:sp>
         <p:nvSpPr>
-          <p:cNvPr id="14" name="TextBox 13"/>
-          <p:cNvSpPr txBox="1"/>
-          <p:nvPr/>
-        </p:nvSpPr>
-        <p:spPr>
-          <a:xfrm>
-            <a:off x="822960" y="3703320"/>
-            <a:ext cx="3346704" cy="548640"/>
-          </a:xfrm>
-          <a:prstGeom prst="rect">
-            <a:avLst/>
-          </a:prstGeom>
-          <a:noFill/>
-        </p:spPr>
-        <p:txBody>
-          <a:bodyPr wrap="square" anchor="ctr" lIns="0" rIns="0" tIns="0" bIns="0">
-            <a:spAutoFit/>
-          </a:bodyPr>
-          <a:lstStyle/>
-          <a:p>
-            <a:pPr algn="ctr"/>
-            <a:r>
-              <a:rPr sz="1400" b="1" spc="-100">
-                <a:solidFill>
-                  <a:srgbClr val="FFFFFF"/>
+          <p:cNvPr id="10" name="TextBox 9"/>
+          <p:cNvSpPr txBox="1"/>
+          <p:nvPr/>
+        </p:nvSpPr>
+        <p:spPr>
+          <a:xfrm>
+            <a:off x="7086600" y="2468880"/>
+            <a:ext cx="4023360" cy="274320"/>
+          </a:xfrm>
+          <a:prstGeom prst="rect">
+            <a:avLst/>
+          </a:prstGeom>
+          <a:noFill/>
+        </p:spPr>
+        <p:txBody>
+          <a:bodyPr wrap="square" anchor="t" lIns="0" rIns="0" tIns="0" bIns="0">
+            <a:spAutoFit/>
+          </a:bodyPr>
+          <a:lstStyle/>
+          <a:p>
+            <a:pPr algn="l"/>
+            <a:r>
+              <a:rPr sz="1250" b="1" spc="-100">
+                <a:solidFill>
+                  <a:srgbClr val="3D2B1B"/>
                 </a:solidFill>
                 <a:latin typeface="Pretendard"/>
                 <a:ea typeface="Pretendard"/>
@@ -37257,14 +37762,14 @@
       </p:sp>
       <p:sp>
         <p:nvSpPr>
-          <p:cNvPr id="15" name="TextBox 14"/>
-          <p:cNvSpPr txBox="1"/>
-          <p:nvPr/>
-        </p:nvSpPr>
-        <p:spPr>
-          <a:xfrm>
-            <a:off x="1078992" y="4434840"/>
-            <a:ext cx="2834640" cy="1371600"/>
+          <p:cNvPr id="11" name="TextBox 10"/>
+          <p:cNvSpPr txBox="1"/>
+          <p:nvPr/>
+        </p:nvSpPr>
+        <p:spPr>
+          <a:xfrm>
+            <a:off x="7086600" y="2761488"/>
+            <a:ext cx="4114800" cy="457200"/>
           </a:xfrm>
           <a:prstGeom prst="rect">
             <a:avLst/>
@@ -37279,28 +37784,64 @@
           <a:p>
             <a:pPr algn="l"/>
             <a:r>
-              <a:rPr sz="1050" b="0" spc="-100">
+              <a:rPr sz="980" b="0" spc="-100">
                 <a:solidFill>
                   <a:srgbClr val="868680"/>
                 </a:solidFill>
                 <a:latin typeface="Pretendard"/>
                 <a:ea typeface="Pretendard"/>
               </a:rPr>
-              <a:t>광고가 아니라 ‘내 주변의 후기’ — 니치 생활자의 실제 루틴 콘텐츠가 신뢰를 만든다</a:t>
-            </a:r>
-          </a:p>
-        </p:txBody>
-      </p:sp>
-      <p:sp>
-        <p:nvSpPr>
-          <p:cNvPr id="16" name="Rounded Rectangle 15"/>
+              <a:t>광고가 아니라 ‘내 주변의 후기’ — 니치 생활자의 실제 루틴 콘텐츠가 웰니스 신뢰를 만든다</a:t>
+            </a:r>
+          </a:p>
+        </p:txBody>
+      </p:sp>
+      <p:sp>
+        <p:nvSpPr>
+          <p:cNvPr id="12" name="TextBox 11"/>
+          <p:cNvSpPr txBox="1"/>
+          <p:nvPr/>
+        </p:nvSpPr>
+        <p:spPr>
+          <a:xfrm>
+            <a:off x="7086600" y="3182112"/>
+            <a:ext cx="4114800" cy="219456"/>
+          </a:xfrm>
+          <a:prstGeom prst="rect">
+            <a:avLst/>
+          </a:prstGeom>
+          <a:noFill/>
+        </p:spPr>
+        <p:txBody>
+          <a:bodyPr wrap="square" anchor="t" lIns="0" rIns="0" tIns="0" bIns="0">
+            <a:spAutoFit/>
+          </a:bodyPr>
+          <a:lstStyle/>
+          <a:p>
+            <a:pPr algn="l"/>
+            <a:r>
+              <a:rPr sz="850" b="0" spc="-100">
+                <a:solidFill>
+                  <a:srgbClr val="141412"/>
+                </a:solidFill>
+                <a:latin typeface="Pretendard"/>
+                <a:ea typeface="Pretendard"/>
+              </a:rPr>
+              <a:t>데이터  소비자는 작은 크리에이터를 더 신뢰 (나노 ER 6.23%)</a:t>
+            </a:r>
+          </a:p>
+        </p:txBody>
+      </p:sp>
+      <p:sp>
+        <p:nvSpPr>
+          <p:cNvPr id="13" name="Rounded Rectangle 12"/>
           <p:cNvSpPr/>
           <p:nvPr/>
         </p:nvSpPr>
         <p:spPr>
           <a:xfrm>
-            <a:off x="4352544" y="3703320"/>
-            <a:ext cx="3346704" cy="2194560"/>
+            <a:off x="6858000" y="3547872"/>
+            <a:ext cx="4480560" cy="1060704"/>
           </a:xfrm>
           <a:prstGeom prst="roundRect">
             <a:avLst>
@@ -37341,14 +37882,14 @@
       </p:sp>
       <p:sp>
         <p:nvSpPr>
-          <p:cNvPr id="17" name="Rectangle 16"/>
+          <p:cNvPr id="14" name="Rectangle 13"/>
           <p:cNvSpPr/>
           <p:nvPr/>
         </p:nvSpPr>
         <p:spPr>
           <a:xfrm>
-            <a:off x="4352544" y="3703320"/>
-            <a:ext cx="3346704" cy="548640"/>
+            <a:off x="6858000" y="3547872"/>
+            <a:ext cx="82296" cy="1060704"/>
           </a:xfrm>
           <a:prstGeom prst="rect">
             <a:avLst/>
@@ -37385,31 +37926,31 @@
       </p:sp>
       <p:sp>
         <p:nvSpPr>
-          <p:cNvPr id="18" name="TextBox 17"/>
-          <p:cNvSpPr txBox="1"/>
-          <p:nvPr/>
-        </p:nvSpPr>
-        <p:spPr>
-          <a:xfrm>
-            <a:off x="4352544" y="3703320"/>
-            <a:ext cx="3346704" cy="548640"/>
-          </a:xfrm>
-          <a:prstGeom prst="rect">
-            <a:avLst/>
-          </a:prstGeom>
-          <a:noFill/>
-        </p:spPr>
-        <p:txBody>
-          <a:bodyPr wrap="square" anchor="ctr" lIns="0" rIns="0" tIns="0" bIns="0">
-            <a:spAutoFit/>
-          </a:bodyPr>
-          <a:lstStyle/>
-          <a:p>
-            <a:pPr algn="ctr"/>
-            <a:r>
-              <a:rPr sz="1400" b="1" spc="-100">
-                <a:solidFill>
-                  <a:srgbClr val="FFFFFF"/>
+          <p:cNvPr id="15" name="TextBox 14"/>
+          <p:cNvSpPr txBox="1"/>
+          <p:nvPr/>
+        </p:nvSpPr>
+        <p:spPr>
+          <a:xfrm>
+            <a:off x="7086600" y="3657600"/>
+            <a:ext cx="4023360" cy="274320"/>
+          </a:xfrm>
+          <a:prstGeom prst="rect">
+            <a:avLst/>
+          </a:prstGeom>
+          <a:noFill/>
+        </p:spPr>
+        <p:txBody>
+          <a:bodyPr wrap="square" anchor="t" lIns="0" rIns="0" tIns="0" bIns="0">
+            <a:spAutoFit/>
+          </a:bodyPr>
+          <a:lstStyle/>
+          <a:p>
+            <a:pPr algn="l"/>
+            <a:r>
+              <a:rPr sz="1250" b="1" spc="-100">
+                <a:solidFill>
+                  <a:srgbClr val="3D2B1B"/>
                 </a:solidFill>
                 <a:latin typeface="Pretendard"/>
                 <a:ea typeface="Pretendard"/>
@@ -37421,14 +37962,14 @@
       </p:sp>
       <p:sp>
         <p:nvSpPr>
-          <p:cNvPr id="19" name="TextBox 18"/>
-          <p:cNvSpPr txBox="1"/>
-          <p:nvPr/>
-        </p:nvSpPr>
-        <p:spPr>
-          <a:xfrm>
-            <a:off x="4608576" y="4434840"/>
-            <a:ext cx="2834640" cy="1371600"/>
+          <p:cNvPr id="16" name="TextBox 15"/>
+          <p:cNvSpPr txBox="1"/>
+          <p:nvPr/>
+        </p:nvSpPr>
+        <p:spPr>
+          <a:xfrm>
+            <a:off x="7086600" y="3950208"/>
+            <a:ext cx="4114800" cy="457200"/>
           </a:xfrm>
           <a:prstGeom prst="rect">
             <a:avLst/>
@@ -37443,7 +37984,7 @@
           <a:p>
             <a:pPr algn="l"/>
             <a:r>
-              <a:rPr sz="1050" b="0" spc="-100">
+              <a:rPr sz="980" b="0" spc="-100">
                 <a:solidFill>
                   <a:srgbClr val="868680"/>
                 </a:solidFill>
@@ -37457,14 +37998,50 @@
       </p:sp>
       <p:sp>
         <p:nvSpPr>
-          <p:cNvPr id="20" name="Rounded Rectangle 19"/>
+          <p:cNvPr id="17" name="TextBox 16"/>
+          <p:cNvSpPr txBox="1"/>
+          <p:nvPr/>
+        </p:nvSpPr>
+        <p:spPr>
+          <a:xfrm>
+            <a:off x="7086600" y="4370832"/>
+            <a:ext cx="4114800" cy="219456"/>
+          </a:xfrm>
+          <a:prstGeom prst="rect">
+            <a:avLst/>
+          </a:prstGeom>
+          <a:noFill/>
+        </p:spPr>
+        <p:txBody>
+          <a:bodyPr wrap="square" anchor="t" lIns="0" rIns="0" tIns="0" bIns="0">
+            <a:spAutoFit/>
+          </a:bodyPr>
+          <a:lstStyle/>
+          <a:p>
+            <a:pPr algn="l"/>
+            <a:r>
+              <a:rPr sz="850" b="0" spc="-100">
+                <a:solidFill>
+                  <a:srgbClr val="141412"/>
+                </a:solidFill>
+                <a:latin typeface="Pretendard"/>
+                <a:ea typeface="Pretendard"/>
+              </a:rPr>
+              <a:t>데이터  73% 브랜드가 마이크로·미드티어 우선 선택(2026)</a:t>
+            </a:r>
+          </a:p>
+        </p:txBody>
+      </p:sp>
+      <p:sp>
+        <p:nvSpPr>
+          <p:cNvPr id="18" name="Rounded Rectangle 17"/>
           <p:cNvSpPr/>
           <p:nvPr/>
         </p:nvSpPr>
         <p:spPr>
           <a:xfrm>
-            <a:off x="7882127" y="3703320"/>
-            <a:ext cx="3346704" cy="2194560"/>
+            <a:off x="6858000" y="4736592"/>
+            <a:ext cx="4480560" cy="1060704"/>
           </a:xfrm>
           <a:prstGeom prst="roundRect">
             <a:avLst>
@@ -37505,14 +38082,14 @@
       </p:sp>
       <p:sp>
         <p:nvSpPr>
-          <p:cNvPr id="21" name="Rectangle 20"/>
+          <p:cNvPr id="19" name="Rectangle 18"/>
           <p:cNvSpPr/>
           <p:nvPr/>
         </p:nvSpPr>
         <p:spPr>
           <a:xfrm>
-            <a:off x="7882127" y="3703320"/>
-            <a:ext cx="3346704" cy="548640"/>
+            <a:off x="6858000" y="4736592"/>
+            <a:ext cx="82296" cy="1060704"/>
           </a:xfrm>
           <a:prstGeom prst="rect">
             <a:avLst/>
@@ -37549,50 +38126,86 @@
       </p:sp>
       <p:sp>
         <p:nvSpPr>
+          <p:cNvPr id="20" name="TextBox 19"/>
+          <p:cNvSpPr txBox="1"/>
+          <p:nvPr/>
+        </p:nvSpPr>
+        <p:spPr>
+          <a:xfrm>
+            <a:off x="7086600" y="4846320"/>
+            <a:ext cx="4023360" cy="274320"/>
+          </a:xfrm>
+          <a:prstGeom prst="rect">
+            <a:avLst/>
+          </a:prstGeom>
+          <a:noFill/>
+        </p:spPr>
+        <p:txBody>
+          <a:bodyPr wrap="square" anchor="t" lIns="0" rIns="0" tIns="0" bIns="0">
+            <a:spAutoFit/>
+          </a:bodyPr>
+          <a:lstStyle/>
+          <a:p>
+            <a:pPr algn="l"/>
+            <a:r>
+              <a:rPr sz="1250" b="1" spc="-100">
+                <a:solidFill>
+                  <a:srgbClr val="3D2B1B"/>
+                </a:solidFill>
+                <a:latin typeface="Pretendard"/>
+                <a:ea typeface="Pretendard"/>
+              </a:rPr>
+              <a:t>자산화</a:t>
+            </a:r>
+          </a:p>
+        </p:txBody>
+      </p:sp>
+      <p:sp>
+        <p:nvSpPr>
+          <p:cNvPr id="21" name="TextBox 20"/>
+          <p:cNvSpPr txBox="1"/>
+          <p:nvPr/>
+        </p:nvSpPr>
+        <p:spPr>
+          <a:xfrm>
+            <a:off x="7086600" y="5138928"/>
+            <a:ext cx="4114800" cy="457200"/>
+          </a:xfrm>
+          <a:prstGeom prst="rect">
+            <a:avLst/>
+          </a:prstGeom>
+          <a:noFill/>
+        </p:spPr>
+        <p:txBody>
+          <a:bodyPr wrap="square" anchor="t" lIns="0" rIns="0" tIns="0" bIns="0">
+            <a:spAutoFit/>
+          </a:bodyPr>
+          <a:lstStyle/>
+          <a:p>
+            <a:pPr algn="l"/>
+            <a:r>
+              <a:rPr sz="980" b="0" spc="-100">
+                <a:solidFill>
+                  <a:srgbClr val="868680"/>
+                </a:solidFill>
+                <a:latin typeface="Pretendard"/>
+                <a:ea typeface="Pretendard"/>
+              </a:rPr>
+              <a:t>저단가·다수 콘텐츠가 후기·검색·퍼포먼스 소재로 이어지는 원천 자산이 된다</a:t>
+            </a:r>
+          </a:p>
+        </p:txBody>
+      </p:sp>
+      <p:sp>
+        <p:nvSpPr>
           <p:cNvPr id="22" name="TextBox 21"/>
           <p:cNvSpPr txBox="1"/>
           <p:nvPr/>
         </p:nvSpPr>
         <p:spPr>
           <a:xfrm>
-            <a:off x="7882127" y="3703320"/>
-            <a:ext cx="3346704" cy="548640"/>
-          </a:xfrm>
-          <a:prstGeom prst="rect">
-            <a:avLst/>
-          </a:prstGeom>
-          <a:noFill/>
-        </p:spPr>
-        <p:txBody>
-          <a:bodyPr wrap="square" anchor="ctr" lIns="0" rIns="0" tIns="0" bIns="0">
-            <a:spAutoFit/>
-          </a:bodyPr>
-          <a:lstStyle/>
-          <a:p>
-            <a:pPr algn="ctr"/>
-            <a:r>
-              <a:rPr sz="1400" b="1" spc="-100">
-                <a:solidFill>
-                  <a:srgbClr val="FFFFFF"/>
-                </a:solidFill>
-                <a:latin typeface="Pretendard"/>
-                <a:ea typeface="Pretendard"/>
-              </a:rPr>
-              <a:t>자산화</a:t>
-            </a:r>
-          </a:p>
-        </p:txBody>
-      </p:sp>
-      <p:sp>
-        <p:nvSpPr>
-          <p:cNvPr id="23" name="TextBox 22"/>
-          <p:cNvSpPr txBox="1"/>
-          <p:nvPr/>
-        </p:nvSpPr>
-        <p:spPr>
-          <a:xfrm>
-            <a:off x="8138159" y="4434840"/>
-            <a:ext cx="2834640" cy="1371600"/>
+            <a:off x="7086600" y="5559552"/>
+            <a:ext cx="4114800" cy="219456"/>
           </a:xfrm>
           <a:prstGeom prst="rect">
             <a:avLst/>
@@ -37607,21 +38220,21 @@
           <a:p>
             <a:pPr algn="l"/>
             <a:r>
-              <a:rPr sz="1050" b="0" spc="-100">
-                <a:solidFill>
-                  <a:srgbClr val="868680"/>
-                </a:solidFill>
-                <a:latin typeface="Pretendard"/>
-                <a:ea typeface="Pretendard"/>
-              </a:rPr>
-              <a:t>저단가·다수 콘텐츠가 후기·검색·퍼포먼스 소재로 이어지는 원천 자산이 된다</a:t>
-            </a:r>
-          </a:p>
-        </p:txBody>
-      </p:sp>
-      <p:sp>
-        <p:nvSpPr>
-          <p:cNvPr id="24" name="Rectangle 23"/>
+              <a:rPr sz="850" b="0" spc="-100">
+                <a:solidFill>
+                  <a:srgbClr val="141412"/>
+                </a:solidFill>
+                <a:latin typeface="Pretendard"/>
+                <a:ea typeface="Pretendard"/>
+              </a:rPr>
+              <a:t>데이터  유료광고 전환 시 ER 2~3배·CPA 절감(PA 2차)</a:t>
+            </a:r>
+          </a:p>
+        </p:txBody>
+      </p:sp>
+      <p:sp>
+        <p:nvSpPr>
+          <p:cNvPr id="23" name="Rectangle 22"/>
           <p:cNvSpPr/>
           <p:nvPr/>
         </p:nvSpPr>
@@ -37665,7 +38278,7 @@
       </p:sp>
       <p:sp>
         <p:nvSpPr>
-          <p:cNvPr id="25" name="Rectangle 24"/>
+          <p:cNvPr id="24" name="Rectangle 23"/>
           <p:cNvSpPr/>
           <p:nvPr/>
         </p:nvSpPr>
@@ -37709,7 +38322,7 @@
       </p:sp>
       <p:sp>
         <p:nvSpPr>
-          <p:cNvPr id="26" name="TextBox 25"/>
+          <p:cNvPr id="25" name="TextBox 24"/>
           <p:cNvSpPr txBox="1"/>
           <p:nvPr/>
         </p:nvSpPr>
@@ -37745,7 +38358,7 @@
       </p:sp>
       <p:sp>
         <p:nvSpPr>
-          <p:cNvPr id="27" name="TextBox 26"/>
+          <p:cNvPr id="26" name="TextBox 25"/>
           <p:cNvSpPr txBox="1"/>
           <p:nvPr/>
         </p:nvSpPr>
@@ -39414,6 +40027,42 @@
       <p:sp>
         <p:nvSpPr>
           <p:cNvPr id="27" name="TextBox 26"/>
+          <p:cNvSpPr txBox="1"/>
+          <p:nvPr/>
+        </p:nvSpPr>
+        <p:spPr>
+          <a:xfrm>
+            <a:off x="822960" y="6510528"/>
+            <a:ext cx="10543032" cy="274320"/>
+          </a:xfrm>
+          <a:prstGeom prst="rect">
+            <a:avLst/>
+          </a:prstGeom>
+          <a:noFill/>
+        </p:spPr>
+        <p:txBody>
+          <a:bodyPr wrap="square" anchor="t" lIns="0" rIns="0" tIns="0" bIns="0">
+            <a:spAutoFit/>
+          </a:bodyPr>
+          <a:lstStyle/>
+          <a:p>
+            <a:pPr algn="l"/>
+            <a:r>
+              <a:rPr sz="850" b="0" spc="-100">
+                <a:solidFill>
+                  <a:srgbClr val="868680"/>
+                </a:solidFill>
+                <a:latin typeface="Pretendard"/>
+                <a:ea typeface="Pretendard"/>
+              </a:rPr>
+              <a:t>※ ER(인게이지먼트율) = (좋아요+댓글+저장+공유) ÷ 팔로워, 게시물당 평균 · 인스타그램 기준</a:t>
+            </a:r>
+          </a:p>
+        </p:txBody>
+      </p:sp>
+      <p:sp>
+        <p:nvSpPr>
+          <p:cNvPr id="28" name="TextBox 27"/>
           <p:cNvSpPr txBox="1"/>
           <p:nvPr/>
         </p:nvSpPr>
@@ -41304,6 +41953,7 @@
                 <a:ea typeface="Pretendard"/>
               </a:rPr>
               <a:t>·  멜라나잇 · 취침 전
+밤에 쉽게 못 드는 30대
 “불 끄기 전, 마무리 한 알”</a:t>
             </a:r>
           </a:p>
@@ -41322,6 +41972,7 @@
                 <a:ea typeface="Pretendard"/>
               </a:rPr>
               <a:t>·  웰니스 구미 · 오후 슬럼프
+야근 잦은 직장인
 “11시 퇴근, 나른한 3시”</a:t>
             </a:r>
           </a:p>
@@ -41527,6 +42178,7 @@
                 <a:ea typeface="Pretendard"/>
               </a:rPr>
               <a:t>·  올리브오일 캡슐 · 아침 공복
+공복 섭취 고민 입문자
 “공복에 올리브오일? 속쓰림?”</a:t>
             </a:r>
           </a:p>
@@ -41545,6 +42197,7 @@
                 <a:ea typeface="Pretendard"/>
               </a:rPr>
               <a:t>·  캡슐 · 정보 탐색
+가성비 따지는 30대
 “생오일 vs 캡슐 가성비 팩트체크”</a:t>
             </a:r>
           </a:p>
@@ -41749,7 +42402,8 @@
                 <a:latin typeface="Pretendard"/>
                 <a:ea typeface="Pretendard"/>
               </a:rPr>
-              <a:t>·  스틱 · 재구매
+              <a:t>·  스틱 · 재구매 고민
+맛 때문에 망설인 사람
 “오일 무슨 맛인지 표현해볼게요”</a:t>
             </a:r>
           </a:p>
@@ -41768,7 +42422,8 @@
                 <a:ea typeface="Pretendard"/>
               </a:rPr>
               <a:t>·  히어로 라인 · 올영세일
-“장바구니 템, 이번 세일 필수 이유”</a:t>
+장바구니 담아둔 대기족
+“이번 세일 꼭 사야 하는 이유”</a:t>
             </a:r>
           </a:p>
         </p:txBody>
@@ -41973,6 +42628,7 @@
                 <a:ea typeface="Pretendard"/>
               </a:rPr>
               <a:t>·  구미·캡슐 · 완주 인증
+작심삼일러 · 한 통 완주 후
 “안 먹고 쌓인 통 vs 싹 비운 통”</a:t>
             </a:r>
           </a:p>
@@ -41991,6 +42647,7 @@
                 <a:ea typeface="Pretendard"/>
               </a:rPr>
               <a:t>·  스틱 · K-웰니스
+K-뷰티 관심 외국인
 “K-뷰티 다음은 K-웰니스”</a:t>
             </a:r>
           </a:p>

--- a/proposal/BAT_올리브영_2026_올더베러_마케팅제안_클린재설계_HAN.pptx
+++ b/proposal/BAT_올리브영_2026_올더베러_마케팅제안_클린재설계_HAN.pptx
@@ -42944,7 +42944,7 @@
                 <a:latin typeface="Pretendard"/>
                 <a:ea typeface="Pretendard"/>
               </a:rPr>
-              <a:t>제품별 릴스 컨셉 8종 — 한눈에</a:t>
+              <a:t>제품별 릴스 컨셉 — 올리브오일 4 · 구미 8종</a:t>
             </a:r>
           </a:p>
         </p:txBody>
@@ -42980,7 +42980,7 @@
                 <a:latin typeface="Pretendard"/>
                 <a:ea typeface="Pretendard"/>
               </a:rPr>
-              <a:t>성공 훅 = 명확한 타겟 × 구체적 상황 × 반전/팩트</a:t>
+              <a:t>성공 훅 = 명확한 타겟 × 구체적 상황 × 반전/팩트 · 모든 훅은 VOC 1,104건에서 도출</a:t>
             </a:r>
           </a:p>
         </p:txBody>
@@ -42994,8 +42994,8 @@
           <p:nvPr/>
         </p:nvGraphicFramePr>
         <p:xfrm>
-          <a:off x="822960" y="2103120"/>
-          <a:ext cx="10543031" cy="3950208"/>
+          <a:off x="822960" y="2194560"/>
+          <a:ext cx="10543031" cy="4101084"/>
         </p:xfrm>
         <a:graphic>
           <a:graphicData uri="http://schemas.openxmlformats.org/drawingml/2006/table">
@@ -43004,11 +43004,11 @@
                 <a:tableStyleId>{5C22544A-7EE6-4342-B048-85BDC9FD1C3A}</a:tableStyleId>
               </a:tblPr>
               <a:tblGrid>
-                <a:gridCol w="2156529"/>
-                <a:gridCol w="3594215"/>
-                <a:gridCol w="4792287"/>
+                <a:gridCol w="2243198"/>
+                <a:gridCol w="3589117"/>
+                <a:gridCol w="4710716"/>
               </a:tblGrid>
-              <a:tr h="438912">
+              <a:tr h="315468">
                 <a:tc>
                   <a:txBody>
                     <a:bodyPr wrap="square"/>
@@ -43016,7 +43016,7 @@
                     <a:p>
                       <a:pPr algn="l"/>
                       <a:r>
-                        <a:rPr sz="1050" b="1" spc="-100">
+                        <a:rPr sz="1000" b="1" spc="-100">
                           <a:solidFill>
                             <a:srgbClr val="FFFFFF"/>
                           </a:solidFill>
@@ -43040,7 +43040,7 @@
                     <a:p>
                       <a:pPr algn="l"/>
                       <a:r>
-                        <a:rPr sz="1050" b="1" spc="-100">
+                        <a:rPr sz="1000" b="1" spc="-100">
                           <a:solidFill>
                             <a:srgbClr val="FFFFFF"/>
                           </a:solidFill>
@@ -43064,14 +43064,14 @@
                     <a:p>
                       <a:pPr algn="l"/>
                       <a:r>
-                        <a:rPr sz="1050" b="1" spc="-100">
+                        <a:rPr sz="1000" b="1" spc="-100">
                           <a:solidFill>
                             <a:srgbClr val="FFFFFF"/>
                           </a:solidFill>
                           <a:latin typeface="Pretendard"/>
                           <a:ea typeface="Pretendard"/>
                         </a:rPr>
-                        <a:t>인트로 예시</a:t>
+                        <a:t>인트로 예시 (소비자 언어)</a:t>
                       </a:r>
                     </a:p>
                   </a:txBody>
@@ -43082,7 +43082,7 @@
                   </a:tcPr>
                 </a:tc>
               </a:tr>
-              <a:tr h="438912">
+              <a:tr h="315468">
                 <a:tc>
                   <a:txBody>
                     <a:bodyPr wrap="square"/>
@@ -43090,7 +43090,7 @@
                     <a:p>
                       <a:pPr algn="l"/>
                       <a:r>
-                        <a:rPr sz="950" b="0" spc="-100">
+                        <a:rPr sz="900" b="0" spc="-100">
                           <a:solidFill>
                             <a:srgbClr val="141412"/>
                           </a:solidFill>
@@ -43114,7 +43114,7 @@
                     <a:p>
                       <a:pPr algn="l"/>
                       <a:r>
-                        <a:rPr sz="950" b="0" spc="-100">
+                        <a:rPr sz="900" b="0" spc="-100">
                           <a:solidFill>
                             <a:srgbClr val="141412"/>
                           </a:solidFill>
@@ -43138,7 +43138,7 @@
                     <a:p>
                       <a:pPr algn="l"/>
                       <a:r>
-                        <a:rPr sz="950" b="0" spc="-100">
+                        <a:rPr sz="900" b="0" spc="-100">
                           <a:solidFill>
                             <a:srgbClr val="141412"/>
                           </a:solidFill>
@@ -43156,7 +43156,7 @@
                   </a:tcPr>
                 </a:tc>
               </a:tr>
-              <a:tr h="438912">
+              <a:tr h="315468">
                 <a:tc>
                   <a:txBody>
                     <a:bodyPr wrap="square"/>
@@ -43164,7 +43164,7 @@
                     <a:p>
                       <a:pPr algn="l"/>
                       <a:r>
-                        <a:rPr sz="950" b="0" spc="-100">
+                        <a:rPr sz="900" b="0" spc="-100">
                           <a:solidFill>
                             <a:srgbClr val="141412"/>
                           </a:solidFill>
@@ -43188,7 +43188,7 @@
                     <a:p>
                       <a:pPr algn="l"/>
                       <a:r>
-                        <a:rPr sz="950" b="0" spc="-100">
+                        <a:rPr sz="900" b="0" spc="-100">
                           <a:solidFill>
                             <a:srgbClr val="141412"/>
                           </a:solidFill>
@@ -43212,7 +43212,7 @@
                     <a:p>
                       <a:pPr algn="l"/>
                       <a:r>
-                        <a:rPr sz="950" b="0" spc="-100">
+                        <a:rPr sz="900" b="0" spc="-100">
                           <a:solidFill>
                             <a:srgbClr val="141412"/>
                           </a:solidFill>
@@ -43230,7 +43230,7 @@
                   </a:tcPr>
                 </a:tc>
               </a:tr>
-              <a:tr h="438912">
+              <a:tr h="315468">
                 <a:tc>
                   <a:txBody>
                     <a:bodyPr wrap="square"/>
@@ -43238,7 +43238,451 @@
                     <a:p>
                       <a:pPr algn="l"/>
                       <a:r>
-                        <a:rPr sz="950" b="0" spc="-100">
+                        <a:rPr sz="900" b="0" spc="-100">
+                          <a:solidFill>
+                            <a:srgbClr val="141412"/>
+                          </a:solidFill>
+                          <a:latin typeface="Pretendard"/>
+                          <a:ea typeface="Pretendard"/>
+                        </a:rPr>
+                        <a:t>스틱 A (일반)</a:t>
+                      </a:r>
+                    </a:p>
+                  </a:txBody>
+                  <a:tcPr marL="63500" marR="63500" marT="25400" marB="25400" anchor="ctr">
+                    <a:solidFill>
+                      <a:srgbClr val="FFFFFF"/>
+                    </a:solidFill>
+                  </a:tcPr>
+                </a:tc>
+                <a:tc>
+                  <a:txBody>
+                    <a:bodyPr wrap="square"/>
+                    <a:lstStyle/>
+                    <a:p>
+                      <a:pPr algn="l"/>
+                      <a:r>
+                        <a:rPr sz="900" b="0" spc="-100">
+                          <a:solidFill>
+                            <a:srgbClr val="141412"/>
+                          </a:solidFill>
+                          <a:latin typeface="Pretendard"/>
+                          <a:ea typeface="Pretendard"/>
+                        </a:rPr>
+                        <a:t>가방에 쏙, 출근길 한 포</a:t>
+                      </a:r>
+                    </a:p>
+                  </a:txBody>
+                  <a:tcPr marL="63500" marR="63500" marT="25400" marB="25400" anchor="ctr">
+                    <a:solidFill>
+                      <a:srgbClr val="FFFFFF"/>
+                    </a:solidFill>
+                  </a:tcPr>
+                </a:tc>
+                <a:tc>
+                  <a:txBody>
+                    <a:bodyPr wrap="square"/>
+                    <a:lstStyle/>
+                    <a:p>
+                      <a:pPr algn="l"/>
+                      <a:r>
+                        <a:rPr sz="900" b="0" spc="-100">
+                          <a:solidFill>
+                            <a:srgbClr val="141412"/>
+                          </a:solidFill>
+                          <a:latin typeface="Pretendard"/>
+                          <a:ea typeface="Pretendard"/>
+                        </a:rPr>
+                        <a:t>“요즘 가방에 꼭 챙기는 거 하나”</a:t>
+                      </a:r>
+                    </a:p>
+                  </a:txBody>
+                  <a:tcPr marL="63500" marR="63500" marT="25400" marB="25400" anchor="ctr">
+                    <a:solidFill>
+                      <a:srgbClr val="FFFFFF"/>
+                    </a:solidFill>
+                  </a:tcPr>
+                </a:tc>
+              </a:tr>
+              <a:tr h="315468">
+                <a:tc>
+                  <a:txBody>
+                    <a:bodyPr wrap="square"/>
+                    <a:lstStyle/>
+                    <a:p>
+                      <a:pPr algn="l"/>
+                      <a:r>
+                        <a:rPr sz="900" b="0" spc="-100">
+                          <a:solidFill>
+                            <a:srgbClr val="141412"/>
+                          </a:solidFill>
+                          <a:latin typeface="Pretendard"/>
+                          <a:ea typeface="Pretendard"/>
+                        </a:rPr>
+                        <a:t>스틱 B (일반)</a:t>
+                      </a:r>
+                    </a:p>
+                  </a:txBody>
+                  <a:tcPr marL="63500" marR="63500" marT="25400" marB="25400" anchor="ctr">
+                    <a:solidFill>
+                      <a:srgbClr val="F3F2E7"/>
+                    </a:solidFill>
+                  </a:tcPr>
+                </a:tc>
+                <a:tc>
+                  <a:txBody>
+                    <a:bodyPr wrap="square"/>
+                    <a:lstStyle/>
+                    <a:p>
+                      <a:pPr algn="l"/>
+                      <a:r>
+                        <a:rPr sz="900" b="0" spc="-100">
+                          <a:solidFill>
+                            <a:srgbClr val="141412"/>
+                          </a:solidFill>
+                          <a:latin typeface="Pretendard"/>
+                          <a:ea typeface="Pretendard"/>
+                        </a:rPr>
+                        <a:t>오일 맛 솔직 리뷰</a:t>
+                      </a:r>
+                    </a:p>
+                  </a:txBody>
+                  <a:tcPr marL="63500" marR="63500" marT="25400" marB="25400" anchor="ctr">
+                    <a:solidFill>
+                      <a:srgbClr val="F3F2E7"/>
+                    </a:solidFill>
+                  </a:tcPr>
+                </a:tc>
+                <a:tc>
+                  <a:txBody>
+                    <a:bodyPr wrap="square"/>
+                    <a:lstStyle/>
+                    <a:p>
+                      <a:pPr algn="l"/>
+                      <a:r>
+                        <a:rPr sz="900" b="0" spc="-100">
+                          <a:solidFill>
+                            <a:srgbClr val="141412"/>
+                          </a:solidFill>
+                          <a:latin typeface="Pretendard"/>
+                          <a:ea typeface="Pretendard"/>
+                        </a:rPr>
+                        <a:t>“오일에서는 역시 오일 맛이 나야죠”</a:t>
+                      </a:r>
+                    </a:p>
+                  </a:txBody>
+                  <a:tcPr marL="63500" marR="63500" marT="25400" marB="25400" anchor="ctr">
+                    <a:solidFill>
+                      <a:srgbClr val="F3F2E7"/>
+                    </a:solidFill>
+                  </a:tcPr>
+                </a:tc>
+              </a:tr>
+              <a:tr h="315468">
+                <a:tc>
+                  <a:txBody>
+                    <a:bodyPr wrap="square"/>
+                    <a:lstStyle/>
+                    <a:p>
+                      <a:pPr algn="l"/>
+                      <a:r>
+                        <a:rPr sz="900" b="0" spc="-100">
+                          <a:solidFill>
+                            <a:srgbClr val="141412"/>
+                          </a:solidFill>
+                          <a:latin typeface="Pretendard"/>
+                          <a:ea typeface="Pretendard"/>
+                        </a:rPr>
+                        <a:t>구미·멜라나잇 (일반)</a:t>
+                      </a:r>
+                    </a:p>
+                  </a:txBody>
+                  <a:tcPr marL="63500" marR="63500" marT="25400" marB="25400" anchor="ctr">
+                    <a:solidFill>
+                      <a:srgbClr val="FFFFFF"/>
+                    </a:solidFill>
+                  </a:tcPr>
+                </a:tc>
+                <a:tc>
+                  <a:txBody>
+                    <a:bodyPr wrap="square"/>
+                    <a:lstStyle/>
+                    <a:p>
+                      <a:pPr algn="l"/>
+                      <a:r>
+                        <a:rPr sz="900" b="0" spc="-100">
+                          <a:solidFill>
+                            <a:srgbClr val="141412"/>
+                          </a:solidFill>
+                          <a:latin typeface="Pretendard"/>
+                          <a:ea typeface="Pretendard"/>
+                        </a:rPr>
+                        <a:t>자기 전 무드 리추얼</a:t>
+                      </a:r>
+                    </a:p>
+                  </a:txBody>
+                  <a:tcPr marL="63500" marR="63500" marT="25400" marB="25400" anchor="ctr">
+                    <a:solidFill>
+                      <a:srgbClr val="FFFFFF"/>
+                    </a:solidFill>
+                  </a:tcPr>
+                </a:tc>
+                <a:tc>
+                  <a:txBody>
+                    <a:bodyPr wrap="square"/>
+                    <a:lstStyle/>
+                    <a:p>
+                      <a:pPr algn="l"/>
+                      <a:r>
+                        <a:rPr sz="900" b="0" spc="-100">
+                          <a:solidFill>
+                            <a:srgbClr val="141412"/>
+                          </a:solidFill>
+                          <a:latin typeface="Pretendard"/>
+                          <a:ea typeface="Pretendard"/>
+                        </a:rPr>
+                        <a:t>“잠 들기 전 마지막으로… 할 일이 있어요”</a:t>
+                      </a:r>
+                    </a:p>
+                  </a:txBody>
+                  <a:tcPr marL="63500" marR="63500" marT="25400" marB="25400" anchor="ctr">
+                    <a:solidFill>
+                      <a:srgbClr val="FFFFFF"/>
+                    </a:solidFill>
+                  </a:tcPr>
+                </a:tc>
+              </a:tr>
+              <a:tr h="315468">
+                <a:tc>
+                  <a:txBody>
+                    <a:bodyPr wrap="square"/>
+                    <a:lstStyle/>
+                    <a:p>
+                      <a:pPr algn="l"/>
+                      <a:r>
+                        <a:rPr sz="900" b="0" spc="-100">
+                          <a:solidFill>
+                            <a:srgbClr val="141412"/>
+                          </a:solidFill>
+                          <a:latin typeface="Pretendard"/>
+                          <a:ea typeface="Pretendard"/>
+                        </a:rPr>
+                        <a:t>구미·콜라겐 (일반)</a:t>
+                      </a:r>
+                    </a:p>
+                  </a:txBody>
+                  <a:tcPr marL="63500" marR="63500" marT="25400" marB="25400" anchor="ctr">
+                    <a:solidFill>
+                      <a:srgbClr val="F3F2E7"/>
+                    </a:solidFill>
+                  </a:tcPr>
+                </a:tc>
+                <a:tc>
+                  <a:txBody>
+                    <a:bodyPr wrap="square"/>
+                    <a:lstStyle/>
+                    <a:p>
+                      <a:pPr algn="l"/>
+                      <a:r>
+                        <a:rPr sz="900" b="0" spc="-100">
+                          <a:solidFill>
+                            <a:srgbClr val="141412"/>
+                          </a:solidFill>
+                          <a:latin typeface="Pretendard"/>
+                          <a:ea typeface="Pretendard"/>
+                        </a:rPr>
+                        <a:t>디저트 대신 한 알</a:t>
+                      </a:r>
+                    </a:p>
+                  </a:txBody>
+                  <a:tcPr marL="63500" marR="63500" marT="25400" marB="25400" anchor="ctr">
+                    <a:solidFill>
+                      <a:srgbClr val="F3F2E7"/>
+                    </a:solidFill>
+                  </a:tcPr>
+                </a:tc>
+                <a:tc>
+                  <a:txBody>
+                    <a:bodyPr wrap="square"/>
+                    <a:lstStyle/>
+                    <a:p>
+                      <a:pPr algn="l"/>
+                      <a:r>
+                        <a:rPr sz="900" b="0" spc="-100">
+                          <a:solidFill>
+                            <a:srgbClr val="141412"/>
+                          </a:solidFill>
+                          <a:latin typeface="Pretendard"/>
+                          <a:ea typeface="Pretendard"/>
+                        </a:rPr>
+                        <a:t>“단 거 당기는데 죄책감은 싫고”</a:t>
+                      </a:r>
+                    </a:p>
+                  </a:txBody>
+                  <a:tcPr marL="63500" marR="63500" marT="25400" marB="25400" anchor="ctr">
+                    <a:solidFill>
+                      <a:srgbClr val="F3F2E7"/>
+                    </a:solidFill>
+                  </a:tcPr>
+                </a:tc>
+              </a:tr>
+              <a:tr h="315468">
+                <a:tc>
+                  <a:txBody>
+                    <a:bodyPr wrap="square"/>
+                    <a:lstStyle/>
+                    <a:p>
+                      <a:pPr algn="l"/>
+                      <a:r>
+                        <a:rPr sz="900" b="0" spc="-100">
+                          <a:solidFill>
+                            <a:srgbClr val="141412"/>
+                          </a:solidFill>
+                          <a:latin typeface="Pretendard"/>
+                          <a:ea typeface="Pretendard"/>
+                        </a:rPr>
+                        <a:t>구미·올인원 (건기식)</a:t>
+                      </a:r>
+                    </a:p>
+                  </a:txBody>
+                  <a:tcPr marL="63500" marR="63500" marT="25400" marB="25400" anchor="ctr">
+                    <a:solidFill>
+                      <a:srgbClr val="FFFFFF"/>
+                    </a:solidFill>
+                  </a:tcPr>
+                </a:tc>
+                <a:tc>
+                  <a:txBody>
+                    <a:bodyPr wrap="square"/>
+                    <a:lstStyle/>
+                    <a:p>
+                      <a:pPr algn="l"/>
+                      <a:r>
+                        <a:rPr sz="900" b="0" spc="-100">
+                          <a:solidFill>
+                            <a:srgbClr val="141412"/>
+                          </a:solidFill>
+                          <a:latin typeface="Pretendard"/>
+                          <a:ea typeface="Pretendard"/>
+                        </a:rPr>
+                        <a:t>영양제 5통 대신 하루 두 알 — 입문자용</a:t>
+                      </a:r>
+                    </a:p>
+                  </a:txBody>
+                  <a:tcPr marL="63500" marR="63500" marT="25400" marB="25400" anchor="ctr">
+                    <a:solidFill>
+                      <a:srgbClr val="FFFFFF"/>
+                    </a:solidFill>
+                  </a:tcPr>
+                </a:tc>
+                <a:tc>
+                  <a:txBody>
+                    <a:bodyPr wrap="square"/>
+                    <a:lstStyle/>
+                    <a:p>
+                      <a:pPr algn="l"/>
+                      <a:r>
+                        <a:rPr sz="900" b="0" spc="-100">
+                          <a:solidFill>
+                            <a:srgbClr val="141412"/>
+                          </a:solidFill>
+                          <a:latin typeface="Pretendard"/>
+                          <a:ea typeface="Pretendard"/>
+                        </a:rPr>
+                        <a:t>“영양제 사두고 결국 안 먹게 되는 사람 모여라”</a:t>
+                      </a:r>
+                    </a:p>
+                  </a:txBody>
+                  <a:tcPr marL="63500" marR="63500" marT="25400" marB="25400" anchor="ctr">
+                    <a:solidFill>
+                      <a:srgbClr val="FFFFFF"/>
+                    </a:solidFill>
+                  </a:tcPr>
+                </a:tc>
+              </a:tr>
+              <a:tr h="315468">
+                <a:tc>
+                  <a:txBody>
+                    <a:bodyPr wrap="square"/>
+                    <a:lstStyle/>
+                    <a:p>
+                      <a:pPr algn="l"/>
+                      <a:r>
+                        <a:rPr sz="900" b="0" spc="-100">
+                          <a:solidFill>
+                            <a:srgbClr val="141412"/>
+                          </a:solidFill>
+                          <a:latin typeface="Pretendard"/>
+                          <a:ea typeface="Pretendard"/>
+                        </a:rPr>
+                        <a:t>구미·철분 (건기식)</a:t>
+                      </a:r>
+                    </a:p>
+                  </a:txBody>
+                  <a:tcPr marL="63500" marR="63500" marT="25400" marB="25400" anchor="ctr">
+                    <a:solidFill>
+                      <a:srgbClr val="F3F2E7"/>
+                    </a:solidFill>
+                  </a:tcPr>
+                </a:tc>
+                <a:tc>
+                  <a:txBody>
+                    <a:bodyPr wrap="square"/>
+                    <a:lstStyle/>
+                    <a:p>
+                      <a:pPr algn="l"/>
+                      <a:r>
+                        <a:rPr sz="900" b="0" spc="-100">
+                          <a:solidFill>
+                            <a:srgbClr val="141412"/>
+                          </a:solidFill>
+                          <a:latin typeface="Pretendard"/>
+                          <a:ea typeface="Pretendard"/>
+                        </a:rPr>
+                        <a:t>비린 철분제 포기족 → 안 비린 젤리 반전</a:t>
+                      </a:r>
+                    </a:p>
+                  </a:txBody>
+                  <a:tcPr marL="63500" marR="63500" marT="25400" marB="25400" anchor="ctr">
+                    <a:solidFill>
+                      <a:srgbClr val="F3F2E7"/>
+                    </a:solidFill>
+                  </a:tcPr>
+                </a:tc>
+                <a:tc>
+                  <a:txBody>
+                    <a:bodyPr wrap="square"/>
+                    <a:lstStyle/>
+                    <a:p>
+                      <a:pPr algn="l"/>
+                      <a:r>
+                        <a:rPr sz="900" b="0" spc="-100">
+                          <a:solidFill>
+                            <a:srgbClr val="141412"/>
+                          </a:solidFill>
+                          <a:latin typeface="Pretendard"/>
+                          <a:ea typeface="Pretendard"/>
+                        </a:rPr>
+                        <a:t>“철분제 비려서 뱉어본 사람… 이건 좀 다른데?”</a:t>
+                      </a:r>
+                    </a:p>
+                  </a:txBody>
+                  <a:tcPr marL="63500" marR="63500" marT="25400" marB="25400" anchor="ctr">
+                    <a:solidFill>
+                      <a:srgbClr val="F3F2E7"/>
+                    </a:solidFill>
+                  </a:tcPr>
+                </a:tc>
+              </a:tr>
+              <a:tr h="315468">
+                <a:tc>
+                  <a:txBody>
+                    <a:bodyPr wrap="square"/>
+                    <a:lstStyle/>
+                    <a:p>
+                      <a:pPr algn="l"/>
+                      <a:r>
+                        <a:rPr sz="900" b="0" spc="-100">
                           <a:solidFill>
                             <a:srgbClr val="141412"/>
                           </a:solidFill>
@@ -43262,7 +43706,7 @@
                     <a:p>
                       <a:pPr algn="l"/>
                       <a:r>
-                        <a:rPr sz="950" b="0" spc="-100">
+                        <a:rPr sz="900" b="0" spc="-100">
                           <a:solidFill>
                             <a:srgbClr val="141412"/>
                           </a:solidFill>
@@ -43286,7 +43730,7 @@
                     <a:p>
                       <a:pPr algn="l"/>
                       <a:r>
-                        <a:rPr sz="950" b="0" spc="-100">
+                        <a:rPr sz="900" b="0" spc="-100">
                           <a:solidFill>
                             <a:srgbClr val="141412"/>
                           </a:solidFill>
@@ -43304,7 +43748,7 @@
                   </a:tcPr>
                 </a:tc>
               </a:tr>
-              <a:tr h="438912">
+              <a:tr h="315468">
                 <a:tc>
                   <a:txBody>
                     <a:bodyPr wrap="square"/>
@@ -43312,14 +43756,14 @@
                     <a:p>
                       <a:pPr algn="l"/>
                       <a:r>
-                        <a:rPr sz="950" b="0" spc="-100">
+                        <a:rPr sz="900" b="0" spc="-100">
                           <a:solidFill>
                             <a:srgbClr val="141412"/>
                           </a:solidFill>
                           <a:latin typeface="Pretendard"/>
                           <a:ea typeface="Pretendard"/>
                         </a:rPr>
-                        <a:t>구미·바나바잎 (건기식)</a:t>
+                        <a:t>구미·비타민C (건기식)</a:t>
                       </a:r>
                     </a:p>
                   </a:txBody>
@@ -43336,14 +43780,14 @@
                     <a:p>
                       <a:pPr algn="l"/>
                       <a:r>
-                        <a:rPr sz="950" b="0" spc="-100">
+                        <a:rPr sz="900" b="0" spc="-100">
                           <a:solidFill>
                             <a:srgbClr val="141412"/>
                           </a:solidFill>
                           <a:latin typeface="Pretendard"/>
                           <a:ea typeface="Pretendard"/>
                         </a:rPr>
-                        <a:t>식후 혈당 스파이크 공감 연출</a:t>
+                        <a:t>시고 큰 알약 대신 새콤한 한 알 · 환절기 챙김</a:t>
                       </a:r>
                     </a:p>
                   </a:txBody>
@@ -43360,14 +43804,14 @@
                     <a:p>
                       <a:pPr algn="l"/>
                       <a:r>
-                        <a:rPr sz="950" b="0" spc="-100">
+                        <a:rPr sz="900" b="0" spc="-100">
                           <a:solidFill>
                             <a:srgbClr val="141412"/>
                           </a:solidFill>
                           <a:latin typeface="Pretendard"/>
                           <a:ea typeface="Pretendard"/>
                         </a:rPr>
-                        <a:t>“혈당 스파이크 뚜드려 맞는 당신!”</a:t>
+                        <a:t>“환절기마다 챙기는데 알약은 너무 크잖아요”</a:t>
                       </a:r>
                     </a:p>
                   </a:txBody>
@@ -43378,7 +43822,7 @@
                   </a:tcPr>
                 </a:tc>
               </a:tr>
-              <a:tr h="438912">
+              <a:tr h="315468">
                 <a:tc>
                   <a:txBody>
                     <a:bodyPr wrap="square"/>
@@ -43386,14 +43830,14 @@
                     <a:p>
                       <a:pPr algn="l"/>
                       <a:r>
-                        <a:rPr sz="950" b="0" spc="-100">
+                        <a:rPr sz="900" b="0" spc="-100">
                           <a:solidFill>
                             <a:srgbClr val="141412"/>
                           </a:solidFill>
                           <a:latin typeface="Pretendard"/>
                           <a:ea typeface="Pretendard"/>
                         </a:rPr>
-                        <a:t>구미·멜라나잇 (일반)</a:t>
+                        <a:t>구미·바나바잎 (건기식)</a:t>
                       </a:r>
                     </a:p>
                   </a:txBody>
@@ -43410,14 +43854,14 @@
                     <a:p>
                       <a:pPr algn="l"/>
                       <a:r>
-                        <a:rPr sz="950" b="0" spc="-100">
+                        <a:rPr sz="900" b="0" spc="-100">
                           <a:solidFill>
                             <a:srgbClr val="141412"/>
                           </a:solidFill>
                           <a:latin typeface="Pretendard"/>
                           <a:ea typeface="Pretendard"/>
                         </a:rPr>
-                        <a:t>자기 전 무드 리추얼</a:t>
+                        <a:t>식후 혈당 스파이크 공감 연출</a:t>
                       </a:r>
                     </a:p>
                   </a:txBody>
@@ -43434,14 +43878,14 @@
                     <a:p>
                       <a:pPr algn="l"/>
                       <a:r>
-                        <a:rPr sz="950" b="0" spc="-100">
+                        <a:rPr sz="900" b="0" spc="-100">
                           <a:solidFill>
                             <a:srgbClr val="141412"/>
                           </a:solidFill>
                           <a:latin typeface="Pretendard"/>
                           <a:ea typeface="Pretendard"/>
                         </a:rPr>
-                        <a:t>“잠 들기 전 마지막으로… 할 일이 있어요”</a:t>
+                        <a:t>“혈당 스파이크 뚜드려 맞는 당신!”</a:t>
                       </a:r>
                     </a:p>
                   </a:txBody>
@@ -43452,7 +43896,7 @@
                   </a:tcPr>
                 </a:tc>
               </a:tr>
-              <a:tr h="438912">
+              <a:tr h="315468">
                 <a:tc>
                   <a:txBody>
                     <a:bodyPr wrap="square"/>
@@ -43460,14 +43904,14 @@
                     <a:p>
                       <a:pPr algn="l"/>
                       <a:r>
-                        <a:rPr sz="950" b="0" spc="-100">
+                        <a:rPr sz="900" b="0" spc="-100">
                           <a:solidFill>
                             <a:srgbClr val="141412"/>
                           </a:solidFill>
                           <a:latin typeface="Pretendard"/>
                           <a:ea typeface="Pretendard"/>
                         </a:rPr>
-                        <a:t>구미·콜라겐 (일반)</a:t>
+                        <a:t>구미·비오틴 (건기식)</a:t>
                       </a:r>
                     </a:p>
                   </a:txBody>
@@ -43484,14 +43928,14 @@
                     <a:p>
                       <a:pPr algn="l"/>
                       <a:r>
-                        <a:rPr sz="950" b="0" spc="-100">
+                        <a:rPr sz="900" b="0" spc="-100">
                           <a:solidFill>
                             <a:srgbClr val="141412"/>
                           </a:solidFill>
                           <a:latin typeface="Pretendard"/>
                           <a:ea typeface="Pretendard"/>
                         </a:rPr>
-                        <a:t>디저트 대신 한 알</a:t>
+                        <a:t>베개 위 머리카락 늘었다면 — 헤어케어 루틴</a:t>
                       </a:r>
                     </a:p>
                   </a:txBody>
@@ -43508,162 +43952,14 @@
                     <a:p>
                       <a:pPr algn="l"/>
                       <a:r>
-                        <a:rPr sz="950" b="0" spc="-100">
+                        <a:rPr sz="900" b="0" spc="-100">
                           <a:solidFill>
                             <a:srgbClr val="141412"/>
                           </a:solidFill>
                           <a:latin typeface="Pretendard"/>
                           <a:ea typeface="Pretendard"/>
                         </a:rPr>
-                        <a:t>“단 거 당기는데 죄책감은 싫고”</a:t>
-                      </a:r>
-                    </a:p>
-                  </a:txBody>
-                  <a:tcPr marL="63500" marR="63500" marT="25400" marB="25400" anchor="ctr">
-                    <a:solidFill>
-                      <a:srgbClr val="F3F2E7"/>
-                    </a:solidFill>
-                  </a:tcPr>
-                </a:tc>
-              </a:tr>
-              <a:tr h="438912">
-                <a:tc>
-                  <a:txBody>
-                    <a:bodyPr wrap="square"/>
-                    <a:lstStyle/>
-                    <a:p>
-                      <a:pPr algn="l"/>
-                      <a:r>
-                        <a:rPr sz="950" b="0" spc="-100">
-                          <a:solidFill>
-                            <a:srgbClr val="141412"/>
-                          </a:solidFill>
-                          <a:latin typeface="Pretendard"/>
-                          <a:ea typeface="Pretendard"/>
-                        </a:rPr>
-                        <a:t>스틱 A (일반)</a:t>
-                      </a:r>
-                    </a:p>
-                  </a:txBody>
-                  <a:tcPr marL="63500" marR="63500" marT="25400" marB="25400" anchor="ctr">
-                    <a:solidFill>
-                      <a:srgbClr val="FFFFFF"/>
-                    </a:solidFill>
-                  </a:tcPr>
-                </a:tc>
-                <a:tc>
-                  <a:txBody>
-                    <a:bodyPr wrap="square"/>
-                    <a:lstStyle/>
-                    <a:p>
-                      <a:pPr algn="l"/>
-                      <a:r>
-                        <a:rPr sz="950" b="0" spc="-100">
-                          <a:solidFill>
-                            <a:srgbClr val="141412"/>
-                          </a:solidFill>
-                          <a:latin typeface="Pretendard"/>
-                          <a:ea typeface="Pretendard"/>
-                        </a:rPr>
-                        <a:t>가방에 쏙, 출근길 한 포</a:t>
-                      </a:r>
-                    </a:p>
-                  </a:txBody>
-                  <a:tcPr marL="63500" marR="63500" marT="25400" marB="25400" anchor="ctr">
-                    <a:solidFill>
-                      <a:srgbClr val="FFFFFF"/>
-                    </a:solidFill>
-                  </a:tcPr>
-                </a:tc>
-                <a:tc>
-                  <a:txBody>
-                    <a:bodyPr wrap="square"/>
-                    <a:lstStyle/>
-                    <a:p>
-                      <a:pPr algn="l"/>
-                      <a:r>
-                        <a:rPr sz="950" b="0" spc="-100">
-                          <a:solidFill>
-                            <a:srgbClr val="141412"/>
-                          </a:solidFill>
-                          <a:latin typeface="Pretendard"/>
-                          <a:ea typeface="Pretendard"/>
-                        </a:rPr>
-                        <a:t>“요즘 가방에 꼭 챙기는 거 하나”</a:t>
-                      </a:r>
-                    </a:p>
-                  </a:txBody>
-                  <a:tcPr marL="63500" marR="63500" marT="25400" marB="25400" anchor="ctr">
-                    <a:solidFill>
-                      <a:srgbClr val="FFFFFF"/>
-                    </a:solidFill>
-                  </a:tcPr>
-                </a:tc>
-              </a:tr>
-              <a:tr h="438912">
-                <a:tc>
-                  <a:txBody>
-                    <a:bodyPr wrap="square"/>
-                    <a:lstStyle/>
-                    <a:p>
-                      <a:pPr algn="l"/>
-                      <a:r>
-                        <a:rPr sz="950" b="0" spc="-100">
-                          <a:solidFill>
-                            <a:srgbClr val="141412"/>
-                          </a:solidFill>
-                          <a:latin typeface="Pretendard"/>
-                          <a:ea typeface="Pretendard"/>
-                        </a:rPr>
-                        <a:t>스틱 B (일반)</a:t>
-                      </a:r>
-                    </a:p>
-                  </a:txBody>
-                  <a:tcPr marL="63500" marR="63500" marT="25400" marB="25400" anchor="ctr">
-                    <a:solidFill>
-                      <a:srgbClr val="F3F2E7"/>
-                    </a:solidFill>
-                  </a:tcPr>
-                </a:tc>
-                <a:tc>
-                  <a:txBody>
-                    <a:bodyPr wrap="square"/>
-                    <a:lstStyle/>
-                    <a:p>
-                      <a:pPr algn="l"/>
-                      <a:r>
-                        <a:rPr sz="950" b="0" spc="-100">
-                          <a:solidFill>
-                            <a:srgbClr val="141412"/>
-                          </a:solidFill>
-                          <a:latin typeface="Pretendard"/>
-                          <a:ea typeface="Pretendard"/>
-                        </a:rPr>
-                        <a:t>오일 맛 솔직 리뷰</a:t>
-                      </a:r>
-                    </a:p>
-                  </a:txBody>
-                  <a:tcPr marL="63500" marR="63500" marT="25400" marB="25400" anchor="ctr">
-                    <a:solidFill>
-                      <a:srgbClr val="F3F2E7"/>
-                    </a:solidFill>
-                  </a:tcPr>
-                </a:tc>
-                <a:tc>
-                  <a:txBody>
-                    <a:bodyPr wrap="square"/>
-                    <a:lstStyle/>
-                    <a:p>
-                      <a:pPr algn="l"/>
-                      <a:r>
-                        <a:rPr sz="950" b="0" spc="-100">
-                          <a:solidFill>
-                            <a:srgbClr val="141412"/>
-                          </a:solidFill>
-                          <a:latin typeface="Pretendard"/>
-                          <a:ea typeface="Pretendard"/>
-                        </a:rPr>
-                        <a:t>“오일에서는 역시 오일 맛이 나야죠”</a:t>
+                        <a:t>“요즘 머리 신경 쓰여서 챙기기 시작한 거”</a:t>
                       </a:r>
                     </a:p>
                   </a:txBody>
@@ -43681,6 +43977,42 @@
       <p:sp>
         <p:nvSpPr>
           <p:cNvPr id="7" name="TextBox 6"/>
+          <p:cNvSpPr txBox="1"/>
+          <p:nvPr/>
+        </p:nvSpPr>
+        <p:spPr>
+          <a:xfrm>
+            <a:off x="822960" y="6400800"/>
+            <a:ext cx="10543032" cy="274320"/>
+          </a:xfrm>
+          <a:prstGeom prst="rect">
+            <a:avLst/>
+          </a:prstGeom>
+          <a:noFill/>
+        </p:spPr>
+        <p:txBody>
+          <a:bodyPr wrap="square" anchor="t" lIns="0" rIns="0" tIns="0" bIns="0">
+            <a:spAutoFit/>
+          </a:bodyPr>
+          <a:lstStyle/>
+          <a:p>
+            <a:pPr algn="l"/>
+            <a:r>
+              <a:rPr sz="850" b="0" spc="-100">
+                <a:solidFill>
+                  <a:srgbClr val="868680"/>
+                </a:solidFill>
+                <a:latin typeface="Pretendard"/>
+                <a:ea typeface="Pretendard"/>
+              </a:rPr>
+              <a:t>신규 4종(올인원·철분·비타민C·비오틴) = VOC 질문·긍정 리뷰 기반 · 건기식은 인정 기능성 범위(맛·편의·TPO) 내 Half-EGC로 운영</a:t>
+            </a:r>
+          </a:p>
+        </p:txBody>
+      </p:sp>
+      <p:sp>
+        <p:nvSpPr>
+          <p:cNvPr id="8" name="TextBox 7"/>
           <p:cNvSpPr txBox="1"/>
           <p:nvPr/>
         </p:nvSpPr>

--- a/proposal/BAT_올리브영_2026_올더베러_마케팅제안_클린재설계_HAN.pptx
+++ b/proposal/BAT_올리브영_2026_올더베러_마케팅제안_클린재설계_HAN.pptx
@@ -8105,16 +8105,64 @@
       </p:sp>
       <p:sp>
         <p:nvSpPr>
-          <p:cNvPr id="6" name="Oval 5"/>
+          <p:cNvPr id="6" name="Rounded Rectangle 5"/>
           <p:cNvSpPr/>
           <p:nvPr/>
         </p:nvSpPr>
         <p:spPr>
           <a:xfrm>
-            <a:off x="1727072" y="2240280"/>
-            <a:ext cx="621792" cy="621792"/>
-          </a:xfrm>
-          <a:prstGeom prst="ellipse">
+            <a:off x="822960" y="2240280"/>
+            <a:ext cx="2487168" cy="1783080"/>
+          </a:xfrm>
+          <a:prstGeom prst="roundRect">
+            <a:avLst>
+              <a:gd name="adj" fmla="val 8000"/>
+            </a:avLst>
+          </a:prstGeom>
+          <a:solidFill>
+            <a:srgbClr val="FFFFFF"/>
+          </a:solidFill>
+          <a:ln w="12700">
+            <a:solidFill>
+              <a:srgbClr val="C9C4B8"/>
+            </a:solidFill>
+          </a:ln>
+          <a:effectLst/>
+        </p:spPr>
+        <p:style>
+          <a:lnRef idx="1">
+            <a:schemeClr val="accent1"/>
+          </a:lnRef>
+          <a:fillRef idx="3">
+            <a:schemeClr val="accent1"/>
+          </a:fillRef>
+          <a:effectRef idx="2">
+            <a:schemeClr val="accent1"/>
+          </a:effectRef>
+          <a:fontRef idx="minor">
+            <a:schemeClr val="lt1"/>
+          </a:fontRef>
+        </p:style>
+        <p:txBody>
+          <a:bodyPr rtlCol="0" anchor="ctr"/>
+          <a:lstStyle/>
+          <a:p>
+            <a:pPr algn="ctr"/>
+          </a:p>
+        </p:txBody>
+      </p:sp>
+      <p:sp>
+        <p:nvSpPr>
+          <p:cNvPr id="7" name="Rectangle 6"/>
+          <p:cNvSpPr/>
+          <p:nvPr/>
+        </p:nvSpPr>
+        <p:spPr>
+          <a:xfrm>
+            <a:off x="822960" y="2240280"/>
+            <a:ext cx="2487168" cy="73152"/>
+          </a:xfrm>
+          <a:prstGeom prst="rect">
             <a:avLst/>
           </a:prstGeom>
           <a:solidFill>
@@ -8149,14 +8197,58 @@
       </p:sp>
       <p:sp>
         <p:nvSpPr>
-          <p:cNvPr id="7" name="TextBox 6"/>
-          <p:cNvSpPr txBox="1"/>
-          <p:nvPr/>
-        </p:nvSpPr>
-        <p:spPr>
-          <a:xfrm>
-            <a:off x="1727072" y="2240280"/>
-            <a:ext cx="621792" cy="621792"/>
+          <p:cNvPr id="8" name="Oval 7"/>
+          <p:cNvSpPr/>
+          <p:nvPr/>
+        </p:nvSpPr>
+        <p:spPr>
+          <a:xfrm>
+            <a:off x="1728216" y="2432304"/>
+            <a:ext cx="676656" cy="676656"/>
+          </a:xfrm>
+          <a:prstGeom prst="ellipse">
+            <a:avLst/>
+          </a:prstGeom>
+          <a:solidFill>
+            <a:srgbClr val="3D2B1B"/>
+          </a:solidFill>
+          <a:ln>
+            <a:noFill/>
+          </a:ln>
+          <a:effectLst/>
+        </p:spPr>
+        <p:style>
+          <a:lnRef idx="1">
+            <a:schemeClr val="accent1"/>
+          </a:lnRef>
+          <a:fillRef idx="3">
+            <a:schemeClr val="accent1"/>
+          </a:fillRef>
+          <a:effectRef idx="2">
+            <a:schemeClr val="accent1"/>
+          </a:effectRef>
+          <a:fontRef idx="minor">
+            <a:schemeClr val="lt1"/>
+          </a:fontRef>
+        </p:style>
+        <p:txBody>
+          <a:bodyPr rtlCol="0" anchor="ctr"/>
+          <a:lstStyle/>
+          <a:p>
+            <a:pPr algn="ctr"/>
+          </a:p>
+        </p:txBody>
+      </p:sp>
+      <p:sp>
+        <p:nvSpPr>
+          <p:cNvPr id="9" name="TextBox 8"/>
+          <p:cNvSpPr txBox="1"/>
+          <p:nvPr/>
+        </p:nvSpPr>
+        <p:spPr>
+          <a:xfrm>
+            <a:off x="1728216" y="2432304"/>
+            <a:ext cx="676656" cy="676656"/>
           </a:xfrm>
           <a:prstGeom prst="rect">
             <a:avLst/>
@@ -8185,14 +8277,14 @@
       </p:sp>
       <p:sp>
         <p:nvSpPr>
-          <p:cNvPr id="8" name="TextBox 7"/>
-          <p:cNvSpPr txBox="1"/>
-          <p:nvPr/>
-        </p:nvSpPr>
-        <p:spPr>
-          <a:xfrm>
-            <a:off x="822960" y="2971800"/>
-            <a:ext cx="2430018" cy="457200"/>
+          <p:cNvPr id="10" name="TextBox 9"/>
+          <p:cNvSpPr txBox="1"/>
+          <p:nvPr/>
+        </p:nvSpPr>
+        <p:spPr>
+          <a:xfrm>
+            <a:off x="969264" y="3218688"/>
+            <a:ext cx="2194560" cy="502920"/>
           </a:xfrm>
           <a:prstGeom prst="rect">
             <a:avLst/>
@@ -8207,7 +8299,7 @@
           <a:p>
             <a:pPr algn="ctr"/>
             <a:r>
-              <a:rPr sz="1350" b="1" spc="-100">
+              <a:rPr sz="1250" b="1" spc="-100">
                 <a:solidFill>
                   <a:srgbClr val="141412"/>
                 </a:solidFill>
@@ -8221,14 +8313,14 @@
       </p:sp>
       <p:sp>
         <p:nvSpPr>
-          <p:cNvPr id="9" name="TextBox 8"/>
-          <p:cNvSpPr txBox="1"/>
-          <p:nvPr/>
-        </p:nvSpPr>
-        <p:spPr>
-          <a:xfrm>
-            <a:off x="868680" y="3447288"/>
-            <a:ext cx="2338578" cy="1097280"/>
+          <p:cNvPr id="11" name="TextBox 10"/>
+          <p:cNvSpPr txBox="1"/>
+          <p:nvPr/>
+        </p:nvSpPr>
+        <p:spPr>
+          <a:xfrm>
+            <a:off x="1005840" y="3694176"/>
+            <a:ext cx="2121408" cy="731520"/>
           </a:xfrm>
           <a:prstGeom prst="rect">
             <a:avLst/>
@@ -8243,28 +8335,28 @@
           <a:p>
             <a:pPr algn="ctr"/>
             <a:r>
-              <a:rPr sz="1050" b="0" spc="-100">
+              <a:rPr sz="980" b="0" spc="-100">
                 <a:solidFill>
                   <a:srgbClr val="868680"/>
                 </a:solidFill>
                 <a:latin typeface="Pretendard"/>
                 <a:ea typeface="Pretendard"/>
               </a:rPr>
-              <a:t>릴스/쇼츠 대본·자막·해시태그를 검수 큐 등록</a:t>
-            </a:r>
-          </a:p>
-        </p:txBody>
-      </p:sp>
-      <p:sp>
-        <p:nvSpPr>
-          <p:cNvPr id="10" name="Chevron 9"/>
+              <a:t>릴스/쇼츠 대본·자막·해시태그를 검수 큐에 등록</a:t>
+            </a:r>
+          </a:p>
+        </p:txBody>
+      </p:sp>
+      <p:sp>
+        <p:nvSpPr>
+          <p:cNvPr id="12" name="Chevron 11"/>
           <p:cNvSpPr/>
           <p:nvPr/>
         </p:nvSpPr>
         <p:spPr>
           <a:xfrm>
-            <a:off x="3207258" y="2423160"/>
-            <a:ext cx="365760" cy="256032"/>
+            <a:off x="3323844" y="2999232"/>
+            <a:ext cx="196596" cy="256032"/>
           </a:xfrm>
           <a:prstGeom prst="chevron">
             <a:avLst/>
@@ -8301,16 +8393,64 @@
       </p:sp>
       <p:sp>
         <p:nvSpPr>
-          <p:cNvPr id="11" name="Oval 10"/>
+          <p:cNvPr id="13" name="Rounded Rectangle 12"/>
           <p:cNvSpPr/>
           <p:nvPr/>
         </p:nvSpPr>
         <p:spPr>
           <a:xfrm>
-            <a:off x="4431411" y="2240280"/>
-            <a:ext cx="621792" cy="621792"/>
-          </a:xfrm>
-          <a:prstGeom prst="ellipse">
+            <a:off x="3525012" y="2240280"/>
+            <a:ext cx="2487168" cy="1783080"/>
+          </a:xfrm>
+          <a:prstGeom prst="roundRect">
+            <a:avLst>
+              <a:gd name="adj" fmla="val 8000"/>
+            </a:avLst>
+          </a:prstGeom>
+          <a:solidFill>
+            <a:srgbClr val="FFFFFF"/>
+          </a:solidFill>
+          <a:ln w="12700">
+            <a:solidFill>
+              <a:srgbClr val="C9C4B8"/>
+            </a:solidFill>
+          </a:ln>
+          <a:effectLst/>
+        </p:spPr>
+        <p:style>
+          <a:lnRef idx="1">
+            <a:schemeClr val="accent1"/>
+          </a:lnRef>
+          <a:fillRef idx="3">
+            <a:schemeClr val="accent1"/>
+          </a:fillRef>
+          <a:effectRef idx="2">
+            <a:schemeClr val="accent1"/>
+          </a:effectRef>
+          <a:fontRef idx="minor">
+            <a:schemeClr val="lt1"/>
+          </a:fontRef>
+        </p:style>
+        <p:txBody>
+          <a:bodyPr rtlCol="0" anchor="ctr"/>
+          <a:lstStyle/>
+          <a:p>
+            <a:pPr algn="ctr"/>
+          </a:p>
+        </p:txBody>
+      </p:sp>
+      <p:sp>
+        <p:nvSpPr>
+          <p:cNvPr id="14" name="Rectangle 13"/>
+          <p:cNvSpPr/>
+          <p:nvPr/>
+        </p:nvSpPr>
+        <p:spPr>
+          <a:xfrm>
+            <a:off x="3525012" y="2240280"/>
+            <a:ext cx="2487168" cy="73152"/>
+          </a:xfrm>
+          <a:prstGeom prst="rect">
             <a:avLst/>
           </a:prstGeom>
           <a:solidFill>
@@ -8345,14 +8485,58 @@
       </p:sp>
       <p:sp>
         <p:nvSpPr>
-          <p:cNvPr id="12" name="TextBox 11"/>
-          <p:cNvSpPr txBox="1"/>
-          <p:nvPr/>
-        </p:nvSpPr>
-        <p:spPr>
-          <a:xfrm>
-            <a:off x="4431411" y="2240280"/>
-            <a:ext cx="621792" cy="621792"/>
+          <p:cNvPr id="15" name="Oval 14"/>
+          <p:cNvSpPr/>
+          <p:nvPr/>
+        </p:nvSpPr>
+        <p:spPr>
+          <a:xfrm>
+            <a:off x="4430268" y="2432304"/>
+            <a:ext cx="676656" cy="676656"/>
+          </a:xfrm>
+          <a:prstGeom prst="ellipse">
+            <a:avLst/>
+          </a:prstGeom>
+          <a:solidFill>
+            <a:srgbClr val="3D2B1B"/>
+          </a:solidFill>
+          <a:ln>
+            <a:noFill/>
+          </a:ln>
+          <a:effectLst/>
+        </p:spPr>
+        <p:style>
+          <a:lnRef idx="1">
+            <a:schemeClr val="accent1"/>
+          </a:lnRef>
+          <a:fillRef idx="3">
+            <a:schemeClr val="accent1"/>
+          </a:fillRef>
+          <a:effectRef idx="2">
+            <a:schemeClr val="accent1"/>
+          </a:effectRef>
+          <a:fontRef idx="minor">
+            <a:schemeClr val="lt1"/>
+          </a:fontRef>
+        </p:style>
+        <p:txBody>
+          <a:bodyPr rtlCol="0" anchor="ctr"/>
+          <a:lstStyle/>
+          <a:p>
+            <a:pPr algn="ctr"/>
+          </a:p>
+        </p:txBody>
+      </p:sp>
+      <p:sp>
+        <p:nvSpPr>
+          <p:cNvPr id="16" name="TextBox 15"/>
+          <p:cNvSpPr txBox="1"/>
+          <p:nvPr/>
+        </p:nvSpPr>
+        <p:spPr>
+          <a:xfrm>
+            <a:off x="4430268" y="2432304"/>
+            <a:ext cx="676656" cy="676656"/>
           </a:xfrm>
           <a:prstGeom prst="rect">
             <a:avLst/>
@@ -8381,14 +8565,14 @@
       </p:sp>
       <p:sp>
         <p:nvSpPr>
-          <p:cNvPr id="13" name="TextBox 12"/>
-          <p:cNvSpPr txBox="1"/>
-          <p:nvPr/>
-        </p:nvSpPr>
-        <p:spPr>
-          <a:xfrm>
-            <a:off x="3527298" y="2971800"/>
-            <a:ext cx="2430018" cy="457200"/>
+          <p:cNvPr id="17" name="TextBox 16"/>
+          <p:cNvSpPr txBox="1"/>
+          <p:nvPr/>
+        </p:nvSpPr>
+        <p:spPr>
+          <a:xfrm>
+            <a:off x="3671315" y="3218688"/>
+            <a:ext cx="2194560" cy="502920"/>
           </a:xfrm>
           <a:prstGeom prst="rect">
             <a:avLst/>
@@ -8403,7 +8587,7 @@
           <a:p>
             <a:pPr algn="ctr"/>
             <a:r>
-              <a:rPr sz="1350" b="1" spc="-100">
+              <a:rPr sz="1250" b="1" spc="-100">
                 <a:solidFill>
                   <a:srgbClr val="141412"/>
                 </a:solidFill>
@@ -8417,14 +8601,14 @@
       </p:sp>
       <p:sp>
         <p:nvSpPr>
-          <p:cNvPr id="14" name="TextBox 13"/>
-          <p:cNvSpPr txBox="1"/>
-          <p:nvPr/>
-        </p:nvSpPr>
-        <p:spPr>
-          <a:xfrm>
-            <a:off x="3573018" y="3447288"/>
-            <a:ext cx="2338578" cy="1097280"/>
+          <p:cNvPr id="18" name="TextBox 17"/>
+          <p:cNvSpPr txBox="1"/>
+          <p:nvPr/>
+        </p:nvSpPr>
+        <p:spPr>
+          <a:xfrm>
+            <a:off x="3707891" y="3694176"/>
+            <a:ext cx="2121408" cy="731520"/>
           </a:xfrm>
           <a:prstGeom prst="rect">
             <a:avLst/>
@@ -8439,28 +8623,28 @@
           <a:p>
             <a:pPr algn="ctr"/>
             <a:r>
-              <a:rPr sz="1050" b="0" spc="-100">
+              <a:rPr sz="980" b="0" spc="-100">
                 <a:solidFill>
                   <a:srgbClr val="868680"/>
                 </a:solidFill>
                 <a:latin typeface="Pretendard"/>
                 <a:ea typeface="Pretendard"/>
               </a:rPr>
-              <a:t>분류 자동 분기 → 효능·과장·질병 표현 탐지·플래그</a:t>
-            </a:r>
-          </a:p>
-        </p:txBody>
-      </p:sp>
-      <p:sp>
-        <p:nvSpPr>
-          <p:cNvPr id="15" name="Chevron 14"/>
+              <a:t>제품 분류 자동 분기 → 효능·과장·질병 표현 탐지·플래그</a:t>
+            </a:r>
+          </a:p>
+        </p:txBody>
+      </p:sp>
+      <p:sp>
+        <p:nvSpPr>
+          <p:cNvPr id="19" name="Chevron 18"/>
           <p:cNvSpPr/>
           <p:nvPr/>
         </p:nvSpPr>
         <p:spPr>
           <a:xfrm>
-            <a:off x="5911596" y="2423160"/>
-            <a:ext cx="365760" cy="256032"/>
+            <a:off x="6025896" y="2999232"/>
+            <a:ext cx="196596" cy="256032"/>
           </a:xfrm>
           <a:prstGeom prst="chevron">
             <a:avLst/>
@@ -8497,16 +8681,64 @@
       </p:sp>
       <p:sp>
         <p:nvSpPr>
-          <p:cNvPr id="16" name="Oval 15"/>
+          <p:cNvPr id="20" name="Rounded Rectangle 19"/>
           <p:cNvSpPr/>
           <p:nvPr/>
         </p:nvSpPr>
         <p:spPr>
           <a:xfrm>
-            <a:off x="7135749" y="2240280"/>
-            <a:ext cx="621792" cy="621792"/>
-          </a:xfrm>
-          <a:prstGeom prst="ellipse">
+            <a:off x="6227064" y="2240280"/>
+            <a:ext cx="2487168" cy="1783080"/>
+          </a:xfrm>
+          <a:prstGeom prst="roundRect">
+            <a:avLst>
+              <a:gd name="adj" fmla="val 8000"/>
+            </a:avLst>
+          </a:prstGeom>
+          <a:solidFill>
+            <a:srgbClr val="FFFFFF"/>
+          </a:solidFill>
+          <a:ln w="12700">
+            <a:solidFill>
+              <a:srgbClr val="C9C4B8"/>
+            </a:solidFill>
+          </a:ln>
+          <a:effectLst/>
+        </p:spPr>
+        <p:style>
+          <a:lnRef idx="1">
+            <a:schemeClr val="accent1"/>
+          </a:lnRef>
+          <a:fillRef idx="3">
+            <a:schemeClr val="accent1"/>
+          </a:fillRef>
+          <a:effectRef idx="2">
+            <a:schemeClr val="accent1"/>
+          </a:effectRef>
+          <a:fontRef idx="minor">
+            <a:schemeClr val="lt1"/>
+          </a:fontRef>
+        </p:style>
+        <p:txBody>
+          <a:bodyPr rtlCol="0" anchor="ctr"/>
+          <a:lstStyle/>
+          <a:p>
+            <a:pPr algn="ctr"/>
+          </a:p>
+        </p:txBody>
+      </p:sp>
+      <p:sp>
+        <p:nvSpPr>
+          <p:cNvPr id="21" name="Rectangle 20"/>
+          <p:cNvSpPr/>
+          <p:nvPr/>
+        </p:nvSpPr>
+        <p:spPr>
+          <a:xfrm>
+            <a:off x="6227064" y="2240280"/>
+            <a:ext cx="2487168" cy="73152"/>
+          </a:xfrm>
+          <a:prstGeom prst="rect">
             <a:avLst/>
           </a:prstGeom>
           <a:solidFill>
@@ -8541,14 +8773,58 @@
       </p:sp>
       <p:sp>
         <p:nvSpPr>
-          <p:cNvPr id="17" name="TextBox 16"/>
-          <p:cNvSpPr txBox="1"/>
-          <p:nvPr/>
-        </p:nvSpPr>
-        <p:spPr>
-          <a:xfrm>
-            <a:off x="7135749" y="2240280"/>
-            <a:ext cx="621792" cy="621792"/>
+          <p:cNvPr id="22" name="Oval 21"/>
+          <p:cNvSpPr/>
+          <p:nvPr/>
+        </p:nvSpPr>
+        <p:spPr>
+          <a:xfrm>
+            <a:off x="7132320" y="2432304"/>
+            <a:ext cx="676656" cy="676656"/>
+          </a:xfrm>
+          <a:prstGeom prst="ellipse">
+            <a:avLst/>
+          </a:prstGeom>
+          <a:solidFill>
+            <a:srgbClr val="3D2B1B"/>
+          </a:solidFill>
+          <a:ln>
+            <a:noFill/>
+          </a:ln>
+          <a:effectLst/>
+        </p:spPr>
+        <p:style>
+          <a:lnRef idx="1">
+            <a:schemeClr val="accent1"/>
+          </a:lnRef>
+          <a:fillRef idx="3">
+            <a:schemeClr val="accent1"/>
+          </a:fillRef>
+          <a:effectRef idx="2">
+            <a:schemeClr val="accent1"/>
+          </a:effectRef>
+          <a:fontRef idx="minor">
+            <a:schemeClr val="lt1"/>
+          </a:fontRef>
+        </p:style>
+        <p:txBody>
+          <a:bodyPr rtlCol="0" anchor="ctr"/>
+          <a:lstStyle/>
+          <a:p>
+            <a:pPr algn="ctr"/>
+          </a:p>
+        </p:txBody>
+      </p:sp>
+      <p:sp>
+        <p:nvSpPr>
+          <p:cNvPr id="23" name="TextBox 22"/>
+          <p:cNvSpPr txBox="1"/>
+          <p:nvPr/>
+        </p:nvSpPr>
+        <p:spPr>
+          <a:xfrm>
+            <a:off x="7132320" y="2432304"/>
+            <a:ext cx="676656" cy="676656"/>
           </a:xfrm>
           <a:prstGeom prst="rect">
             <a:avLst/>
@@ -8577,14 +8853,14 @@
       </p:sp>
       <p:sp>
         <p:nvSpPr>
-          <p:cNvPr id="18" name="TextBox 17"/>
-          <p:cNvSpPr txBox="1"/>
-          <p:nvPr/>
-        </p:nvSpPr>
-        <p:spPr>
-          <a:xfrm>
-            <a:off x="6231636" y="2971800"/>
-            <a:ext cx="2430018" cy="457200"/>
+          <p:cNvPr id="24" name="TextBox 23"/>
+          <p:cNvSpPr txBox="1"/>
+          <p:nvPr/>
+        </p:nvSpPr>
+        <p:spPr>
+          <a:xfrm>
+            <a:off x="6373368" y="3218688"/>
+            <a:ext cx="2194560" cy="502920"/>
           </a:xfrm>
           <a:prstGeom prst="rect">
             <a:avLst/>
@@ -8599,7 +8875,7 @@
           <a:p>
             <a:pPr algn="ctr"/>
             <a:r>
-              <a:rPr sz="1350" b="1" spc="-100">
+              <a:rPr sz="1250" b="1" spc="-100">
                 <a:solidFill>
                   <a:srgbClr val="141412"/>
                 </a:solidFill>
@@ -8613,14 +8889,14 @@
       </p:sp>
       <p:sp>
         <p:nvSpPr>
-          <p:cNvPr id="19" name="TextBox 18"/>
-          <p:cNvSpPr txBox="1"/>
-          <p:nvPr/>
-        </p:nvSpPr>
-        <p:spPr>
-          <a:xfrm>
-            <a:off x="6277356" y="3447288"/>
-            <a:ext cx="2338578" cy="1097280"/>
+          <p:cNvPr id="25" name="TextBox 24"/>
+          <p:cNvSpPr txBox="1"/>
+          <p:nvPr/>
+        </p:nvSpPr>
+        <p:spPr>
+          <a:xfrm>
+            <a:off x="6409944" y="3694176"/>
+            <a:ext cx="2121408" cy="731520"/>
           </a:xfrm>
           <a:prstGeom prst="rect">
             <a:avLst/>
@@ -8635,28 +8911,28 @@
           <a:p>
             <a:pPr algn="ctr"/>
             <a:r>
-              <a:rPr sz="1050" b="0" spc="-100">
+              <a:rPr sz="980" b="0" spc="-100">
                 <a:solidFill>
                   <a:srgbClr val="868680"/>
                 </a:solidFill>
                 <a:latin typeface="Pretendard"/>
                 <a:ea typeface="Pretendard"/>
               </a:rPr>
-              <a:t>위험 문구 → 안전 문구 대안 (근거 조항 동반)</a:t>
-            </a:r>
-          </a:p>
-        </p:txBody>
-      </p:sp>
-      <p:sp>
-        <p:nvSpPr>
-          <p:cNvPr id="20" name="Chevron 19"/>
+              <a:t>위험 문구 → 안전 문구 대안 제시 (근거 조항 동반)</a:t>
+            </a:r>
+          </a:p>
+        </p:txBody>
+      </p:sp>
+      <p:sp>
+        <p:nvSpPr>
+          <p:cNvPr id="26" name="Chevron 25"/>
           <p:cNvSpPr/>
           <p:nvPr/>
         </p:nvSpPr>
         <p:spPr>
           <a:xfrm>
-            <a:off x="8615934" y="2423160"/>
-            <a:ext cx="365760" cy="256032"/>
+            <a:off x="8727948" y="2999232"/>
+            <a:ext cx="196596" cy="256032"/>
           </a:xfrm>
           <a:prstGeom prst="chevron">
             <a:avLst/>
@@ -8693,16 +8969,64 @@
       </p:sp>
       <p:sp>
         <p:nvSpPr>
-          <p:cNvPr id="21" name="Oval 20"/>
+          <p:cNvPr id="27" name="Rounded Rectangle 26"/>
           <p:cNvSpPr/>
           <p:nvPr/>
         </p:nvSpPr>
         <p:spPr>
           <a:xfrm>
-            <a:off x="9840087" y="2240280"/>
-            <a:ext cx="621792" cy="621792"/>
-          </a:xfrm>
-          <a:prstGeom prst="ellipse">
+            <a:off x="8929116" y="2240280"/>
+            <a:ext cx="2487168" cy="1783080"/>
+          </a:xfrm>
+          <a:prstGeom prst="roundRect">
+            <a:avLst>
+              <a:gd name="adj" fmla="val 8000"/>
+            </a:avLst>
+          </a:prstGeom>
+          <a:solidFill>
+            <a:srgbClr val="FFFFFF"/>
+          </a:solidFill>
+          <a:ln w="12700">
+            <a:solidFill>
+              <a:srgbClr val="C9C4B8"/>
+            </a:solidFill>
+          </a:ln>
+          <a:effectLst/>
+        </p:spPr>
+        <p:style>
+          <a:lnRef idx="1">
+            <a:schemeClr val="accent1"/>
+          </a:lnRef>
+          <a:fillRef idx="3">
+            <a:schemeClr val="accent1"/>
+          </a:fillRef>
+          <a:effectRef idx="2">
+            <a:schemeClr val="accent1"/>
+          </a:effectRef>
+          <a:fontRef idx="minor">
+            <a:schemeClr val="lt1"/>
+          </a:fontRef>
+        </p:style>
+        <p:txBody>
+          <a:bodyPr rtlCol="0" anchor="ctr"/>
+          <a:lstStyle/>
+          <a:p>
+            <a:pPr algn="ctr"/>
+          </a:p>
+        </p:txBody>
+      </p:sp>
+      <p:sp>
+        <p:nvSpPr>
+          <p:cNvPr id="28" name="Rectangle 27"/>
+          <p:cNvSpPr/>
+          <p:nvPr/>
+        </p:nvSpPr>
+        <p:spPr>
+          <a:xfrm>
+            <a:off x="8929116" y="2240280"/>
+            <a:ext cx="2487168" cy="73152"/>
+          </a:xfrm>
+          <a:prstGeom prst="rect">
             <a:avLst/>
           </a:prstGeom>
           <a:solidFill>
@@ -8737,14 +9061,58 @@
       </p:sp>
       <p:sp>
         <p:nvSpPr>
-          <p:cNvPr id="22" name="TextBox 21"/>
-          <p:cNvSpPr txBox="1"/>
-          <p:nvPr/>
-        </p:nvSpPr>
-        <p:spPr>
-          <a:xfrm>
-            <a:off x="9840087" y="2240280"/>
-            <a:ext cx="621792" cy="621792"/>
+          <p:cNvPr id="29" name="Oval 28"/>
+          <p:cNvSpPr/>
+          <p:nvPr/>
+        </p:nvSpPr>
+        <p:spPr>
+          <a:xfrm>
+            <a:off x="9834372" y="2432304"/>
+            <a:ext cx="676656" cy="676656"/>
+          </a:xfrm>
+          <a:prstGeom prst="ellipse">
+            <a:avLst/>
+          </a:prstGeom>
+          <a:solidFill>
+            <a:srgbClr val="3D2B1B"/>
+          </a:solidFill>
+          <a:ln>
+            <a:noFill/>
+          </a:ln>
+          <a:effectLst/>
+        </p:spPr>
+        <p:style>
+          <a:lnRef idx="1">
+            <a:schemeClr val="accent1"/>
+          </a:lnRef>
+          <a:fillRef idx="3">
+            <a:schemeClr val="accent1"/>
+          </a:fillRef>
+          <a:effectRef idx="2">
+            <a:schemeClr val="accent1"/>
+          </a:effectRef>
+          <a:fontRef idx="minor">
+            <a:schemeClr val="lt1"/>
+          </a:fontRef>
+        </p:style>
+        <p:txBody>
+          <a:bodyPr rtlCol="0" anchor="ctr"/>
+          <a:lstStyle/>
+          <a:p>
+            <a:pPr algn="ctr"/>
+          </a:p>
+        </p:txBody>
+      </p:sp>
+      <p:sp>
+        <p:nvSpPr>
+          <p:cNvPr id="30" name="TextBox 29"/>
+          <p:cNvSpPr txBox="1"/>
+          <p:nvPr/>
+        </p:nvSpPr>
+        <p:spPr>
+          <a:xfrm>
+            <a:off x="9834372" y="2432304"/>
+            <a:ext cx="676656" cy="676656"/>
           </a:xfrm>
           <a:prstGeom prst="rect">
             <a:avLst/>
@@ -8773,14 +9141,14 @@
       </p:sp>
       <p:sp>
         <p:nvSpPr>
-          <p:cNvPr id="23" name="TextBox 22"/>
-          <p:cNvSpPr txBox="1"/>
-          <p:nvPr/>
-        </p:nvSpPr>
-        <p:spPr>
-          <a:xfrm>
-            <a:off x="8935974" y="2971800"/>
-            <a:ext cx="2430018" cy="457200"/>
+          <p:cNvPr id="31" name="TextBox 30"/>
+          <p:cNvSpPr txBox="1"/>
+          <p:nvPr/>
+        </p:nvSpPr>
+        <p:spPr>
+          <a:xfrm>
+            <a:off x="9075420" y="3218688"/>
+            <a:ext cx="2194560" cy="502920"/>
           </a:xfrm>
           <a:prstGeom prst="rect">
             <a:avLst/>
@@ -8795,7 +9163,7 @@
           <a:p>
             <a:pPr algn="ctr"/>
             <a:r>
-              <a:rPr sz="1350" b="1" spc="-100">
+              <a:rPr sz="1250" b="1" spc="-100">
                 <a:solidFill>
                   <a:srgbClr val="141412"/>
                 </a:solidFill>
@@ -8809,14 +9177,14 @@
       </p:sp>
       <p:sp>
         <p:nvSpPr>
-          <p:cNvPr id="24" name="TextBox 23"/>
-          <p:cNvSpPr txBox="1"/>
-          <p:nvPr/>
-        </p:nvSpPr>
-        <p:spPr>
-          <a:xfrm>
-            <a:off x="8981694" y="3447288"/>
-            <a:ext cx="2338578" cy="1097280"/>
+          <p:cNvPr id="32" name="TextBox 31"/>
+          <p:cNvSpPr txBox="1"/>
+          <p:nvPr/>
+        </p:nvSpPr>
+        <p:spPr>
+          <a:xfrm>
+            <a:off x="9111996" y="3694176"/>
+            <a:ext cx="2121408" cy="731520"/>
           </a:xfrm>
           <a:prstGeom prst="rect">
             <a:avLst/>
@@ -8831,28 +9199,28 @@
           <a:p>
             <a:pPr algn="ctr"/>
             <a:r>
-              <a:rPr sz="1050" b="0" spc="-100">
+              <a:rPr sz="980" b="0" spc="-100">
                 <a:solidFill>
                   <a:srgbClr val="868680"/>
                 </a:solidFill>
                 <a:latin typeface="Pretendard"/>
                 <a:ea typeface="Pretendard"/>
               </a:rPr>
-              <a:t>건기식 자율심의·법무 확인 후 송출</a:t>
-            </a:r>
-          </a:p>
-        </p:txBody>
-      </p:sp>
-      <p:sp>
-        <p:nvSpPr>
-          <p:cNvPr id="25" name="Rounded Rectangle 24"/>
+              <a:t>건기식 자율심의·법무 확인까지 완료 후 송출</a:t>
+            </a:r>
+          </a:p>
+        </p:txBody>
+      </p:sp>
+      <p:sp>
+        <p:nvSpPr>
+          <p:cNvPr id="33" name="Rounded Rectangle 32"/>
           <p:cNvSpPr/>
           <p:nvPr/>
         </p:nvSpPr>
         <p:spPr>
           <a:xfrm>
-            <a:off x="822960" y="4709160"/>
-            <a:ext cx="2542032" cy="457200"/>
+            <a:off x="822960" y="4297680"/>
+            <a:ext cx="10543032" cy="603504"/>
           </a:xfrm>
           <a:prstGeom prst="roundRect">
             <a:avLst>
@@ -8891,14 +9259,14 @@
       </p:sp>
       <p:sp>
         <p:nvSpPr>
-          <p:cNvPr id="26" name="TextBox 25"/>
-          <p:cNvSpPr txBox="1"/>
-          <p:nvPr/>
-        </p:nvSpPr>
-        <p:spPr>
-          <a:xfrm>
-            <a:off x="822960" y="4709160"/>
-            <a:ext cx="2542032" cy="457200"/>
+          <p:cNvPr id="34" name="TextBox 33"/>
+          <p:cNvSpPr txBox="1"/>
+          <p:nvPr/>
+        </p:nvSpPr>
+        <p:spPr>
+          <a:xfrm>
+            <a:off x="822960" y="4297680"/>
+            <a:ext cx="2633472" cy="603504"/>
           </a:xfrm>
           <a:prstGeom prst="rect">
             <a:avLst/>
@@ -8913,9 +9281,9 @@
           <a:p>
             <a:pPr algn="ctr"/>
             <a:r>
-              <a:rPr sz="1100" b="1" spc="-100">
-                <a:solidFill>
-                  <a:srgbClr val="141412"/>
+              <a:rPr sz="1200" b="1" spc="-100">
+                <a:solidFill>
+                  <a:srgbClr val="3D2B1B"/>
                 </a:solidFill>
                 <a:latin typeface="Pretendard"/>
                 <a:ea typeface="Pretendard"/>
@@ -8927,14 +9295,122 @@
       </p:sp>
       <p:sp>
         <p:nvSpPr>
-          <p:cNvPr id="27" name="Rounded Rectangle 26"/>
+          <p:cNvPr id="35" name="TextBox 34"/>
+          <p:cNvSpPr txBox="1"/>
+          <p:nvPr/>
+        </p:nvSpPr>
+        <p:spPr>
+          <a:xfrm>
+            <a:off x="3456432" y="4297680"/>
+            <a:ext cx="2633472" cy="603504"/>
+          </a:xfrm>
+          <a:prstGeom prst="rect">
+            <a:avLst/>
+          </a:prstGeom>
+          <a:noFill/>
+        </p:spPr>
+        <p:txBody>
+          <a:bodyPr wrap="square" anchor="ctr" lIns="0" rIns="0" tIns="0" bIns="0">
+            <a:spAutoFit/>
+          </a:bodyPr>
+          <a:lstStyle/>
+          <a:p>
+            <a:pPr algn="ctr"/>
+            <a:r>
+              <a:rPr sz="1200" b="1" spc="-100">
+                <a:solidFill>
+                  <a:srgbClr val="3D2B1B"/>
+                </a:solidFill>
+                <a:latin typeface="Pretendard"/>
+                <a:ea typeface="Pretendard"/>
+              </a:rPr>
+              <a:t>✓  검토 기간 단축</a:t>
+            </a:r>
+          </a:p>
+        </p:txBody>
+      </p:sp>
+      <p:sp>
+        <p:nvSpPr>
+          <p:cNvPr id="36" name="TextBox 35"/>
+          <p:cNvSpPr txBox="1"/>
+          <p:nvPr/>
+        </p:nvSpPr>
+        <p:spPr>
+          <a:xfrm>
+            <a:off x="6089904" y="4297680"/>
+            <a:ext cx="2633472" cy="603504"/>
+          </a:xfrm>
+          <a:prstGeom prst="rect">
+            <a:avLst/>
+          </a:prstGeom>
+          <a:noFill/>
+        </p:spPr>
+        <p:txBody>
+          <a:bodyPr wrap="square" anchor="ctr" lIns="0" rIns="0" tIns="0" bIns="0">
+            <a:spAutoFit/>
+          </a:bodyPr>
+          <a:lstStyle/>
+          <a:p>
+            <a:pPr algn="ctr"/>
+            <a:r>
+              <a:rPr sz="1200" b="1" spc="-100">
+                <a:solidFill>
+                  <a:srgbClr val="3D2B1B"/>
+                </a:solidFill>
+                <a:latin typeface="Pretendard"/>
+                <a:ea typeface="Pretendard"/>
+              </a:rPr>
+              <a:t>✓  표현 일관성 확보</a:t>
+            </a:r>
+          </a:p>
+        </p:txBody>
+      </p:sp>
+      <p:sp>
+        <p:nvSpPr>
+          <p:cNvPr id="37" name="TextBox 36"/>
+          <p:cNvSpPr txBox="1"/>
+          <p:nvPr/>
+        </p:nvSpPr>
+        <p:spPr>
+          <a:xfrm>
+            <a:off x="8723376" y="4297680"/>
+            <a:ext cx="2633472" cy="603504"/>
+          </a:xfrm>
+          <a:prstGeom prst="rect">
+            <a:avLst/>
+          </a:prstGeom>
+          <a:noFill/>
+        </p:spPr>
+        <p:txBody>
+          <a:bodyPr wrap="square" anchor="ctr" lIns="0" rIns="0" tIns="0" bIns="0">
+            <a:spAutoFit/>
+          </a:bodyPr>
+          <a:lstStyle/>
+          <a:p>
+            <a:pPr algn="ctr"/>
+            <a:r>
+              <a:rPr sz="1200" b="1" spc="-100">
+                <a:solidFill>
+                  <a:srgbClr val="3D2B1B"/>
+                </a:solidFill>
+                <a:latin typeface="Pretendard"/>
+                <a:ea typeface="Pretendard"/>
+              </a:rPr>
+              <a:t>✓  분류별 자동 분기</a:t>
+            </a:r>
+          </a:p>
+        </p:txBody>
+      </p:sp>
+      <p:sp>
+        <p:nvSpPr>
+          <p:cNvPr id="38" name="Rounded Rectangle 37"/>
           <p:cNvSpPr/>
           <p:nvPr/>
         </p:nvSpPr>
         <p:spPr>
           <a:xfrm>
-            <a:off x="3529584" y="4709160"/>
-            <a:ext cx="2542032" cy="457200"/>
+            <a:off x="822960" y="5120640"/>
+            <a:ext cx="5120640" cy="960120"/>
           </a:xfrm>
           <a:prstGeom prst="roundRect">
             <a:avLst>
@@ -8942,7 +9418,53 @@
             </a:avLst>
           </a:prstGeom>
           <a:solidFill>
-            <a:srgbClr val="F3F2E7"/>
+            <a:srgbClr val="FFFFFF"/>
+          </a:solidFill>
+          <a:ln w="12700">
+            <a:solidFill>
+              <a:srgbClr val="C9C4B8"/>
+            </a:solidFill>
+          </a:ln>
+          <a:effectLst/>
+        </p:spPr>
+        <p:style>
+          <a:lnRef idx="1">
+            <a:schemeClr val="accent1"/>
+          </a:lnRef>
+          <a:fillRef idx="3">
+            <a:schemeClr val="accent1"/>
+          </a:fillRef>
+          <a:effectRef idx="2">
+            <a:schemeClr val="accent1"/>
+          </a:effectRef>
+          <a:fontRef idx="minor">
+            <a:schemeClr val="lt1"/>
+          </a:fontRef>
+        </p:style>
+        <p:txBody>
+          <a:bodyPr rtlCol="0" anchor="ctr"/>
+          <a:lstStyle/>
+          <a:p>
+            <a:pPr algn="ctr"/>
+          </a:p>
+        </p:txBody>
+      </p:sp>
+      <p:sp>
+        <p:nvSpPr>
+          <p:cNvPr id="39" name="Rectangle 38"/>
+          <p:cNvSpPr/>
+          <p:nvPr/>
+        </p:nvSpPr>
+        <p:spPr>
+          <a:xfrm>
+            <a:off x="822960" y="5120640"/>
+            <a:ext cx="82296" cy="960120"/>
+          </a:xfrm>
+          <a:prstGeom prst="rect">
+            <a:avLst/>
+          </a:prstGeom>
+          <a:solidFill>
+            <a:srgbClr val="3D2B1B"/>
           </a:solidFill>
           <a:ln>
             <a:noFill/>
@@ -8973,14 +9495,50 @@
       </p:sp>
       <p:sp>
         <p:nvSpPr>
-          <p:cNvPr id="28" name="TextBox 27"/>
-          <p:cNvSpPr txBox="1"/>
-          <p:nvPr/>
-        </p:nvSpPr>
-        <p:spPr>
-          <a:xfrm>
-            <a:off x="3529584" y="4709160"/>
-            <a:ext cx="2542032" cy="457200"/>
+          <p:cNvPr id="40" name="TextBox 39"/>
+          <p:cNvSpPr txBox="1"/>
+          <p:nvPr/>
+        </p:nvSpPr>
+        <p:spPr>
+          <a:xfrm>
+            <a:off x="1115568" y="5230368"/>
+            <a:ext cx="4572000" cy="274320"/>
+          </a:xfrm>
+          <a:prstGeom prst="rect">
+            <a:avLst/>
+          </a:prstGeom>
+          <a:noFill/>
+        </p:spPr>
+        <p:txBody>
+          <a:bodyPr wrap="square" anchor="t" lIns="0" rIns="0" tIns="0" bIns="0">
+            <a:spAutoFit/>
+          </a:bodyPr>
+          <a:lstStyle/>
+          <a:p>
+            <a:pPr algn="l"/>
+            <a:r>
+              <a:rPr sz="1250" b="1" spc="-100">
+                <a:solidFill>
+                  <a:srgbClr val="3D2B1B"/>
+                </a:solidFill>
+                <a:latin typeface="Pretendard"/>
+                <a:ea typeface="Pretendard"/>
+              </a:rPr>
+              <a:t>일반식품</a:t>
+            </a:r>
+          </a:p>
+        </p:txBody>
+      </p:sp>
+      <p:sp>
+        <p:nvSpPr>
+          <p:cNvPr id="41" name="TextBox 40"/>
+          <p:cNvSpPr txBox="1"/>
+          <p:nvPr/>
+        </p:nvSpPr>
+        <p:spPr>
+          <a:xfrm>
+            <a:off x="2651760" y="5248656"/>
+            <a:ext cx="3108960" cy="256032"/>
           </a:xfrm>
           <a:prstGeom prst="rect">
             <a:avLst/>
@@ -8993,30 +9551,66 @@
           </a:bodyPr>
           <a:lstStyle/>
           <a:p>
-            <a:pPr algn="ctr"/>
-            <a:r>
-              <a:rPr sz="1100" b="1" spc="-100">
+            <a:pPr algn="l"/>
+            <a:r>
+              <a:rPr sz="900" b="1" spc="-100">
                 <a:solidFill>
                   <a:srgbClr val="141412"/>
                 </a:solidFill>
                 <a:latin typeface="Pretendard"/>
                 <a:ea typeface="Pretendard"/>
               </a:rPr>
-              <a:t>✓  검토 기간 단축</a:t>
-            </a:r>
-          </a:p>
-        </p:txBody>
-      </p:sp>
-      <p:sp>
-        <p:nvSpPr>
-          <p:cNvPr id="29" name="Rounded Rectangle 28"/>
+              <a:t>올리브오일 · 멜라나잇 · 콜라겐</a:t>
+            </a:r>
+          </a:p>
+        </p:txBody>
+      </p:sp>
+      <p:sp>
+        <p:nvSpPr>
+          <p:cNvPr id="42" name="TextBox 41"/>
+          <p:cNvSpPr txBox="1"/>
+          <p:nvPr/>
+        </p:nvSpPr>
+        <p:spPr>
+          <a:xfrm>
+            <a:off x="1115568" y="5559552"/>
+            <a:ext cx="4572000" cy="457200"/>
+          </a:xfrm>
+          <a:prstGeom prst="rect">
+            <a:avLst/>
+          </a:prstGeom>
+          <a:noFill/>
+        </p:spPr>
+        <p:txBody>
+          <a:bodyPr wrap="square" anchor="t" lIns="0" rIns="0" tIns="0" bIns="0">
+            <a:spAutoFit/>
+          </a:bodyPr>
+          <a:lstStyle/>
+          <a:p>
+            <a:pPr algn="l"/>
+            <a:r>
+              <a:rPr sz="950" b="0" spc="-100">
+                <a:solidFill>
+                  <a:srgbClr val="868680"/>
+                </a:solidFill>
+                <a:latin typeface="Pretendard"/>
+                <a:ea typeface="Pretendard"/>
+              </a:rPr>
+              <a:t>질병·신체기능·건강 효능 표현 전면 금지 → 원료·맛·편의·무드 앵글만 사용</a:t>
+            </a:r>
+          </a:p>
+        </p:txBody>
+      </p:sp>
+      <p:sp>
+        <p:nvSpPr>
+          <p:cNvPr id="43" name="Rounded Rectangle 42"/>
           <p:cNvSpPr/>
           <p:nvPr/>
         </p:nvSpPr>
         <p:spPr>
           <a:xfrm>
-            <a:off x="6236208" y="4709160"/>
-            <a:ext cx="2542032" cy="457200"/>
+            <a:off x="6245352" y="5120640"/>
+            <a:ext cx="5120640" cy="960120"/>
           </a:xfrm>
           <a:prstGeom prst="roundRect">
             <a:avLst>
@@ -9024,7 +9618,53 @@
             </a:avLst>
           </a:prstGeom>
           <a:solidFill>
-            <a:srgbClr val="F3F2E7"/>
+            <a:srgbClr val="FFFFFF"/>
+          </a:solidFill>
+          <a:ln w="12700">
+            <a:solidFill>
+              <a:srgbClr val="C9C4B8"/>
+            </a:solidFill>
+          </a:ln>
+          <a:effectLst/>
+        </p:spPr>
+        <p:style>
+          <a:lnRef idx="1">
+            <a:schemeClr val="accent1"/>
+          </a:lnRef>
+          <a:fillRef idx="3">
+            <a:schemeClr val="accent1"/>
+          </a:fillRef>
+          <a:effectRef idx="2">
+            <a:schemeClr val="accent1"/>
+          </a:effectRef>
+          <a:fontRef idx="minor">
+            <a:schemeClr val="lt1"/>
+          </a:fontRef>
+        </p:style>
+        <p:txBody>
+          <a:bodyPr rtlCol="0" anchor="ctr"/>
+          <a:lstStyle/>
+          <a:p>
+            <a:pPr algn="ctr"/>
+          </a:p>
+        </p:txBody>
+      </p:sp>
+      <p:sp>
+        <p:nvSpPr>
+          <p:cNvPr id="44" name="Rectangle 43"/>
+          <p:cNvSpPr/>
+          <p:nvPr/>
+        </p:nvSpPr>
+        <p:spPr>
+          <a:xfrm>
+            <a:off x="6245352" y="5120640"/>
+            <a:ext cx="82296" cy="960120"/>
+          </a:xfrm>
+          <a:prstGeom prst="rect">
+            <a:avLst/>
+          </a:prstGeom>
+          <a:solidFill>
+            <a:srgbClr val="3D2B1B"/>
           </a:solidFill>
           <a:ln>
             <a:noFill/>
@@ -9055,14 +9695,50 @@
       </p:sp>
       <p:sp>
         <p:nvSpPr>
-          <p:cNvPr id="30" name="TextBox 29"/>
-          <p:cNvSpPr txBox="1"/>
-          <p:nvPr/>
-        </p:nvSpPr>
-        <p:spPr>
-          <a:xfrm>
-            <a:off x="6236208" y="4709160"/>
-            <a:ext cx="2542032" cy="457200"/>
+          <p:cNvPr id="45" name="TextBox 44"/>
+          <p:cNvSpPr txBox="1"/>
+          <p:nvPr/>
+        </p:nvSpPr>
+        <p:spPr>
+          <a:xfrm>
+            <a:off x="6537960" y="5230368"/>
+            <a:ext cx="4572000" cy="274320"/>
+          </a:xfrm>
+          <a:prstGeom prst="rect">
+            <a:avLst/>
+          </a:prstGeom>
+          <a:noFill/>
+        </p:spPr>
+        <p:txBody>
+          <a:bodyPr wrap="square" anchor="t" lIns="0" rIns="0" tIns="0" bIns="0">
+            <a:spAutoFit/>
+          </a:bodyPr>
+          <a:lstStyle/>
+          <a:p>
+            <a:pPr algn="l"/>
+            <a:r>
+              <a:rPr sz="1250" b="1" spc="-100">
+                <a:solidFill>
+                  <a:srgbClr val="3D2B1B"/>
+                </a:solidFill>
+                <a:latin typeface="Pretendard"/>
+                <a:ea typeface="Pretendard"/>
+              </a:rPr>
+              <a:t>건강기능식품</a:t>
+            </a:r>
+          </a:p>
+        </p:txBody>
+      </p:sp>
+      <p:sp>
+        <p:nvSpPr>
+          <p:cNvPr id="46" name="TextBox 45"/>
+          <p:cNvSpPr txBox="1"/>
+          <p:nvPr/>
+        </p:nvSpPr>
+        <p:spPr>
+          <a:xfrm>
+            <a:off x="8074152" y="5248656"/>
+            <a:ext cx="3108960" cy="256032"/>
           </a:xfrm>
           <a:prstGeom prst="rect">
             <a:avLst/>
@@ -9075,112 +9751,30 @@
           </a:bodyPr>
           <a:lstStyle/>
           <a:p>
-            <a:pPr algn="ctr"/>
-            <a:r>
-              <a:rPr sz="1100" b="1" spc="-100">
+            <a:pPr algn="l"/>
+            <a:r>
+              <a:rPr sz="900" b="1" spc="-100">
                 <a:solidFill>
                   <a:srgbClr val="141412"/>
                 </a:solidFill>
                 <a:latin typeface="Pretendard"/>
                 <a:ea typeface="Pretendard"/>
               </a:rPr>
-              <a:t>✓  표현 일관성 확보</a:t>
-            </a:r>
-          </a:p>
-        </p:txBody>
-      </p:sp>
-      <p:sp>
-        <p:nvSpPr>
-          <p:cNvPr id="31" name="Rounded Rectangle 30"/>
-          <p:cNvSpPr/>
-          <p:nvPr/>
-        </p:nvSpPr>
-        <p:spPr>
-          <a:xfrm>
-            <a:off x="8942832" y="4709160"/>
-            <a:ext cx="2542032" cy="457200"/>
-          </a:xfrm>
-          <a:prstGeom prst="roundRect">
-            <a:avLst>
-              <a:gd name="adj" fmla="val 8000"/>
-            </a:avLst>
-          </a:prstGeom>
-          <a:solidFill>
-            <a:srgbClr val="F3F2E7"/>
-          </a:solidFill>
-          <a:ln>
-            <a:noFill/>
-          </a:ln>
-          <a:effectLst/>
-        </p:spPr>
-        <p:style>
-          <a:lnRef idx="1">
-            <a:schemeClr val="accent1"/>
-          </a:lnRef>
-          <a:fillRef idx="3">
-            <a:schemeClr val="accent1"/>
-          </a:fillRef>
-          <a:effectRef idx="2">
-            <a:schemeClr val="accent1"/>
-          </a:effectRef>
-          <a:fontRef idx="minor">
-            <a:schemeClr val="lt1"/>
-          </a:fontRef>
-        </p:style>
-        <p:txBody>
-          <a:bodyPr rtlCol="0" anchor="ctr"/>
-          <a:lstStyle/>
-          <a:p>
-            <a:pPr algn="ctr"/>
-          </a:p>
-        </p:txBody>
-      </p:sp>
-      <p:sp>
-        <p:nvSpPr>
-          <p:cNvPr id="32" name="TextBox 31"/>
-          <p:cNvSpPr txBox="1"/>
-          <p:nvPr/>
-        </p:nvSpPr>
-        <p:spPr>
-          <a:xfrm>
-            <a:off x="8942832" y="4709160"/>
-            <a:ext cx="2542032" cy="457200"/>
-          </a:xfrm>
-          <a:prstGeom prst="rect">
-            <a:avLst/>
-          </a:prstGeom>
-          <a:noFill/>
-        </p:spPr>
-        <p:txBody>
-          <a:bodyPr wrap="square" anchor="ctr" lIns="0" rIns="0" tIns="0" bIns="0">
-            <a:spAutoFit/>
-          </a:bodyPr>
-          <a:lstStyle/>
-          <a:p>
-            <a:pPr algn="ctr"/>
-            <a:r>
-              <a:rPr sz="1100" b="1" spc="-100">
-                <a:solidFill>
-                  <a:srgbClr val="141412"/>
-                </a:solidFill>
-                <a:latin typeface="Pretendard"/>
-                <a:ea typeface="Pretendard"/>
-              </a:rPr>
-              <a:t>✓  분류별 자동 분기</a:t>
-            </a:r>
-          </a:p>
-        </p:txBody>
-      </p:sp>
-      <p:sp>
-        <p:nvSpPr>
-          <p:cNvPr id="33" name="TextBox 32"/>
-          <p:cNvSpPr txBox="1"/>
-          <p:nvPr/>
-        </p:nvSpPr>
-        <p:spPr>
-          <a:xfrm>
-            <a:off x="822960" y="5440680"/>
-            <a:ext cx="10515600" cy="365760"/>
+              <a:t>루테인·바나바잎·올인원·철분·비타민C·비오틴</a:t>
+            </a:r>
+          </a:p>
+        </p:txBody>
+      </p:sp>
+      <p:sp>
+        <p:nvSpPr>
+          <p:cNvPr id="47" name="TextBox 46"/>
+          <p:cNvSpPr txBox="1"/>
+          <p:nvPr/>
+        </p:nvSpPr>
+        <p:spPr>
+          <a:xfrm>
+            <a:off x="6537960" y="5559552"/>
+            <a:ext cx="4572000" cy="457200"/>
           </a:xfrm>
           <a:prstGeom prst="rect">
             <a:avLst/>
@@ -9195,28 +9789,28 @@
           <a:p>
             <a:pPr algn="l"/>
             <a:r>
-              <a:rPr sz="1250" b="1" spc="-100">
-                <a:solidFill>
-                  <a:srgbClr val="141412"/>
-                </a:solidFill>
-                <a:latin typeface="Pretendard"/>
-                <a:ea typeface="Pretendard"/>
-              </a:rPr>
-              <a:t>제품 분류별 원칙</a:t>
-            </a:r>
-          </a:p>
-        </p:txBody>
-      </p:sp>
-      <p:sp>
-        <p:nvSpPr>
-          <p:cNvPr id="34" name="TextBox 33"/>
-          <p:cNvSpPr txBox="1"/>
-          <p:nvPr/>
-        </p:nvSpPr>
-        <p:spPr>
-          <a:xfrm>
-            <a:off x="822960" y="5779008"/>
-            <a:ext cx="5212080" cy="731520"/>
+              <a:rPr sz="950" b="0" spc="-100">
+                <a:solidFill>
+                  <a:srgbClr val="868680"/>
+                </a:solidFill>
+                <a:latin typeface="Pretendard"/>
+                <a:ea typeface="Pretendard"/>
+              </a:rPr>
+              <a:t>인정 기능성 문구 그대로만 · 의약품 오인·과장·체험 단정 금지 · 자율심의 대상</a:t>
+            </a:r>
+          </a:p>
+        </p:txBody>
+      </p:sp>
+      <p:sp>
+        <p:nvSpPr>
+          <p:cNvPr id="48" name="TextBox 47"/>
+          <p:cNvSpPr txBox="1"/>
+          <p:nvPr/>
+        </p:nvSpPr>
+        <p:spPr>
+          <a:xfrm>
+            <a:off x="822960" y="6199632"/>
+            <a:ext cx="10543032" cy="274320"/>
           </a:xfrm>
           <a:prstGeom prst="rect">
             <a:avLst/>
@@ -9231,93 +9825,21 @@
           <a:p>
             <a:pPr algn="l"/>
             <a:r>
-              <a:rPr sz="1000" b="0" spc="-100">
+              <a:rPr sz="850" b="0" spc="-100">
                 <a:solidFill>
                   <a:srgbClr val="868680"/>
                 </a:solidFill>
                 <a:latin typeface="Pretendard"/>
                 <a:ea typeface="Pretendard"/>
               </a:rPr>
-              <a:t>일반식품 (올리브오일·멜라나잇·콜라겐) — 질병·기능 표현 전면 금지, 원료·맛·편의·무드 앵글만</a:t>
-            </a:r>
-          </a:p>
-        </p:txBody>
-      </p:sp>
-      <p:sp>
-        <p:nvSpPr>
-          <p:cNvPr id="35" name="TextBox 34"/>
-          <p:cNvSpPr txBox="1"/>
-          <p:nvPr/>
-        </p:nvSpPr>
-        <p:spPr>
-          <a:xfrm>
-            <a:off x="6217920" y="5779008"/>
-            <a:ext cx="5120640" cy="731520"/>
-          </a:xfrm>
-          <a:prstGeom prst="rect">
-            <a:avLst/>
-          </a:prstGeom>
-          <a:noFill/>
-        </p:spPr>
-        <p:txBody>
-          <a:bodyPr wrap="square" anchor="t" lIns="0" rIns="0" tIns="0" bIns="0">
-            <a:spAutoFit/>
-          </a:bodyPr>
-          <a:lstStyle/>
-          <a:p>
-            <a:pPr algn="l"/>
-            <a:r>
-              <a:rPr sz="1000" b="0" spc="-100">
-                <a:solidFill>
-                  <a:srgbClr val="868680"/>
-                </a:solidFill>
-                <a:latin typeface="Pretendard"/>
-                <a:ea typeface="Pretendard"/>
-              </a:rPr>
-              <a:t>건강기능식품 (루테인·바나바잎) — 인정 기능성 문구 그대로, 과장·체험 단정 금지·자율심의</a:t>
-            </a:r>
-          </a:p>
-        </p:txBody>
-      </p:sp>
-      <p:sp>
-        <p:nvSpPr>
-          <p:cNvPr id="36" name="TextBox 35"/>
-          <p:cNvSpPr txBox="1"/>
-          <p:nvPr/>
-        </p:nvSpPr>
-        <p:spPr>
-          <a:xfrm>
-            <a:off x="822960" y="6537960"/>
-            <a:ext cx="10543032" cy="274320"/>
-          </a:xfrm>
-          <a:prstGeom prst="rect">
-            <a:avLst/>
-          </a:prstGeom>
-          <a:noFill/>
-        </p:spPr>
-        <p:txBody>
-          <a:bodyPr wrap="square" anchor="t" lIns="0" rIns="0" tIns="0" bIns="0">
-            <a:spAutoFit/>
-          </a:bodyPr>
-          <a:lstStyle/>
-          <a:p>
-            <a:pPr algn="l"/>
-            <a:r>
-              <a:rPr sz="850" b="0" spc="-100">
-                <a:solidFill>
-                  <a:srgbClr val="868680"/>
-                </a:solidFill>
-                <a:latin typeface="Pretendard"/>
-                <a:ea typeface="Pretendard"/>
-              </a:rPr>
-              <a:t>근거 — 식품 등의 표시·광고에 관한 법률 · 한국건강기능식품협회 자율심의 · 공정위 추천·보증 심사지침(유료광고·협찬 표시)</a:t>
-            </a:r>
-          </a:p>
-        </p:txBody>
-      </p:sp>
-      <p:sp>
-        <p:nvSpPr>
-          <p:cNvPr id="37" name="TextBox 36"/>
+              <a:t>근거 — 식품 등의 표시·광고에 관한 법률 · 한국건강기능식품협회 자율심의 · 공정위 추천·보증 심사지침</a:t>
+            </a:r>
+          </a:p>
+        </p:txBody>
+      </p:sp>
+      <p:sp>
+        <p:nvSpPr>
+          <p:cNvPr id="49" name="TextBox 48"/>
           <p:cNvSpPr txBox="1"/>
           <p:nvPr/>
         </p:nvSpPr>
@@ -9518,7 +10040,7 @@
                 <a:latin typeface="Pretendard"/>
                 <a:ea typeface="Pretendard"/>
               </a:rPr>
-              <a:t>위험 표현(❌)을 안전 표현(✅)으로 — AI 1차, 사람 최종</a:t>
+              <a:t>위험 표현(❌)을 안전 표현(✅)으로 — Claude AI 1차, 사람 최종</a:t>
             </a:r>
           </a:p>
         </p:txBody>
@@ -9532,8 +10054,8 @@
           <p:nvPr/>
         </p:nvGraphicFramePr>
         <p:xfrm>
-          <a:off x="822960" y="2103120"/>
-          <a:ext cx="6400798" cy="3017520"/>
+          <a:off x="822960" y="2240280"/>
+          <a:ext cx="6400800" cy="3703320"/>
         </p:xfrm>
         <a:graphic>
           <a:graphicData uri="http://schemas.openxmlformats.org/drawingml/2006/table">
@@ -9543,10 +10065,10 @@
               </a:tblPr>
               <a:tblGrid>
                 <a:gridCol w="1727200"/>
-                <a:gridCol w="2031999"/>
-                <a:gridCol w="2641599"/>
+                <a:gridCol w="2133600"/>
+                <a:gridCol w="2540000"/>
               </a:tblGrid>
-              <a:tr h="502920">
+              <a:tr h="370332">
                 <a:tc>
                   <a:txBody>
                     <a:bodyPr wrap="square"/>
@@ -9585,7 +10107,7 @@
                           <a:latin typeface="Pretendard"/>
                           <a:ea typeface="Pretendard"/>
                         </a:rPr>
-                        <a:t>❌ 위험</a:t>
+                        <a:t>❌ 위험 표현</a:t>
                       </a:r>
                     </a:p>
                   </a:txBody>
@@ -9609,7 +10131,7 @@
                           <a:latin typeface="Pretendard"/>
                           <a:ea typeface="Pretendard"/>
                         </a:rPr>
-                        <a:t>✅ 안전</a:t>
+                        <a:t>✅ 안전 표현</a:t>
                       </a:r>
                     </a:p>
                   </a:txBody>
@@ -9620,7 +10142,7 @@
                   </a:tcPr>
                 </a:tc>
               </a:tr>
-              <a:tr h="502920">
+              <a:tr h="370332">
                 <a:tc>
                   <a:txBody>
                     <a:bodyPr wrap="square"/>
@@ -9694,7 +10216,7 @@
                   </a:tcPr>
                 </a:tc>
               </a:tr>
-              <a:tr h="502920">
+              <a:tr h="370332">
                 <a:tc>
                   <a:txBody>
                     <a:bodyPr wrap="square"/>
@@ -9733,7 +10255,7 @@
                           <a:latin typeface="Pretendard"/>
                           <a:ea typeface="Pretendard"/>
                         </a:rPr>
-                        <a:t>숙면 젤리/잠 잘 오는</a:t>
+                        <a:t>숙면 젤리 / 잠 잘 오는</a:t>
                       </a:r>
                     </a:p>
                   </a:txBody>
@@ -9757,7 +10279,7 @@
                           <a:latin typeface="Pretendard"/>
                           <a:ea typeface="Pretendard"/>
                         </a:rPr>
-                        <a:t>자기 전 리추얼/하루 마무리 한 알</a:t>
+                        <a:t>자기 전 리추얼 / 하루 마무리 한 알</a:t>
                       </a:r>
                     </a:p>
                   </a:txBody>
@@ -9768,7 +10290,7 @@
                   </a:tcPr>
                 </a:tc>
               </a:tr>
-              <a:tr h="502920">
+              <a:tr h="370332">
                 <a:tc>
                   <a:txBody>
                     <a:bodyPr wrap="square"/>
@@ -9842,7 +10364,155 @@
                   </a:tcPr>
                 </a:tc>
               </a:tr>
-              <a:tr h="502920">
+              <a:tr h="370332">
+                <a:tc>
+                  <a:txBody>
+                    <a:bodyPr wrap="square"/>
+                    <a:lstStyle/>
+                    <a:p>
+                      <a:pPr algn="l"/>
+                      <a:r>
+                        <a:rPr sz="900" b="0" spc="-100">
+                          <a:solidFill>
+                            <a:srgbClr val="141412"/>
+                          </a:solidFill>
+                          <a:latin typeface="Pretendard"/>
+                          <a:ea typeface="Pretendard"/>
+                        </a:rPr>
+                        <a:t>올인원 (건기식)</a:t>
+                      </a:r>
+                    </a:p>
+                  </a:txBody>
+                  <a:tcPr marL="63500" marR="63500" marT="25400" marB="25400" anchor="ctr">
+                    <a:solidFill>
+                      <a:srgbClr val="F3F2E7"/>
+                    </a:solidFill>
+                  </a:tcPr>
+                </a:tc>
+                <a:tc>
+                  <a:txBody>
+                    <a:bodyPr wrap="square"/>
+                    <a:lstStyle/>
+                    <a:p>
+                      <a:pPr algn="l"/>
+                      <a:r>
+                        <a:rPr sz="900" b="0" spc="-100">
+                          <a:solidFill>
+                            <a:srgbClr val="141412"/>
+                          </a:solidFill>
+                          <a:latin typeface="Pretendard"/>
+                          <a:ea typeface="Pretendard"/>
+                        </a:rPr>
+                        <a:t>이거 하나면 영양 끝</a:t>
+                      </a:r>
+                    </a:p>
+                  </a:txBody>
+                  <a:tcPr marL="63500" marR="63500" marT="25400" marB="25400" anchor="ctr">
+                    <a:solidFill>
+                      <a:srgbClr val="F3F2E7"/>
+                    </a:solidFill>
+                  </a:tcPr>
+                </a:tc>
+                <a:tc>
+                  <a:txBody>
+                    <a:bodyPr wrap="square"/>
+                    <a:lstStyle/>
+                    <a:p>
+                      <a:pPr algn="l"/>
+                      <a:r>
+                        <a:rPr sz="900" b="0" spc="-100">
+                          <a:solidFill>
+                            <a:srgbClr val="141412"/>
+                          </a:solidFill>
+                          <a:latin typeface="Pretendard"/>
+                          <a:ea typeface="Pretendard"/>
+                        </a:rPr>
+                        <a:t>영양제 여러 통 대신 하루 두 알</a:t>
+                      </a:r>
+                    </a:p>
+                  </a:txBody>
+                  <a:tcPr marL="63500" marR="63500" marT="25400" marB="25400" anchor="ctr">
+                    <a:solidFill>
+                      <a:srgbClr val="F3F2E7"/>
+                    </a:solidFill>
+                  </a:tcPr>
+                </a:tc>
+              </a:tr>
+              <a:tr h="370332">
+                <a:tc>
+                  <a:txBody>
+                    <a:bodyPr wrap="square"/>
+                    <a:lstStyle/>
+                    <a:p>
+                      <a:pPr algn="l"/>
+                      <a:r>
+                        <a:rPr sz="900" b="0" spc="-100">
+                          <a:solidFill>
+                            <a:srgbClr val="141412"/>
+                          </a:solidFill>
+                          <a:latin typeface="Pretendard"/>
+                          <a:ea typeface="Pretendard"/>
+                        </a:rPr>
+                        <a:t>철분 (건기식)</a:t>
+                      </a:r>
+                    </a:p>
+                  </a:txBody>
+                  <a:tcPr marL="63500" marR="63500" marT="25400" marB="25400" anchor="ctr">
+                    <a:solidFill>
+                      <a:srgbClr val="FFFFFF"/>
+                    </a:solidFill>
+                  </a:tcPr>
+                </a:tc>
+                <a:tc>
+                  <a:txBody>
+                    <a:bodyPr wrap="square"/>
+                    <a:lstStyle/>
+                    <a:p>
+                      <a:pPr algn="l"/>
+                      <a:r>
+                        <a:rPr sz="900" b="0" spc="-100">
+                          <a:solidFill>
+                            <a:srgbClr val="141412"/>
+                          </a:solidFill>
+                          <a:latin typeface="Pretendard"/>
+                          <a:ea typeface="Pretendard"/>
+                        </a:rPr>
+                        <a:t>빈혈 치료 / 피 만드는</a:t>
+                      </a:r>
+                    </a:p>
+                  </a:txBody>
+                  <a:tcPr marL="63500" marR="63500" marT="25400" marB="25400" anchor="ctr">
+                    <a:solidFill>
+                      <a:srgbClr val="FFFFFF"/>
+                    </a:solidFill>
+                  </a:tcPr>
+                </a:tc>
+                <a:tc>
+                  <a:txBody>
+                    <a:bodyPr wrap="square"/>
+                    <a:lstStyle/>
+                    <a:p>
+                      <a:pPr algn="l"/>
+                      <a:r>
+                        <a:rPr sz="900" b="0" spc="-100">
+                          <a:solidFill>
+                            <a:srgbClr val="141412"/>
+                          </a:solidFill>
+                          <a:latin typeface="Pretendard"/>
+                          <a:ea typeface="Pretendard"/>
+                        </a:rPr>
+                        <a:t>철분, 혈액 생성에 필요</a:t>
+                      </a:r>
+                    </a:p>
+                  </a:txBody>
+                  <a:tcPr marL="63500" marR="63500" marT="25400" marB="25400" anchor="ctr">
+                    <a:solidFill>
+                      <a:srgbClr val="FFFFFF"/>
+                    </a:solidFill>
+                  </a:tcPr>
+                </a:tc>
+              </a:tr>
+              <a:tr h="370332">
                 <a:tc>
                   <a:txBody>
                     <a:bodyPr wrap="square"/>
@@ -9916,7 +10586,7 @@
                   </a:tcPr>
                 </a:tc>
               </a:tr>
-              <a:tr h="502920">
+              <a:tr h="370332">
                 <a:tc>
                   <a:txBody>
                     <a:bodyPr wrap="square"/>
@@ -9931,7 +10601,7 @@
                           <a:latin typeface="Pretendard"/>
                           <a:ea typeface="Pretendard"/>
                         </a:rPr>
-                        <a:t>바나바잎 (건기식)</a:t>
+                        <a:t>비타민C (건기식)</a:t>
                       </a:r>
                     </a:p>
                   </a:txBody>
@@ -9955,7 +10625,7 @@
                           <a:latin typeface="Pretendard"/>
                           <a:ea typeface="Pretendard"/>
                         </a:rPr>
-                        <a:t>혈당 낮추는/당뇨에</a:t>
+                        <a:t>감기 예방 / 면역력 올리는</a:t>
                       </a:r>
                     </a:p>
                   </a:txBody>
@@ -9979,7 +10649,155 @@
                           <a:latin typeface="Pretendard"/>
                           <a:ea typeface="Pretendard"/>
                         </a:rPr>
+                        <a:t>비타민C, 항산화에 도움</a:t>
+                      </a:r>
+                    </a:p>
+                  </a:txBody>
+                  <a:tcPr marL="63500" marR="63500" marT="25400" marB="25400" anchor="ctr">
+                    <a:solidFill>
+                      <a:srgbClr val="FFFFFF"/>
+                    </a:solidFill>
+                  </a:tcPr>
+                </a:tc>
+              </a:tr>
+              <a:tr h="370332">
+                <a:tc>
+                  <a:txBody>
+                    <a:bodyPr wrap="square"/>
+                    <a:lstStyle/>
+                    <a:p>
+                      <a:pPr algn="l"/>
+                      <a:r>
+                        <a:rPr sz="900" b="0" spc="-100">
+                          <a:solidFill>
+                            <a:srgbClr val="141412"/>
+                          </a:solidFill>
+                          <a:latin typeface="Pretendard"/>
+                          <a:ea typeface="Pretendard"/>
+                        </a:rPr>
+                        <a:t>바나바잎 (건기식)</a:t>
+                      </a:r>
+                    </a:p>
+                  </a:txBody>
+                  <a:tcPr marL="63500" marR="63500" marT="25400" marB="25400" anchor="ctr">
+                    <a:solidFill>
+                      <a:srgbClr val="F3F2E7"/>
+                    </a:solidFill>
+                  </a:tcPr>
+                </a:tc>
+                <a:tc>
+                  <a:txBody>
+                    <a:bodyPr wrap="square"/>
+                    <a:lstStyle/>
+                    <a:p>
+                      <a:pPr algn="l"/>
+                      <a:r>
+                        <a:rPr sz="900" b="0" spc="-100">
+                          <a:solidFill>
+                            <a:srgbClr val="141412"/>
+                          </a:solidFill>
+                          <a:latin typeface="Pretendard"/>
+                          <a:ea typeface="Pretendard"/>
+                        </a:rPr>
+                        <a:t>혈당 낮추는 / 당뇨에</a:t>
+                      </a:r>
+                    </a:p>
+                  </a:txBody>
+                  <a:tcPr marL="63500" marR="63500" marT="25400" marB="25400" anchor="ctr">
+                    <a:solidFill>
+                      <a:srgbClr val="F3F2E7"/>
+                    </a:solidFill>
+                  </a:tcPr>
+                </a:tc>
+                <a:tc>
+                  <a:txBody>
+                    <a:bodyPr wrap="square"/>
+                    <a:lstStyle/>
+                    <a:p>
+                      <a:pPr algn="l"/>
+                      <a:r>
+                        <a:rPr sz="900" b="0" spc="-100">
+                          <a:solidFill>
+                            <a:srgbClr val="141412"/>
+                          </a:solidFill>
+                          <a:latin typeface="Pretendard"/>
+                          <a:ea typeface="Pretendard"/>
+                        </a:rPr>
                         <a:t>식후 혈당 상승 억제에 도움</a:t>
+                      </a:r>
+                    </a:p>
+                  </a:txBody>
+                  <a:tcPr marL="63500" marR="63500" marT="25400" marB="25400" anchor="ctr">
+                    <a:solidFill>
+                      <a:srgbClr val="F3F2E7"/>
+                    </a:solidFill>
+                  </a:tcPr>
+                </a:tc>
+              </a:tr>
+              <a:tr h="370332">
+                <a:tc>
+                  <a:txBody>
+                    <a:bodyPr wrap="square"/>
+                    <a:lstStyle/>
+                    <a:p>
+                      <a:pPr algn="l"/>
+                      <a:r>
+                        <a:rPr sz="900" b="0" spc="-100">
+                          <a:solidFill>
+                            <a:srgbClr val="141412"/>
+                          </a:solidFill>
+                          <a:latin typeface="Pretendard"/>
+                          <a:ea typeface="Pretendard"/>
+                        </a:rPr>
+                        <a:t>비오틴 (건기식)</a:t>
+                      </a:r>
+                    </a:p>
+                  </a:txBody>
+                  <a:tcPr marL="63500" marR="63500" marT="25400" marB="25400" anchor="ctr">
+                    <a:solidFill>
+                      <a:srgbClr val="FFFFFF"/>
+                    </a:solidFill>
+                  </a:tcPr>
+                </a:tc>
+                <a:tc>
+                  <a:txBody>
+                    <a:bodyPr wrap="square"/>
+                    <a:lstStyle/>
+                    <a:p>
+                      <a:pPr algn="l"/>
+                      <a:r>
+                        <a:rPr sz="900" b="0" spc="-100">
+                          <a:solidFill>
+                            <a:srgbClr val="141412"/>
+                          </a:solidFill>
+                          <a:latin typeface="Pretendard"/>
+                          <a:ea typeface="Pretendard"/>
+                        </a:rPr>
+                        <a:t>탈모 치료 / 머리 나는</a:t>
+                      </a:r>
+                    </a:p>
+                  </a:txBody>
+                  <a:tcPr marL="63500" marR="63500" marT="25400" marB="25400" anchor="ctr">
+                    <a:solidFill>
+                      <a:srgbClr val="FFFFFF"/>
+                    </a:solidFill>
+                  </a:tcPr>
+                </a:tc>
+                <a:tc>
+                  <a:txBody>
+                    <a:bodyPr wrap="square"/>
+                    <a:lstStyle/>
+                    <a:p>
+                      <a:pPr algn="l"/>
+                      <a:r>
+                        <a:rPr sz="900" b="0" spc="-100">
+                          <a:solidFill>
+                            <a:srgbClr val="141412"/>
+                          </a:solidFill>
+                          <a:latin typeface="Pretendard"/>
+                          <a:ea typeface="Pretendard"/>
+                        </a:rPr>
+                        <a:t>비오틴, 모발·손발톱 건강에 필요</a:t>
                       </a:r>
                     </a:p>
                   </a:txBody>
@@ -10002,8 +10820,8 @@
         </p:nvSpPr>
         <p:spPr>
           <a:xfrm>
-            <a:off x="7498079" y="2103120"/>
-            <a:ext cx="3840480" cy="310896"/>
+            <a:off x="7498079" y="2240280"/>
+            <a:ext cx="3840480" cy="329184"/>
           </a:xfrm>
           <a:prstGeom prst="rect">
             <a:avLst/>
@@ -10018,6 +10836,720 @@
           <a:p>
             <a:pPr algn="l"/>
             <a:r>
+              <a:rPr sz="1300" b="1" spc="-100">
+                <a:solidFill>
+                  <a:srgbClr val="141412"/>
+                </a:solidFill>
+                <a:latin typeface="Pretendard"/>
+                <a:ea typeface="Pretendard"/>
+              </a:rPr>
+              <a:t>송출 전 필수 체크리스트</a:t>
+            </a:r>
+          </a:p>
+        </p:txBody>
+      </p:sp>
+      <p:sp>
+        <p:nvSpPr>
+          <p:cNvPr id="8" name="Rounded Rectangle 7"/>
+          <p:cNvSpPr/>
+          <p:nvPr/>
+        </p:nvSpPr>
+        <p:spPr>
+          <a:xfrm>
+            <a:off x="7498079" y="2670048"/>
+            <a:ext cx="3840480" cy="603504"/>
+          </a:xfrm>
+          <a:prstGeom prst="roundRect">
+            <a:avLst>
+              <a:gd name="adj" fmla="val 8000"/>
+            </a:avLst>
+          </a:prstGeom>
+          <a:solidFill>
+            <a:srgbClr val="F3F2E7"/>
+          </a:solidFill>
+          <a:ln>
+            <a:noFill/>
+          </a:ln>
+          <a:effectLst/>
+        </p:spPr>
+        <p:style>
+          <a:lnRef idx="1">
+            <a:schemeClr val="accent1"/>
+          </a:lnRef>
+          <a:fillRef idx="3">
+            <a:schemeClr val="accent1"/>
+          </a:fillRef>
+          <a:effectRef idx="2">
+            <a:schemeClr val="accent1"/>
+          </a:effectRef>
+          <a:fontRef idx="minor">
+            <a:schemeClr val="lt1"/>
+          </a:fontRef>
+        </p:style>
+        <p:txBody>
+          <a:bodyPr rtlCol="0" anchor="ctr"/>
+          <a:lstStyle/>
+          <a:p>
+            <a:pPr algn="ctr"/>
+          </a:p>
+        </p:txBody>
+      </p:sp>
+      <p:sp>
+        <p:nvSpPr>
+          <p:cNvPr id="9" name="TextBox 8"/>
+          <p:cNvSpPr txBox="1"/>
+          <p:nvPr/>
+        </p:nvSpPr>
+        <p:spPr>
+          <a:xfrm>
+            <a:off x="7626096" y="2670048"/>
+            <a:ext cx="457200" cy="603504"/>
+          </a:xfrm>
+          <a:prstGeom prst="rect">
+            <a:avLst/>
+          </a:prstGeom>
+          <a:noFill/>
+        </p:spPr>
+        <p:txBody>
+          <a:bodyPr wrap="square" anchor="ctr" lIns="0" rIns="0" tIns="0" bIns="0">
+            <a:spAutoFit/>
+          </a:bodyPr>
+          <a:lstStyle/>
+          <a:p>
+            <a:pPr algn="ctr"/>
+            <a:r>
+              <a:rPr sz="1400" b="1" spc="-100">
+                <a:solidFill>
+                  <a:srgbClr val="3D2B1B"/>
+                </a:solidFill>
+                <a:latin typeface="Pretendard"/>
+                <a:ea typeface="Pretendard"/>
+              </a:rPr>
+              <a:t>☑</a:t>
+            </a:r>
+          </a:p>
+        </p:txBody>
+      </p:sp>
+      <p:sp>
+        <p:nvSpPr>
+          <p:cNvPr id="10" name="TextBox 9"/>
+          <p:cNvSpPr txBox="1"/>
+          <p:nvPr/>
+        </p:nvSpPr>
+        <p:spPr>
+          <a:xfrm>
+            <a:off x="8083296" y="2670048"/>
+            <a:ext cx="3108960" cy="603504"/>
+          </a:xfrm>
+          <a:prstGeom prst="rect">
+            <a:avLst/>
+          </a:prstGeom>
+          <a:noFill/>
+        </p:spPr>
+        <p:txBody>
+          <a:bodyPr wrap="square" anchor="ctr" lIns="0" rIns="0" tIns="0" bIns="0">
+            <a:spAutoFit/>
+          </a:bodyPr>
+          <a:lstStyle/>
+          <a:p>
+            <a:pPr algn="l"/>
+            <a:r>
+              <a:rPr sz="950" b="0" spc="-100">
+                <a:solidFill>
+                  <a:srgbClr val="141412"/>
+                </a:solidFill>
+                <a:latin typeface="Pretendard"/>
+                <a:ea typeface="Pretendard"/>
+              </a:rPr>
+              <a:t>유료광고·협찬 표시 — 자막+음성+캡션+‘유료 파트너십’ 태그 모두 적용</a:t>
+            </a:r>
+          </a:p>
+        </p:txBody>
+      </p:sp>
+      <p:sp>
+        <p:nvSpPr>
+          <p:cNvPr id="11" name="Rounded Rectangle 10"/>
+          <p:cNvSpPr/>
+          <p:nvPr/>
+        </p:nvSpPr>
+        <p:spPr>
+          <a:xfrm>
+            <a:off x="7498079" y="3364991"/>
+            <a:ext cx="3840480" cy="603504"/>
+          </a:xfrm>
+          <a:prstGeom prst="roundRect">
+            <a:avLst>
+              <a:gd name="adj" fmla="val 8000"/>
+            </a:avLst>
+          </a:prstGeom>
+          <a:solidFill>
+            <a:srgbClr val="F3F2E7"/>
+          </a:solidFill>
+          <a:ln>
+            <a:noFill/>
+          </a:ln>
+          <a:effectLst/>
+        </p:spPr>
+        <p:style>
+          <a:lnRef idx="1">
+            <a:schemeClr val="accent1"/>
+          </a:lnRef>
+          <a:fillRef idx="3">
+            <a:schemeClr val="accent1"/>
+          </a:fillRef>
+          <a:effectRef idx="2">
+            <a:schemeClr val="accent1"/>
+          </a:effectRef>
+          <a:fontRef idx="minor">
+            <a:schemeClr val="lt1"/>
+          </a:fontRef>
+        </p:style>
+        <p:txBody>
+          <a:bodyPr rtlCol="0" anchor="ctr"/>
+          <a:lstStyle/>
+          <a:p>
+            <a:pPr algn="ctr"/>
+          </a:p>
+        </p:txBody>
+      </p:sp>
+      <p:sp>
+        <p:nvSpPr>
+          <p:cNvPr id="12" name="TextBox 11"/>
+          <p:cNvSpPr txBox="1"/>
+          <p:nvPr/>
+        </p:nvSpPr>
+        <p:spPr>
+          <a:xfrm>
+            <a:off x="7626096" y="3364991"/>
+            <a:ext cx="457200" cy="603504"/>
+          </a:xfrm>
+          <a:prstGeom prst="rect">
+            <a:avLst/>
+          </a:prstGeom>
+          <a:noFill/>
+        </p:spPr>
+        <p:txBody>
+          <a:bodyPr wrap="square" anchor="ctr" lIns="0" rIns="0" tIns="0" bIns="0">
+            <a:spAutoFit/>
+          </a:bodyPr>
+          <a:lstStyle/>
+          <a:p>
+            <a:pPr algn="ctr"/>
+            <a:r>
+              <a:rPr sz="1400" b="1" spc="-100">
+                <a:solidFill>
+                  <a:srgbClr val="3D2B1B"/>
+                </a:solidFill>
+                <a:latin typeface="Pretendard"/>
+                <a:ea typeface="Pretendard"/>
+              </a:rPr>
+              <a:t>☑</a:t>
+            </a:r>
+          </a:p>
+        </p:txBody>
+      </p:sp>
+      <p:sp>
+        <p:nvSpPr>
+          <p:cNvPr id="13" name="TextBox 12"/>
+          <p:cNvSpPr txBox="1"/>
+          <p:nvPr/>
+        </p:nvSpPr>
+        <p:spPr>
+          <a:xfrm>
+            <a:off x="8083296" y="3364991"/>
+            <a:ext cx="3108960" cy="603504"/>
+          </a:xfrm>
+          <a:prstGeom prst="rect">
+            <a:avLst/>
+          </a:prstGeom>
+          <a:noFill/>
+        </p:spPr>
+        <p:txBody>
+          <a:bodyPr wrap="square" anchor="ctr" lIns="0" rIns="0" tIns="0" bIns="0">
+            <a:spAutoFit/>
+          </a:bodyPr>
+          <a:lstStyle/>
+          <a:p>
+            <a:pPr algn="l"/>
+            <a:r>
+              <a:rPr sz="950" b="0" spc="-100">
+                <a:solidFill>
+                  <a:srgbClr val="141412"/>
+                </a:solidFill>
+                <a:latin typeface="Pretendard"/>
+                <a:ea typeface="Pretendard"/>
+              </a:rPr>
+              <a:t>일반식품 — 질병·신체기능·건강 효능 표현 전면 배제</a:t>
+            </a:r>
+          </a:p>
+        </p:txBody>
+      </p:sp>
+      <p:sp>
+        <p:nvSpPr>
+          <p:cNvPr id="14" name="Rounded Rectangle 13"/>
+          <p:cNvSpPr/>
+          <p:nvPr/>
+        </p:nvSpPr>
+        <p:spPr>
+          <a:xfrm>
+            <a:off x="7498079" y="4059935"/>
+            <a:ext cx="3840480" cy="603504"/>
+          </a:xfrm>
+          <a:prstGeom prst="roundRect">
+            <a:avLst>
+              <a:gd name="adj" fmla="val 8000"/>
+            </a:avLst>
+          </a:prstGeom>
+          <a:solidFill>
+            <a:srgbClr val="F3F2E7"/>
+          </a:solidFill>
+          <a:ln>
+            <a:noFill/>
+          </a:ln>
+          <a:effectLst/>
+        </p:spPr>
+        <p:style>
+          <a:lnRef idx="1">
+            <a:schemeClr val="accent1"/>
+          </a:lnRef>
+          <a:fillRef idx="3">
+            <a:schemeClr val="accent1"/>
+          </a:fillRef>
+          <a:effectRef idx="2">
+            <a:schemeClr val="accent1"/>
+          </a:effectRef>
+          <a:fontRef idx="minor">
+            <a:schemeClr val="lt1"/>
+          </a:fontRef>
+        </p:style>
+        <p:txBody>
+          <a:bodyPr rtlCol="0" anchor="ctr"/>
+          <a:lstStyle/>
+          <a:p>
+            <a:pPr algn="ctr"/>
+          </a:p>
+        </p:txBody>
+      </p:sp>
+      <p:sp>
+        <p:nvSpPr>
+          <p:cNvPr id="15" name="TextBox 14"/>
+          <p:cNvSpPr txBox="1"/>
+          <p:nvPr/>
+        </p:nvSpPr>
+        <p:spPr>
+          <a:xfrm>
+            <a:off x="7626096" y="4059935"/>
+            <a:ext cx="457200" cy="603504"/>
+          </a:xfrm>
+          <a:prstGeom prst="rect">
+            <a:avLst/>
+          </a:prstGeom>
+          <a:noFill/>
+        </p:spPr>
+        <p:txBody>
+          <a:bodyPr wrap="square" anchor="ctr" lIns="0" rIns="0" tIns="0" bIns="0">
+            <a:spAutoFit/>
+          </a:bodyPr>
+          <a:lstStyle/>
+          <a:p>
+            <a:pPr algn="ctr"/>
+            <a:r>
+              <a:rPr sz="1400" b="1" spc="-100">
+                <a:solidFill>
+                  <a:srgbClr val="3D2B1B"/>
+                </a:solidFill>
+                <a:latin typeface="Pretendard"/>
+                <a:ea typeface="Pretendard"/>
+              </a:rPr>
+              <a:t>☑</a:t>
+            </a:r>
+          </a:p>
+        </p:txBody>
+      </p:sp>
+      <p:sp>
+        <p:nvSpPr>
+          <p:cNvPr id="16" name="TextBox 15"/>
+          <p:cNvSpPr txBox="1"/>
+          <p:nvPr/>
+        </p:nvSpPr>
+        <p:spPr>
+          <a:xfrm>
+            <a:off x="8083296" y="4059935"/>
+            <a:ext cx="3108960" cy="603504"/>
+          </a:xfrm>
+          <a:prstGeom prst="rect">
+            <a:avLst/>
+          </a:prstGeom>
+          <a:noFill/>
+        </p:spPr>
+        <p:txBody>
+          <a:bodyPr wrap="square" anchor="ctr" lIns="0" rIns="0" tIns="0" bIns="0">
+            <a:spAutoFit/>
+          </a:bodyPr>
+          <a:lstStyle/>
+          <a:p>
+            <a:pPr algn="l"/>
+            <a:r>
+              <a:rPr sz="950" b="0" spc="-100">
+                <a:solidFill>
+                  <a:srgbClr val="141412"/>
+                </a:solidFill>
+                <a:latin typeface="Pretendard"/>
+                <a:ea typeface="Pretendard"/>
+              </a:rPr>
+              <a:t>건기식 — 인정 기능성 문구 그대로, 의약품 오인·과장 없음</a:t>
+            </a:r>
+          </a:p>
+        </p:txBody>
+      </p:sp>
+      <p:sp>
+        <p:nvSpPr>
+          <p:cNvPr id="17" name="Rounded Rectangle 16"/>
+          <p:cNvSpPr/>
+          <p:nvPr/>
+        </p:nvSpPr>
+        <p:spPr>
+          <a:xfrm>
+            <a:off x="7498079" y="4754880"/>
+            <a:ext cx="3840480" cy="603504"/>
+          </a:xfrm>
+          <a:prstGeom prst="roundRect">
+            <a:avLst>
+              <a:gd name="adj" fmla="val 8000"/>
+            </a:avLst>
+          </a:prstGeom>
+          <a:solidFill>
+            <a:srgbClr val="F3F2E7"/>
+          </a:solidFill>
+          <a:ln>
+            <a:noFill/>
+          </a:ln>
+          <a:effectLst/>
+        </p:spPr>
+        <p:style>
+          <a:lnRef idx="1">
+            <a:schemeClr val="accent1"/>
+          </a:lnRef>
+          <a:fillRef idx="3">
+            <a:schemeClr val="accent1"/>
+          </a:fillRef>
+          <a:effectRef idx="2">
+            <a:schemeClr val="accent1"/>
+          </a:effectRef>
+          <a:fontRef idx="minor">
+            <a:schemeClr val="lt1"/>
+          </a:fontRef>
+        </p:style>
+        <p:txBody>
+          <a:bodyPr rtlCol="0" anchor="ctr"/>
+          <a:lstStyle/>
+          <a:p>
+            <a:pPr algn="ctr"/>
+          </a:p>
+        </p:txBody>
+      </p:sp>
+      <p:sp>
+        <p:nvSpPr>
+          <p:cNvPr id="18" name="TextBox 17"/>
+          <p:cNvSpPr txBox="1"/>
+          <p:nvPr/>
+        </p:nvSpPr>
+        <p:spPr>
+          <a:xfrm>
+            <a:off x="7626096" y="4754880"/>
+            <a:ext cx="457200" cy="603504"/>
+          </a:xfrm>
+          <a:prstGeom prst="rect">
+            <a:avLst/>
+          </a:prstGeom>
+          <a:noFill/>
+        </p:spPr>
+        <p:txBody>
+          <a:bodyPr wrap="square" anchor="ctr" lIns="0" rIns="0" tIns="0" bIns="0">
+            <a:spAutoFit/>
+          </a:bodyPr>
+          <a:lstStyle/>
+          <a:p>
+            <a:pPr algn="ctr"/>
+            <a:r>
+              <a:rPr sz="1400" b="1" spc="-100">
+                <a:solidFill>
+                  <a:srgbClr val="3D2B1B"/>
+                </a:solidFill>
+                <a:latin typeface="Pretendard"/>
+                <a:ea typeface="Pretendard"/>
+              </a:rPr>
+              <a:t>☑</a:t>
+            </a:r>
+          </a:p>
+        </p:txBody>
+      </p:sp>
+      <p:sp>
+        <p:nvSpPr>
+          <p:cNvPr id="19" name="TextBox 18"/>
+          <p:cNvSpPr txBox="1"/>
+          <p:nvPr/>
+        </p:nvSpPr>
+        <p:spPr>
+          <a:xfrm>
+            <a:off x="8083296" y="4754880"/>
+            <a:ext cx="3108960" cy="603504"/>
+          </a:xfrm>
+          <a:prstGeom prst="rect">
+            <a:avLst/>
+          </a:prstGeom>
+          <a:noFill/>
+        </p:spPr>
+        <p:txBody>
+          <a:bodyPr wrap="square" anchor="ctr" lIns="0" rIns="0" tIns="0" bIns="0">
+            <a:spAutoFit/>
+          </a:bodyPr>
+          <a:lstStyle/>
+          <a:p>
+            <a:pPr algn="l"/>
+            <a:r>
+              <a:rPr sz="950" b="0" spc="-100">
+                <a:solidFill>
+                  <a:srgbClr val="141412"/>
+                </a:solidFill>
+                <a:latin typeface="Pretendard"/>
+                <a:ea typeface="Pretendard"/>
+              </a:rPr>
+              <a:t>‘효과 미체감’ 방어 — ‘꾸준히’ OK / 보장·단정 금지</a:t>
+            </a:r>
+          </a:p>
+        </p:txBody>
+      </p:sp>
+      <p:sp>
+        <p:nvSpPr>
+          <p:cNvPr id="20" name="Rounded Rectangle 19"/>
+          <p:cNvSpPr/>
+          <p:nvPr/>
+        </p:nvSpPr>
+        <p:spPr>
+          <a:xfrm>
+            <a:off x="7498079" y="5449824"/>
+            <a:ext cx="3840480" cy="603504"/>
+          </a:xfrm>
+          <a:prstGeom prst="roundRect">
+            <a:avLst>
+              <a:gd name="adj" fmla="val 8000"/>
+            </a:avLst>
+          </a:prstGeom>
+          <a:solidFill>
+            <a:srgbClr val="F3F2E7"/>
+          </a:solidFill>
+          <a:ln>
+            <a:noFill/>
+          </a:ln>
+          <a:effectLst/>
+        </p:spPr>
+        <p:style>
+          <a:lnRef idx="1">
+            <a:schemeClr val="accent1"/>
+          </a:lnRef>
+          <a:fillRef idx="3">
+            <a:schemeClr val="accent1"/>
+          </a:fillRef>
+          <a:effectRef idx="2">
+            <a:schemeClr val="accent1"/>
+          </a:effectRef>
+          <a:fontRef idx="minor">
+            <a:schemeClr val="lt1"/>
+          </a:fontRef>
+        </p:style>
+        <p:txBody>
+          <a:bodyPr rtlCol="0" anchor="ctr"/>
+          <a:lstStyle/>
+          <a:p>
+            <a:pPr algn="ctr"/>
+          </a:p>
+        </p:txBody>
+      </p:sp>
+      <p:sp>
+        <p:nvSpPr>
+          <p:cNvPr id="21" name="TextBox 20"/>
+          <p:cNvSpPr txBox="1"/>
+          <p:nvPr/>
+        </p:nvSpPr>
+        <p:spPr>
+          <a:xfrm>
+            <a:off x="7626096" y="5449824"/>
+            <a:ext cx="457200" cy="603504"/>
+          </a:xfrm>
+          <a:prstGeom prst="rect">
+            <a:avLst/>
+          </a:prstGeom>
+          <a:noFill/>
+        </p:spPr>
+        <p:txBody>
+          <a:bodyPr wrap="square" anchor="ctr" lIns="0" rIns="0" tIns="0" bIns="0">
+            <a:spAutoFit/>
+          </a:bodyPr>
+          <a:lstStyle/>
+          <a:p>
+            <a:pPr algn="ctr"/>
+            <a:r>
+              <a:rPr sz="1400" b="1" spc="-100">
+                <a:solidFill>
+                  <a:srgbClr val="3D2B1B"/>
+                </a:solidFill>
+                <a:latin typeface="Pretendard"/>
+                <a:ea typeface="Pretendard"/>
+              </a:rPr>
+              <a:t>☑</a:t>
+            </a:r>
+          </a:p>
+        </p:txBody>
+      </p:sp>
+      <p:sp>
+        <p:nvSpPr>
+          <p:cNvPr id="22" name="TextBox 21"/>
+          <p:cNvSpPr txBox="1"/>
+          <p:nvPr/>
+        </p:nvSpPr>
+        <p:spPr>
+          <a:xfrm>
+            <a:off x="8083296" y="5449824"/>
+            <a:ext cx="3108960" cy="603504"/>
+          </a:xfrm>
+          <a:prstGeom prst="rect">
+            <a:avLst/>
+          </a:prstGeom>
+          <a:noFill/>
+        </p:spPr>
+        <p:txBody>
+          <a:bodyPr wrap="square" anchor="ctr" lIns="0" rIns="0" tIns="0" bIns="0">
+            <a:spAutoFit/>
+          </a:bodyPr>
+          <a:lstStyle/>
+          <a:p>
+            <a:pPr algn="l"/>
+            <a:r>
+              <a:rPr sz="950" b="0" spc="-100">
+                <a:solidFill>
+                  <a:srgbClr val="141412"/>
+                </a:solidFill>
+                <a:latin typeface="Pretendard"/>
+                <a:ea typeface="Pretendard"/>
+              </a:rPr>
+              <a:t>건기식 자율심의 + 법무·RA 검토 완료 후 송출</a:t>
+            </a:r>
+          </a:p>
+        </p:txBody>
+      </p:sp>
+      <p:sp>
+        <p:nvSpPr>
+          <p:cNvPr id="23" name="Rectangle 22"/>
+          <p:cNvSpPr/>
+          <p:nvPr/>
+        </p:nvSpPr>
+        <p:spPr>
+          <a:xfrm>
+            <a:off x="822960" y="6144768"/>
+            <a:ext cx="10543032" cy="457200"/>
+          </a:xfrm>
+          <a:prstGeom prst="rect">
+            <a:avLst/>
+          </a:prstGeom>
+          <a:solidFill>
+            <a:srgbClr val="F3F2E7"/>
+          </a:solidFill>
+          <a:ln>
+            <a:noFill/>
+          </a:ln>
+          <a:effectLst/>
+        </p:spPr>
+        <p:style>
+          <a:lnRef idx="1">
+            <a:schemeClr val="accent1"/>
+          </a:lnRef>
+          <a:fillRef idx="3">
+            <a:schemeClr val="accent1"/>
+          </a:fillRef>
+          <a:effectRef idx="2">
+            <a:schemeClr val="accent1"/>
+          </a:effectRef>
+          <a:fontRef idx="minor">
+            <a:schemeClr val="lt1"/>
+          </a:fontRef>
+        </p:style>
+        <p:txBody>
+          <a:bodyPr rtlCol="0" anchor="ctr"/>
+          <a:lstStyle/>
+          <a:p>
+            <a:pPr algn="ctr"/>
+          </a:p>
+        </p:txBody>
+      </p:sp>
+      <p:sp>
+        <p:nvSpPr>
+          <p:cNvPr id="24" name="Rectangle 23"/>
+          <p:cNvSpPr/>
+          <p:nvPr/>
+        </p:nvSpPr>
+        <p:spPr>
+          <a:xfrm>
+            <a:off x="822960" y="6144768"/>
+            <a:ext cx="82296" cy="457200"/>
+          </a:xfrm>
+          <a:prstGeom prst="rect">
+            <a:avLst/>
+          </a:prstGeom>
+          <a:solidFill>
+            <a:srgbClr val="3D2B1B"/>
+          </a:solidFill>
+          <a:ln>
+            <a:noFill/>
+          </a:ln>
+          <a:effectLst/>
+        </p:spPr>
+        <p:style>
+          <a:lnRef idx="1">
+            <a:schemeClr val="accent1"/>
+          </a:lnRef>
+          <a:fillRef idx="3">
+            <a:schemeClr val="accent1"/>
+          </a:fillRef>
+          <a:effectRef idx="2">
+            <a:schemeClr val="accent1"/>
+          </a:effectRef>
+          <a:fontRef idx="minor">
+            <a:schemeClr val="lt1"/>
+          </a:fontRef>
+        </p:style>
+        <p:txBody>
+          <a:bodyPr rtlCol="0" anchor="ctr"/>
+          <a:lstStyle/>
+          <a:p>
+            <a:pPr algn="ctr"/>
+          </a:p>
+        </p:txBody>
+      </p:sp>
+      <p:sp>
+        <p:nvSpPr>
+          <p:cNvPr id="25" name="TextBox 24"/>
+          <p:cNvSpPr txBox="1"/>
+          <p:nvPr/>
+        </p:nvSpPr>
+        <p:spPr>
+          <a:xfrm>
+            <a:off x="1097280" y="6144768"/>
+            <a:ext cx="10058400" cy="457200"/>
+          </a:xfrm>
+          <a:prstGeom prst="rect">
+            <a:avLst/>
+          </a:prstGeom>
+          <a:noFill/>
+        </p:spPr>
+        <p:txBody>
+          <a:bodyPr wrap="square" anchor="ctr" lIns="0" rIns="0" tIns="0" bIns="0">
+            <a:spAutoFit/>
+          </a:bodyPr>
+          <a:lstStyle/>
+          <a:p>
+            <a:pPr algn="ctr"/>
+            <a:r>
               <a:rPr sz="1250" b="1" spc="-100">
                 <a:solidFill>
                   <a:srgbClr val="141412"/>
@@ -10025,122 +11557,14 @@
                 <a:latin typeface="Pretendard"/>
                 <a:ea typeface="Pretendard"/>
               </a:rPr>
-              <a:t>송출 전 체크리스트</a:t>
-            </a:r>
-          </a:p>
-        </p:txBody>
-      </p:sp>
-      <p:sp>
-        <p:nvSpPr>
-          <p:cNvPr id="8" name="TextBox 7"/>
-          <p:cNvSpPr txBox="1"/>
-          <p:nvPr/>
-        </p:nvSpPr>
-        <p:spPr>
-          <a:xfrm>
-            <a:off x="7498079" y="2514600"/>
-            <a:ext cx="3840480" cy="3291840"/>
-          </a:xfrm>
-          <a:prstGeom prst="rect">
-            <a:avLst/>
-          </a:prstGeom>
-          <a:noFill/>
-        </p:spPr>
-        <p:txBody>
-          <a:bodyPr wrap="square" lIns="0" rIns="0" tIns="0" bIns="0">
-            <a:spAutoFit/>
-          </a:bodyPr>
-          <a:lstStyle/>
-          <a:p>
-            <a:pPr>
-              <a:spcAft>
-                <a:spcPts val="960"/>
-              </a:spcAft>
-            </a:pPr>
-            <a:r>
-              <a:rPr sz="1050" b="0" spc="-100">
-                <a:solidFill>
-                  <a:srgbClr val="141412"/>
-                </a:solidFill>
-                <a:latin typeface="Pretendard"/>
-                <a:ea typeface="Pretendard"/>
-              </a:rPr>
-              <a:t>☑  유료광고·협찬 표시 (자막+음성+캡션+파트너십 태그)</a:t>
-            </a:r>
-          </a:p>
-          <a:p>
-            <a:pPr>
-              <a:spcAft>
-                <a:spcPts val="960"/>
-              </a:spcAft>
-            </a:pPr>
-            <a:r>
-              <a:rPr sz="1050" b="0" spc="-100">
-                <a:solidFill>
-                  <a:srgbClr val="141412"/>
-                </a:solidFill>
-                <a:latin typeface="Pretendard"/>
-                <a:ea typeface="Pretendard"/>
-              </a:rPr>
-              <a:t>☑  일반식품 — 질병·기능 효능 표현 전면 배제</a:t>
-            </a:r>
-          </a:p>
-          <a:p>
-            <a:pPr>
-              <a:spcAft>
-                <a:spcPts val="960"/>
-              </a:spcAft>
-            </a:pPr>
-            <a:r>
-              <a:rPr sz="1050" b="0" spc="-100">
-                <a:solidFill>
-                  <a:srgbClr val="141412"/>
-                </a:solidFill>
-                <a:latin typeface="Pretendard"/>
-                <a:ea typeface="Pretendard"/>
-              </a:rPr>
-              <a:t>☑  건기식 — 인정 기능성 문구 그대로, 과장 없음</a:t>
-            </a:r>
-          </a:p>
-          <a:p>
-            <a:pPr>
-              <a:spcAft>
-                <a:spcPts val="960"/>
-              </a:spcAft>
-            </a:pPr>
-            <a:r>
-              <a:rPr sz="1050" b="0" spc="-100">
-                <a:solidFill>
-                  <a:srgbClr val="141412"/>
-                </a:solidFill>
-                <a:latin typeface="Pretendard"/>
-                <a:ea typeface="Pretendard"/>
-              </a:rPr>
-              <a:t>☑  ‘효과 미체감’ 방어 — 보장·단정 금지</a:t>
-            </a:r>
-          </a:p>
-          <a:p>
-            <a:pPr>
-              <a:spcAft>
-                <a:spcPts val="960"/>
-              </a:spcAft>
-            </a:pPr>
-            <a:r>
-              <a:rPr sz="1050" b="0" spc="-100">
-                <a:solidFill>
-                  <a:srgbClr val="141412"/>
-                </a:solidFill>
-                <a:latin typeface="Pretendard"/>
-                <a:ea typeface="Pretendard"/>
-              </a:rPr>
-              <a:t>☑  건기식 자율심의 + 법무·RA 검토 완료</a:t>
-            </a:r>
-          </a:p>
-        </p:txBody>
-      </p:sp>
-      <p:sp>
-        <p:nvSpPr>
-          <p:cNvPr id="9" name="TextBox 8"/>
+              <a:t>Claude AI 사전 검수로 1차 필터링(반려↓·기간 단축) 후, 체크리스트로 사람이 최종 점검</a:t>
+            </a:r>
+          </a:p>
+        </p:txBody>
+      </p:sp>
+      <p:sp>
+        <p:nvSpPr>
+          <p:cNvPr id="26" name="TextBox 25"/>
           <p:cNvSpPr txBox="1"/>
           <p:nvPr/>
         </p:nvSpPr>

--- a/proposal/BAT_올리브영_2026_올더베러_마케팅제안_클린재설계_HAN.pptx
+++ b/proposal/BAT_올리브영_2026_올더베러_마케팅제안_클린재설계_HAN.pptx
@@ -12102,20 +12102,22 @@
       </p:sp>
       <p:sp>
         <p:nvSpPr>
-          <p:cNvPr id="6" name="Oval 5"/>
+          <p:cNvPr id="6" name="Rounded Rectangle 5"/>
           <p:cNvSpPr/>
           <p:nvPr/>
         </p:nvSpPr>
         <p:spPr>
           <a:xfrm>
-            <a:off x="1727072" y="2240280"/>
-            <a:ext cx="621792" cy="621792"/>
-          </a:xfrm>
-          <a:prstGeom prst="ellipse">
-            <a:avLst/>
+            <a:off x="822960" y="2103120"/>
+            <a:ext cx="10543032" cy="1078992"/>
+          </a:xfrm>
+          <a:prstGeom prst="roundRect">
+            <a:avLst>
+              <a:gd name="adj" fmla="val 8000"/>
+            </a:avLst>
           </a:prstGeom>
           <a:solidFill>
-            <a:srgbClr val="3D2B1B"/>
+            <a:srgbClr val="F3F2E7"/>
           </a:solidFill>
           <a:ln>
             <a:noFill/>
@@ -12152,8 +12154,92 @@
         </p:nvSpPr>
         <p:spPr>
           <a:xfrm>
-            <a:off x="1727072" y="2240280"/>
-            <a:ext cx="621792" cy="621792"/>
+            <a:off x="1078992" y="2231136"/>
+            <a:ext cx="7315200" cy="274320"/>
+          </a:xfrm>
+          <a:prstGeom prst="rect">
+            <a:avLst/>
+          </a:prstGeom>
+          <a:noFill/>
+        </p:spPr>
+        <p:txBody>
+          <a:bodyPr wrap="square" anchor="t" lIns="0" rIns="0" tIns="0" bIns="0">
+            <a:spAutoFit/>
+          </a:bodyPr>
+          <a:lstStyle/>
+          <a:p>
+            <a:pPr algn="l"/>
+            <a:r>
+              <a:rPr sz="1100" b="1" spc="-100">
+                <a:solidFill>
+                  <a:srgbClr val="3D2B1B"/>
+                </a:solidFill>
+                <a:latin typeface="Pretendard"/>
+                <a:ea typeface="Pretendard"/>
+              </a:rPr>
+              <a:t>소비자 구매 여정 — 올영 외부에서도 ‘선택 근거’를 채운다</a:t>
+            </a:r>
+          </a:p>
+        </p:txBody>
+      </p:sp>
+      <p:sp>
+        <p:nvSpPr>
+          <p:cNvPr id="8" name="Rounded Rectangle 7"/>
+          <p:cNvSpPr/>
+          <p:nvPr/>
+        </p:nvSpPr>
+        <p:spPr>
+          <a:xfrm>
+            <a:off x="960120" y="2596896"/>
+            <a:ext cx="2286000" cy="457200"/>
+          </a:xfrm>
+          <a:prstGeom prst="roundRect">
+            <a:avLst>
+              <a:gd name="adj" fmla="val 8000"/>
+            </a:avLst>
+          </a:prstGeom>
+          <a:solidFill>
+            <a:srgbClr val="FFFFFF"/>
+          </a:solidFill>
+          <a:ln w="15240">
+            <a:solidFill>
+              <a:srgbClr val="3D2B1B"/>
+            </a:solidFill>
+          </a:ln>
+          <a:effectLst/>
+        </p:spPr>
+        <p:style>
+          <a:lnRef idx="1">
+            <a:schemeClr val="accent1"/>
+          </a:lnRef>
+          <a:fillRef idx="3">
+            <a:schemeClr val="accent1"/>
+          </a:fillRef>
+          <a:effectRef idx="2">
+            <a:schemeClr val="accent1"/>
+          </a:effectRef>
+          <a:fontRef idx="minor">
+            <a:schemeClr val="lt1"/>
+          </a:fontRef>
+        </p:style>
+        <p:txBody>
+          <a:bodyPr rtlCol="0" anchor="ctr"/>
+          <a:lstStyle/>
+          <a:p>
+            <a:pPr algn="ctr"/>
+          </a:p>
+        </p:txBody>
+      </p:sp>
+      <p:sp>
+        <p:nvSpPr>
+          <p:cNvPr id="9" name="TextBox 8"/>
+          <p:cNvSpPr txBox="1"/>
+          <p:nvPr/>
+        </p:nvSpPr>
+        <p:spPr>
+          <a:xfrm>
+            <a:off x="960120" y="2596896"/>
+            <a:ext cx="2286000" cy="457200"/>
           </a:xfrm>
           <a:prstGeom prst="rect">
             <a:avLst/>
@@ -12168,86 +12254,14 @@
           <a:p>
             <a:pPr algn="ctr"/>
             <a:r>
-              <a:rPr sz="1700" b="1" spc="-100">
-                <a:solidFill>
-                  <a:srgbClr val="FFFFFF"/>
-                </a:solidFill>
-                <a:latin typeface="Pretendard"/>
-                <a:ea typeface="Pretendard"/>
-              </a:rPr>
-              <a:t>01</a:t>
-            </a:r>
-          </a:p>
-        </p:txBody>
-      </p:sp>
-      <p:sp>
-        <p:nvSpPr>
-          <p:cNvPr id="8" name="TextBox 7"/>
-          <p:cNvSpPr txBox="1"/>
-          <p:nvPr/>
-        </p:nvSpPr>
-        <p:spPr>
-          <a:xfrm>
-            <a:off x="822960" y="2971800"/>
-            <a:ext cx="2430018" cy="457200"/>
-          </a:xfrm>
-          <a:prstGeom prst="rect">
-            <a:avLst/>
-          </a:prstGeom>
-          <a:noFill/>
-        </p:spPr>
-        <p:txBody>
-          <a:bodyPr wrap="square" anchor="t" lIns="0" rIns="0" tIns="0" bIns="0">
-            <a:spAutoFit/>
-          </a:bodyPr>
-          <a:lstStyle/>
-          <a:p>
-            <a:pPr algn="ctr"/>
-            <a:r>
-              <a:rPr sz="1350" b="1" spc="-100">
-                <a:solidFill>
-                  <a:srgbClr val="141412"/>
+              <a:rPr sz="1100" b="1" spc="-100">
+                <a:solidFill>
+                  <a:srgbClr val="3D2B1B"/>
                 </a:solidFill>
                 <a:latin typeface="Pretendard"/>
                 <a:ea typeface="Pretendard"/>
               </a:rPr>
               <a:t>제품을 본다</a:t>
-            </a:r>
-          </a:p>
-        </p:txBody>
-      </p:sp>
-      <p:sp>
-        <p:nvSpPr>
-          <p:cNvPr id="9" name="TextBox 8"/>
-          <p:cNvSpPr txBox="1"/>
-          <p:nvPr/>
-        </p:nvSpPr>
-        <p:spPr>
-          <a:xfrm>
-            <a:off x="868680" y="3447288"/>
-            <a:ext cx="2338578" cy="1097280"/>
-          </a:xfrm>
-          <a:prstGeom prst="rect">
-            <a:avLst/>
-          </a:prstGeom>
-          <a:noFill/>
-        </p:spPr>
-        <p:txBody>
-          <a:bodyPr wrap="square" anchor="t" lIns="0" rIns="0" tIns="0" bIns="0">
-            <a:spAutoFit/>
-          </a:bodyPr>
-          <a:lstStyle/>
-          <a:p>
-            <a:pPr algn="ctr"/>
-            <a:r>
-              <a:rPr sz="1050" b="0" spc="-100">
-                <a:solidFill>
-                  <a:srgbClr val="868680"/>
-                </a:solidFill>
-                <a:latin typeface="Pretendard"/>
-                <a:ea typeface="Pretendard"/>
-              </a:rPr>
-              <a:t>시딩·광고로 첫 인지 발생</a:t>
             </a:r>
           </a:p>
         </p:txBody>
@@ -12260,8 +12274,8 @@
         </p:nvSpPr>
         <p:spPr>
           <a:xfrm>
-            <a:off x="3207258" y="2423160"/>
-            <a:ext cx="365760" cy="256032"/>
+            <a:off x="3273552" y="2715768"/>
+            <a:ext cx="237744" cy="256032"/>
           </a:xfrm>
           <a:prstGeom prst="chevron">
             <a:avLst/>
@@ -12298,23 +12312,27 @@
       </p:sp>
       <p:sp>
         <p:nvSpPr>
-          <p:cNvPr id="11" name="Oval 10"/>
+          <p:cNvPr id="11" name="Rounded Rectangle 10"/>
           <p:cNvSpPr/>
           <p:nvPr/>
         </p:nvSpPr>
         <p:spPr>
           <a:xfrm>
-            <a:off x="4431411" y="2240280"/>
-            <a:ext cx="621792" cy="621792"/>
-          </a:xfrm>
-          <a:prstGeom prst="ellipse">
-            <a:avLst/>
+            <a:off x="3566160" y="2596896"/>
+            <a:ext cx="2286000" cy="457200"/>
+          </a:xfrm>
+          <a:prstGeom prst="roundRect">
+            <a:avLst>
+              <a:gd name="adj" fmla="val 8000"/>
+            </a:avLst>
           </a:prstGeom>
           <a:solidFill>
-            <a:srgbClr val="3D2B1B"/>
+            <a:srgbClr val="FFFFFF"/>
           </a:solidFill>
-          <a:ln>
-            <a:noFill/>
+          <a:ln w="15240">
+            <a:solidFill>
+              <a:srgbClr val="3D2B1B"/>
+            </a:solidFill>
           </a:ln>
           <a:effectLst/>
         </p:spPr>
@@ -12348,8 +12366,8 @@
         </p:nvSpPr>
         <p:spPr>
           <a:xfrm>
-            <a:off x="4431411" y="2240280"/>
-            <a:ext cx="621792" cy="621792"/>
+            <a:off x="3566160" y="2596896"/>
+            <a:ext cx="2286000" cy="457200"/>
           </a:xfrm>
           <a:prstGeom prst="rect">
             <a:avLst/>
@@ -12364,45 +12382,9 @@
           <a:p>
             <a:pPr algn="ctr"/>
             <a:r>
-              <a:rPr sz="1700" b="1" spc="-100">
-                <a:solidFill>
-                  <a:srgbClr val="FFFFFF"/>
-                </a:solidFill>
-                <a:latin typeface="Pretendard"/>
-                <a:ea typeface="Pretendard"/>
-              </a:rPr>
-              <a:t>02</a:t>
-            </a:r>
-          </a:p>
-        </p:txBody>
-      </p:sp>
-      <p:sp>
-        <p:nvSpPr>
-          <p:cNvPr id="13" name="TextBox 12"/>
-          <p:cNvSpPr txBox="1"/>
-          <p:nvPr/>
-        </p:nvSpPr>
-        <p:spPr>
-          <a:xfrm>
-            <a:off x="3527298" y="2971800"/>
-            <a:ext cx="2430018" cy="457200"/>
-          </a:xfrm>
-          <a:prstGeom prst="rect">
-            <a:avLst/>
-          </a:prstGeom>
-          <a:noFill/>
-        </p:spPr>
-        <p:txBody>
-          <a:bodyPr wrap="square" anchor="t" lIns="0" rIns="0" tIns="0" bIns="0">
-            <a:spAutoFit/>
-          </a:bodyPr>
-          <a:lstStyle/>
-          <a:p>
-            <a:pPr algn="ctr"/>
-            <a:r>
-              <a:rPr sz="1350" b="1" spc="-100">
-                <a:solidFill>
-                  <a:srgbClr val="141412"/>
+              <a:rPr sz="1100" b="1" spc="-100">
+                <a:solidFill>
+                  <a:srgbClr val="3D2B1B"/>
                 </a:solidFill>
                 <a:latin typeface="Pretendard"/>
                 <a:ea typeface="Pretendard"/>
@@ -12414,50 +12396,14 @@
       </p:sp>
       <p:sp>
         <p:nvSpPr>
-          <p:cNvPr id="14" name="TextBox 13"/>
-          <p:cNvSpPr txBox="1"/>
-          <p:nvPr/>
-        </p:nvSpPr>
-        <p:spPr>
-          <a:xfrm>
-            <a:off x="3573018" y="3447288"/>
-            <a:ext cx="2338578" cy="1097280"/>
-          </a:xfrm>
-          <a:prstGeom prst="rect">
-            <a:avLst/>
-          </a:prstGeom>
-          <a:noFill/>
-        </p:spPr>
-        <p:txBody>
-          <a:bodyPr wrap="square" anchor="t" lIns="0" rIns="0" tIns="0" bIns="0">
-            <a:spAutoFit/>
-          </a:bodyPr>
-          <a:lstStyle/>
-          <a:p>
-            <a:pPr algn="ctr"/>
-            <a:r>
-              <a:rPr sz="1050" b="0" spc="-100">
-                <a:solidFill>
-                  <a:srgbClr val="868680"/>
-                </a:solidFill>
-                <a:latin typeface="Pretendard"/>
-                <a:ea typeface="Pretendard"/>
-              </a:rPr>
-              <a:t>제품명·카테고리·상황 키워드 탐색</a:t>
-            </a:r>
-          </a:p>
-        </p:txBody>
-      </p:sp>
-      <p:sp>
-        <p:nvSpPr>
-          <p:cNvPr id="15" name="Chevron 14"/>
+          <p:cNvPr id="13" name="Chevron 12"/>
           <p:cNvSpPr/>
           <p:nvPr/>
         </p:nvSpPr>
         <p:spPr>
           <a:xfrm>
-            <a:off x="5911596" y="2423160"/>
-            <a:ext cx="365760" cy="256032"/>
+            <a:off x="5879592" y="2715768"/>
+            <a:ext cx="237744" cy="256032"/>
           </a:xfrm>
           <a:prstGeom prst="chevron">
             <a:avLst/>
@@ -12494,23 +12440,27 @@
       </p:sp>
       <p:sp>
         <p:nvSpPr>
-          <p:cNvPr id="16" name="Oval 15"/>
+          <p:cNvPr id="14" name="Rounded Rectangle 13"/>
           <p:cNvSpPr/>
           <p:nvPr/>
         </p:nvSpPr>
         <p:spPr>
           <a:xfrm>
-            <a:off x="7135749" y="2240280"/>
-            <a:ext cx="621792" cy="621792"/>
-          </a:xfrm>
-          <a:prstGeom prst="ellipse">
-            <a:avLst/>
+            <a:off x="6172200" y="2596896"/>
+            <a:ext cx="2286000" cy="457200"/>
+          </a:xfrm>
+          <a:prstGeom prst="roundRect">
+            <a:avLst>
+              <a:gd name="adj" fmla="val 8000"/>
+            </a:avLst>
           </a:prstGeom>
           <a:solidFill>
-            <a:srgbClr val="3D2B1B"/>
+            <a:srgbClr val="FFFFFF"/>
           </a:solidFill>
-          <a:ln>
-            <a:noFill/>
+          <a:ln w="15240">
+            <a:solidFill>
+              <a:srgbClr val="3D2B1B"/>
+            </a:solidFill>
           </a:ln>
           <a:effectLst/>
         </p:spPr>
@@ -12538,14 +12488,14 @@
       </p:sp>
       <p:sp>
         <p:nvSpPr>
-          <p:cNvPr id="17" name="TextBox 16"/>
-          <p:cNvSpPr txBox="1"/>
-          <p:nvPr/>
-        </p:nvSpPr>
-        <p:spPr>
-          <a:xfrm>
-            <a:off x="7135749" y="2240280"/>
-            <a:ext cx="621792" cy="621792"/>
+          <p:cNvPr id="15" name="TextBox 14"/>
+          <p:cNvSpPr txBox="1"/>
+          <p:nvPr/>
+        </p:nvSpPr>
+        <p:spPr>
+          <a:xfrm>
+            <a:off x="6172200" y="2596896"/>
+            <a:ext cx="2286000" cy="457200"/>
           </a:xfrm>
           <a:prstGeom prst="rect">
             <a:avLst/>
@@ -12560,45 +12510,9 @@
           <a:p>
             <a:pPr algn="ctr"/>
             <a:r>
-              <a:rPr sz="1700" b="1" spc="-100">
-                <a:solidFill>
-                  <a:srgbClr val="FFFFFF"/>
-                </a:solidFill>
-                <a:latin typeface="Pretendard"/>
-                <a:ea typeface="Pretendard"/>
-              </a:rPr>
-              <a:t>03</a:t>
-            </a:r>
-          </a:p>
-        </p:txBody>
-      </p:sp>
-      <p:sp>
-        <p:nvSpPr>
-          <p:cNvPr id="18" name="TextBox 17"/>
-          <p:cNvSpPr txBox="1"/>
-          <p:nvPr/>
-        </p:nvSpPr>
-        <p:spPr>
-          <a:xfrm>
-            <a:off x="6231636" y="2971800"/>
-            <a:ext cx="2430018" cy="457200"/>
-          </a:xfrm>
-          <a:prstGeom prst="rect">
-            <a:avLst/>
-          </a:prstGeom>
-          <a:noFill/>
-        </p:spPr>
-        <p:txBody>
-          <a:bodyPr wrap="square" anchor="t" lIns="0" rIns="0" tIns="0" bIns="0">
-            <a:spAutoFit/>
-          </a:bodyPr>
-          <a:lstStyle/>
-          <a:p>
-            <a:pPr algn="ctr"/>
-            <a:r>
-              <a:rPr sz="1350" b="1" spc="-100">
-                <a:solidFill>
-                  <a:srgbClr val="141412"/>
+              <a:rPr sz="1100" b="1" spc="-100">
+                <a:solidFill>
+                  <a:srgbClr val="3D2B1B"/>
                 </a:solidFill>
                 <a:latin typeface="Pretendard"/>
                 <a:ea typeface="Pretendard"/>
@@ -12610,50 +12524,14 @@
       </p:sp>
       <p:sp>
         <p:nvSpPr>
-          <p:cNvPr id="19" name="TextBox 18"/>
-          <p:cNvSpPr txBox="1"/>
-          <p:nvPr/>
-        </p:nvSpPr>
-        <p:spPr>
-          <a:xfrm>
-            <a:off x="6277356" y="3447288"/>
-            <a:ext cx="2338578" cy="1097280"/>
-          </a:xfrm>
-          <a:prstGeom prst="rect">
-            <a:avLst/>
-          </a:prstGeom>
-          <a:noFill/>
-        </p:spPr>
-        <p:txBody>
-          <a:bodyPr wrap="square" anchor="t" lIns="0" rIns="0" tIns="0" bIns="0">
-            <a:spAutoFit/>
-          </a:bodyPr>
-          <a:lstStyle/>
-          <a:p>
-            <a:pPr algn="ctr"/>
-            <a:r>
-              <a:rPr sz="1050" b="0" spc="-100">
-                <a:solidFill>
-                  <a:srgbClr val="868680"/>
-                </a:solidFill>
-                <a:latin typeface="Pretendard"/>
-                <a:ea typeface="Pretendard"/>
-              </a:rPr>
-              <a:t>후기·장바구니·랭킹 맥락 확인</a:t>
-            </a:r>
-          </a:p>
-        </p:txBody>
-      </p:sp>
-      <p:sp>
-        <p:nvSpPr>
-          <p:cNvPr id="20" name="Chevron 19"/>
+          <p:cNvPr id="16" name="Chevron 15"/>
           <p:cNvSpPr/>
           <p:nvPr/>
         </p:nvSpPr>
         <p:spPr>
           <a:xfrm>
-            <a:off x="8615934" y="2423160"/>
-            <a:ext cx="365760" cy="256032"/>
+            <a:off x="8485632" y="2715768"/>
+            <a:ext cx="237744" cy="256032"/>
           </a:xfrm>
           <a:prstGeom prst="chevron">
             <a:avLst/>
@@ -12690,23 +12568,27 @@
       </p:sp>
       <p:sp>
         <p:nvSpPr>
-          <p:cNvPr id="21" name="Oval 20"/>
+          <p:cNvPr id="17" name="Rounded Rectangle 16"/>
           <p:cNvSpPr/>
           <p:nvPr/>
         </p:nvSpPr>
         <p:spPr>
           <a:xfrm>
-            <a:off x="9840087" y="2240280"/>
-            <a:ext cx="621792" cy="621792"/>
-          </a:xfrm>
-          <a:prstGeom prst="ellipse">
-            <a:avLst/>
+            <a:off x="8778240" y="2596896"/>
+            <a:ext cx="2286000" cy="457200"/>
+          </a:xfrm>
+          <a:prstGeom prst="roundRect">
+            <a:avLst>
+              <a:gd name="adj" fmla="val 8000"/>
+            </a:avLst>
           </a:prstGeom>
           <a:solidFill>
-            <a:srgbClr val="3D2B1B"/>
+            <a:srgbClr val="FFFFFF"/>
           </a:solidFill>
-          <a:ln>
-            <a:noFill/>
+          <a:ln w="15240">
+            <a:solidFill>
+              <a:srgbClr val="3D2B1B"/>
+            </a:solidFill>
           </a:ln>
           <a:effectLst/>
         </p:spPr>
@@ -12734,14 +12616,14 @@
       </p:sp>
       <p:sp>
         <p:nvSpPr>
-          <p:cNvPr id="22" name="TextBox 21"/>
-          <p:cNvSpPr txBox="1"/>
-          <p:nvPr/>
-        </p:nvSpPr>
-        <p:spPr>
-          <a:xfrm>
-            <a:off x="9840087" y="2240280"/>
-            <a:ext cx="621792" cy="621792"/>
+          <p:cNvPr id="18" name="TextBox 17"/>
+          <p:cNvSpPr txBox="1"/>
+          <p:nvPr/>
+        </p:nvSpPr>
+        <p:spPr>
+          <a:xfrm>
+            <a:off x="8778240" y="2596896"/>
+            <a:ext cx="2286000" cy="457200"/>
           </a:xfrm>
           <a:prstGeom prst="rect">
             <a:avLst/>
@@ -12756,45 +12638,9 @@
           <a:p>
             <a:pPr algn="ctr"/>
             <a:r>
-              <a:rPr sz="1700" b="1" spc="-100">
-                <a:solidFill>
-                  <a:srgbClr val="FFFFFF"/>
-                </a:solidFill>
-                <a:latin typeface="Pretendard"/>
-                <a:ea typeface="Pretendard"/>
-              </a:rPr>
-              <a:t>04</a:t>
-            </a:r>
-          </a:p>
-        </p:txBody>
-      </p:sp>
-      <p:sp>
-        <p:nvSpPr>
-          <p:cNvPr id="23" name="TextBox 22"/>
-          <p:cNvSpPr txBox="1"/>
-          <p:nvPr/>
-        </p:nvSpPr>
-        <p:spPr>
-          <a:xfrm>
-            <a:off x="8935974" y="2971800"/>
-            <a:ext cx="2430018" cy="457200"/>
-          </a:xfrm>
-          <a:prstGeom prst="rect">
-            <a:avLst/>
-          </a:prstGeom>
-          <a:noFill/>
-        </p:spPr>
-        <p:txBody>
-          <a:bodyPr wrap="square" anchor="t" lIns="0" rIns="0" tIns="0" bIns="0">
-            <a:spAutoFit/>
-          </a:bodyPr>
-          <a:lstStyle/>
-          <a:p>
-            <a:pPr algn="ctr"/>
-            <a:r>
-              <a:rPr sz="1350" b="1" spc="-100">
-                <a:solidFill>
-                  <a:srgbClr val="141412"/>
+              <a:rPr sz="1100" b="1" spc="-100">
+                <a:solidFill>
+                  <a:srgbClr val="3D2B1B"/>
                 </a:solidFill>
                 <a:latin typeface="Pretendard"/>
                 <a:ea typeface="Pretendard"/>
@@ -12806,50 +12652,14 @@
       </p:sp>
       <p:sp>
         <p:nvSpPr>
-          <p:cNvPr id="24" name="TextBox 23"/>
-          <p:cNvSpPr txBox="1"/>
-          <p:nvPr/>
-        </p:nvSpPr>
-        <p:spPr>
-          <a:xfrm>
-            <a:off x="8981694" y="3447288"/>
-            <a:ext cx="2338578" cy="1097280"/>
-          </a:xfrm>
-          <a:prstGeom prst="rect">
-            <a:avLst/>
-          </a:prstGeom>
-          <a:noFill/>
-        </p:spPr>
-        <p:txBody>
-          <a:bodyPr wrap="square" anchor="t" lIns="0" rIns="0" tIns="0" bIns="0">
-            <a:spAutoFit/>
-          </a:bodyPr>
-          <a:lstStyle/>
-          <a:p>
-            <a:pPr algn="ctr"/>
-            <a:r>
-              <a:rPr sz="1050" b="0" spc="-100">
-                <a:solidFill>
-                  <a:srgbClr val="868680"/>
-                </a:solidFill>
-                <a:latin typeface="Pretendard"/>
-                <a:ea typeface="Pretendard"/>
-              </a:rPr>
-              <a:t>진성 구매·리뷰·랭킹 행동</a:t>
-            </a:r>
-          </a:p>
-        </p:txBody>
-      </p:sp>
-      <p:sp>
-        <p:nvSpPr>
-          <p:cNvPr id="25" name="Rounded Rectangle 24"/>
+          <p:cNvPr id="19" name="Rounded Rectangle 18"/>
           <p:cNvSpPr/>
           <p:nvPr/>
         </p:nvSpPr>
         <p:spPr>
           <a:xfrm>
-            <a:off x="822960" y="4160520"/>
-            <a:ext cx="3346704" cy="1737360"/>
+            <a:off x="822960" y="3401568"/>
+            <a:ext cx="3383280" cy="2505456"/>
           </a:xfrm>
           <a:prstGeom prst="roundRect">
             <a:avLst>
@@ -12890,14 +12700,14 @@
       </p:sp>
       <p:sp>
         <p:nvSpPr>
-          <p:cNvPr id="26" name="Rectangle 25"/>
+          <p:cNvPr id="20" name="Rectangle 19"/>
           <p:cNvSpPr/>
           <p:nvPr/>
         </p:nvSpPr>
         <p:spPr>
           <a:xfrm>
-            <a:off x="822960" y="4160520"/>
-            <a:ext cx="3346704" cy="502920"/>
+            <a:off x="822960" y="3401568"/>
+            <a:ext cx="3383280" cy="566928"/>
           </a:xfrm>
           <a:prstGeom prst="rect">
             <a:avLst/>
@@ -12934,14 +12744,248 @@
       </p:sp>
       <p:sp>
         <p:nvSpPr>
+          <p:cNvPr id="21" name="TextBox 20"/>
+          <p:cNvSpPr txBox="1"/>
+          <p:nvPr/>
+        </p:nvSpPr>
+        <p:spPr>
+          <a:xfrm>
+            <a:off x="822960" y="3401568"/>
+            <a:ext cx="3383280" cy="566928"/>
+          </a:xfrm>
+          <a:prstGeom prst="rect">
+            <a:avLst/>
+          </a:prstGeom>
+          <a:noFill/>
+        </p:spPr>
+        <p:txBody>
+          <a:bodyPr wrap="square" anchor="ctr" lIns="0" rIns="0" tIns="0" bIns="0">
+            <a:spAutoFit/>
+          </a:bodyPr>
+          <a:lstStyle/>
+          <a:p>
+            <a:pPr algn="ctr"/>
+            <a:r>
+              <a:rPr sz="1150" b="1" spc="-100">
+                <a:solidFill>
+                  <a:srgbClr val="FFFFFF"/>
+                </a:solidFill>
+                <a:latin typeface="Pretendard"/>
+                <a:ea typeface="Pretendard"/>
+              </a:rPr>
+              <a:t>검색 시 ‘비어 있지 않게’</a:t>
+            </a:r>
+          </a:p>
+        </p:txBody>
+      </p:sp>
+      <p:sp>
+        <p:nvSpPr>
+          <p:cNvPr id="22" name="Oval 21"/>
+          <p:cNvSpPr/>
+          <p:nvPr/>
+        </p:nvSpPr>
+        <p:spPr>
+          <a:xfrm>
+            <a:off x="1078992" y="4160520"/>
+            <a:ext cx="457200" cy="457200"/>
+          </a:xfrm>
+          <a:prstGeom prst="ellipse">
+            <a:avLst/>
+          </a:prstGeom>
+          <a:solidFill>
+            <a:srgbClr val="0E5A30"/>
+          </a:solidFill>
+          <a:ln>
+            <a:noFill/>
+          </a:ln>
+          <a:effectLst/>
+        </p:spPr>
+        <p:style>
+          <a:lnRef idx="1">
+            <a:schemeClr val="accent1"/>
+          </a:lnRef>
+          <a:fillRef idx="3">
+            <a:schemeClr val="accent1"/>
+          </a:fillRef>
+          <a:effectRef idx="2">
+            <a:schemeClr val="accent1"/>
+          </a:effectRef>
+          <a:fontRef idx="minor">
+            <a:schemeClr val="lt1"/>
+          </a:fontRef>
+        </p:style>
+        <p:txBody>
+          <a:bodyPr rtlCol="0" anchor="ctr"/>
+          <a:lstStyle/>
+          <a:p>
+            <a:pPr algn="ctr"/>
+          </a:p>
+        </p:txBody>
+      </p:sp>
+      <p:sp>
+        <p:nvSpPr>
+          <p:cNvPr id="23" name="TextBox 22"/>
+          <p:cNvSpPr txBox="1"/>
+          <p:nvPr/>
+        </p:nvSpPr>
+        <p:spPr>
+          <a:xfrm>
+            <a:off x="1078992" y="4160520"/>
+            <a:ext cx="457200" cy="457200"/>
+          </a:xfrm>
+          <a:prstGeom prst="rect">
+            <a:avLst/>
+          </a:prstGeom>
+          <a:noFill/>
+        </p:spPr>
+        <p:txBody>
+          <a:bodyPr wrap="square" anchor="ctr" lIns="0" rIns="0" tIns="0" bIns="0">
+            <a:spAutoFit/>
+          </a:bodyPr>
+          <a:lstStyle/>
+          <a:p>
+            <a:pPr algn="ctr"/>
+            <a:r>
+              <a:rPr sz="1300" b="1" spc="-100">
+                <a:solidFill>
+                  <a:srgbClr val="FFFFFF"/>
+                </a:solidFill>
+                <a:latin typeface="Pretendard"/>
+                <a:ea typeface="Pretendard"/>
+              </a:rPr>
+              <a:t>1</a:t>
+            </a:r>
+          </a:p>
+        </p:txBody>
+      </p:sp>
+      <p:sp>
+        <p:nvSpPr>
+          <p:cNvPr id="24" name="TextBox 23"/>
+          <p:cNvSpPr txBox="1"/>
+          <p:nvPr/>
+        </p:nvSpPr>
+        <p:spPr>
+          <a:xfrm>
+            <a:off x="1664208" y="4160520"/>
+            <a:ext cx="2377440" cy="457200"/>
+          </a:xfrm>
+          <a:prstGeom prst="rect">
+            <a:avLst/>
+          </a:prstGeom>
+          <a:noFill/>
+        </p:spPr>
+        <p:txBody>
+          <a:bodyPr wrap="square" anchor="ctr" lIns="0" rIns="0" tIns="0" bIns="0">
+            <a:spAutoFit/>
+          </a:bodyPr>
+          <a:lstStyle/>
+          <a:p>
+            <a:pPr algn="l"/>
+            <a:r>
+              <a:rPr sz="1000" b="1" spc="-100">
+                <a:solidFill>
+                  <a:srgbClr val="3D2B1B"/>
+                </a:solidFill>
+                <a:latin typeface="Pretendard"/>
+                <a:ea typeface="Pretendard"/>
+              </a:rPr>
+              <a:t>바이럴이 채우는 지점</a:t>
+            </a:r>
+          </a:p>
+        </p:txBody>
+      </p:sp>
+      <p:sp>
+        <p:nvSpPr>
+          <p:cNvPr id="25" name="TextBox 24"/>
+          <p:cNvSpPr txBox="1"/>
+          <p:nvPr/>
+        </p:nvSpPr>
+        <p:spPr>
+          <a:xfrm>
+            <a:off x="1078992" y="4773168"/>
+            <a:ext cx="2889504" cy="914400"/>
+          </a:xfrm>
+          <a:prstGeom prst="rect">
+            <a:avLst/>
+          </a:prstGeom>
+          <a:noFill/>
+        </p:spPr>
+        <p:txBody>
+          <a:bodyPr wrap="square" anchor="t" lIns="0" rIns="0" tIns="0" bIns="0">
+            <a:spAutoFit/>
+          </a:bodyPr>
+          <a:lstStyle/>
+          <a:p>
+            <a:pPr algn="l"/>
+            <a:r>
+              <a:rPr sz="980" b="0" spc="-100">
+                <a:solidFill>
+                  <a:srgbClr val="868680"/>
+                </a:solidFill>
+                <a:latin typeface="Pretendard"/>
+                <a:ea typeface="Pretendard"/>
+              </a:rPr>
+              <a:t>제품명·카테고리·상황 키워드 검색 시 정보성 콘텐츠가 노출되도록 자산화. AI 답변·검색 결과에 ‘근거 있는 추천’으로 등장</a:t>
+            </a:r>
+          </a:p>
+        </p:txBody>
+      </p:sp>
+      <p:sp>
+        <p:nvSpPr>
+          <p:cNvPr id="26" name="Rounded Rectangle 25"/>
+          <p:cNvSpPr/>
+          <p:nvPr/>
+        </p:nvSpPr>
+        <p:spPr>
+          <a:xfrm>
+            <a:off x="1078992" y="5541264"/>
+            <a:ext cx="2889504" cy="329184"/>
+          </a:xfrm>
+          <a:prstGeom prst="roundRect">
+            <a:avLst>
+              <a:gd name="adj" fmla="val 8000"/>
+            </a:avLst>
+          </a:prstGeom>
+          <a:solidFill>
+            <a:srgbClr val="0E5A30"/>
+          </a:solidFill>
+          <a:ln>
+            <a:noFill/>
+          </a:ln>
+          <a:effectLst/>
+        </p:spPr>
+        <p:style>
+          <a:lnRef idx="1">
+            <a:schemeClr val="accent1"/>
+          </a:lnRef>
+          <a:fillRef idx="3">
+            <a:schemeClr val="accent1"/>
+          </a:fillRef>
+          <a:effectRef idx="2">
+            <a:schemeClr val="accent1"/>
+          </a:effectRef>
+          <a:fontRef idx="minor">
+            <a:schemeClr val="lt1"/>
+          </a:fontRef>
+        </p:style>
+        <p:txBody>
+          <a:bodyPr rtlCol="0" anchor="ctr"/>
+          <a:lstStyle/>
+          <a:p>
+            <a:pPr algn="ctr"/>
+          </a:p>
+        </p:txBody>
+      </p:sp>
+      <p:sp>
+        <p:nvSpPr>
           <p:cNvPr id="27" name="TextBox 26"/>
           <p:cNvSpPr txBox="1"/>
           <p:nvPr/>
         </p:nvSpPr>
         <p:spPr>
           <a:xfrm>
-            <a:off x="822960" y="4160520"/>
-            <a:ext cx="3346704" cy="502920"/>
+            <a:off x="1078992" y="5541264"/>
+            <a:ext cx="2889504" cy="329184"/>
           </a:xfrm>
           <a:prstGeom prst="rect">
             <a:avLst/>
@@ -12956,100 +13000,28 @@
           <a:p>
             <a:pPr algn="ctr"/>
             <a:r>
-              <a:rPr sz="1150" b="1" spc="-100">
+              <a:rPr sz="950" b="1" spc="-100">
                 <a:solidFill>
                   <a:srgbClr val="FFFFFF"/>
                 </a:solidFill>
                 <a:latin typeface="Pretendard"/>
                 <a:ea typeface="Pretendard"/>
               </a:rPr>
-              <a:t>검색 시 ‘비어 있지 않게’</a:t>
-            </a:r>
-          </a:p>
-        </p:txBody>
-      </p:sp>
-      <p:sp>
-        <p:nvSpPr>
-          <p:cNvPr id="28" name="TextBox 27"/>
-          <p:cNvSpPr txBox="1"/>
-          <p:nvPr/>
-        </p:nvSpPr>
-        <p:spPr>
-          <a:xfrm>
-            <a:off x="1051560" y="4754880"/>
-            <a:ext cx="2889504" cy="868680"/>
-          </a:xfrm>
-          <a:prstGeom prst="rect">
-            <a:avLst/>
-          </a:prstGeom>
-          <a:noFill/>
-        </p:spPr>
-        <p:txBody>
-          <a:bodyPr wrap="square" anchor="t" lIns="0" rIns="0" tIns="0" bIns="0">
-            <a:spAutoFit/>
-          </a:bodyPr>
-          <a:lstStyle/>
-          <a:p>
-            <a:pPr algn="l"/>
-            <a:r>
-              <a:rPr sz="1000" b="0" spc="-100">
-                <a:solidFill>
-                  <a:srgbClr val="868680"/>
-                </a:solidFill>
-                <a:latin typeface="Pretendard"/>
-                <a:ea typeface="Pretendard"/>
-              </a:rPr>
-              <a:t>제품·상황 키워드 검색에 정보성 콘텐츠 노출·자산화</a:t>
-            </a:r>
-          </a:p>
-        </p:txBody>
-      </p:sp>
-      <p:sp>
-        <p:nvSpPr>
-          <p:cNvPr id="29" name="TextBox 28"/>
-          <p:cNvSpPr txBox="1"/>
-          <p:nvPr/>
-        </p:nvSpPr>
-        <p:spPr>
-          <a:xfrm>
-            <a:off x="1051560" y="5559552"/>
-            <a:ext cx="2889504" cy="292608"/>
-          </a:xfrm>
-          <a:prstGeom prst="rect">
-            <a:avLst/>
-          </a:prstGeom>
-          <a:noFill/>
-        </p:spPr>
-        <p:txBody>
-          <a:bodyPr wrap="square" anchor="t" lIns="0" rIns="0" tIns="0" bIns="0">
-            <a:spAutoFit/>
-          </a:bodyPr>
-          <a:lstStyle/>
-          <a:p>
-            <a:pPr algn="l"/>
-            <a:r>
-              <a:rPr sz="950" b="1" spc="-100">
-                <a:solidFill>
-                  <a:srgbClr val="3D2B1B"/>
-                </a:solidFill>
-                <a:latin typeface="Pretendard"/>
-                <a:ea typeface="Pretendard"/>
-              </a:rPr>
-              <a:t>→ 네이버·언론보도 GEO·AEO</a:t>
-            </a:r>
-          </a:p>
-        </p:txBody>
-      </p:sp>
-      <p:sp>
-        <p:nvSpPr>
-          <p:cNvPr id="30" name="Rounded Rectangle 29"/>
+              <a:t>→  네이버·언론보도 · GEO/AEO</a:t>
+            </a:r>
+          </a:p>
+        </p:txBody>
+      </p:sp>
+      <p:sp>
+        <p:nvSpPr>
+          <p:cNvPr id="28" name="Rounded Rectangle 27"/>
           <p:cNvSpPr/>
           <p:nvPr/>
         </p:nvSpPr>
         <p:spPr>
           <a:xfrm>
-            <a:off x="4352544" y="4160520"/>
-            <a:ext cx="3346704" cy="1737360"/>
+            <a:off x="4393692" y="3401568"/>
+            <a:ext cx="3383280" cy="2505456"/>
           </a:xfrm>
           <a:prstGeom prst="roundRect">
             <a:avLst>
@@ -13090,14 +13062,14 @@
       </p:sp>
       <p:sp>
         <p:nvSpPr>
-          <p:cNvPr id="31" name="Rectangle 30"/>
+          <p:cNvPr id="29" name="Rectangle 28"/>
           <p:cNvSpPr/>
           <p:nvPr/>
         </p:nvSpPr>
         <p:spPr>
           <a:xfrm>
-            <a:off x="4352544" y="4160520"/>
-            <a:ext cx="3346704" cy="502920"/>
+            <a:off x="4393692" y="3401568"/>
+            <a:ext cx="3383280" cy="566928"/>
           </a:xfrm>
           <a:prstGeom prst="rect">
             <a:avLst/>
@@ -13134,14 +13106,94 @@
       </p:sp>
       <p:sp>
         <p:nvSpPr>
+          <p:cNvPr id="30" name="TextBox 29"/>
+          <p:cNvSpPr txBox="1"/>
+          <p:nvPr/>
+        </p:nvSpPr>
+        <p:spPr>
+          <a:xfrm>
+            <a:off x="4393692" y="3401568"/>
+            <a:ext cx="3383280" cy="566928"/>
+          </a:xfrm>
+          <a:prstGeom prst="rect">
+            <a:avLst/>
+          </a:prstGeom>
+          <a:noFill/>
+        </p:spPr>
+        <p:txBody>
+          <a:bodyPr wrap="square" anchor="ctr" lIns="0" rIns="0" tIns="0" bIns="0">
+            <a:spAutoFit/>
+          </a:bodyPr>
+          <a:lstStyle/>
+          <a:p>
+            <a:pPr algn="ctr"/>
+            <a:r>
+              <a:rPr sz="1150" b="1" spc="-100">
+                <a:solidFill>
+                  <a:srgbClr val="FFFFFF"/>
+                </a:solidFill>
+                <a:latin typeface="Pretendard"/>
+                <a:ea typeface="Pretendard"/>
+              </a:rPr>
+              <a:t>비교 시 ‘선택 근거’ 제공</a:t>
+            </a:r>
+          </a:p>
+        </p:txBody>
+      </p:sp>
+      <p:sp>
+        <p:nvSpPr>
+          <p:cNvPr id="31" name="Oval 30"/>
+          <p:cNvSpPr/>
+          <p:nvPr/>
+        </p:nvSpPr>
+        <p:spPr>
+          <a:xfrm>
+            <a:off x="4649724" y="4160520"/>
+            <a:ext cx="457200" cy="457200"/>
+          </a:xfrm>
+          <a:prstGeom prst="ellipse">
+            <a:avLst/>
+          </a:prstGeom>
+          <a:solidFill>
+            <a:srgbClr val="0E5A30"/>
+          </a:solidFill>
+          <a:ln>
+            <a:noFill/>
+          </a:ln>
+          <a:effectLst/>
+        </p:spPr>
+        <p:style>
+          <a:lnRef idx="1">
+            <a:schemeClr val="accent1"/>
+          </a:lnRef>
+          <a:fillRef idx="3">
+            <a:schemeClr val="accent1"/>
+          </a:fillRef>
+          <a:effectRef idx="2">
+            <a:schemeClr val="accent1"/>
+          </a:effectRef>
+          <a:fontRef idx="minor">
+            <a:schemeClr val="lt1"/>
+          </a:fontRef>
+        </p:style>
+        <p:txBody>
+          <a:bodyPr rtlCol="0" anchor="ctr"/>
+          <a:lstStyle/>
+          <a:p>
+            <a:pPr algn="ctr"/>
+          </a:p>
+        </p:txBody>
+      </p:sp>
+      <p:sp>
+        <p:nvSpPr>
           <p:cNvPr id="32" name="TextBox 31"/>
           <p:cNvSpPr txBox="1"/>
           <p:nvPr/>
         </p:nvSpPr>
         <p:spPr>
           <a:xfrm>
-            <a:off x="4352544" y="4160520"/>
-            <a:ext cx="3346704" cy="502920"/>
+            <a:off x="4649724" y="4160520"/>
+            <a:ext cx="457200" cy="457200"/>
           </a:xfrm>
           <a:prstGeom prst="rect">
             <a:avLst/>
@@ -13156,14 +13208,14 @@
           <a:p>
             <a:pPr algn="ctr"/>
             <a:r>
-              <a:rPr sz="1150" b="1" spc="-100">
+              <a:rPr sz="1300" b="1" spc="-100">
                 <a:solidFill>
                   <a:srgbClr val="FFFFFF"/>
                 </a:solidFill>
                 <a:latin typeface="Pretendard"/>
                 <a:ea typeface="Pretendard"/>
               </a:rPr>
-              <a:t>비교 시 ‘선택 근거’ 제공</a:t>
+              <a:t>2</a:t>
             </a:r>
           </a:p>
         </p:txBody>
@@ -13176,8 +13228,44 @@
         </p:nvSpPr>
         <p:spPr>
           <a:xfrm>
-            <a:off x="4581144" y="4754880"/>
-            <a:ext cx="2889504" cy="868680"/>
+            <a:off x="5234940" y="4160520"/>
+            <a:ext cx="2377440" cy="457200"/>
+          </a:xfrm>
+          <a:prstGeom prst="rect">
+            <a:avLst/>
+          </a:prstGeom>
+          <a:noFill/>
+        </p:spPr>
+        <p:txBody>
+          <a:bodyPr wrap="square" anchor="ctr" lIns="0" rIns="0" tIns="0" bIns="0">
+            <a:spAutoFit/>
+          </a:bodyPr>
+          <a:lstStyle/>
+          <a:p>
+            <a:pPr algn="l"/>
+            <a:r>
+              <a:rPr sz="1000" b="1" spc="-100">
+                <a:solidFill>
+                  <a:srgbClr val="3D2B1B"/>
+                </a:solidFill>
+                <a:latin typeface="Pretendard"/>
+                <a:ea typeface="Pretendard"/>
+              </a:rPr>
+              <a:t>바이럴이 채우는 지점</a:t>
+            </a:r>
+          </a:p>
+        </p:txBody>
+      </p:sp>
+      <p:sp>
+        <p:nvSpPr>
+          <p:cNvPr id="34" name="TextBox 33"/>
+          <p:cNvSpPr txBox="1"/>
+          <p:nvPr/>
+        </p:nvSpPr>
+        <p:spPr>
+          <a:xfrm>
+            <a:off x="4649724" y="4773168"/>
+            <a:ext cx="2889504" cy="914400"/>
           </a:xfrm>
           <a:prstGeom prst="rect">
             <a:avLst/>
@@ -13192,50 +13280,14 @@
           <a:p>
             <a:pPr algn="l"/>
             <a:r>
-              <a:rPr sz="1000" b="0" spc="-100">
+              <a:rPr sz="980" b="0" spc="-100">
                 <a:solidFill>
                   <a:srgbClr val="868680"/>
                 </a:solidFill>
                 <a:latin typeface="Pretendard"/>
                 <a:ea typeface="Pretendard"/>
               </a:rPr>
-              <a:t>후기·장바구니·랭킹 맥락으로 ‘선택해도 되는 제품’ 확신</a:t>
-            </a:r>
-          </a:p>
-        </p:txBody>
-      </p:sp>
-      <p:sp>
-        <p:nvSpPr>
-          <p:cNvPr id="34" name="TextBox 33"/>
-          <p:cNvSpPr txBox="1"/>
-          <p:nvPr/>
-        </p:nvSpPr>
-        <p:spPr>
-          <a:xfrm>
-            <a:off x="4581144" y="5559552"/>
-            <a:ext cx="2889504" cy="292608"/>
-          </a:xfrm>
-          <a:prstGeom prst="rect">
-            <a:avLst/>
-          </a:prstGeom>
-          <a:noFill/>
-        </p:spPr>
-        <p:txBody>
-          <a:bodyPr wrap="square" anchor="t" lIns="0" rIns="0" tIns="0" bIns="0">
-            <a:spAutoFit/>
-          </a:bodyPr>
-          <a:lstStyle/>
-          <a:p>
-            <a:pPr algn="l"/>
-            <a:r>
-              <a:rPr sz="950" b="1" spc="-100">
-                <a:solidFill>
-                  <a:srgbClr val="3D2B1B"/>
-                </a:solidFill>
-                <a:latin typeface="Pretendard"/>
-                <a:ea typeface="Pretendard"/>
-              </a:rPr>
-              <a:t>→ 커뮤니티·파워페이지</a:t>
+              <a:t>후기·장바구니·랭킹 맥락을 만들어 ‘선택해도 되는 제품’이라는 확신을 형성. 올영 외부에서도 비교·선택 근거를 채움</a:t>
             </a:r>
           </a:p>
         </p:txBody>
@@ -13248,8 +13300,90 @@
         </p:nvSpPr>
         <p:spPr>
           <a:xfrm>
-            <a:off x="7882127" y="4160520"/>
-            <a:ext cx="3346704" cy="1737360"/>
+            <a:off x="4649724" y="5541264"/>
+            <a:ext cx="2889504" cy="329184"/>
+          </a:xfrm>
+          <a:prstGeom prst="roundRect">
+            <a:avLst>
+              <a:gd name="adj" fmla="val 8000"/>
+            </a:avLst>
+          </a:prstGeom>
+          <a:solidFill>
+            <a:srgbClr val="0E5A30"/>
+          </a:solidFill>
+          <a:ln>
+            <a:noFill/>
+          </a:ln>
+          <a:effectLst/>
+        </p:spPr>
+        <p:style>
+          <a:lnRef idx="1">
+            <a:schemeClr val="accent1"/>
+          </a:lnRef>
+          <a:fillRef idx="3">
+            <a:schemeClr val="accent1"/>
+          </a:fillRef>
+          <a:effectRef idx="2">
+            <a:schemeClr val="accent1"/>
+          </a:effectRef>
+          <a:fontRef idx="minor">
+            <a:schemeClr val="lt1"/>
+          </a:fontRef>
+        </p:style>
+        <p:txBody>
+          <a:bodyPr rtlCol="0" anchor="ctr"/>
+          <a:lstStyle/>
+          <a:p>
+            <a:pPr algn="ctr"/>
+          </a:p>
+        </p:txBody>
+      </p:sp>
+      <p:sp>
+        <p:nvSpPr>
+          <p:cNvPr id="36" name="TextBox 35"/>
+          <p:cNvSpPr txBox="1"/>
+          <p:nvPr/>
+        </p:nvSpPr>
+        <p:spPr>
+          <a:xfrm>
+            <a:off x="4649724" y="5541264"/>
+            <a:ext cx="2889504" cy="329184"/>
+          </a:xfrm>
+          <a:prstGeom prst="rect">
+            <a:avLst/>
+          </a:prstGeom>
+          <a:noFill/>
+        </p:spPr>
+        <p:txBody>
+          <a:bodyPr wrap="square" anchor="ctr" lIns="0" rIns="0" tIns="0" bIns="0">
+            <a:spAutoFit/>
+          </a:bodyPr>
+          <a:lstStyle/>
+          <a:p>
+            <a:pPr algn="ctr"/>
+            <a:r>
+              <a:rPr sz="950" b="1" spc="-100">
+                <a:solidFill>
+                  <a:srgbClr val="FFFFFF"/>
+                </a:solidFill>
+                <a:latin typeface="Pretendard"/>
+                <a:ea typeface="Pretendard"/>
+              </a:rPr>
+              <a:t>→  커뮤니티 · 파워페이지</a:t>
+            </a:r>
+          </a:p>
+        </p:txBody>
+      </p:sp>
+      <p:sp>
+        <p:nvSpPr>
+          <p:cNvPr id="37" name="Rounded Rectangle 36"/>
+          <p:cNvSpPr/>
+          <p:nvPr/>
+        </p:nvSpPr>
+        <p:spPr>
+          <a:xfrm>
+            <a:off x="7964423" y="3401568"/>
+            <a:ext cx="3383280" cy="2505456"/>
           </a:xfrm>
           <a:prstGeom prst="roundRect">
             <a:avLst>
@@ -13290,14 +13424,14 @@
       </p:sp>
       <p:sp>
         <p:nvSpPr>
-          <p:cNvPr id="36" name="Rectangle 35"/>
+          <p:cNvPr id="38" name="Rectangle 37"/>
           <p:cNvSpPr/>
           <p:nvPr/>
         </p:nvSpPr>
         <p:spPr>
           <a:xfrm>
-            <a:off x="7882127" y="4160520"/>
-            <a:ext cx="3346704" cy="502920"/>
+            <a:off x="7964423" y="3401568"/>
+            <a:ext cx="3383280" cy="566928"/>
           </a:xfrm>
           <a:prstGeom prst="rect">
             <a:avLst/>
@@ -13334,14 +13468,14 @@
       </p:sp>
       <p:sp>
         <p:nvSpPr>
-          <p:cNvPr id="37" name="TextBox 36"/>
-          <p:cNvSpPr txBox="1"/>
-          <p:nvPr/>
-        </p:nvSpPr>
-        <p:spPr>
-          <a:xfrm>
-            <a:off x="7882127" y="4160520"/>
-            <a:ext cx="3346704" cy="502920"/>
+          <p:cNvPr id="39" name="TextBox 38"/>
+          <p:cNvSpPr txBox="1"/>
+          <p:nvPr/>
+        </p:nvSpPr>
+        <p:spPr>
+          <a:xfrm>
+            <a:off x="7964423" y="3401568"/>
+            <a:ext cx="3383280" cy="566928"/>
           </a:xfrm>
           <a:prstGeom prst="rect">
             <a:avLst/>
@@ -13370,14 +13504,130 @@
       </p:sp>
       <p:sp>
         <p:nvSpPr>
-          <p:cNvPr id="38" name="TextBox 37"/>
-          <p:cNvSpPr txBox="1"/>
-          <p:nvPr/>
-        </p:nvSpPr>
-        <p:spPr>
-          <a:xfrm>
-            <a:off x="8110727" y="4754880"/>
-            <a:ext cx="2889504" cy="868680"/>
+          <p:cNvPr id="40" name="Oval 39"/>
+          <p:cNvSpPr/>
+          <p:nvPr/>
+        </p:nvSpPr>
+        <p:spPr>
+          <a:xfrm>
+            <a:off x="8220455" y="4160520"/>
+            <a:ext cx="457200" cy="457200"/>
+          </a:xfrm>
+          <a:prstGeom prst="ellipse">
+            <a:avLst/>
+          </a:prstGeom>
+          <a:solidFill>
+            <a:srgbClr val="0E5A30"/>
+          </a:solidFill>
+          <a:ln>
+            <a:noFill/>
+          </a:ln>
+          <a:effectLst/>
+        </p:spPr>
+        <p:style>
+          <a:lnRef idx="1">
+            <a:schemeClr val="accent1"/>
+          </a:lnRef>
+          <a:fillRef idx="3">
+            <a:schemeClr val="accent1"/>
+          </a:fillRef>
+          <a:effectRef idx="2">
+            <a:schemeClr val="accent1"/>
+          </a:effectRef>
+          <a:fontRef idx="minor">
+            <a:schemeClr val="lt1"/>
+          </a:fontRef>
+        </p:style>
+        <p:txBody>
+          <a:bodyPr rtlCol="0" anchor="ctr"/>
+          <a:lstStyle/>
+          <a:p>
+            <a:pPr algn="ctr"/>
+          </a:p>
+        </p:txBody>
+      </p:sp>
+      <p:sp>
+        <p:nvSpPr>
+          <p:cNvPr id="41" name="TextBox 40"/>
+          <p:cNvSpPr txBox="1"/>
+          <p:nvPr/>
+        </p:nvSpPr>
+        <p:spPr>
+          <a:xfrm>
+            <a:off x="8220455" y="4160520"/>
+            <a:ext cx="457200" cy="457200"/>
+          </a:xfrm>
+          <a:prstGeom prst="rect">
+            <a:avLst/>
+          </a:prstGeom>
+          <a:noFill/>
+        </p:spPr>
+        <p:txBody>
+          <a:bodyPr wrap="square" anchor="ctr" lIns="0" rIns="0" tIns="0" bIns="0">
+            <a:spAutoFit/>
+          </a:bodyPr>
+          <a:lstStyle/>
+          <a:p>
+            <a:pPr algn="ctr"/>
+            <a:r>
+              <a:rPr sz="1300" b="1" spc="-100">
+                <a:solidFill>
+                  <a:srgbClr val="FFFFFF"/>
+                </a:solidFill>
+                <a:latin typeface="Pretendard"/>
+                <a:ea typeface="Pretendard"/>
+              </a:rPr>
+              <a:t>3</a:t>
+            </a:r>
+          </a:p>
+        </p:txBody>
+      </p:sp>
+      <p:sp>
+        <p:nvSpPr>
+          <p:cNvPr id="42" name="TextBox 41"/>
+          <p:cNvSpPr txBox="1"/>
+          <p:nvPr/>
+        </p:nvSpPr>
+        <p:spPr>
+          <a:xfrm>
+            <a:off x="8805672" y="4160520"/>
+            <a:ext cx="2377440" cy="457200"/>
+          </a:xfrm>
+          <a:prstGeom prst="rect">
+            <a:avLst/>
+          </a:prstGeom>
+          <a:noFill/>
+        </p:spPr>
+        <p:txBody>
+          <a:bodyPr wrap="square" anchor="ctr" lIns="0" rIns="0" tIns="0" bIns="0">
+            <a:spAutoFit/>
+          </a:bodyPr>
+          <a:lstStyle/>
+          <a:p>
+            <a:pPr algn="l"/>
+            <a:r>
+              <a:rPr sz="1000" b="1" spc="-100">
+                <a:solidFill>
+                  <a:srgbClr val="3D2B1B"/>
+                </a:solidFill>
+                <a:latin typeface="Pretendard"/>
+                <a:ea typeface="Pretendard"/>
+              </a:rPr>
+              <a:t>바이럴이 채우는 지점</a:t>
+            </a:r>
+          </a:p>
+        </p:txBody>
+      </p:sp>
+      <p:sp>
+        <p:nvSpPr>
+          <p:cNvPr id="43" name="TextBox 42"/>
+          <p:cNvSpPr txBox="1"/>
+          <p:nvPr/>
+        </p:nvSpPr>
+        <p:spPr>
+          <a:xfrm>
+            <a:off x="8220455" y="4773168"/>
+            <a:ext cx="2889504" cy="914400"/>
           </a:xfrm>
           <a:prstGeom prst="rect">
             <a:avLst/>
@@ -13392,57 +13642,227 @@
           <a:p>
             <a:pPr algn="l"/>
             <a:r>
-              <a:rPr sz="1000" b="0" spc="-100">
+              <a:rPr sz="980" b="0" spc="-100">
                 <a:solidFill>
                   <a:srgbClr val="868680"/>
                 </a:solidFill>
                 <a:latin typeface="Pretendard"/>
                 <a:ea typeface="Pretendard"/>
               </a:rPr>
-              <a:t>진성 구매·리뷰·랭킹 행동으로 전환, 위닝은 PA 2차</a:t>
-            </a:r>
-          </a:p>
-        </p:txBody>
-      </p:sp>
-      <p:sp>
-        <p:nvSpPr>
-          <p:cNvPr id="39" name="TextBox 38"/>
-          <p:cNvSpPr txBox="1"/>
-          <p:nvPr/>
-        </p:nvSpPr>
-        <p:spPr>
-          <a:xfrm>
-            <a:off x="8110727" y="5559552"/>
-            <a:ext cx="2889504" cy="292608"/>
-          </a:xfrm>
-          <a:prstGeom prst="rect">
-            <a:avLst/>
-          </a:prstGeom>
-          <a:noFill/>
-        </p:spPr>
-        <p:txBody>
-          <a:bodyPr wrap="square" anchor="t" lIns="0" rIns="0" tIns="0" bIns="0">
-            <a:spAutoFit/>
-          </a:bodyPr>
-          <a:lstStyle/>
-          <a:p>
-            <a:pPr algn="l"/>
+              <a:t>단순 노출이 아니라 진성 구매·리뷰·랭킹이라는 ‘행동’으로 전환. 위닝 콘텐츠는 PA 2차로 재투입</a:t>
+            </a:r>
+          </a:p>
+        </p:txBody>
+      </p:sp>
+      <p:sp>
+        <p:nvSpPr>
+          <p:cNvPr id="44" name="Rounded Rectangle 43"/>
+          <p:cNvSpPr/>
+          <p:nvPr/>
+        </p:nvSpPr>
+        <p:spPr>
+          <a:xfrm>
+            <a:off x="8220455" y="5541264"/>
+            <a:ext cx="2889504" cy="329184"/>
+          </a:xfrm>
+          <a:prstGeom prst="roundRect">
+            <a:avLst>
+              <a:gd name="adj" fmla="val 8000"/>
+            </a:avLst>
+          </a:prstGeom>
+          <a:solidFill>
+            <a:srgbClr val="0E5A30"/>
+          </a:solidFill>
+          <a:ln>
+            <a:noFill/>
+          </a:ln>
+          <a:effectLst/>
+        </p:spPr>
+        <p:style>
+          <a:lnRef idx="1">
+            <a:schemeClr val="accent1"/>
+          </a:lnRef>
+          <a:fillRef idx="3">
+            <a:schemeClr val="accent1"/>
+          </a:fillRef>
+          <a:effectRef idx="2">
+            <a:schemeClr val="accent1"/>
+          </a:effectRef>
+          <a:fontRef idx="minor">
+            <a:schemeClr val="lt1"/>
+          </a:fontRef>
+        </p:style>
+        <p:txBody>
+          <a:bodyPr rtlCol="0" anchor="ctr"/>
+          <a:lstStyle/>
+          <a:p>
+            <a:pPr algn="ctr"/>
+          </a:p>
+        </p:txBody>
+      </p:sp>
+      <p:sp>
+        <p:nvSpPr>
+          <p:cNvPr id="45" name="TextBox 44"/>
+          <p:cNvSpPr txBox="1"/>
+          <p:nvPr/>
+        </p:nvSpPr>
+        <p:spPr>
+          <a:xfrm>
+            <a:off x="8220455" y="5541264"/>
+            <a:ext cx="2889504" cy="329184"/>
+          </a:xfrm>
+          <a:prstGeom prst="rect">
+            <a:avLst/>
+          </a:prstGeom>
+          <a:noFill/>
+        </p:spPr>
+        <p:txBody>
+          <a:bodyPr wrap="square" anchor="ctr" lIns="0" rIns="0" tIns="0" bIns="0">
+            <a:spAutoFit/>
+          </a:bodyPr>
+          <a:lstStyle/>
+          <a:p>
+            <a:pPr algn="ctr"/>
             <a:r>
               <a:rPr sz="950" b="1" spc="-100">
                 <a:solidFill>
-                  <a:srgbClr val="3D2B1B"/>
-                </a:solidFill>
-                <a:latin typeface="Pretendard"/>
-                <a:ea typeface="Pretendard"/>
-              </a:rPr>
-              <a:t>→ 챌린저스·어필리에이트</a:t>
-            </a:r>
-          </a:p>
-        </p:txBody>
-      </p:sp>
-      <p:sp>
-        <p:nvSpPr>
-          <p:cNvPr id="40" name="TextBox 39"/>
+                  <a:srgbClr val="FFFFFF"/>
+                </a:solidFill>
+                <a:latin typeface="Pretendard"/>
+                <a:ea typeface="Pretendard"/>
+              </a:rPr>
+              <a:t>→  챌린저스 · 어필리에이트</a:t>
+            </a:r>
+          </a:p>
+        </p:txBody>
+      </p:sp>
+      <p:sp>
+        <p:nvSpPr>
+          <p:cNvPr id="46" name="Rectangle 45"/>
+          <p:cNvSpPr/>
+          <p:nvPr/>
+        </p:nvSpPr>
+        <p:spPr>
+          <a:xfrm>
+            <a:off x="822960" y="6144768"/>
+            <a:ext cx="10543032" cy="457200"/>
+          </a:xfrm>
+          <a:prstGeom prst="rect">
+            <a:avLst/>
+          </a:prstGeom>
+          <a:solidFill>
+            <a:srgbClr val="F3F2E7"/>
+          </a:solidFill>
+          <a:ln>
+            <a:noFill/>
+          </a:ln>
+          <a:effectLst/>
+        </p:spPr>
+        <p:style>
+          <a:lnRef idx="1">
+            <a:schemeClr val="accent1"/>
+          </a:lnRef>
+          <a:fillRef idx="3">
+            <a:schemeClr val="accent1"/>
+          </a:fillRef>
+          <a:effectRef idx="2">
+            <a:schemeClr val="accent1"/>
+          </a:effectRef>
+          <a:fontRef idx="minor">
+            <a:schemeClr val="lt1"/>
+          </a:fontRef>
+        </p:style>
+        <p:txBody>
+          <a:bodyPr rtlCol="0" anchor="ctr"/>
+          <a:lstStyle/>
+          <a:p>
+            <a:pPr algn="ctr"/>
+          </a:p>
+        </p:txBody>
+      </p:sp>
+      <p:sp>
+        <p:nvSpPr>
+          <p:cNvPr id="47" name="Rectangle 46"/>
+          <p:cNvSpPr/>
+          <p:nvPr/>
+        </p:nvSpPr>
+        <p:spPr>
+          <a:xfrm>
+            <a:off x="822960" y="6144768"/>
+            <a:ext cx="82296" cy="457200"/>
+          </a:xfrm>
+          <a:prstGeom prst="rect">
+            <a:avLst/>
+          </a:prstGeom>
+          <a:solidFill>
+            <a:srgbClr val="3D2B1B"/>
+          </a:solidFill>
+          <a:ln>
+            <a:noFill/>
+          </a:ln>
+          <a:effectLst/>
+        </p:spPr>
+        <p:style>
+          <a:lnRef idx="1">
+            <a:schemeClr val="accent1"/>
+          </a:lnRef>
+          <a:fillRef idx="3">
+            <a:schemeClr val="accent1"/>
+          </a:fillRef>
+          <a:effectRef idx="2">
+            <a:schemeClr val="accent1"/>
+          </a:effectRef>
+          <a:fontRef idx="minor">
+            <a:schemeClr val="lt1"/>
+          </a:fontRef>
+        </p:style>
+        <p:txBody>
+          <a:bodyPr rtlCol="0" anchor="ctr"/>
+          <a:lstStyle/>
+          <a:p>
+            <a:pPr algn="ctr"/>
+          </a:p>
+        </p:txBody>
+      </p:sp>
+      <p:sp>
+        <p:nvSpPr>
+          <p:cNvPr id="48" name="TextBox 47"/>
+          <p:cNvSpPr txBox="1"/>
+          <p:nvPr/>
+        </p:nvSpPr>
+        <p:spPr>
+          <a:xfrm>
+            <a:off x="1097280" y="6144768"/>
+            <a:ext cx="10058400" cy="457200"/>
+          </a:xfrm>
+          <a:prstGeom prst="rect">
+            <a:avLst/>
+          </a:prstGeom>
+          <a:noFill/>
+        </p:spPr>
+        <p:txBody>
+          <a:bodyPr wrap="square" anchor="ctr" lIns="0" rIns="0" tIns="0" bIns="0">
+            <a:spAutoFit/>
+          </a:bodyPr>
+          <a:lstStyle/>
+          <a:p>
+            <a:pPr algn="ctr"/>
+            <a:r>
+              <a:rPr sz="1250" b="1" spc="-100">
+                <a:solidFill>
+                  <a:srgbClr val="141412"/>
+                </a:solidFill>
+                <a:latin typeface="Pretendard"/>
+                <a:ea typeface="Pretendard"/>
+              </a:rPr>
+              <a:t>바이럴 = 노출 + 구매 직전 ‘확신’의 밀도 — 검증·신뢰 단계를 채운다</a:t>
+            </a:r>
+          </a:p>
+        </p:txBody>
+      </p:sp>
+      <p:sp>
+        <p:nvSpPr>
+          <p:cNvPr id="49" name="TextBox 48"/>
           <p:cNvSpPr txBox="1"/>
           <p:nvPr/>
         </p:nvSpPr>
@@ -13650,13 +14070,59 @@
       </p:sp>
       <p:sp>
         <p:nvSpPr>
-          <p:cNvPr id="6" name="Oval 5"/>
+          <p:cNvPr id="6" name="Rounded Rectangle 5"/>
           <p:cNvSpPr/>
           <p:nvPr/>
         </p:nvSpPr>
         <p:spPr>
           <a:xfrm>
-            <a:off x="1727072" y="2240280"/>
+            <a:off x="822960" y="2103120"/>
+            <a:ext cx="10543032" cy="1755648"/>
+          </a:xfrm>
+          <a:prstGeom prst="roundRect">
+            <a:avLst>
+              <a:gd name="adj" fmla="val 8000"/>
+            </a:avLst>
+          </a:prstGeom>
+          <a:solidFill>
+            <a:srgbClr val="F3F2E7"/>
+          </a:solidFill>
+          <a:ln>
+            <a:noFill/>
+          </a:ln>
+          <a:effectLst/>
+        </p:spPr>
+        <p:style>
+          <a:lnRef idx="1">
+            <a:schemeClr val="accent1"/>
+          </a:lnRef>
+          <a:fillRef idx="3">
+            <a:schemeClr val="accent1"/>
+          </a:fillRef>
+          <a:effectRef idx="2">
+            <a:schemeClr val="accent1"/>
+          </a:effectRef>
+          <a:fontRef idx="minor">
+            <a:schemeClr val="lt1"/>
+          </a:fontRef>
+        </p:style>
+        <p:txBody>
+          <a:bodyPr rtlCol="0" anchor="ctr"/>
+          <a:lstStyle/>
+          <a:p>
+            <a:pPr algn="ctr"/>
+          </a:p>
+        </p:txBody>
+      </p:sp>
+      <p:sp>
+        <p:nvSpPr>
+          <p:cNvPr id="7" name="Oval 6"/>
+          <p:cNvSpPr/>
+          <p:nvPr/>
+        </p:nvSpPr>
+        <p:spPr>
+          <a:xfrm>
+            <a:off x="1826513" y="2286000"/>
             <a:ext cx="621792" cy="621792"/>
           </a:xfrm>
           <a:prstGeom prst="ellipse">
@@ -13694,13 +14160,13 @@
       </p:sp>
       <p:sp>
         <p:nvSpPr>
-          <p:cNvPr id="7" name="TextBox 6"/>
-          <p:cNvSpPr txBox="1"/>
-          <p:nvPr/>
-        </p:nvSpPr>
-        <p:spPr>
-          <a:xfrm>
-            <a:off x="1727072" y="2240280"/>
+          <p:cNvPr id="8" name="TextBox 7"/>
+          <p:cNvSpPr txBox="1"/>
+          <p:nvPr/>
+        </p:nvSpPr>
+        <p:spPr>
+          <a:xfrm>
+            <a:off x="1826513" y="2286000"/>
             <a:ext cx="621792" cy="621792"/>
           </a:xfrm>
           <a:prstGeom prst="rect">
@@ -13730,14 +14196,14 @@
       </p:sp>
       <p:sp>
         <p:nvSpPr>
-          <p:cNvPr id="8" name="TextBox 7"/>
-          <p:cNvSpPr txBox="1"/>
-          <p:nvPr/>
-        </p:nvSpPr>
-        <p:spPr>
-          <a:xfrm>
-            <a:off x="822960" y="2971800"/>
-            <a:ext cx="2430018" cy="457200"/>
+          <p:cNvPr id="9" name="TextBox 8"/>
+          <p:cNvSpPr txBox="1"/>
+          <p:nvPr/>
+        </p:nvSpPr>
+        <p:spPr>
+          <a:xfrm>
+            <a:off x="960119" y="3017520"/>
+            <a:ext cx="2354580" cy="457200"/>
           </a:xfrm>
           <a:prstGeom prst="rect">
             <a:avLst/>
@@ -13766,14 +14232,14 @@
       </p:sp>
       <p:sp>
         <p:nvSpPr>
-          <p:cNvPr id="9" name="TextBox 8"/>
-          <p:cNvSpPr txBox="1"/>
-          <p:nvPr/>
-        </p:nvSpPr>
-        <p:spPr>
-          <a:xfrm>
-            <a:off x="868680" y="3447288"/>
-            <a:ext cx="2338578" cy="1097280"/>
+          <p:cNvPr id="10" name="TextBox 9"/>
+          <p:cNvSpPr txBox="1"/>
+          <p:nvPr/>
+        </p:nvSpPr>
+        <p:spPr>
+          <a:xfrm>
+            <a:off x="1005839" y="3493008"/>
+            <a:ext cx="2263140" cy="1097280"/>
           </a:xfrm>
           <a:prstGeom prst="rect">
             <a:avLst/>
@@ -13795,20 +14261,20 @@
                 <a:latin typeface="Pretendard"/>
                 <a:ea typeface="Pretendard"/>
               </a:rPr>
-              <a:t>습관 앱 챌린저스 내 미션 개설(실구매 의사 유저)</a:t>
-            </a:r>
-          </a:p>
-        </p:txBody>
-      </p:sp>
-      <p:sp>
-        <p:nvSpPr>
-          <p:cNvPr id="10" name="Chevron 9"/>
+              <a:t>습관 앱 챌린저스 내 미션 개설 (실구매 의사 유저 타겟)</a:t>
+            </a:r>
+          </a:p>
+        </p:txBody>
+      </p:sp>
+      <p:sp>
+        <p:nvSpPr>
+          <p:cNvPr id="11" name="Chevron 10"/>
           <p:cNvSpPr/>
           <p:nvPr/>
         </p:nvSpPr>
         <p:spPr>
           <a:xfrm>
-            <a:off x="3207258" y="2423160"/>
+            <a:off x="3268979" y="2468880"/>
             <a:ext cx="365760" cy="256032"/>
           </a:xfrm>
           <a:prstGeom prst="chevron">
@@ -13846,13 +14312,13 @@
       </p:sp>
       <p:sp>
         <p:nvSpPr>
-          <p:cNvPr id="11" name="Oval 10"/>
+          <p:cNvPr id="12" name="Oval 11"/>
           <p:cNvSpPr/>
           <p:nvPr/>
         </p:nvSpPr>
         <p:spPr>
           <a:xfrm>
-            <a:off x="4431411" y="2240280"/>
+            <a:off x="4455414" y="2286000"/>
             <a:ext cx="621792" cy="621792"/>
           </a:xfrm>
           <a:prstGeom prst="ellipse">
@@ -13890,13 +14356,13 @@
       </p:sp>
       <p:sp>
         <p:nvSpPr>
-          <p:cNvPr id="12" name="TextBox 11"/>
-          <p:cNvSpPr txBox="1"/>
-          <p:nvPr/>
-        </p:nvSpPr>
-        <p:spPr>
-          <a:xfrm>
-            <a:off x="4431411" y="2240280"/>
+          <p:cNvPr id="13" name="TextBox 12"/>
+          <p:cNvSpPr txBox="1"/>
+          <p:nvPr/>
+        </p:nvSpPr>
+        <p:spPr>
+          <a:xfrm>
+            <a:off x="4455414" y="2286000"/>
             <a:ext cx="621792" cy="621792"/>
           </a:xfrm>
           <a:prstGeom prst="rect">
@@ -13926,14 +14392,14 @@
       </p:sp>
       <p:sp>
         <p:nvSpPr>
-          <p:cNvPr id="13" name="TextBox 12"/>
-          <p:cNvSpPr txBox="1"/>
-          <p:nvPr/>
-        </p:nvSpPr>
-        <p:spPr>
-          <a:xfrm>
-            <a:off x="3527298" y="2971800"/>
-            <a:ext cx="2430018" cy="457200"/>
+          <p:cNvPr id="14" name="TextBox 13"/>
+          <p:cNvSpPr txBox="1"/>
+          <p:nvPr/>
+        </p:nvSpPr>
+        <p:spPr>
+          <a:xfrm>
+            <a:off x="3589020" y="3017520"/>
+            <a:ext cx="2354580" cy="457200"/>
           </a:xfrm>
           <a:prstGeom prst="rect">
             <a:avLst/>
@@ -13962,14 +14428,14 @@
       </p:sp>
       <p:sp>
         <p:nvSpPr>
-          <p:cNvPr id="14" name="TextBox 13"/>
-          <p:cNvSpPr txBox="1"/>
-          <p:nvPr/>
-        </p:nvSpPr>
-        <p:spPr>
-          <a:xfrm>
-            <a:off x="3573018" y="3447288"/>
-            <a:ext cx="2338578" cy="1097280"/>
+          <p:cNvPr id="15" name="TextBox 14"/>
+          <p:cNvSpPr txBox="1"/>
+          <p:nvPr/>
+        </p:nvSpPr>
+        <p:spPr>
+          <a:xfrm>
+            <a:off x="3634740" y="3493008"/>
+            <a:ext cx="2263140" cy="1097280"/>
           </a:xfrm>
           <a:prstGeom prst="rect">
             <a:avLst/>
@@ -13998,13 +14464,13 @@
       </p:sp>
       <p:sp>
         <p:nvSpPr>
-          <p:cNvPr id="15" name="Chevron 14"/>
+          <p:cNvPr id="16" name="Chevron 15"/>
           <p:cNvSpPr/>
           <p:nvPr/>
         </p:nvSpPr>
         <p:spPr>
           <a:xfrm>
-            <a:off x="5911596" y="2423160"/>
+            <a:off x="5897880" y="2468880"/>
             <a:ext cx="365760" cy="256032"/>
           </a:xfrm>
           <a:prstGeom prst="chevron">
@@ -14042,13 +14508,13 @@
       </p:sp>
       <p:sp>
         <p:nvSpPr>
-          <p:cNvPr id="16" name="Oval 15"/>
+          <p:cNvPr id="17" name="Oval 16"/>
           <p:cNvSpPr/>
           <p:nvPr/>
         </p:nvSpPr>
         <p:spPr>
           <a:xfrm>
-            <a:off x="7135749" y="2240280"/>
+            <a:off x="7084314" y="2286000"/>
             <a:ext cx="621792" cy="621792"/>
           </a:xfrm>
           <a:prstGeom prst="ellipse">
@@ -14086,13 +14552,13 @@
       </p:sp>
       <p:sp>
         <p:nvSpPr>
-          <p:cNvPr id="17" name="TextBox 16"/>
-          <p:cNvSpPr txBox="1"/>
-          <p:nvPr/>
-        </p:nvSpPr>
-        <p:spPr>
-          <a:xfrm>
-            <a:off x="7135749" y="2240280"/>
+          <p:cNvPr id="18" name="TextBox 17"/>
+          <p:cNvSpPr txBox="1"/>
+          <p:nvPr/>
+        </p:nvSpPr>
+        <p:spPr>
+          <a:xfrm>
+            <a:off x="7084314" y="2286000"/>
             <a:ext cx="621792" cy="621792"/>
           </a:xfrm>
           <a:prstGeom prst="rect">
@@ -14122,14 +14588,14 @@
       </p:sp>
       <p:sp>
         <p:nvSpPr>
-          <p:cNvPr id="18" name="TextBox 17"/>
-          <p:cNvSpPr txBox="1"/>
-          <p:nvPr/>
-        </p:nvSpPr>
-        <p:spPr>
-          <a:xfrm>
-            <a:off x="6231636" y="2971800"/>
-            <a:ext cx="2430018" cy="457200"/>
+          <p:cNvPr id="19" name="TextBox 18"/>
+          <p:cNvSpPr txBox="1"/>
+          <p:nvPr/>
+        </p:nvSpPr>
+        <p:spPr>
+          <a:xfrm>
+            <a:off x="6217920" y="3017520"/>
+            <a:ext cx="2354580" cy="457200"/>
           </a:xfrm>
           <a:prstGeom prst="rect">
             <a:avLst/>
@@ -14158,14 +14624,14 @@
       </p:sp>
       <p:sp>
         <p:nvSpPr>
-          <p:cNvPr id="19" name="TextBox 18"/>
-          <p:cNvSpPr txBox="1"/>
-          <p:nvPr/>
-        </p:nvSpPr>
-        <p:spPr>
-          <a:xfrm>
-            <a:off x="6277356" y="3447288"/>
-            <a:ext cx="2338578" cy="1097280"/>
+          <p:cNvPr id="20" name="TextBox 19"/>
+          <p:cNvSpPr txBox="1"/>
+          <p:nvPr/>
+        </p:nvSpPr>
+        <p:spPr>
+          <a:xfrm>
+            <a:off x="6263640" y="3493008"/>
+            <a:ext cx="2263140" cy="1097280"/>
           </a:xfrm>
           <a:prstGeom prst="rect">
             <a:avLst/>
@@ -14187,20 +14653,20 @@
                 <a:latin typeface="Pretendard"/>
                 <a:ea typeface="Pretendard"/>
               </a:rPr>
-              <a:t>구매·사용·올영 리뷰 업로드를 ‘인증’</a:t>
-            </a:r>
-          </a:p>
-        </p:txBody>
-      </p:sp>
-      <p:sp>
-        <p:nvSpPr>
-          <p:cNvPr id="20" name="Chevron 19"/>
+              <a:t>구매·사용·올영 리뷰 업로드를 ‘인증’으로 수행</a:t>
+            </a:r>
+          </a:p>
+        </p:txBody>
+      </p:sp>
+      <p:sp>
+        <p:nvSpPr>
+          <p:cNvPr id="21" name="Chevron 20"/>
           <p:cNvSpPr/>
           <p:nvPr/>
         </p:nvSpPr>
         <p:spPr>
           <a:xfrm>
-            <a:off x="8615934" y="2423160"/>
+            <a:off x="8526780" y="2468880"/>
             <a:ext cx="365760" cy="256032"/>
           </a:xfrm>
           <a:prstGeom prst="chevron">
@@ -14238,13 +14704,13 @@
       </p:sp>
       <p:sp>
         <p:nvSpPr>
-          <p:cNvPr id="21" name="Oval 20"/>
+          <p:cNvPr id="22" name="Oval 21"/>
           <p:cNvSpPr/>
           <p:nvPr/>
         </p:nvSpPr>
         <p:spPr>
           <a:xfrm>
-            <a:off x="9840087" y="2240280"/>
+            <a:off x="9713214" y="2286000"/>
             <a:ext cx="621792" cy="621792"/>
           </a:xfrm>
           <a:prstGeom prst="ellipse">
@@ -14282,13 +14748,13 @@
       </p:sp>
       <p:sp>
         <p:nvSpPr>
-          <p:cNvPr id="22" name="TextBox 21"/>
-          <p:cNvSpPr txBox="1"/>
-          <p:nvPr/>
-        </p:nvSpPr>
-        <p:spPr>
-          <a:xfrm>
-            <a:off x="9840087" y="2240280"/>
+          <p:cNvPr id="23" name="TextBox 22"/>
+          <p:cNvSpPr txBox="1"/>
+          <p:nvPr/>
+        </p:nvSpPr>
+        <p:spPr>
+          <a:xfrm>
+            <a:off x="9713214" y="2286000"/>
             <a:ext cx="621792" cy="621792"/>
           </a:xfrm>
           <a:prstGeom prst="rect">
@@ -14318,14 +14784,14 @@
       </p:sp>
       <p:sp>
         <p:nvSpPr>
-          <p:cNvPr id="23" name="TextBox 22"/>
-          <p:cNvSpPr txBox="1"/>
-          <p:nvPr/>
-        </p:nvSpPr>
-        <p:spPr>
-          <a:xfrm>
-            <a:off x="8935974" y="2971800"/>
-            <a:ext cx="2430018" cy="457200"/>
+          <p:cNvPr id="24" name="TextBox 23"/>
+          <p:cNvSpPr txBox="1"/>
+          <p:nvPr/>
+        </p:nvSpPr>
+        <p:spPr>
+          <a:xfrm>
+            <a:off x="8846820" y="3017520"/>
+            <a:ext cx="2354580" cy="457200"/>
           </a:xfrm>
           <a:prstGeom prst="rect">
             <a:avLst/>
@@ -14354,14 +14820,14 @@
       </p:sp>
       <p:sp>
         <p:nvSpPr>
-          <p:cNvPr id="24" name="TextBox 23"/>
-          <p:cNvSpPr txBox="1"/>
-          <p:nvPr/>
-        </p:nvSpPr>
-        <p:spPr>
-          <a:xfrm>
-            <a:off x="8981694" y="3447288"/>
-            <a:ext cx="2338578" cy="1097280"/>
+          <p:cNvPr id="25" name="TextBox 24"/>
+          <p:cNvSpPr txBox="1"/>
+          <p:nvPr/>
+        </p:nvSpPr>
+        <p:spPr>
+          <a:xfrm>
+            <a:off x="8892540" y="3493008"/>
+            <a:ext cx="2263140" cy="1097280"/>
           </a:xfrm>
           <a:prstGeom prst="rect">
             <a:avLst/>
@@ -14390,14 +14856,188 @@
       </p:sp>
       <p:sp>
         <p:nvSpPr>
-          <p:cNvPr id="25" name="TextBox 24"/>
-          <p:cNvSpPr txBox="1"/>
-          <p:nvPr/>
-        </p:nvSpPr>
-        <p:spPr>
-          <a:xfrm>
-            <a:off x="822960" y="4297680"/>
-            <a:ext cx="10515600" cy="310896"/>
+          <p:cNvPr id="26" name="Rounded Rectangle 25"/>
+          <p:cNvSpPr/>
+          <p:nvPr/>
+        </p:nvSpPr>
+        <p:spPr>
+          <a:xfrm>
+            <a:off x="822960" y="4023360"/>
+            <a:ext cx="10543032" cy="548640"/>
+          </a:xfrm>
+          <a:prstGeom prst="roundRect">
+            <a:avLst>
+              <a:gd name="adj" fmla="val 8000"/>
+            </a:avLst>
+          </a:prstGeom>
+          <a:solidFill>
+            <a:srgbClr val="3D2B1B"/>
+          </a:solidFill>
+          <a:ln>
+            <a:noFill/>
+          </a:ln>
+          <a:effectLst/>
+        </p:spPr>
+        <p:style>
+          <a:lnRef idx="1">
+            <a:schemeClr val="accent1"/>
+          </a:lnRef>
+          <a:fillRef idx="3">
+            <a:schemeClr val="accent1"/>
+          </a:fillRef>
+          <a:effectRef idx="2">
+            <a:schemeClr val="accent1"/>
+          </a:effectRef>
+          <a:fontRef idx="minor">
+            <a:schemeClr val="lt1"/>
+          </a:fontRef>
+        </p:style>
+        <p:txBody>
+          <a:bodyPr rtlCol="0" anchor="ctr"/>
+          <a:lstStyle/>
+          <a:p>
+            <a:pPr algn="ctr"/>
+          </a:p>
+        </p:txBody>
+      </p:sp>
+      <p:sp>
+        <p:nvSpPr>
+          <p:cNvPr id="27" name="TextBox 26"/>
+          <p:cNvSpPr txBox="1"/>
+          <p:nvPr/>
+        </p:nvSpPr>
+        <p:spPr>
+          <a:xfrm>
+            <a:off x="1097280" y="4023360"/>
+            <a:ext cx="10058400" cy="548640"/>
+          </a:xfrm>
+          <a:prstGeom prst="rect">
+            <a:avLst/>
+          </a:prstGeom>
+          <a:noFill/>
+        </p:spPr>
+        <p:txBody>
+          <a:bodyPr wrap="square" anchor="ctr" lIns="0" rIns="0" tIns="0" bIns="0">
+            <a:spAutoFit/>
+          </a:bodyPr>
+          <a:lstStyle/>
+          <a:p>
+            <a:pPr algn="l"/>
+            <a:r>
+              <a:rPr sz="1250" b="1" spc="-100">
+                <a:solidFill>
+                  <a:srgbClr val="FFFFFF"/>
+                </a:solidFill>
+                <a:latin typeface="Pretendard"/>
+                <a:ea typeface="Pretendard"/>
+              </a:rPr>
+              <a:t>목표 — 올더베러의 올리브영 카테고리 랭킹 1위 달성 · know-how 기반 전략 운영 배치</a:t>
+            </a:r>
+          </a:p>
+        </p:txBody>
+      </p:sp>
+      <p:sp>
+        <p:nvSpPr>
+          <p:cNvPr id="28" name="Rounded Rectangle 27"/>
+          <p:cNvSpPr/>
+          <p:nvPr/>
+        </p:nvSpPr>
+        <p:spPr>
+          <a:xfrm>
+            <a:off x="822960" y="4709160"/>
+            <a:ext cx="2487168" cy="1188720"/>
+          </a:xfrm>
+          <a:prstGeom prst="roundRect">
+            <a:avLst>
+              <a:gd name="adj" fmla="val 8000"/>
+            </a:avLst>
+          </a:prstGeom>
+          <a:solidFill>
+            <a:srgbClr val="FFFFFF"/>
+          </a:solidFill>
+          <a:ln w="12700">
+            <a:solidFill>
+              <a:srgbClr val="C9C4B8"/>
+            </a:solidFill>
+          </a:ln>
+          <a:effectLst/>
+        </p:spPr>
+        <p:style>
+          <a:lnRef idx="1">
+            <a:schemeClr val="accent1"/>
+          </a:lnRef>
+          <a:fillRef idx="3">
+            <a:schemeClr val="accent1"/>
+          </a:fillRef>
+          <a:effectRef idx="2">
+            <a:schemeClr val="accent1"/>
+          </a:effectRef>
+          <a:fontRef idx="minor">
+            <a:schemeClr val="lt1"/>
+          </a:fontRef>
+        </p:style>
+        <p:txBody>
+          <a:bodyPr rtlCol="0" anchor="ctr"/>
+          <a:lstStyle/>
+          <a:p>
+            <a:pPr algn="ctr"/>
+          </a:p>
+        </p:txBody>
+      </p:sp>
+      <p:sp>
+        <p:nvSpPr>
+          <p:cNvPr id="29" name="Rectangle 28"/>
+          <p:cNvSpPr/>
+          <p:nvPr/>
+        </p:nvSpPr>
+        <p:spPr>
+          <a:xfrm>
+            <a:off x="822960" y="4709160"/>
+            <a:ext cx="73152" cy="1188720"/>
+          </a:xfrm>
+          <a:prstGeom prst="rect">
+            <a:avLst/>
+          </a:prstGeom>
+          <a:solidFill>
+            <a:srgbClr val="0E5A30"/>
+          </a:solidFill>
+          <a:ln>
+            <a:noFill/>
+          </a:ln>
+          <a:effectLst/>
+        </p:spPr>
+        <p:style>
+          <a:lnRef idx="1">
+            <a:schemeClr val="accent1"/>
+          </a:lnRef>
+          <a:fillRef idx="3">
+            <a:schemeClr val="accent1"/>
+          </a:fillRef>
+          <a:effectRef idx="2">
+            <a:schemeClr val="accent1"/>
+          </a:effectRef>
+          <a:fontRef idx="minor">
+            <a:schemeClr val="lt1"/>
+          </a:fontRef>
+        </p:style>
+        <p:txBody>
+          <a:bodyPr rtlCol="0" anchor="ctr"/>
+          <a:lstStyle/>
+          <a:p>
+            <a:pPr algn="ctr"/>
+          </a:p>
+        </p:txBody>
+      </p:sp>
+      <p:sp>
+        <p:nvSpPr>
+          <p:cNvPr id="30" name="TextBox 29"/>
+          <p:cNvSpPr txBox="1"/>
+          <p:nvPr/>
+        </p:nvSpPr>
+        <p:spPr>
+          <a:xfrm>
+            <a:off x="1042416" y="4828032"/>
+            <a:ext cx="2194560" cy="274320"/>
           </a:xfrm>
           <a:prstGeom prst="rect">
             <a:avLst/>
@@ -14412,135 +15052,549 @@
           <a:p>
             <a:pPr algn="l"/>
             <a:r>
-              <a:rPr sz="1250" b="1" spc="-100">
-                <a:solidFill>
-                  <a:srgbClr val="141412"/>
-                </a:solidFill>
-                <a:latin typeface="Pretendard"/>
-                <a:ea typeface="Pretendard"/>
-              </a:rPr>
-              <a:t>왜 효과적인가</a:t>
-            </a:r>
-          </a:p>
-        </p:txBody>
-      </p:sp>
-      <p:sp>
-        <p:nvSpPr>
-          <p:cNvPr id="26" name="TextBox 25"/>
-          <p:cNvSpPr txBox="1"/>
-          <p:nvPr/>
-        </p:nvSpPr>
-        <p:spPr>
-          <a:xfrm>
-            <a:off x="822960" y="4663440"/>
-            <a:ext cx="5212080" cy="1371600"/>
-          </a:xfrm>
-          <a:prstGeom prst="rect">
-            <a:avLst/>
-          </a:prstGeom>
-          <a:noFill/>
-        </p:spPr>
-        <p:txBody>
-          <a:bodyPr wrap="square" lIns="0" rIns="0" tIns="0" bIns="0">
-            <a:spAutoFit/>
-          </a:bodyPr>
-          <a:lstStyle/>
-          <a:p>
-            <a:pPr>
-              <a:spcAft>
-                <a:spcPts val="600"/>
-              </a:spcAft>
-            </a:pPr>
-            <a:r>
-              <a:rPr sz="1100" b="0" spc="-100">
+              <a:rPr sz="1100" b="1" spc="-100">
+                <a:solidFill>
+                  <a:srgbClr val="3D2B1B"/>
+                </a:solidFill>
+                <a:latin typeface="Pretendard"/>
+                <a:ea typeface="Pretendard"/>
+              </a:rPr>
+              <a:t>올영 PB 신뢰</a:t>
+            </a:r>
+          </a:p>
+        </p:txBody>
+      </p:sp>
+      <p:sp>
+        <p:nvSpPr>
+          <p:cNvPr id="31" name="TextBox 30"/>
+          <p:cNvSpPr txBox="1"/>
+          <p:nvPr/>
+        </p:nvSpPr>
+        <p:spPr>
+          <a:xfrm>
+            <a:off x="1042416" y="5138928"/>
+            <a:ext cx="2212848" cy="731520"/>
+          </a:xfrm>
+          <a:prstGeom prst="rect">
+            <a:avLst/>
+          </a:prstGeom>
+          <a:noFill/>
+        </p:spPr>
+        <p:txBody>
+          <a:bodyPr wrap="square" anchor="t" lIns="0" rIns="0" tIns="0" bIns="0">
+            <a:spAutoFit/>
+          </a:bodyPr>
+          <a:lstStyle/>
+          <a:p>
+            <a:pPr algn="l"/>
+            <a:r>
+              <a:rPr sz="930" b="0" spc="-100">
                 <a:solidFill>
                   <a:srgbClr val="868680"/>
                 </a:solidFill>
                 <a:latin typeface="Pretendard"/>
                 <a:ea typeface="Pretendard"/>
               </a:rPr>
-              <a:t>·  올영이 만든 웰니스 PB로 올영 랭킹 1위 달성</a:t>
-            </a:r>
-          </a:p>
-          <a:p>
-            <a:pPr>
-              <a:spcAft>
-                <a:spcPts val="600"/>
-              </a:spcAft>
-            </a:pPr>
-            <a:r>
-              <a:rPr sz="1100" b="0" spc="-100">
+              <a:t>올영이 만든 웰니스 PB로 올영 랭킹 1위 달성</a:t>
+            </a:r>
+          </a:p>
+        </p:txBody>
+      </p:sp>
+      <p:sp>
+        <p:nvSpPr>
+          <p:cNvPr id="32" name="Rounded Rectangle 31"/>
+          <p:cNvSpPr/>
+          <p:nvPr/>
+        </p:nvSpPr>
+        <p:spPr>
+          <a:xfrm>
+            <a:off x="3479291" y="4709160"/>
+            <a:ext cx="2487168" cy="1188720"/>
+          </a:xfrm>
+          <a:prstGeom prst="roundRect">
+            <a:avLst>
+              <a:gd name="adj" fmla="val 8000"/>
+            </a:avLst>
+          </a:prstGeom>
+          <a:solidFill>
+            <a:srgbClr val="FFFFFF"/>
+          </a:solidFill>
+          <a:ln w="12700">
+            <a:solidFill>
+              <a:srgbClr val="C9C4B8"/>
+            </a:solidFill>
+          </a:ln>
+          <a:effectLst/>
+        </p:spPr>
+        <p:style>
+          <a:lnRef idx="1">
+            <a:schemeClr val="accent1"/>
+          </a:lnRef>
+          <a:fillRef idx="3">
+            <a:schemeClr val="accent1"/>
+          </a:fillRef>
+          <a:effectRef idx="2">
+            <a:schemeClr val="accent1"/>
+          </a:effectRef>
+          <a:fontRef idx="minor">
+            <a:schemeClr val="lt1"/>
+          </a:fontRef>
+        </p:style>
+        <p:txBody>
+          <a:bodyPr rtlCol="0" anchor="ctr"/>
+          <a:lstStyle/>
+          <a:p>
+            <a:pPr algn="ctr"/>
+          </a:p>
+        </p:txBody>
+      </p:sp>
+      <p:sp>
+        <p:nvSpPr>
+          <p:cNvPr id="33" name="Rectangle 32"/>
+          <p:cNvSpPr/>
+          <p:nvPr/>
+        </p:nvSpPr>
+        <p:spPr>
+          <a:xfrm>
+            <a:off x="3479291" y="4709160"/>
+            <a:ext cx="73152" cy="1188720"/>
+          </a:xfrm>
+          <a:prstGeom prst="rect">
+            <a:avLst/>
+          </a:prstGeom>
+          <a:solidFill>
+            <a:srgbClr val="0E5A30"/>
+          </a:solidFill>
+          <a:ln>
+            <a:noFill/>
+          </a:ln>
+          <a:effectLst/>
+        </p:spPr>
+        <p:style>
+          <a:lnRef idx="1">
+            <a:schemeClr val="accent1"/>
+          </a:lnRef>
+          <a:fillRef idx="3">
+            <a:schemeClr val="accent1"/>
+          </a:fillRef>
+          <a:effectRef idx="2">
+            <a:schemeClr val="accent1"/>
+          </a:effectRef>
+          <a:fontRef idx="minor">
+            <a:schemeClr val="lt1"/>
+          </a:fontRef>
+        </p:style>
+        <p:txBody>
+          <a:bodyPr rtlCol="0" anchor="ctr"/>
+          <a:lstStyle/>
+          <a:p>
+            <a:pPr algn="ctr"/>
+          </a:p>
+        </p:txBody>
+      </p:sp>
+      <p:sp>
+        <p:nvSpPr>
+          <p:cNvPr id="34" name="TextBox 33"/>
+          <p:cNvSpPr txBox="1"/>
+          <p:nvPr/>
+        </p:nvSpPr>
+        <p:spPr>
+          <a:xfrm>
+            <a:off x="3698748" y="4828032"/>
+            <a:ext cx="2194560" cy="274320"/>
+          </a:xfrm>
+          <a:prstGeom prst="rect">
+            <a:avLst/>
+          </a:prstGeom>
+          <a:noFill/>
+        </p:spPr>
+        <p:txBody>
+          <a:bodyPr wrap="square" anchor="t" lIns="0" rIns="0" tIns="0" bIns="0">
+            <a:spAutoFit/>
+          </a:bodyPr>
+          <a:lstStyle/>
+          <a:p>
+            <a:pPr algn="l"/>
+            <a:r>
+              <a:rPr sz="1100" b="1" spc="-100">
+                <a:solidFill>
+                  <a:srgbClr val="3D2B1B"/>
+                </a:solidFill>
+                <a:latin typeface="Pretendard"/>
+                <a:ea typeface="Pretendard"/>
+              </a:rPr>
+              <a:t>‘1위’ 키워드</a:t>
+            </a:r>
+          </a:p>
+        </p:txBody>
+      </p:sp>
+      <p:sp>
+        <p:nvSpPr>
+          <p:cNvPr id="35" name="TextBox 34"/>
+          <p:cNvSpPr txBox="1"/>
+          <p:nvPr/>
+        </p:nvSpPr>
+        <p:spPr>
+          <a:xfrm>
+            <a:off x="3698748" y="5138928"/>
+            <a:ext cx="2212848" cy="731520"/>
+          </a:xfrm>
+          <a:prstGeom prst="rect">
+            <a:avLst/>
+          </a:prstGeom>
+          <a:noFill/>
+        </p:spPr>
+        <p:txBody>
+          <a:bodyPr wrap="square" anchor="t" lIns="0" rIns="0" tIns="0" bIns="0">
+            <a:spAutoFit/>
+          </a:bodyPr>
+          <a:lstStyle/>
+          <a:p>
+            <a:pPr algn="l"/>
+            <a:r>
+              <a:rPr sz="930" b="0" spc="-100">
                 <a:solidFill>
                   <a:srgbClr val="868680"/>
                 </a:solidFill>
                 <a:latin typeface="Pretendard"/>
                 <a:ea typeface="Pretendard"/>
               </a:rPr>
-              <a:t>·  ‘1위’ 키워드 플레이로 신뢰성 획득</a:t>
-            </a:r>
-          </a:p>
-        </p:txBody>
-      </p:sp>
-      <p:sp>
-        <p:nvSpPr>
-          <p:cNvPr id="27" name="TextBox 26"/>
-          <p:cNvSpPr txBox="1"/>
-          <p:nvPr/>
-        </p:nvSpPr>
-        <p:spPr>
-          <a:xfrm>
-            <a:off x="6217920" y="4663440"/>
-            <a:ext cx="5120640" cy="1371600"/>
-          </a:xfrm>
-          <a:prstGeom prst="rect">
-            <a:avLst/>
-          </a:prstGeom>
-          <a:noFill/>
-        </p:spPr>
-        <p:txBody>
-          <a:bodyPr wrap="square" lIns="0" rIns="0" tIns="0" bIns="0">
-            <a:spAutoFit/>
-          </a:bodyPr>
-          <a:lstStyle/>
-          <a:p>
-            <a:pPr>
-              <a:spcAft>
-                <a:spcPts val="600"/>
-              </a:spcAft>
-            </a:pPr>
-            <a:r>
-              <a:rPr sz="1100" b="0" spc="-100">
+              <a:t>랭킹 달성 후 ‘1위’ 키워드 플레이로 신뢰성 획득</a:t>
+            </a:r>
+          </a:p>
+        </p:txBody>
+      </p:sp>
+      <p:sp>
+        <p:nvSpPr>
+          <p:cNvPr id="36" name="Rounded Rectangle 35"/>
+          <p:cNvSpPr/>
+          <p:nvPr/>
+        </p:nvSpPr>
+        <p:spPr>
+          <a:xfrm>
+            <a:off x="6135624" y="4709160"/>
+            <a:ext cx="2487168" cy="1188720"/>
+          </a:xfrm>
+          <a:prstGeom prst="roundRect">
+            <a:avLst>
+              <a:gd name="adj" fmla="val 8000"/>
+            </a:avLst>
+          </a:prstGeom>
+          <a:solidFill>
+            <a:srgbClr val="FFFFFF"/>
+          </a:solidFill>
+          <a:ln w="12700">
+            <a:solidFill>
+              <a:srgbClr val="C9C4B8"/>
+            </a:solidFill>
+          </a:ln>
+          <a:effectLst/>
+        </p:spPr>
+        <p:style>
+          <a:lnRef idx="1">
+            <a:schemeClr val="accent1"/>
+          </a:lnRef>
+          <a:fillRef idx="3">
+            <a:schemeClr val="accent1"/>
+          </a:fillRef>
+          <a:effectRef idx="2">
+            <a:schemeClr val="accent1"/>
+          </a:effectRef>
+          <a:fontRef idx="minor">
+            <a:schemeClr val="lt1"/>
+          </a:fontRef>
+        </p:style>
+        <p:txBody>
+          <a:bodyPr rtlCol="0" anchor="ctr"/>
+          <a:lstStyle/>
+          <a:p>
+            <a:pPr algn="ctr"/>
+          </a:p>
+        </p:txBody>
+      </p:sp>
+      <p:sp>
+        <p:nvSpPr>
+          <p:cNvPr id="37" name="Rectangle 36"/>
+          <p:cNvSpPr/>
+          <p:nvPr/>
+        </p:nvSpPr>
+        <p:spPr>
+          <a:xfrm>
+            <a:off x="6135624" y="4709160"/>
+            <a:ext cx="73152" cy="1188720"/>
+          </a:xfrm>
+          <a:prstGeom prst="rect">
+            <a:avLst/>
+          </a:prstGeom>
+          <a:solidFill>
+            <a:srgbClr val="0E5A30"/>
+          </a:solidFill>
+          <a:ln>
+            <a:noFill/>
+          </a:ln>
+          <a:effectLst/>
+        </p:spPr>
+        <p:style>
+          <a:lnRef idx="1">
+            <a:schemeClr val="accent1"/>
+          </a:lnRef>
+          <a:fillRef idx="3">
+            <a:schemeClr val="accent1"/>
+          </a:fillRef>
+          <a:effectRef idx="2">
+            <a:schemeClr val="accent1"/>
+          </a:effectRef>
+          <a:fontRef idx="minor">
+            <a:schemeClr val="lt1"/>
+          </a:fontRef>
+        </p:style>
+        <p:txBody>
+          <a:bodyPr rtlCol="0" anchor="ctr"/>
+          <a:lstStyle/>
+          <a:p>
+            <a:pPr algn="ctr"/>
+          </a:p>
+        </p:txBody>
+      </p:sp>
+      <p:sp>
+        <p:nvSpPr>
+          <p:cNvPr id="38" name="TextBox 37"/>
+          <p:cNvSpPr txBox="1"/>
+          <p:nvPr/>
+        </p:nvSpPr>
+        <p:spPr>
+          <a:xfrm>
+            <a:off x="6355080" y="4828032"/>
+            <a:ext cx="2194560" cy="274320"/>
+          </a:xfrm>
+          <a:prstGeom prst="rect">
+            <a:avLst/>
+          </a:prstGeom>
+          <a:noFill/>
+        </p:spPr>
+        <p:txBody>
+          <a:bodyPr wrap="square" anchor="t" lIns="0" rIns="0" tIns="0" bIns="0">
+            <a:spAutoFit/>
+          </a:bodyPr>
+          <a:lstStyle/>
+          <a:p>
+            <a:pPr algn="l"/>
+            <a:r>
+              <a:rPr sz="1100" b="1" spc="-100">
+                <a:solidFill>
+                  <a:srgbClr val="3D2B1B"/>
+                </a:solidFill>
+                <a:latin typeface="Pretendard"/>
+                <a:ea typeface="Pretendard"/>
+              </a:rPr>
+              <a:t>진성 자발 리뷰</a:t>
+            </a:r>
+          </a:p>
+        </p:txBody>
+      </p:sp>
+      <p:sp>
+        <p:nvSpPr>
+          <p:cNvPr id="39" name="TextBox 38"/>
+          <p:cNvSpPr txBox="1"/>
+          <p:nvPr/>
+        </p:nvSpPr>
+        <p:spPr>
+          <a:xfrm>
+            <a:off x="6355080" y="5138928"/>
+            <a:ext cx="2212848" cy="731520"/>
+          </a:xfrm>
+          <a:prstGeom prst="rect">
+            <a:avLst/>
+          </a:prstGeom>
+          <a:noFill/>
+        </p:spPr>
+        <p:txBody>
+          <a:bodyPr wrap="square" anchor="t" lIns="0" rIns="0" tIns="0" bIns="0">
+            <a:spAutoFit/>
+          </a:bodyPr>
+          <a:lstStyle/>
+          <a:p>
+            <a:pPr algn="l"/>
+            <a:r>
+              <a:rPr sz="930" b="0" spc="-100">
                 <a:solidFill>
                   <a:srgbClr val="868680"/>
                 </a:solidFill>
                 <a:latin typeface="Pretendard"/>
                 <a:ea typeface="Pretendard"/>
               </a:rPr>
-              <a:t>·  진성 구매자 자발 리뷰 = 신뢰 자산 확보</a:t>
-            </a:r>
-          </a:p>
-          <a:p>
-            <a:pPr>
-              <a:spcAft>
-                <a:spcPts val="600"/>
-              </a:spcAft>
-            </a:pPr>
-            <a:r>
-              <a:rPr sz="1100" b="0" spc="-100">
+              <a:t>실사용자의 구매+후기로 신뢰 자산 확보</a:t>
+            </a:r>
+          </a:p>
+        </p:txBody>
+      </p:sp>
+      <p:sp>
+        <p:nvSpPr>
+          <p:cNvPr id="40" name="Rounded Rectangle 39"/>
+          <p:cNvSpPr/>
+          <p:nvPr/>
+        </p:nvSpPr>
+        <p:spPr>
+          <a:xfrm>
+            <a:off x="8791956" y="4709160"/>
+            <a:ext cx="2487168" cy="1188720"/>
+          </a:xfrm>
+          <a:prstGeom prst="roundRect">
+            <a:avLst>
+              <a:gd name="adj" fmla="val 8000"/>
+            </a:avLst>
+          </a:prstGeom>
+          <a:solidFill>
+            <a:srgbClr val="FFFFFF"/>
+          </a:solidFill>
+          <a:ln w="12700">
+            <a:solidFill>
+              <a:srgbClr val="C9C4B8"/>
+            </a:solidFill>
+          </a:ln>
+          <a:effectLst/>
+        </p:spPr>
+        <p:style>
+          <a:lnRef idx="1">
+            <a:schemeClr val="accent1"/>
+          </a:lnRef>
+          <a:fillRef idx="3">
+            <a:schemeClr val="accent1"/>
+          </a:fillRef>
+          <a:effectRef idx="2">
+            <a:schemeClr val="accent1"/>
+          </a:effectRef>
+          <a:fontRef idx="minor">
+            <a:schemeClr val="lt1"/>
+          </a:fontRef>
+        </p:style>
+        <p:txBody>
+          <a:bodyPr rtlCol="0" anchor="ctr"/>
+          <a:lstStyle/>
+          <a:p>
+            <a:pPr algn="ctr"/>
+          </a:p>
+        </p:txBody>
+      </p:sp>
+      <p:sp>
+        <p:nvSpPr>
+          <p:cNvPr id="41" name="Rectangle 40"/>
+          <p:cNvSpPr/>
+          <p:nvPr/>
+        </p:nvSpPr>
+        <p:spPr>
+          <a:xfrm>
+            <a:off x="8791956" y="4709160"/>
+            <a:ext cx="73152" cy="1188720"/>
+          </a:xfrm>
+          <a:prstGeom prst="rect">
+            <a:avLst/>
+          </a:prstGeom>
+          <a:solidFill>
+            <a:srgbClr val="0E5A30"/>
+          </a:solidFill>
+          <a:ln>
+            <a:noFill/>
+          </a:ln>
+          <a:effectLst/>
+        </p:spPr>
+        <p:style>
+          <a:lnRef idx="1">
+            <a:schemeClr val="accent1"/>
+          </a:lnRef>
+          <a:fillRef idx="3">
+            <a:schemeClr val="accent1"/>
+          </a:fillRef>
+          <a:effectRef idx="2">
+            <a:schemeClr val="accent1"/>
+          </a:effectRef>
+          <a:fontRef idx="minor">
+            <a:schemeClr val="lt1"/>
+          </a:fontRef>
+        </p:style>
+        <p:txBody>
+          <a:bodyPr rtlCol="0" anchor="ctr"/>
+          <a:lstStyle/>
+          <a:p>
+            <a:pPr algn="ctr"/>
+          </a:p>
+        </p:txBody>
+      </p:sp>
+      <p:sp>
+        <p:nvSpPr>
+          <p:cNvPr id="42" name="TextBox 41"/>
+          <p:cNvSpPr txBox="1"/>
+          <p:nvPr/>
+        </p:nvSpPr>
+        <p:spPr>
+          <a:xfrm>
+            <a:off x="9011412" y="4828032"/>
+            <a:ext cx="2194560" cy="274320"/>
+          </a:xfrm>
+          <a:prstGeom prst="rect">
+            <a:avLst/>
+          </a:prstGeom>
+          <a:noFill/>
+        </p:spPr>
+        <p:txBody>
+          <a:bodyPr wrap="square" anchor="t" lIns="0" rIns="0" tIns="0" bIns="0">
+            <a:spAutoFit/>
+          </a:bodyPr>
+          <a:lstStyle/>
+          <a:p>
+            <a:pPr algn="l"/>
+            <a:r>
+              <a:rPr sz="1100" b="1" spc="-100">
+                <a:solidFill>
+                  <a:srgbClr val="3D2B1B"/>
+                </a:solidFill>
+                <a:latin typeface="Pretendard"/>
+                <a:ea typeface="Pretendard"/>
+              </a:rPr>
+              <a:t>동시 점화</a:t>
+            </a:r>
+          </a:p>
+        </p:txBody>
+      </p:sp>
+      <p:sp>
+        <p:nvSpPr>
+          <p:cNvPr id="43" name="TextBox 42"/>
+          <p:cNvSpPr txBox="1"/>
+          <p:nvPr/>
+        </p:nvSpPr>
+        <p:spPr>
+          <a:xfrm>
+            <a:off x="9011412" y="5138928"/>
+            <a:ext cx="2212848" cy="731520"/>
+          </a:xfrm>
+          <a:prstGeom prst="rect">
+            <a:avLst/>
+          </a:prstGeom>
+          <a:noFill/>
+        </p:spPr>
+        <p:txBody>
+          <a:bodyPr wrap="square" anchor="t" lIns="0" rIns="0" tIns="0" bIns="0">
+            <a:spAutoFit/>
+          </a:bodyPr>
+          <a:lstStyle/>
+          <a:p>
+            <a:pPr algn="l"/>
+            <a:r>
+              <a:rPr sz="930" b="0" spc="-100">
                 <a:solidFill>
                   <a:srgbClr val="868680"/>
                 </a:solidFill>
                 <a:latin typeface="Pretendard"/>
                 <a:ea typeface="Pretendard"/>
               </a:rPr>
-              <a:t>·  동시 게시 = 랭킹·후기 볼륨 ‘동시 점화’</a:t>
-            </a:r>
-          </a:p>
-        </p:txBody>
-      </p:sp>
-      <p:sp>
-        <p:nvSpPr>
-          <p:cNvPr id="28" name="Rectangle 27"/>
+              <a:t>동시 게시 = 랭킹·후기 볼륨 ‘동시 점화’</a:t>
+            </a:r>
+          </a:p>
+        </p:txBody>
+      </p:sp>
+      <p:sp>
+        <p:nvSpPr>
+          <p:cNvPr id="44" name="Rectangle 43"/>
           <p:cNvSpPr/>
           <p:nvPr/>
         </p:nvSpPr>
@@ -14584,7 +15638,7 @@
       </p:sp>
       <p:sp>
         <p:nvSpPr>
-          <p:cNvPr id="29" name="Rectangle 28"/>
+          <p:cNvPr id="45" name="Rectangle 44"/>
           <p:cNvSpPr/>
           <p:nvPr/>
         </p:nvSpPr>
@@ -14628,7 +15682,7 @@
       </p:sp>
       <p:sp>
         <p:nvSpPr>
-          <p:cNvPr id="30" name="TextBox 29"/>
+          <p:cNvPr id="46" name="TextBox 45"/>
           <p:cNvSpPr txBox="1"/>
           <p:nvPr/>
         </p:nvSpPr>
@@ -14657,14 +15711,14 @@
                 <a:latin typeface="Pretendard"/>
                 <a:ea typeface="Pretendard"/>
               </a:rPr>
-              <a:t>진성 구매·리뷰를 10–18시 시간대별로 분산 매니징 → 최저 비용 최대 효율</a:t>
-            </a:r>
-          </a:p>
-        </p:txBody>
-      </p:sp>
-      <p:sp>
-        <p:nvSpPr>
-          <p:cNvPr id="31" name="TextBox 30"/>
+              <a:t>진성 구매·리뷰를 10·12·14·16·18시로 분산 매니징 → 최저 비용 최대 효율</a:t>
+            </a:r>
+          </a:p>
+        </p:txBody>
+      </p:sp>
+      <p:sp>
+        <p:nvSpPr>
+          <p:cNvPr id="47" name="TextBox 46"/>
           <p:cNvSpPr txBox="1"/>
           <p:nvPr/>
         </p:nvSpPr>
@@ -15195,7 +16249,7 @@
                 <a:latin typeface="Pretendard"/>
                 <a:ea typeface="Pretendard"/>
               </a:rPr>
-              <a:t>‘추천템’ 검색·비교 맥락에 올더베러를 진입시키는 장치</a:t>
+              <a:t>‘추천템’ 검색·비교 맥락에 올더베러를 자연스럽게 진입시키는 장치</a:t>
             </a:r>
           </a:p>
         </p:txBody>
@@ -15209,7 +16263,7 @@
         <p:spPr>
           <a:xfrm>
             <a:off x="822960" y="2240280"/>
-            <a:ext cx="4997196" cy="3566160"/>
+            <a:ext cx="5042916" cy="3657600"/>
           </a:xfrm>
           <a:prstGeom prst="roundRect">
             <a:avLst>
@@ -15257,7 +16311,7 @@
         <p:spPr>
           <a:xfrm>
             <a:off x="822960" y="2240280"/>
-            <a:ext cx="4997196" cy="566928"/>
+            <a:ext cx="5042916" cy="640080"/>
           </a:xfrm>
           <a:prstGeom prst="rect">
             <a:avLst/>
@@ -15294,14 +16348,58 @@
       </p:sp>
       <p:sp>
         <p:nvSpPr>
-          <p:cNvPr id="8" name="TextBox 7"/>
-          <p:cNvSpPr txBox="1"/>
-          <p:nvPr/>
-        </p:nvSpPr>
-        <p:spPr>
-          <a:xfrm>
-            <a:off x="1097280" y="2240280"/>
-            <a:ext cx="4448556" cy="566928"/>
+          <p:cNvPr id="8" name="Oval 7"/>
+          <p:cNvSpPr/>
+          <p:nvPr/>
+        </p:nvSpPr>
+        <p:spPr>
+          <a:xfrm>
+            <a:off x="1060704" y="2359152"/>
+            <a:ext cx="402336" cy="402336"/>
+          </a:xfrm>
+          <a:prstGeom prst="ellipse">
+            <a:avLst/>
+          </a:prstGeom>
+          <a:solidFill>
+            <a:srgbClr val="0E5A30"/>
+          </a:solidFill>
+          <a:ln>
+            <a:noFill/>
+          </a:ln>
+          <a:effectLst/>
+        </p:spPr>
+        <p:style>
+          <a:lnRef idx="1">
+            <a:schemeClr val="accent1"/>
+          </a:lnRef>
+          <a:fillRef idx="3">
+            <a:schemeClr val="accent1"/>
+          </a:fillRef>
+          <a:effectRef idx="2">
+            <a:schemeClr val="accent1"/>
+          </a:effectRef>
+          <a:fontRef idx="minor">
+            <a:schemeClr val="lt1"/>
+          </a:fontRef>
+        </p:style>
+        <p:txBody>
+          <a:bodyPr rtlCol="0" anchor="ctr"/>
+          <a:lstStyle/>
+          <a:p>
+            <a:pPr algn="ctr"/>
+          </a:p>
+        </p:txBody>
+      </p:sp>
+      <p:sp>
+        <p:nvSpPr>
+          <p:cNvPr id="9" name="TextBox 8"/>
+          <p:cNvSpPr txBox="1"/>
+          <p:nvPr/>
+        </p:nvSpPr>
+        <p:spPr>
+          <a:xfrm>
+            <a:off x="1060704" y="2359152"/>
+            <a:ext cx="402336" cy="402336"/>
           </a:xfrm>
           <a:prstGeom prst="rect">
             <a:avLst/>
@@ -15314,30 +16412,112 @@
           </a:bodyPr>
           <a:lstStyle/>
           <a:p>
+            <a:pPr algn="ctr"/>
+            <a:r>
+              <a:rPr sz="1500" b="1" spc="-100">
+                <a:solidFill>
+                  <a:srgbClr val="FFFFFF"/>
+                </a:solidFill>
+                <a:latin typeface="Pretendard"/>
+                <a:ea typeface="Pretendard"/>
+              </a:rPr>
+              <a:t>A</a:t>
+            </a:r>
+          </a:p>
+        </p:txBody>
+      </p:sp>
+      <p:sp>
+        <p:nvSpPr>
+          <p:cNvPr id="10" name="TextBox 9"/>
+          <p:cNvSpPr txBox="1"/>
+          <p:nvPr/>
+        </p:nvSpPr>
+        <p:spPr>
+          <a:xfrm>
+            <a:off x="1600200" y="2240280"/>
+            <a:ext cx="4128515" cy="640080"/>
+          </a:xfrm>
+          <a:prstGeom prst="rect">
+            <a:avLst/>
+          </a:prstGeom>
+          <a:noFill/>
+        </p:spPr>
+        <p:txBody>
+          <a:bodyPr wrap="square" anchor="ctr" lIns="0" rIns="0" tIns="0" bIns="0">
+            <a:spAutoFit/>
+          </a:bodyPr>
+          <a:lstStyle/>
+          <a:p>
             <a:pPr algn="l"/>
             <a:r>
-              <a:rPr sz="1500" b="1" spc="-100">
+              <a:rPr sz="1450" b="1" spc="-100">
                 <a:solidFill>
                   <a:srgbClr val="FFFFFF"/>
                 </a:solidFill>
                 <a:latin typeface="Pretendard"/>
                 <a:ea typeface="Pretendard"/>
               </a:rPr>
-              <a:t>A. 뷰티앱 · 커뮤니티 체험단</a:t>
-            </a:r>
-          </a:p>
-        </p:txBody>
-      </p:sp>
-      <p:sp>
-        <p:nvSpPr>
-          <p:cNvPr id="9" name="TextBox 8"/>
-          <p:cNvSpPr txBox="1"/>
-          <p:nvPr/>
-        </p:nvSpPr>
-        <p:spPr>
-          <a:xfrm>
-            <a:off x="1097280" y="3017520"/>
-            <a:ext cx="4448556" cy="274320"/>
+              <a:t>뷰티앱 · 커뮤니티 체험단</a:t>
+            </a:r>
+          </a:p>
+        </p:txBody>
+      </p:sp>
+      <p:sp>
+        <p:nvSpPr>
+          <p:cNvPr id="11" name="Rounded Rectangle 10"/>
+          <p:cNvSpPr/>
+          <p:nvPr/>
+        </p:nvSpPr>
+        <p:spPr>
+          <a:xfrm>
+            <a:off x="1051560" y="3035808"/>
+            <a:ext cx="4585716" cy="877824"/>
+          </a:xfrm>
+          <a:prstGeom prst="roundRect">
+            <a:avLst>
+              <a:gd name="adj" fmla="val 8000"/>
+            </a:avLst>
+          </a:prstGeom>
+          <a:solidFill>
+            <a:srgbClr val="F3F2E7"/>
+          </a:solidFill>
+          <a:ln>
+            <a:noFill/>
+          </a:ln>
+          <a:effectLst/>
+        </p:spPr>
+        <p:style>
+          <a:lnRef idx="1">
+            <a:schemeClr val="accent1"/>
+          </a:lnRef>
+          <a:fillRef idx="3">
+            <a:schemeClr val="accent1"/>
+          </a:fillRef>
+          <a:effectRef idx="2">
+            <a:schemeClr val="accent1"/>
+          </a:effectRef>
+          <a:fontRef idx="minor">
+            <a:schemeClr val="lt1"/>
+          </a:fontRef>
+        </p:style>
+        <p:txBody>
+          <a:bodyPr rtlCol="0" anchor="ctr"/>
+          <a:lstStyle/>
+          <a:p>
+            <a:pPr algn="ctr"/>
+          </a:p>
+        </p:txBody>
+      </p:sp>
+      <p:sp>
+        <p:nvSpPr>
+          <p:cNvPr id="12" name="TextBox 11"/>
+          <p:cNvSpPr txBox="1"/>
+          <p:nvPr/>
+        </p:nvSpPr>
+        <p:spPr>
+          <a:xfrm>
+            <a:off x="1234440" y="3145536"/>
+            <a:ext cx="1828800" cy="274320"/>
           </a:xfrm>
           <a:prstGeom prst="rect">
             <a:avLst/>
@@ -15352,7 +16532,7 @@
           <a:p>
             <a:pPr algn="l"/>
             <a:r>
-              <a:rPr sz="1100" b="1" spc="-100">
+              <a:rPr sz="1050" b="1" spc="-100">
                 <a:solidFill>
                   <a:srgbClr val="3D2B1B"/>
                 </a:solidFill>
@@ -15366,14 +16546,14 @@
       </p:sp>
       <p:sp>
         <p:nvSpPr>
-          <p:cNvPr id="10" name="TextBox 9"/>
-          <p:cNvSpPr txBox="1"/>
-          <p:nvPr/>
-        </p:nvSpPr>
-        <p:spPr>
-          <a:xfrm>
-            <a:off x="1097280" y="3291840"/>
-            <a:ext cx="4448556" cy="822960"/>
+          <p:cNvPr id="13" name="TextBox 12"/>
+          <p:cNvSpPr txBox="1"/>
+          <p:nvPr/>
+        </p:nvSpPr>
+        <p:spPr>
+          <a:xfrm>
+            <a:off x="1234440" y="3419856"/>
+            <a:ext cx="4219955" cy="457200"/>
           </a:xfrm>
           <a:prstGeom prst="rect">
             <a:avLst/>
@@ -15388,7 +16568,7 @@
           <a:p>
             <a:pPr algn="l"/>
             <a:r>
-              <a:rPr sz="1050" b="0" spc="-100">
+              <a:rPr sz="940" b="0" spc="-100">
                 <a:solidFill>
                   <a:srgbClr val="868680"/>
                 </a:solidFill>
@@ -15402,14 +16582,60 @@
       </p:sp>
       <p:sp>
         <p:nvSpPr>
-          <p:cNvPr id="11" name="TextBox 10"/>
-          <p:cNvSpPr txBox="1"/>
-          <p:nvPr/>
-        </p:nvSpPr>
-        <p:spPr>
-          <a:xfrm>
-            <a:off x="1097280" y="4096512"/>
-            <a:ext cx="4448556" cy="274320"/>
+          <p:cNvPr id="14" name="Rounded Rectangle 13"/>
+          <p:cNvSpPr/>
+          <p:nvPr/>
+        </p:nvSpPr>
+        <p:spPr>
+          <a:xfrm>
+            <a:off x="1051560" y="3986783"/>
+            <a:ext cx="4585716" cy="877824"/>
+          </a:xfrm>
+          <a:prstGeom prst="roundRect">
+            <a:avLst>
+              <a:gd name="adj" fmla="val 8000"/>
+            </a:avLst>
+          </a:prstGeom>
+          <a:solidFill>
+            <a:srgbClr val="F3F2E7"/>
+          </a:solidFill>
+          <a:ln>
+            <a:noFill/>
+          </a:ln>
+          <a:effectLst/>
+        </p:spPr>
+        <p:style>
+          <a:lnRef idx="1">
+            <a:schemeClr val="accent1"/>
+          </a:lnRef>
+          <a:fillRef idx="3">
+            <a:schemeClr val="accent1"/>
+          </a:fillRef>
+          <a:effectRef idx="2">
+            <a:schemeClr val="accent1"/>
+          </a:effectRef>
+          <a:fontRef idx="minor">
+            <a:schemeClr val="lt1"/>
+          </a:fontRef>
+        </p:style>
+        <p:txBody>
+          <a:bodyPr rtlCol="0" anchor="ctr"/>
+          <a:lstStyle/>
+          <a:p>
+            <a:pPr algn="ctr"/>
+          </a:p>
+        </p:txBody>
+      </p:sp>
+      <p:sp>
+        <p:nvSpPr>
+          <p:cNvPr id="15" name="TextBox 14"/>
+          <p:cNvSpPr txBox="1"/>
+          <p:nvPr/>
+        </p:nvSpPr>
+        <p:spPr>
+          <a:xfrm>
+            <a:off x="1234440" y="4096511"/>
+            <a:ext cx="1828800" cy="274320"/>
           </a:xfrm>
           <a:prstGeom prst="rect">
             <a:avLst/>
@@ -15424,7 +16650,7 @@
           <a:p>
             <a:pPr algn="l"/>
             <a:r>
-              <a:rPr sz="1100" b="1" spc="-100">
+              <a:rPr sz="1050" b="1" spc="-100">
                 <a:solidFill>
                   <a:srgbClr val="3D2B1B"/>
                 </a:solidFill>
@@ -15438,14 +16664,14 @@
       </p:sp>
       <p:sp>
         <p:nvSpPr>
-          <p:cNvPr id="12" name="TextBox 11"/>
-          <p:cNvSpPr txBox="1"/>
-          <p:nvPr/>
-        </p:nvSpPr>
-        <p:spPr>
-          <a:xfrm>
-            <a:off x="1097280" y="4370832"/>
-            <a:ext cx="4448556" cy="822960"/>
+          <p:cNvPr id="16" name="TextBox 15"/>
+          <p:cNvSpPr txBox="1"/>
+          <p:nvPr/>
+        </p:nvSpPr>
+        <p:spPr>
+          <a:xfrm>
+            <a:off x="1234440" y="4370831"/>
+            <a:ext cx="4219955" cy="457200"/>
           </a:xfrm>
           <a:prstGeom prst="rect">
             <a:avLst/>
@@ -15460,7 +16686,7 @@
           <a:p>
             <a:pPr algn="l"/>
             <a:r>
-              <a:rPr sz="1050" b="0" spc="-100">
+              <a:rPr sz="940" b="0" spc="-100">
                 <a:solidFill>
                   <a:srgbClr val="868680"/>
                 </a:solidFill>
@@ -15474,14 +16700,60 @@
       </p:sp>
       <p:sp>
         <p:nvSpPr>
-          <p:cNvPr id="13" name="TextBox 12"/>
-          <p:cNvSpPr txBox="1"/>
-          <p:nvPr/>
-        </p:nvSpPr>
-        <p:spPr>
-          <a:xfrm>
-            <a:off x="1097280" y="5175504"/>
-            <a:ext cx="4448556" cy="274320"/>
+          <p:cNvPr id="17" name="Rounded Rectangle 16"/>
+          <p:cNvSpPr/>
+          <p:nvPr/>
+        </p:nvSpPr>
+        <p:spPr>
+          <a:xfrm>
+            <a:off x="1051560" y="4937759"/>
+            <a:ext cx="4585716" cy="877824"/>
+          </a:xfrm>
+          <a:prstGeom prst="roundRect">
+            <a:avLst>
+              <a:gd name="adj" fmla="val 8000"/>
+            </a:avLst>
+          </a:prstGeom>
+          <a:solidFill>
+            <a:srgbClr val="F3F2E7"/>
+          </a:solidFill>
+          <a:ln>
+            <a:noFill/>
+          </a:ln>
+          <a:effectLst/>
+        </p:spPr>
+        <p:style>
+          <a:lnRef idx="1">
+            <a:schemeClr val="accent1"/>
+          </a:lnRef>
+          <a:fillRef idx="3">
+            <a:schemeClr val="accent1"/>
+          </a:fillRef>
+          <a:effectRef idx="2">
+            <a:schemeClr val="accent1"/>
+          </a:effectRef>
+          <a:fontRef idx="minor">
+            <a:schemeClr val="lt1"/>
+          </a:fontRef>
+        </p:style>
+        <p:txBody>
+          <a:bodyPr rtlCol="0" anchor="ctr"/>
+          <a:lstStyle/>
+          <a:p>
+            <a:pPr algn="ctr"/>
+          </a:p>
+        </p:txBody>
+      </p:sp>
+      <p:sp>
+        <p:nvSpPr>
+          <p:cNvPr id="18" name="TextBox 17"/>
+          <p:cNvSpPr txBox="1"/>
+          <p:nvPr/>
+        </p:nvSpPr>
+        <p:spPr>
+          <a:xfrm>
+            <a:off x="1234440" y="5047488"/>
+            <a:ext cx="1828800" cy="274320"/>
           </a:xfrm>
           <a:prstGeom prst="rect">
             <a:avLst/>
@@ -15496,7 +16768,7 @@
           <a:p>
             <a:pPr algn="l"/>
             <a:r>
-              <a:rPr sz="1100" b="1" spc="-100">
+              <a:rPr sz="1050" b="1" spc="-100">
                 <a:solidFill>
                   <a:srgbClr val="3D2B1B"/>
                 </a:solidFill>
@@ -15510,14 +16782,14 @@
       </p:sp>
       <p:sp>
         <p:nvSpPr>
-          <p:cNvPr id="14" name="TextBox 13"/>
-          <p:cNvSpPr txBox="1"/>
-          <p:nvPr/>
-        </p:nvSpPr>
-        <p:spPr>
-          <a:xfrm>
-            <a:off x="1097280" y="5449824"/>
-            <a:ext cx="4448556" cy="822960"/>
+          <p:cNvPr id="19" name="TextBox 18"/>
+          <p:cNvSpPr txBox="1"/>
+          <p:nvPr/>
+        </p:nvSpPr>
+        <p:spPr>
+          <a:xfrm>
+            <a:off x="1234440" y="5321807"/>
+            <a:ext cx="4219955" cy="457200"/>
           </a:xfrm>
           <a:prstGeom prst="rect">
             <a:avLst/>
@@ -15532,28 +16804,28 @@
           <a:p>
             <a:pPr algn="l"/>
             <a:r>
-              <a:rPr sz="1050" b="0" spc="-100">
+              <a:rPr sz="940" b="0" spc="-100">
                 <a:solidFill>
                   <a:srgbClr val="868680"/>
                 </a:solidFill>
                 <a:latin typeface="Pretendard"/>
                 <a:ea typeface="Pretendard"/>
               </a:rPr>
-              <a:t>구매 시 64.2%가 어워드·랭킹 참고 / 핏·효율은 선별 필요</a:t>
-            </a:r>
-          </a:p>
-        </p:txBody>
-      </p:sp>
-      <p:sp>
-        <p:nvSpPr>
-          <p:cNvPr id="15" name="Rounded Rectangle 14"/>
+              <a:t>화장품 구매 시 64.2%가 어워드·랭킹 참고 · 4단계 어뷰징 필터로 신뢰↑ / 핏·효율은 선별 필요</a:t>
+            </a:r>
+          </a:p>
+        </p:txBody>
+      </p:sp>
+      <p:sp>
+        <p:nvSpPr>
+          <p:cNvPr id="20" name="Rounded Rectangle 19"/>
           <p:cNvSpPr/>
           <p:nvPr/>
         </p:nvSpPr>
         <p:spPr>
           <a:xfrm>
-            <a:off x="6368796" y="2240280"/>
-            <a:ext cx="4997196" cy="3566160"/>
+            <a:off x="6323076" y="2240280"/>
+            <a:ext cx="5042916" cy="3657600"/>
           </a:xfrm>
           <a:prstGeom prst="roundRect">
             <a:avLst>
@@ -15594,14 +16866,14 @@
       </p:sp>
       <p:sp>
         <p:nvSpPr>
-          <p:cNvPr id="16" name="Rectangle 15"/>
+          <p:cNvPr id="21" name="Rectangle 20"/>
           <p:cNvSpPr/>
           <p:nvPr/>
         </p:nvSpPr>
         <p:spPr>
           <a:xfrm>
-            <a:off x="6368796" y="2240280"/>
-            <a:ext cx="4997196" cy="566928"/>
+            <a:off x="6323076" y="2240280"/>
+            <a:ext cx="5042916" cy="640080"/>
           </a:xfrm>
           <a:prstGeom prst="rect">
             <a:avLst/>
@@ -15638,14 +16910,58 @@
       </p:sp>
       <p:sp>
         <p:nvSpPr>
-          <p:cNvPr id="17" name="TextBox 16"/>
-          <p:cNvSpPr txBox="1"/>
-          <p:nvPr/>
-        </p:nvSpPr>
-        <p:spPr>
-          <a:xfrm>
-            <a:off x="6643116" y="2240280"/>
-            <a:ext cx="4448556" cy="566928"/>
+          <p:cNvPr id="22" name="Oval 21"/>
+          <p:cNvSpPr/>
+          <p:nvPr/>
+        </p:nvSpPr>
+        <p:spPr>
+          <a:xfrm>
+            <a:off x="6560820" y="2359152"/>
+            <a:ext cx="402336" cy="402336"/>
+          </a:xfrm>
+          <a:prstGeom prst="ellipse">
+            <a:avLst/>
+          </a:prstGeom>
+          <a:solidFill>
+            <a:srgbClr val="0E5A30"/>
+          </a:solidFill>
+          <a:ln>
+            <a:noFill/>
+          </a:ln>
+          <a:effectLst/>
+        </p:spPr>
+        <p:style>
+          <a:lnRef idx="1">
+            <a:schemeClr val="accent1"/>
+          </a:lnRef>
+          <a:fillRef idx="3">
+            <a:schemeClr val="accent1"/>
+          </a:fillRef>
+          <a:effectRef idx="2">
+            <a:schemeClr val="accent1"/>
+          </a:effectRef>
+          <a:fontRef idx="minor">
+            <a:schemeClr val="lt1"/>
+          </a:fontRef>
+        </p:style>
+        <p:txBody>
+          <a:bodyPr rtlCol="0" anchor="ctr"/>
+          <a:lstStyle/>
+          <a:p>
+            <a:pPr algn="ctr"/>
+          </a:p>
+        </p:txBody>
+      </p:sp>
+      <p:sp>
+        <p:nvSpPr>
+          <p:cNvPr id="23" name="TextBox 22"/>
+          <p:cNvSpPr txBox="1"/>
+          <p:nvPr/>
+        </p:nvSpPr>
+        <p:spPr>
+          <a:xfrm>
+            <a:off x="6560820" y="2359152"/>
+            <a:ext cx="402336" cy="402336"/>
           </a:xfrm>
           <a:prstGeom prst="rect">
             <a:avLst/>
@@ -15658,249 +16974,71 @@
           </a:bodyPr>
           <a:lstStyle/>
           <a:p>
+            <a:pPr algn="ctr"/>
+            <a:r>
+              <a:rPr sz="1500" b="1" spc="-100">
+                <a:solidFill>
+                  <a:srgbClr val="FFFFFF"/>
+                </a:solidFill>
+                <a:latin typeface="Pretendard"/>
+                <a:ea typeface="Pretendard"/>
+              </a:rPr>
+              <a:t>B</a:t>
+            </a:r>
+          </a:p>
+        </p:txBody>
+      </p:sp>
+      <p:sp>
+        <p:nvSpPr>
+          <p:cNvPr id="24" name="TextBox 23"/>
+          <p:cNvSpPr txBox="1"/>
+          <p:nvPr/>
+        </p:nvSpPr>
+        <p:spPr>
+          <a:xfrm>
+            <a:off x="7100316" y="2240280"/>
+            <a:ext cx="4128515" cy="640080"/>
+          </a:xfrm>
+          <a:prstGeom prst="rect">
+            <a:avLst/>
+          </a:prstGeom>
+          <a:noFill/>
+        </p:spPr>
+        <p:txBody>
+          <a:bodyPr wrap="square" anchor="ctr" lIns="0" rIns="0" tIns="0" bIns="0">
+            <a:spAutoFit/>
+          </a:bodyPr>
+          <a:lstStyle/>
+          <a:p>
             <a:pPr algn="l"/>
             <a:r>
-              <a:rPr sz="1500" b="1" spc="-100">
+              <a:rPr sz="1450" b="1" spc="-100">
                 <a:solidFill>
                   <a:srgbClr val="FFFFFF"/>
                 </a:solidFill>
                 <a:latin typeface="Pretendard"/>
                 <a:ea typeface="Pretendard"/>
               </a:rPr>
-              <a:t>B. 파워페이지 (SNS 정보성)</a:t>
-            </a:r>
-          </a:p>
-        </p:txBody>
-      </p:sp>
-      <p:sp>
-        <p:nvSpPr>
-          <p:cNvPr id="18" name="TextBox 17"/>
-          <p:cNvSpPr txBox="1"/>
-          <p:nvPr/>
-        </p:nvSpPr>
-        <p:spPr>
-          <a:xfrm>
-            <a:off x="6643116" y="3017520"/>
-            <a:ext cx="4448556" cy="274320"/>
-          </a:xfrm>
-          <a:prstGeom prst="rect">
-            <a:avLst/>
-          </a:prstGeom>
-          <a:noFill/>
-        </p:spPr>
-        <p:txBody>
-          <a:bodyPr wrap="square" anchor="t" lIns="0" rIns="0" tIns="0" bIns="0">
-            <a:spAutoFit/>
-          </a:bodyPr>
-          <a:lstStyle/>
-          <a:p>
-            <a:pPr algn="l"/>
-            <a:r>
-              <a:rPr sz="1100" b="1" spc="-100">
-                <a:solidFill>
-                  <a:srgbClr val="3D2B1B"/>
-                </a:solidFill>
-                <a:latin typeface="Pretendard"/>
-                <a:ea typeface="Pretendard"/>
-              </a:rPr>
-              <a:t>타겟</a:t>
-            </a:r>
-          </a:p>
-        </p:txBody>
-      </p:sp>
-      <p:sp>
-        <p:nvSpPr>
-          <p:cNvPr id="19" name="TextBox 18"/>
-          <p:cNvSpPr txBox="1"/>
-          <p:nvPr/>
-        </p:nvSpPr>
-        <p:spPr>
-          <a:xfrm>
-            <a:off x="6643116" y="3291840"/>
-            <a:ext cx="4448556" cy="822960"/>
-          </a:xfrm>
-          <a:prstGeom prst="rect">
-            <a:avLst/>
-          </a:prstGeom>
-          <a:noFill/>
-        </p:spPr>
-        <p:txBody>
-          <a:bodyPr wrap="square" anchor="t" lIns="0" rIns="0" tIns="0" bIns="0">
-            <a:spAutoFit/>
-          </a:bodyPr>
-          <a:lstStyle/>
-          <a:p>
-            <a:pPr algn="l"/>
-            <a:r>
-              <a:rPr sz="1050" b="0" spc="-100">
-                <a:solidFill>
-                  <a:srgbClr val="868680"/>
-                </a:solidFill>
-                <a:latin typeface="Pretendard"/>
-                <a:ea typeface="Pretendard"/>
-              </a:rPr>
-              <a:t>SNS 잠재고객·구매 고의도 + ‘올리브오일 효능’ 검색자</a:t>
-            </a:r>
-          </a:p>
-        </p:txBody>
-      </p:sp>
-      <p:sp>
-        <p:nvSpPr>
-          <p:cNvPr id="20" name="TextBox 19"/>
-          <p:cNvSpPr txBox="1"/>
-          <p:nvPr/>
-        </p:nvSpPr>
-        <p:spPr>
-          <a:xfrm>
-            <a:off x="6643116" y="4096512"/>
-            <a:ext cx="4448556" cy="274320"/>
-          </a:xfrm>
-          <a:prstGeom prst="rect">
-            <a:avLst/>
-          </a:prstGeom>
-          <a:noFill/>
-        </p:spPr>
-        <p:txBody>
-          <a:bodyPr wrap="square" anchor="t" lIns="0" rIns="0" tIns="0" bIns="0">
-            <a:spAutoFit/>
-          </a:bodyPr>
-          <a:lstStyle/>
-          <a:p>
-            <a:pPr algn="l"/>
-            <a:r>
-              <a:rPr sz="1100" b="1" spc="-100">
-                <a:solidFill>
-                  <a:srgbClr val="3D2B1B"/>
-                </a:solidFill>
-                <a:latin typeface="Pretendard"/>
-                <a:ea typeface="Pretendard"/>
-              </a:rPr>
-              <a:t>실행</a:t>
-            </a:r>
-          </a:p>
-        </p:txBody>
-      </p:sp>
-      <p:sp>
-        <p:nvSpPr>
-          <p:cNvPr id="21" name="TextBox 20"/>
-          <p:cNvSpPr txBox="1"/>
-          <p:nvPr/>
-        </p:nvSpPr>
-        <p:spPr>
-          <a:xfrm>
-            <a:off x="6643116" y="4370832"/>
-            <a:ext cx="4448556" cy="822960"/>
-          </a:xfrm>
-          <a:prstGeom prst="rect">
-            <a:avLst/>
-          </a:prstGeom>
-          <a:noFill/>
-        </p:spPr>
-        <p:txBody>
-          <a:bodyPr wrap="square" anchor="t" lIns="0" rIns="0" tIns="0" bIns="0">
-            <a:spAutoFit/>
-          </a:bodyPr>
-          <a:lstStyle/>
-          <a:p>
-            <a:pPr algn="l"/>
-            <a:r>
-              <a:rPr sz="1050" b="0" spc="-100">
-                <a:solidFill>
-                  <a:srgbClr val="868680"/>
-                </a:solidFill>
-                <a:latin typeface="Pretendard"/>
-                <a:ea typeface="Pretendard"/>
-              </a:rPr>
-              <a:t>정보성 파워 블로그·전문 채널로 검색 상위·추천 점유</a:t>
-            </a:r>
-          </a:p>
-        </p:txBody>
-      </p:sp>
-      <p:sp>
-        <p:nvSpPr>
-          <p:cNvPr id="22" name="TextBox 21"/>
-          <p:cNvSpPr txBox="1"/>
-          <p:nvPr/>
-        </p:nvSpPr>
-        <p:spPr>
-          <a:xfrm>
-            <a:off x="6643116" y="5175504"/>
-            <a:ext cx="4448556" cy="274320"/>
-          </a:xfrm>
-          <a:prstGeom prst="rect">
-            <a:avLst/>
-          </a:prstGeom>
-          <a:noFill/>
-        </p:spPr>
-        <p:txBody>
-          <a:bodyPr wrap="square" anchor="t" lIns="0" rIns="0" tIns="0" bIns="0">
-            <a:spAutoFit/>
-          </a:bodyPr>
-          <a:lstStyle/>
-          <a:p>
-            <a:pPr algn="l"/>
-            <a:r>
-              <a:rPr sz="1100" b="1" spc="-100">
-                <a:solidFill>
-                  <a:srgbClr val="3D2B1B"/>
-                </a:solidFill>
-                <a:latin typeface="Pretendard"/>
-                <a:ea typeface="Pretendard"/>
-              </a:rPr>
-              <a:t>분석</a:t>
-            </a:r>
-          </a:p>
-        </p:txBody>
-      </p:sp>
-      <p:sp>
-        <p:nvSpPr>
-          <p:cNvPr id="23" name="TextBox 22"/>
-          <p:cNvSpPr txBox="1"/>
-          <p:nvPr/>
-        </p:nvSpPr>
-        <p:spPr>
-          <a:xfrm>
-            <a:off x="6643116" y="5449824"/>
-            <a:ext cx="4448556" cy="822960"/>
-          </a:xfrm>
-          <a:prstGeom prst="rect">
-            <a:avLst/>
-          </a:prstGeom>
-          <a:noFill/>
-        </p:spPr>
-        <p:txBody>
-          <a:bodyPr wrap="square" anchor="t" lIns="0" rIns="0" tIns="0" bIns="0">
-            <a:spAutoFit/>
-          </a:bodyPr>
-          <a:lstStyle/>
-          <a:p>
-            <a:pPr algn="l"/>
-            <a:r>
-              <a:rPr sz="1050" b="0" spc="-100">
-                <a:solidFill>
-                  <a:srgbClr val="868680"/>
-                </a:solidFill>
-                <a:latin typeface="Pretendard"/>
-                <a:ea typeface="Pretendard"/>
-              </a:rPr>
-              <a:t>인지·각인·전환 트리거를 퍼널 단계별로 제공</a:t>
-            </a:r>
-          </a:p>
-        </p:txBody>
-      </p:sp>
-      <p:sp>
-        <p:nvSpPr>
-          <p:cNvPr id="24" name="Rectangle 23"/>
+              <a:t>파워페이지 (SNS 정보성)</a:t>
+            </a:r>
+          </a:p>
+        </p:txBody>
+      </p:sp>
+      <p:sp>
+        <p:nvSpPr>
+          <p:cNvPr id="25" name="Rounded Rectangle 24"/>
           <p:cNvSpPr/>
           <p:nvPr/>
         </p:nvSpPr>
         <p:spPr>
           <a:xfrm>
-            <a:off x="822960" y="6144768"/>
-            <a:ext cx="10543032" cy="457200"/>
-          </a:xfrm>
-          <a:prstGeom prst="rect">
-            <a:avLst/>
+            <a:off x="6551676" y="3035808"/>
+            <a:ext cx="4585716" cy="877824"/>
+          </a:xfrm>
+          <a:prstGeom prst="roundRect">
+            <a:avLst>
+              <a:gd name="adj" fmla="val 8000"/>
+            </a:avLst>
           </a:prstGeom>
           <a:solidFill>
             <a:srgbClr val="F3F2E7"/>
@@ -15934,7 +17072,359 @@
       </p:sp>
       <p:sp>
         <p:nvSpPr>
-          <p:cNvPr id="25" name="Rectangle 24"/>
+          <p:cNvPr id="26" name="TextBox 25"/>
+          <p:cNvSpPr txBox="1"/>
+          <p:nvPr/>
+        </p:nvSpPr>
+        <p:spPr>
+          <a:xfrm>
+            <a:off x="6734556" y="3145536"/>
+            <a:ext cx="1828800" cy="274320"/>
+          </a:xfrm>
+          <a:prstGeom prst="rect">
+            <a:avLst/>
+          </a:prstGeom>
+          <a:noFill/>
+        </p:spPr>
+        <p:txBody>
+          <a:bodyPr wrap="square" anchor="t" lIns="0" rIns="0" tIns="0" bIns="0">
+            <a:spAutoFit/>
+          </a:bodyPr>
+          <a:lstStyle/>
+          <a:p>
+            <a:pPr algn="l"/>
+            <a:r>
+              <a:rPr sz="1050" b="1" spc="-100">
+                <a:solidFill>
+                  <a:srgbClr val="3D2B1B"/>
+                </a:solidFill>
+                <a:latin typeface="Pretendard"/>
+                <a:ea typeface="Pretendard"/>
+              </a:rPr>
+              <a:t>타겟</a:t>
+            </a:r>
+          </a:p>
+        </p:txBody>
+      </p:sp>
+      <p:sp>
+        <p:nvSpPr>
+          <p:cNvPr id="27" name="TextBox 26"/>
+          <p:cNvSpPr txBox="1"/>
+          <p:nvPr/>
+        </p:nvSpPr>
+        <p:spPr>
+          <a:xfrm>
+            <a:off x="6734556" y="3419856"/>
+            <a:ext cx="4219955" cy="457200"/>
+          </a:xfrm>
+          <a:prstGeom prst="rect">
+            <a:avLst/>
+          </a:prstGeom>
+          <a:noFill/>
+        </p:spPr>
+        <p:txBody>
+          <a:bodyPr wrap="square" anchor="t" lIns="0" rIns="0" tIns="0" bIns="0">
+            <a:spAutoFit/>
+          </a:bodyPr>
+          <a:lstStyle/>
+          <a:p>
+            <a:pPr algn="l"/>
+            <a:r>
+              <a:rPr sz="940" b="0" spc="-100">
+                <a:solidFill>
+                  <a:srgbClr val="868680"/>
+                </a:solidFill>
+                <a:latin typeface="Pretendard"/>
+                <a:ea typeface="Pretendard"/>
+              </a:rPr>
+              <a:t>SNS 잠재고객·구매 고의도 + ‘올리브오일 효능’·‘웰니스 구미 추천’ 검색자</a:t>
+            </a:r>
+          </a:p>
+        </p:txBody>
+      </p:sp>
+      <p:sp>
+        <p:nvSpPr>
+          <p:cNvPr id="28" name="Rounded Rectangle 27"/>
+          <p:cNvSpPr/>
+          <p:nvPr/>
+        </p:nvSpPr>
+        <p:spPr>
+          <a:xfrm>
+            <a:off x="6551676" y="3986783"/>
+            <a:ext cx="4585716" cy="877824"/>
+          </a:xfrm>
+          <a:prstGeom prst="roundRect">
+            <a:avLst>
+              <a:gd name="adj" fmla="val 8000"/>
+            </a:avLst>
+          </a:prstGeom>
+          <a:solidFill>
+            <a:srgbClr val="F3F2E7"/>
+          </a:solidFill>
+          <a:ln>
+            <a:noFill/>
+          </a:ln>
+          <a:effectLst/>
+        </p:spPr>
+        <p:style>
+          <a:lnRef idx="1">
+            <a:schemeClr val="accent1"/>
+          </a:lnRef>
+          <a:fillRef idx="3">
+            <a:schemeClr val="accent1"/>
+          </a:fillRef>
+          <a:effectRef idx="2">
+            <a:schemeClr val="accent1"/>
+          </a:effectRef>
+          <a:fontRef idx="minor">
+            <a:schemeClr val="lt1"/>
+          </a:fontRef>
+        </p:style>
+        <p:txBody>
+          <a:bodyPr rtlCol="0" anchor="ctr"/>
+          <a:lstStyle/>
+          <a:p>
+            <a:pPr algn="ctr"/>
+          </a:p>
+        </p:txBody>
+      </p:sp>
+      <p:sp>
+        <p:nvSpPr>
+          <p:cNvPr id="29" name="TextBox 28"/>
+          <p:cNvSpPr txBox="1"/>
+          <p:nvPr/>
+        </p:nvSpPr>
+        <p:spPr>
+          <a:xfrm>
+            <a:off x="6734556" y="4096511"/>
+            <a:ext cx="1828800" cy="274320"/>
+          </a:xfrm>
+          <a:prstGeom prst="rect">
+            <a:avLst/>
+          </a:prstGeom>
+          <a:noFill/>
+        </p:spPr>
+        <p:txBody>
+          <a:bodyPr wrap="square" anchor="t" lIns="0" rIns="0" tIns="0" bIns="0">
+            <a:spAutoFit/>
+          </a:bodyPr>
+          <a:lstStyle/>
+          <a:p>
+            <a:pPr algn="l"/>
+            <a:r>
+              <a:rPr sz="1050" b="1" spc="-100">
+                <a:solidFill>
+                  <a:srgbClr val="3D2B1B"/>
+                </a:solidFill>
+                <a:latin typeface="Pretendard"/>
+                <a:ea typeface="Pretendard"/>
+              </a:rPr>
+              <a:t>실행</a:t>
+            </a:r>
+          </a:p>
+        </p:txBody>
+      </p:sp>
+      <p:sp>
+        <p:nvSpPr>
+          <p:cNvPr id="30" name="TextBox 29"/>
+          <p:cNvSpPr txBox="1"/>
+          <p:nvPr/>
+        </p:nvSpPr>
+        <p:spPr>
+          <a:xfrm>
+            <a:off x="6734556" y="4370831"/>
+            <a:ext cx="4219955" cy="457200"/>
+          </a:xfrm>
+          <a:prstGeom prst="rect">
+            <a:avLst/>
+          </a:prstGeom>
+          <a:noFill/>
+        </p:spPr>
+        <p:txBody>
+          <a:bodyPr wrap="square" anchor="t" lIns="0" rIns="0" tIns="0" bIns="0">
+            <a:spAutoFit/>
+          </a:bodyPr>
+          <a:lstStyle/>
+          <a:p>
+            <a:pPr algn="l"/>
+            <a:r>
+              <a:rPr sz="940" b="0" spc="-100">
+                <a:solidFill>
+                  <a:srgbClr val="868680"/>
+                </a:solidFill>
+                <a:latin typeface="Pretendard"/>
+                <a:ea typeface="Pretendard"/>
+              </a:rPr>
+              <a:t>정보성 파워 블로그·전문 채널로 검색 상위·추천 리스트 점유</a:t>
+            </a:r>
+          </a:p>
+        </p:txBody>
+      </p:sp>
+      <p:sp>
+        <p:nvSpPr>
+          <p:cNvPr id="31" name="Rounded Rectangle 30"/>
+          <p:cNvSpPr/>
+          <p:nvPr/>
+        </p:nvSpPr>
+        <p:spPr>
+          <a:xfrm>
+            <a:off x="6551676" y="4937759"/>
+            <a:ext cx="4585716" cy="877824"/>
+          </a:xfrm>
+          <a:prstGeom prst="roundRect">
+            <a:avLst>
+              <a:gd name="adj" fmla="val 8000"/>
+            </a:avLst>
+          </a:prstGeom>
+          <a:solidFill>
+            <a:srgbClr val="F3F2E7"/>
+          </a:solidFill>
+          <a:ln>
+            <a:noFill/>
+          </a:ln>
+          <a:effectLst/>
+        </p:spPr>
+        <p:style>
+          <a:lnRef idx="1">
+            <a:schemeClr val="accent1"/>
+          </a:lnRef>
+          <a:fillRef idx="3">
+            <a:schemeClr val="accent1"/>
+          </a:fillRef>
+          <a:effectRef idx="2">
+            <a:schemeClr val="accent1"/>
+          </a:effectRef>
+          <a:fontRef idx="minor">
+            <a:schemeClr val="lt1"/>
+          </a:fontRef>
+        </p:style>
+        <p:txBody>
+          <a:bodyPr rtlCol="0" anchor="ctr"/>
+          <a:lstStyle/>
+          <a:p>
+            <a:pPr algn="ctr"/>
+          </a:p>
+        </p:txBody>
+      </p:sp>
+      <p:sp>
+        <p:nvSpPr>
+          <p:cNvPr id="32" name="TextBox 31"/>
+          <p:cNvSpPr txBox="1"/>
+          <p:nvPr/>
+        </p:nvSpPr>
+        <p:spPr>
+          <a:xfrm>
+            <a:off x="6734556" y="5047488"/>
+            <a:ext cx="1828800" cy="274320"/>
+          </a:xfrm>
+          <a:prstGeom prst="rect">
+            <a:avLst/>
+          </a:prstGeom>
+          <a:noFill/>
+        </p:spPr>
+        <p:txBody>
+          <a:bodyPr wrap="square" anchor="t" lIns="0" rIns="0" tIns="0" bIns="0">
+            <a:spAutoFit/>
+          </a:bodyPr>
+          <a:lstStyle/>
+          <a:p>
+            <a:pPr algn="l"/>
+            <a:r>
+              <a:rPr sz="1050" b="1" spc="-100">
+                <a:solidFill>
+                  <a:srgbClr val="3D2B1B"/>
+                </a:solidFill>
+                <a:latin typeface="Pretendard"/>
+                <a:ea typeface="Pretendard"/>
+              </a:rPr>
+              <a:t>분석</a:t>
+            </a:r>
+          </a:p>
+        </p:txBody>
+      </p:sp>
+      <p:sp>
+        <p:nvSpPr>
+          <p:cNvPr id="33" name="TextBox 32"/>
+          <p:cNvSpPr txBox="1"/>
+          <p:nvPr/>
+        </p:nvSpPr>
+        <p:spPr>
+          <a:xfrm>
+            <a:off x="6734556" y="5321807"/>
+            <a:ext cx="4219955" cy="457200"/>
+          </a:xfrm>
+          <a:prstGeom prst="rect">
+            <a:avLst/>
+          </a:prstGeom>
+          <a:noFill/>
+        </p:spPr>
+        <p:txBody>
+          <a:bodyPr wrap="square" anchor="t" lIns="0" rIns="0" tIns="0" bIns="0">
+            <a:spAutoFit/>
+          </a:bodyPr>
+          <a:lstStyle/>
+          <a:p>
+            <a:pPr algn="l"/>
+            <a:r>
+              <a:rPr sz="940" b="0" spc="-100">
+                <a:solidFill>
+                  <a:srgbClr val="868680"/>
+                </a:solidFill>
+                <a:latin typeface="Pretendard"/>
+                <a:ea typeface="Pretendard"/>
+              </a:rPr>
+              <a:t>모르는 대상엔 인지·각인, 고의도 대상엔 전환 트리거를 퍼널 단계별로 제공</a:t>
+            </a:r>
+          </a:p>
+        </p:txBody>
+      </p:sp>
+      <p:sp>
+        <p:nvSpPr>
+          <p:cNvPr id="34" name="Rectangle 33"/>
+          <p:cNvSpPr/>
+          <p:nvPr/>
+        </p:nvSpPr>
+        <p:spPr>
+          <a:xfrm>
+            <a:off x="822960" y="6144768"/>
+            <a:ext cx="10543032" cy="457200"/>
+          </a:xfrm>
+          <a:prstGeom prst="rect">
+            <a:avLst/>
+          </a:prstGeom>
+          <a:solidFill>
+            <a:srgbClr val="F3F2E7"/>
+          </a:solidFill>
+          <a:ln>
+            <a:noFill/>
+          </a:ln>
+          <a:effectLst/>
+        </p:spPr>
+        <p:style>
+          <a:lnRef idx="1">
+            <a:schemeClr val="accent1"/>
+          </a:lnRef>
+          <a:fillRef idx="3">
+            <a:schemeClr val="accent1"/>
+          </a:fillRef>
+          <a:effectRef idx="2">
+            <a:schemeClr val="accent1"/>
+          </a:effectRef>
+          <a:fontRef idx="minor">
+            <a:schemeClr val="lt1"/>
+          </a:fontRef>
+        </p:style>
+        <p:txBody>
+          <a:bodyPr rtlCol="0" anchor="ctr"/>
+          <a:lstStyle/>
+          <a:p>
+            <a:pPr algn="ctr"/>
+          </a:p>
+        </p:txBody>
+      </p:sp>
+      <p:sp>
+        <p:nvSpPr>
+          <p:cNvPr id="35" name="Rectangle 34"/>
           <p:cNvSpPr/>
           <p:nvPr/>
         </p:nvSpPr>
@@ -15978,7 +17468,7 @@
       </p:sp>
       <p:sp>
         <p:nvSpPr>
-          <p:cNvPr id="26" name="TextBox 25"/>
+          <p:cNvPr id="36" name="TextBox 35"/>
           <p:cNvSpPr txBox="1"/>
           <p:nvPr/>
         </p:nvSpPr>
@@ -16007,14 +17497,14 @@
                 <a:latin typeface="Pretendard"/>
                 <a:ea typeface="Pretendard"/>
               </a:rPr>
-              <a:t>세일 전 탐색이 곧장 장바구니로 이어지도록 ‘추천템’ 맥락을 선점</a:t>
-            </a:r>
-          </a:p>
-        </p:txBody>
-      </p:sp>
-      <p:sp>
-        <p:nvSpPr>
-          <p:cNvPr id="27" name="TextBox 26"/>
+              <a:t>세일 전 탐색이 곧장 장바구니로 이어지도록 ‘추천템’ 맥락을 선점한다</a:t>
+            </a:r>
+          </a:p>
+        </p:txBody>
+      </p:sp>
+      <p:sp>
+        <p:nvSpPr>
+          <p:cNvPr id="37" name="TextBox 36"/>
           <p:cNvSpPr txBox="1"/>
           <p:nvPr/>
         </p:nvSpPr>
@@ -16229,7 +17719,7 @@
         <p:spPr>
           <a:xfrm>
             <a:off x="822960" y="2240280"/>
-            <a:ext cx="4997196" cy="1828800"/>
+            <a:ext cx="5042916" cy="2377440"/>
           </a:xfrm>
           <a:prstGeom prst="roundRect">
             <a:avLst>
@@ -16277,7 +17767,7 @@
         <p:spPr>
           <a:xfrm>
             <a:off x="822960" y="2240280"/>
-            <a:ext cx="4997196" cy="566928"/>
+            <a:ext cx="5042916" cy="548640"/>
           </a:xfrm>
           <a:prstGeom prst="rect">
             <a:avLst/>
@@ -16321,7 +17811,7 @@
         <p:spPr>
           <a:xfrm>
             <a:off x="1097280" y="2240280"/>
-            <a:ext cx="4448556" cy="566928"/>
+            <a:ext cx="4494276" cy="548640"/>
           </a:xfrm>
           <a:prstGeom prst="rect">
             <a:avLst/>
@@ -16336,7 +17826,7 @@
           <a:p>
             <a:pPr algn="l"/>
             <a:r>
-              <a:rPr sz="1500" b="1" spc="-100">
+              <a:rPr sz="1350" b="1" spc="-100">
                 <a:solidFill>
                   <a:srgbClr val="FFFFFF"/>
                 </a:solidFill>
@@ -16356,8 +17846,8 @@
         </p:nvSpPr>
         <p:spPr>
           <a:xfrm>
-            <a:off x="1097280" y="3017520"/>
-            <a:ext cx="4448556" cy="274320"/>
+            <a:off x="1097280" y="2889504"/>
+            <a:ext cx="4494276" cy="548640"/>
           </a:xfrm>
           <a:prstGeom prst="rect">
             <a:avLst/>
@@ -16372,14 +17862,14 @@
           <a:p>
             <a:pPr algn="l"/>
             <a:r>
-              <a:rPr sz="1100" b="1" spc="-100">
-                <a:solidFill>
-                  <a:srgbClr val="3D2B1B"/>
-                </a:solidFill>
-                <a:latin typeface="Pretendard"/>
-                <a:ea typeface="Pretendard"/>
-              </a:rPr>
-              <a:t/>
+              <a:rPr sz="1000" b="0" spc="-100">
+                <a:solidFill>
+                  <a:srgbClr val="868680"/>
+                </a:solidFill>
+                <a:latin typeface="Pretendard"/>
+                <a:ea typeface="Pretendard"/>
+              </a:rPr>
+              <a:t>ChatGPT·Perplexity·Gemini가 답변 생성 시 우리 콘텐츠를 ‘근거·출처’로 고르게 설계</a:t>
             </a:r>
           </a:p>
         </p:txBody>
@@ -16392,30 +17882,68 @@
         </p:nvSpPr>
         <p:spPr>
           <a:xfrm>
-            <a:off x="1097280" y="3291840"/>
-            <a:ext cx="4448556" cy="822960"/>
-          </a:xfrm>
-          <a:prstGeom prst="rect">
-            <a:avLst/>
-          </a:prstGeom>
-          <a:noFill/>
-        </p:spPr>
-        <p:txBody>
-          <a:bodyPr wrap="square" anchor="t" lIns="0" rIns="0" tIns="0" bIns="0">
-            <a:spAutoFit/>
-          </a:bodyPr>
-          <a:lstStyle/>
-          <a:p>
-            <a:pPr algn="l"/>
-            <a:r>
-              <a:rPr sz="1050" b="0" spc="-100">
-                <a:solidFill>
-                  <a:srgbClr val="868680"/>
-                </a:solidFill>
-                <a:latin typeface="Pretendard"/>
-                <a:ea typeface="Pretendard"/>
-              </a:rPr>
-              <a:t>ChatGPT·Perplexity·Gemini가 답변을 만들 때 우리 콘텐츠를 ‘근거·출처’로 고르게 설계</a:t>
+            <a:off x="1097280" y="3529584"/>
+            <a:ext cx="4494276" cy="1005840"/>
+          </a:xfrm>
+          <a:prstGeom prst="rect">
+            <a:avLst/>
+          </a:prstGeom>
+          <a:noFill/>
+        </p:spPr>
+        <p:txBody>
+          <a:bodyPr wrap="square" lIns="0" rIns="0" tIns="0" bIns="0">
+            <a:spAutoFit/>
+          </a:bodyPr>
+          <a:lstStyle/>
+          <a:p>
+            <a:pPr>
+              <a:spcAft>
+                <a:spcPts val="600"/>
+              </a:spcAft>
+            </a:pPr>
+            <a:r>
+              <a:rPr sz="1000" b="0" spc="-100">
+                <a:solidFill>
+                  <a:srgbClr val="141412"/>
+                </a:solidFill>
+                <a:latin typeface="Pretendard"/>
+                <a:ea typeface="Pretendard"/>
+              </a:rPr>
+              <a:t>·  검색 의도에 직답하는 구조로 작성</a:t>
+            </a:r>
+          </a:p>
+          <a:p>
+            <a:pPr>
+              <a:spcAft>
+                <a:spcPts val="600"/>
+              </a:spcAft>
+            </a:pPr>
+            <a:r>
+              <a:rPr sz="1000" b="0" spc="-100">
+                <a:solidFill>
+                  <a:srgbClr val="141412"/>
+                </a:solidFill>
+                <a:latin typeface="Pretendard"/>
+                <a:ea typeface="Pretendard"/>
+              </a:rPr>
+              <a:t>·  출처·수치·정의를 명시해 ‘인용 가능’하게</a:t>
+            </a:r>
+          </a:p>
+          <a:p>
+            <a:pPr>
+              <a:spcAft>
+                <a:spcPts val="600"/>
+              </a:spcAft>
+            </a:pPr>
+            <a:r>
+              <a:rPr sz="1000" b="0" spc="-100">
+                <a:solidFill>
+                  <a:srgbClr val="141412"/>
+                </a:solidFill>
+                <a:latin typeface="Pretendard"/>
+                <a:ea typeface="Pretendard"/>
+              </a:rPr>
+              <a:t>·  언론보도 초안부터 AI 인용 형식으로 발행</a:t>
             </a:r>
           </a:p>
         </p:txBody>
@@ -16428,8 +17956,8 @@
         </p:nvSpPr>
         <p:spPr>
           <a:xfrm>
-            <a:off x="6368796" y="2240280"/>
-            <a:ext cx="4997196" cy="1828800"/>
+            <a:off x="6323076" y="2240280"/>
+            <a:ext cx="5042916" cy="2377440"/>
           </a:xfrm>
           <a:prstGeom prst="roundRect">
             <a:avLst>
@@ -16476,8 +18004,8 @@
         </p:nvSpPr>
         <p:spPr>
           <a:xfrm>
-            <a:off x="6368796" y="2240280"/>
-            <a:ext cx="4997196" cy="566928"/>
+            <a:off x="6323076" y="2240280"/>
+            <a:ext cx="5042916" cy="548640"/>
           </a:xfrm>
           <a:prstGeom prst="rect">
             <a:avLst/>
@@ -16520,8 +18048,8 @@
         </p:nvSpPr>
         <p:spPr>
           <a:xfrm>
-            <a:off x="6643116" y="2240280"/>
-            <a:ext cx="4448556" cy="566928"/>
+            <a:off x="6597396" y="2240280"/>
+            <a:ext cx="4494276" cy="548640"/>
           </a:xfrm>
           <a:prstGeom prst="rect">
             <a:avLst/>
@@ -16536,7 +18064,7 @@
           <a:p>
             <a:pPr algn="l"/>
             <a:r>
-              <a:rPr sz="1500" b="1" spc="-100">
+              <a:rPr sz="1350" b="1" spc="-100">
                 <a:solidFill>
                   <a:srgbClr val="FFFFFF"/>
                 </a:solidFill>
@@ -16556,8 +18084,8 @@
         </p:nvSpPr>
         <p:spPr>
           <a:xfrm>
-            <a:off x="6643116" y="3017520"/>
-            <a:ext cx="4448556" cy="274320"/>
+            <a:off x="6597396" y="2889504"/>
+            <a:ext cx="4494276" cy="548640"/>
           </a:xfrm>
           <a:prstGeom prst="rect">
             <a:avLst/>
@@ -16572,6 +18100,162 @@
           <a:p>
             <a:pPr algn="l"/>
             <a:r>
+              <a:rPr sz="1000" b="0" spc="-100">
+                <a:solidFill>
+                  <a:srgbClr val="868680"/>
+                </a:solidFill>
+                <a:latin typeface="Pretendard"/>
+                <a:ea typeface="Pretendard"/>
+              </a:rPr>
+              <a:t>구글 AI Overview·검색 요약 답변에 ‘정확한 출처’로 반영되도록 최적화</a:t>
+            </a:r>
+          </a:p>
+        </p:txBody>
+      </p:sp>
+      <p:sp>
+        <p:nvSpPr>
+          <p:cNvPr id="15" name="TextBox 14"/>
+          <p:cNvSpPr txBox="1"/>
+          <p:nvPr/>
+        </p:nvSpPr>
+        <p:spPr>
+          <a:xfrm>
+            <a:off x="6597396" y="3529584"/>
+            <a:ext cx="4494276" cy="1005840"/>
+          </a:xfrm>
+          <a:prstGeom prst="rect">
+            <a:avLst/>
+          </a:prstGeom>
+          <a:noFill/>
+        </p:spPr>
+        <p:txBody>
+          <a:bodyPr wrap="square" lIns="0" rIns="0" tIns="0" bIns="0">
+            <a:spAutoFit/>
+          </a:bodyPr>
+          <a:lstStyle/>
+          <a:p>
+            <a:pPr>
+              <a:spcAft>
+                <a:spcPts val="600"/>
+              </a:spcAft>
+            </a:pPr>
+            <a:r>
+              <a:rPr sz="1000" b="0" spc="-100">
+                <a:solidFill>
+                  <a:srgbClr val="141412"/>
+                </a:solidFill>
+                <a:latin typeface="Pretendard"/>
+                <a:ea typeface="Pretendard"/>
+              </a:rPr>
+              <a:t>·  발행 전 AI가 실제로 어떻게 읽는지 점검</a:t>
+            </a:r>
+          </a:p>
+          <a:p>
+            <a:pPr>
+              <a:spcAft>
+                <a:spcPts val="600"/>
+              </a:spcAft>
+            </a:pPr>
+            <a:r>
+              <a:rPr sz="1000" b="0" spc="-100">
+                <a:solidFill>
+                  <a:srgbClr val="141412"/>
+                </a:solidFill>
+                <a:latin typeface="Pretendard"/>
+                <a:ea typeface="Pretendard"/>
+              </a:rPr>
+              <a:t>·  ‘검색 1위’보다 ‘AI 답변 인용’이 새 경쟁력</a:t>
+            </a:r>
+          </a:p>
+          <a:p>
+            <a:pPr>
+              <a:spcAft>
+                <a:spcPts val="600"/>
+              </a:spcAft>
+            </a:pPr>
+            <a:r>
+              <a:rPr sz="1000" b="0" spc="-100">
+                <a:solidFill>
+                  <a:srgbClr val="141412"/>
+                </a:solidFill>
+                <a:latin typeface="Pretendard"/>
+                <a:ea typeface="Pretendard"/>
+              </a:rPr>
+              <a:t>·  Push가 닿지 않는 탐색 순간을 Pull로 선점</a:t>
+            </a:r>
+          </a:p>
+        </p:txBody>
+      </p:sp>
+      <p:sp>
+        <p:nvSpPr>
+          <p:cNvPr id="16" name="Rounded Rectangle 15"/>
+          <p:cNvSpPr/>
+          <p:nvPr/>
+        </p:nvSpPr>
+        <p:spPr>
+          <a:xfrm>
+            <a:off x="822960" y="4754880"/>
+            <a:ext cx="10543032" cy="1143000"/>
+          </a:xfrm>
+          <a:prstGeom prst="roundRect">
+            <a:avLst>
+              <a:gd name="adj" fmla="val 8000"/>
+            </a:avLst>
+          </a:prstGeom>
+          <a:solidFill>
+            <a:srgbClr val="F3F2E7"/>
+          </a:solidFill>
+          <a:ln>
+            <a:noFill/>
+          </a:ln>
+          <a:effectLst/>
+        </p:spPr>
+        <p:style>
+          <a:lnRef idx="1">
+            <a:schemeClr val="accent1"/>
+          </a:lnRef>
+          <a:fillRef idx="3">
+            <a:schemeClr val="accent1"/>
+          </a:fillRef>
+          <a:effectRef idx="2">
+            <a:schemeClr val="accent1"/>
+          </a:effectRef>
+          <a:fontRef idx="minor">
+            <a:schemeClr val="lt1"/>
+          </a:fontRef>
+        </p:style>
+        <p:txBody>
+          <a:bodyPr rtlCol="0" anchor="ctr"/>
+          <a:lstStyle/>
+          <a:p>
+            <a:pPr algn="ctr"/>
+          </a:p>
+        </p:txBody>
+      </p:sp>
+      <p:sp>
+        <p:nvSpPr>
+          <p:cNvPr id="17" name="TextBox 16"/>
+          <p:cNvSpPr txBox="1"/>
+          <p:nvPr/>
+        </p:nvSpPr>
+        <p:spPr>
+          <a:xfrm>
+            <a:off x="1078992" y="4864608"/>
+            <a:ext cx="3657600" cy="274320"/>
+          </a:xfrm>
+          <a:prstGeom prst="rect">
+            <a:avLst/>
+          </a:prstGeom>
+          <a:noFill/>
+        </p:spPr>
+        <p:txBody>
+          <a:bodyPr wrap="square" anchor="t" lIns="0" rIns="0" tIns="0" bIns="0">
+            <a:spAutoFit/>
+          </a:bodyPr>
+          <a:lstStyle/>
+          <a:p>
+            <a:pPr algn="l"/>
+            <a:r>
               <a:rPr sz="1100" b="1" spc="-100">
                 <a:solidFill>
                   <a:srgbClr val="3D2B1B"/>
@@ -16579,57 +18263,21 @@
                 <a:latin typeface="Pretendard"/>
                 <a:ea typeface="Pretendard"/>
               </a:rPr>
-              <a:t/>
-            </a:r>
-          </a:p>
-        </p:txBody>
-      </p:sp>
-      <p:sp>
-        <p:nvSpPr>
-          <p:cNvPr id="15" name="TextBox 14"/>
-          <p:cNvSpPr txBox="1"/>
-          <p:nvPr/>
-        </p:nvSpPr>
-        <p:spPr>
-          <a:xfrm>
-            <a:off x="6643116" y="3291840"/>
-            <a:ext cx="4448556" cy="822960"/>
-          </a:xfrm>
-          <a:prstGeom prst="rect">
-            <a:avLst/>
-          </a:prstGeom>
-          <a:noFill/>
-        </p:spPr>
-        <p:txBody>
-          <a:bodyPr wrap="square" anchor="t" lIns="0" rIns="0" tIns="0" bIns="0">
-            <a:spAutoFit/>
-          </a:bodyPr>
-          <a:lstStyle/>
-          <a:p>
-            <a:pPr algn="l"/>
-            <a:r>
-              <a:rPr sz="1050" b="0" spc="-100">
-                <a:solidFill>
-                  <a:srgbClr val="868680"/>
-                </a:solidFill>
-                <a:latin typeface="Pretendard"/>
-                <a:ea typeface="Pretendard"/>
-              </a:rPr>
-              <a:t>구글 AI Overview·검색 요약 답변에 ‘정확한 출처’로 반영되도록 최적화</a:t>
-            </a:r>
-          </a:p>
-        </p:txBody>
-      </p:sp>
-      <p:sp>
-        <p:nvSpPr>
-          <p:cNvPr id="16" name="Oval 15"/>
+              <a:t>운영 플로우</a:t>
+            </a:r>
+          </a:p>
+        </p:txBody>
+      </p:sp>
+      <p:sp>
+        <p:nvSpPr>
+          <p:cNvPr id="18" name="Oval 17"/>
           <p:cNvSpPr/>
           <p:nvPr/>
         </p:nvSpPr>
         <p:spPr>
           <a:xfrm>
-            <a:off x="1727072" y="4434840"/>
-            <a:ext cx="621792" cy="621792"/>
+            <a:off x="1051560" y="5230368"/>
+            <a:ext cx="457200" cy="457200"/>
           </a:xfrm>
           <a:prstGeom prst="ellipse">
             <a:avLst/>
@@ -16666,14 +18314,14 @@
       </p:sp>
       <p:sp>
         <p:nvSpPr>
-          <p:cNvPr id="17" name="TextBox 16"/>
-          <p:cNvSpPr txBox="1"/>
-          <p:nvPr/>
-        </p:nvSpPr>
-        <p:spPr>
-          <a:xfrm>
-            <a:off x="1727072" y="4434840"/>
-            <a:ext cx="621792" cy="621792"/>
+          <p:cNvPr id="19" name="TextBox 18"/>
+          <p:cNvSpPr txBox="1"/>
+          <p:nvPr/>
+        </p:nvSpPr>
+        <p:spPr>
+          <a:xfrm>
+            <a:off x="1051560" y="5230368"/>
+            <a:ext cx="457200" cy="457200"/>
           </a:xfrm>
           <a:prstGeom prst="rect">
             <a:avLst/>
@@ -16688,43 +18336,43 @@
           <a:p>
             <a:pPr algn="ctr"/>
             <a:r>
-              <a:rPr sz="1700" b="1" spc="-100">
+              <a:rPr sz="1300" b="1" spc="-100">
                 <a:solidFill>
                   <a:srgbClr val="FFFFFF"/>
                 </a:solidFill>
                 <a:latin typeface="Pretendard"/>
                 <a:ea typeface="Pretendard"/>
               </a:rPr>
-              <a:t>01</a:t>
-            </a:r>
-          </a:p>
-        </p:txBody>
-      </p:sp>
-      <p:sp>
-        <p:nvSpPr>
-          <p:cNvPr id="18" name="TextBox 17"/>
-          <p:cNvSpPr txBox="1"/>
-          <p:nvPr/>
-        </p:nvSpPr>
-        <p:spPr>
-          <a:xfrm>
-            <a:off x="822960" y="5166359"/>
-            <a:ext cx="2430018" cy="457200"/>
-          </a:xfrm>
-          <a:prstGeom prst="rect">
-            <a:avLst/>
-          </a:prstGeom>
-          <a:noFill/>
-        </p:spPr>
-        <p:txBody>
-          <a:bodyPr wrap="square" anchor="t" lIns="0" rIns="0" tIns="0" bIns="0">
-            <a:spAutoFit/>
-          </a:bodyPr>
-          <a:lstStyle/>
-          <a:p>
-            <a:pPr algn="ctr"/>
-            <a:r>
-              <a:rPr sz="1350" b="1" spc="-100">
+              <a:t>1</a:t>
+            </a:r>
+          </a:p>
+        </p:txBody>
+      </p:sp>
+      <p:sp>
+        <p:nvSpPr>
+          <p:cNvPr id="20" name="TextBox 19"/>
+          <p:cNvSpPr txBox="1"/>
+          <p:nvPr/>
+        </p:nvSpPr>
+        <p:spPr>
+          <a:xfrm>
+            <a:off x="1618488" y="5230368"/>
+            <a:ext cx="1828800" cy="457200"/>
+          </a:xfrm>
+          <a:prstGeom prst="rect">
+            <a:avLst/>
+          </a:prstGeom>
+          <a:noFill/>
+        </p:spPr>
+        <p:txBody>
+          <a:bodyPr wrap="square" anchor="ctr" lIns="0" rIns="0" tIns="0" bIns="0">
+            <a:spAutoFit/>
+          </a:bodyPr>
+          <a:lstStyle/>
+          <a:p>
+            <a:pPr algn="l"/>
+            <a:r>
+              <a:rPr sz="1050" b="1" spc="-100">
                 <a:solidFill>
                   <a:srgbClr val="141412"/>
                 </a:solidFill>
@@ -16738,50 +18386,14 @@
       </p:sp>
       <p:sp>
         <p:nvSpPr>
-          <p:cNvPr id="19" name="TextBox 18"/>
-          <p:cNvSpPr txBox="1"/>
-          <p:nvPr/>
-        </p:nvSpPr>
-        <p:spPr>
-          <a:xfrm>
-            <a:off x="868680" y="5641848"/>
-            <a:ext cx="2338578" cy="1097280"/>
-          </a:xfrm>
-          <a:prstGeom prst="rect">
-            <a:avLst/>
-          </a:prstGeom>
-          <a:noFill/>
-        </p:spPr>
-        <p:txBody>
-          <a:bodyPr wrap="square" anchor="t" lIns="0" rIns="0" tIns="0" bIns="0">
-            <a:spAutoFit/>
-          </a:bodyPr>
-          <a:lstStyle/>
-          <a:p>
-            <a:pPr algn="ctr"/>
-            <a:r>
-              <a:rPr sz="1050" b="0" spc="-100">
-                <a:solidFill>
-                  <a:srgbClr val="868680"/>
-                </a:solidFill>
-                <a:latin typeface="Pretendard"/>
-                <a:ea typeface="Pretendard"/>
-              </a:rPr>
-              <a:t>검색 의도 직답 구조</a:t>
-            </a:r>
-          </a:p>
-        </p:txBody>
-      </p:sp>
-      <p:sp>
-        <p:nvSpPr>
-          <p:cNvPr id="20" name="Chevron 19"/>
+          <p:cNvPr id="21" name="Chevron 20"/>
           <p:cNvSpPr/>
           <p:nvPr/>
         </p:nvSpPr>
         <p:spPr>
           <a:xfrm>
-            <a:off x="3207258" y="4617720"/>
-            <a:ext cx="365760" cy="256032"/>
+            <a:off x="3264408" y="5349240"/>
+            <a:ext cx="237744" cy="256032"/>
           </a:xfrm>
           <a:prstGeom prst="chevron">
             <a:avLst/>
@@ -16818,14 +18430,14 @@
       </p:sp>
       <p:sp>
         <p:nvSpPr>
-          <p:cNvPr id="21" name="Oval 20"/>
+          <p:cNvPr id="22" name="Oval 21"/>
           <p:cNvSpPr/>
           <p:nvPr/>
         </p:nvSpPr>
         <p:spPr>
           <a:xfrm>
-            <a:off x="4431411" y="4434840"/>
-            <a:ext cx="621792" cy="621792"/>
+            <a:off x="3593591" y="5230368"/>
+            <a:ext cx="457200" cy="457200"/>
           </a:xfrm>
           <a:prstGeom prst="ellipse">
             <a:avLst/>
@@ -16862,14 +18474,14 @@
       </p:sp>
       <p:sp>
         <p:nvSpPr>
-          <p:cNvPr id="22" name="TextBox 21"/>
-          <p:cNvSpPr txBox="1"/>
-          <p:nvPr/>
-        </p:nvSpPr>
-        <p:spPr>
-          <a:xfrm>
-            <a:off x="4431411" y="4434840"/>
-            <a:ext cx="621792" cy="621792"/>
+          <p:cNvPr id="23" name="TextBox 22"/>
+          <p:cNvSpPr txBox="1"/>
+          <p:nvPr/>
+        </p:nvSpPr>
+        <p:spPr>
+          <a:xfrm>
+            <a:off x="3593591" y="5230368"/>
+            <a:ext cx="457200" cy="457200"/>
           </a:xfrm>
           <a:prstGeom prst="rect">
             <a:avLst/>
@@ -16884,43 +18496,43 @@
           <a:p>
             <a:pPr algn="ctr"/>
             <a:r>
-              <a:rPr sz="1700" b="1" spc="-100">
+              <a:rPr sz="1300" b="1" spc="-100">
                 <a:solidFill>
                   <a:srgbClr val="FFFFFF"/>
                 </a:solidFill>
                 <a:latin typeface="Pretendard"/>
                 <a:ea typeface="Pretendard"/>
               </a:rPr>
-              <a:t>02</a:t>
-            </a:r>
-          </a:p>
-        </p:txBody>
-      </p:sp>
-      <p:sp>
-        <p:nvSpPr>
-          <p:cNvPr id="23" name="TextBox 22"/>
-          <p:cNvSpPr txBox="1"/>
-          <p:nvPr/>
-        </p:nvSpPr>
-        <p:spPr>
-          <a:xfrm>
-            <a:off x="3527298" y="5166359"/>
-            <a:ext cx="2430018" cy="457200"/>
-          </a:xfrm>
-          <a:prstGeom prst="rect">
-            <a:avLst/>
-          </a:prstGeom>
-          <a:noFill/>
-        </p:spPr>
-        <p:txBody>
-          <a:bodyPr wrap="square" anchor="t" lIns="0" rIns="0" tIns="0" bIns="0">
-            <a:spAutoFit/>
-          </a:bodyPr>
-          <a:lstStyle/>
-          <a:p>
-            <a:pPr algn="ctr"/>
-            <a:r>
-              <a:rPr sz="1350" b="1" spc="-100">
+              <a:t>2</a:t>
+            </a:r>
+          </a:p>
+        </p:txBody>
+      </p:sp>
+      <p:sp>
+        <p:nvSpPr>
+          <p:cNvPr id="24" name="TextBox 23"/>
+          <p:cNvSpPr txBox="1"/>
+          <p:nvPr/>
+        </p:nvSpPr>
+        <p:spPr>
+          <a:xfrm>
+            <a:off x="4160520" y="5230368"/>
+            <a:ext cx="1828800" cy="457200"/>
+          </a:xfrm>
+          <a:prstGeom prst="rect">
+            <a:avLst/>
+          </a:prstGeom>
+          <a:noFill/>
+        </p:spPr>
+        <p:txBody>
+          <a:bodyPr wrap="square" anchor="ctr" lIns="0" rIns="0" tIns="0" bIns="0">
+            <a:spAutoFit/>
+          </a:bodyPr>
+          <a:lstStyle/>
+          <a:p>
+            <a:pPr algn="l"/>
+            <a:r>
+              <a:rPr sz="1050" b="1" spc="-100">
                 <a:solidFill>
                   <a:srgbClr val="141412"/>
                 </a:solidFill>
@@ -16928,42 +18540,6 @@
                 <a:ea typeface="Pretendard"/>
               </a:rPr>
               <a:t>콘텐츠 발행</a:t>
-            </a:r>
-          </a:p>
-        </p:txBody>
-      </p:sp>
-      <p:sp>
-        <p:nvSpPr>
-          <p:cNvPr id="24" name="TextBox 23"/>
-          <p:cNvSpPr txBox="1"/>
-          <p:nvPr/>
-        </p:nvSpPr>
-        <p:spPr>
-          <a:xfrm>
-            <a:off x="3573018" y="5641848"/>
-            <a:ext cx="2338578" cy="1097280"/>
-          </a:xfrm>
-          <a:prstGeom prst="rect">
-            <a:avLst/>
-          </a:prstGeom>
-          <a:noFill/>
-        </p:spPr>
-        <p:txBody>
-          <a:bodyPr wrap="square" anchor="t" lIns="0" rIns="0" tIns="0" bIns="0">
-            <a:spAutoFit/>
-          </a:bodyPr>
-          <a:lstStyle/>
-          <a:p>
-            <a:pPr algn="ctr"/>
-            <a:r>
-              <a:rPr sz="1050" b="0" spc="-100">
-                <a:solidFill>
-                  <a:srgbClr val="868680"/>
-                </a:solidFill>
-                <a:latin typeface="Pretendard"/>
-                <a:ea typeface="Pretendard"/>
-              </a:rPr>
-              <a:t>언론보도·정보성·인용형</a:t>
             </a:r>
           </a:p>
         </p:txBody>
@@ -16976,8 +18552,8 @@
         </p:nvSpPr>
         <p:spPr>
           <a:xfrm>
-            <a:off x="5911596" y="4617720"/>
-            <a:ext cx="365760" cy="256032"/>
+            <a:off x="5806440" y="5349240"/>
+            <a:ext cx="237744" cy="256032"/>
           </a:xfrm>
           <a:prstGeom prst="chevron">
             <a:avLst/>
@@ -17020,8 +18596,8 @@
         </p:nvSpPr>
         <p:spPr>
           <a:xfrm>
-            <a:off x="7135749" y="4434840"/>
-            <a:ext cx="621792" cy="621792"/>
+            <a:off x="6135623" y="5230368"/>
+            <a:ext cx="457200" cy="457200"/>
           </a:xfrm>
           <a:prstGeom prst="ellipse">
             <a:avLst/>
@@ -17064,8 +18640,8 @@
         </p:nvSpPr>
         <p:spPr>
           <a:xfrm>
-            <a:off x="7135749" y="4434840"/>
-            <a:ext cx="621792" cy="621792"/>
+            <a:off x="6135623" y="5230368"/>
+            <a:ext cx="457200" cy="457200"/>
           </a:xfrm>
           <a:prstGeom prst="rect">
             <a:avLst/>
@@ -17080,14 +18656,14 @@
           <a:p>
             <a:pPr algn="ctr"/>
             <a:r>
-              <a:rPr sz="1700" b="1" spc="-100">
+              <a:rPr sz="1300" b="1" spc="-100">
                 <a:solidFill>
                   <a:srgbClr val="FFFFFF"/>
                 </a:solidFill>
                 <a:latin typeface="Pretendard"/>
                 <a:ea typeface="Pretendard"/>
               </a:rPr>
-              <a:t>03</a:t>
+              <a:t>3</a:t>
             </a:r>
           </a:p>
         </p:txBody>
@@ -17100,23 +18676,23 @@
         </p:nvSpPr>
         <p:spPr>
           <a:xfrm>
-            <a:off x="6231636" y="5166359"/>
-            <a:ext cx="2430018" cy="457200"/>
-          </a:xfrm>
-          <a:prstGeom prst="rect">
-            <a:avLst/>
-          </a:prstGeom>
-          <a:noFill/>
-        </p:spPr>
-        <p:txBody>
-          <a:bodyPr wrap="square" anchor="t" lIns="0" rIns="0" tIns="0" bIns="0">
-            <a:spAutoFit/>
-          </a:bodyPr>
-          <a:lstStyle/>
-          <a:p>
-            <a:pPr algn="ctr"/>
-            <a:r>
-              <a:rPr sz="1350" b="1" spc="-100">
+            <a:off x="6702551" y="5230368"/>
+            <a:ext cx="1828800" cy="457200"/>
+          </a:xfrm>
+          <a:prstGeom prst="rect">
+            <a:avLst/>
+          </a:prstGeom>
+          <a:noFill/>
+        </p:spPr>
+        <p:txBody>
+          <a:bodyPr wrap="square" anchor="ctr" lIns="0" rIns="0" tIns="0" bIns="0">
+            <a:spAutoFit/>
+          </a:bodyPr>
+          <a:lstStyle/>
+          <a:p>
+            <a:pPr algn="l"/>
+            <a:r>
+              <a:rPr sz="1050" b="1" spc="-100">
                 <a:solidFill>
                   <a:srgbClr val="141412"/>
                 </a:solidFill>
@@ -17130,50 +18706,14 @@
       </p:sp>
       <p:sp>
         <p:nvSpPr>
-          <p:cNvPr id="29" name="TextBox 28"/>
-          <p:cNvSpPr txBox="1"/>
-          <p:nvPr/>
-        </p:nvSpPr>
-        <p:spPr>
-          <a:xfrm>
-            <a:off x="6277356" y="5641848"/>
-            <a:ext cx="2338578" cy="1097280"/>
-          </a:xfrm>
-          <a:prstGeom prst="rect">
-            <a:avLst/>
-          </a:prstGeom>
-          <a:noFill/>
-        </p:spPr>
-        <p:txBody>
-          <a:bodyPr wrap="square" anchor="t" lIns="0" rIns="0" tIns="0" bIns="0">
-            <a:spAutoFit/>
-          </a:bodyPr>
-          <a:lstStyle/>
-          <a:p>
-            <a:pPr algn="ctr"/>
-            <a:r>
-              <a:rPr sz="1050" b="0" spc="-100">
-                <a:solidFill>
-                  <a:srgbClr val="868680"/>
-                </a:solidFill>
-                <a:latin typeface="Pretendard"/>
-                <a:ea typeface="Pretendard"/>
-              </a:rPr>
-              <a:t>출처·수치·정의 명시</a:t>
-            </a:r>
-          </a:p>
-        </p:txBody>
-      </p:sp>
-      <p:sp>
-        <p:nvSpPr>
-          <p:cNvPr id="30" name="Chevron 29"/>
+          <p:cNvPr id="29" name="Chevron 28"/>
           <p:cNvSpPr/>
           <p:nvPr/>
         </p:nvSpPr>
         <p:spPr>
           <a:xfrm>
-            <a:off x="8615934" y="4617720"/>
-            <a:ext cx="365760" cy="256032"/>
+            <a:off x="8348471" y="5349240"/>
+            <a:ext cx="237744" cy="256032"/>
           </a:xfrm>
           <a:prstGeom prst="chevron">
             <a:avLst/>
@@ -17210,14 +18750,14 @@
       </p:sp>
       <p:sp>
         <p:nvSpPr>
-          <p:cNvPr id="31" name="Oval 30"/>
+          <p:cNvPr id="30" name="Oval 29"/>
           <p:cNvSpPr/>
           <p:nvPr/>
         </p:nvSpPr>
         <p:spPr>
           <a:xfrm>
-            <a:off x="9840087" y="4434840"/>
-            <a:ext cx="621792" cy="621792"/>
+            <a:off x="8677656" y="5230368"/>
+            <a:ext cx="457200" cy="457200"/>
           </a:xfrm>
           <a:prstGeom prst="ellipse">
             <a:avLst/>
@@ -17254,14 +18794,50 @@
       </p:sp>
       <p:sp>
         <p:nvSpPr>
+          <p:cNvPr id="31" name="TextBox 30"/>
+          <p:cNvSpPr txBox="1"/>
+          <p:nvPr/>
+        </p:nvSpPr>
+        <p:spPr>
+          <a:xfrm>
+            <a:off x="8677656" y="5230368"/>
+            <a:ext cx="457200" cy="457200"/>
+          </a:xfrm>
+          <a:prstGeom prst="rect">
+            <a:avLst/>
+          </a:prstGeom>
+          <a:noFill/>
+        </p:spPr>
+        <p:txBody>
+          <a:bodyPr wrap="square" anchor="ctr" lIns="0" rIns="0" tIns="0" bIns="0">
+            <a:spAutoFit/>
+          </a:bodyPr>
+          <a:lstStyle/>
+          <a:p>
+            <a:pPr algn="ctr"/>
+            <a:r>
+              <a:rPr sz="1300" b="1" spc="-100">
+                <a:solidFill>
+                  <a:srgbClr val="FFFFFF"/>
+                </a:solidFill>
+                <a:latin typeface="Pretendard"/>
+                <a:ea typeface="Pretendard"/>
+              </a:rPr>
+              <a:t>4</a:t>
+            </a:r>
+          </a:p>
+        </p:txBody>
+      </p:sp>
+      <p:sp>
+        <p:nvSpPr>
           <p:cNvPr id="32" name="TextBox 31"/>
           <p:cNvSpPr txBox="1"/>
           <p:nvPr/>
         </p:nvSpPr>
         <p:spPr>
           <a:xfrm>
-            <a:off x="9840087" y="4434840"/>
-            <a:ext cx="621792" cy="621792"/>
+            <a:off x="9244584" y="5230368"/>
+            <a:ext cx="1828800" cy="457200"/>
           </a:xfrm>
           <a:prstGeom prst="rect">
             <a:avLst/>
@@ -17274,45 +18850,9 @@
           </a:bodyPr>
           <a:lstStyle/>
           <a:p>
-            <a:pPr algn="ctr"/>
-            <a:r>
-              <a:rPr sz="1700" b="1" spc="-100">
-                <a:solidFill>
-                  <a:srgbClr val="FFFFFF"/>
-                </a:solidFill>
-                <a:latin typeface="Pretendard"/>
-                <a:ea typeface="Pretendard"/>
-              </a:rPr>
-              <a:t>04</a:t>
-            </a:r>
-          </a:p>
-        </p:txBody>
-      </p:sp>
-      <p:sp>
-        <p:nvSpPr>
-          <p:cNvPr id="33" name="TextBox 32"/>
-          <p:cNvSpPr txBox="1"/>
-          <p:nvPr/>
-        </p:nvSpPr>
-        <p:spPr>
-          <a:xfrm>
-            <a:off x="8935974" y="5166359"/>
-            <a:ext cx="2430018" cy="457200"/>
-          </a:xfrm>
-          <a:prstGeom prst="rect">
-            <a:avLst/>
-          </a:prstGeom>
-          <a:noFill/>
-        </p:spPr>
-        <p:txBody>
-          <a:bodyPr wrap="square" anchor="t" lIns="0" rIns="0" tIns="0" bIns="0">
-            <a:spAutoFit/>
-          </a:bodyPr>
-          <a:lstStyle/>
-          <a:p>
-            <a:pPr algn="ctr"/>
-            <a:r>
-              <a:rPr sz="1350" b="1" spc="-100">
+            <a:pPr algn="l"/>
+            <a:r>
+              <a:rPr sz="1050" b="1" spc="-100">
                 <a:solidFill>
                   <a:srgbClr val="141412"/>
                 </a:solidFill>
@@ -17326,37 +18866,89 @@
       </p:sp>
       <p:sp>
         <p:nvSpPr>
-          <p:cNvPr id="34" name="TextBox 33"/>
-          <p:cNvSpPr txBox="1"/>
-          <p:nvPr/>
-        </p:nvSpPr>
-        <p:spPr>
-          <a:xfrm>
-            <a:off x="8981694" y="5641848"/>
-            <a:ext cx="2338578" cy="1097280"/>
-          </a:xfrm>
-          <a:prstGeom prst="rect">
-            <a:avLst/>
-          </a:prstGeom>
-          <a:noFill/>
-        </p:spPr>
-        <p:txBody>
-          <a:bodyPr wrap="square" anchor="t" lIns="0" rIns="0" tIns="0" bIns="0">
-            <a:spAutoFit/>
-          </a:bodyPr>
-          <a:lstStyle/>
-          <a:p>
-            <a:pPr algn="ctr"/>
-            <a:r>
-              <a:rPr sz="1050" b="0" spc="-100">
-                <a:solidFill>
-                  <a:srgbClr val="868680"/>
-                </a:solidFill>
-                <a:latin typeface="Pretendard"/>
-                <a:ea typeface="Pretendard"/>
-              </a:rPr>
-              <a:t>Pull로 탐색 순간 선점</a:t>
-            </a:r>
+          <p:cNvPr id="33" name="Rectangle 32"/>
+          <p:cNvSpPr/>
+          <p:nvPr/>
+        </p:nvSpPr>
+        <p:spPr>
+          <a:xfrm>
+            <a:off x="822960" y="6144768"/>
+            <a:ext cx="10543032" cy="457200"/>
+          </a:xfrm>
+          <a:prstGeom prst="rect">
+            <a:avLst/>
+          </a:prstGeom>
+          <a:solidFill>
+            <a:srgbClr val="F3F2E7"/>
+          </a:solidFill>
+          <a:ln>
+            <a:noFill/>
+          </a:ln>
+          <a:effectLst/>
+        </p:spPr>
+        <p:style>
+          <a:lnRef idx="1">
+            <a:schemeClr val="accent1"/>
+          </a:lnRef>
+          <a:fillRef idx="3">
+            <a:schemeClr val="accent1"/>
+          </a:fillRef>
+          <a:effectRef idx="2">
+            <a:schemeClr val="accent1"/>
+          </a:effectRef>
+          <a:fontRef idx="minor">
+            <a:schemeClr val="lt1"/>
+          </a:fontRef>
+        </p:style>
+        <p:txBody>
+          <a:bodyPr rtlCol="0" anchor="ctr"/>
+          <a:lstStyle/>
+          <a:p>
+            <a:pPr algn="ctr"/>
+          </a:p>
+        </p:txBody>
+      </p:sp>
+      <p:sp>
+        <p:nvSpPr>
+          <p:cNvPr id="34" name="Rectangle 33"/>
+          <p:cNvSpPr/>
+          <p:nvPr/>
+        </p:nvSpPr>
+        <p:spPr>
+          <a:xfrm>
+            <a:off x="822960" y="6144768"/>
+            <a:ext cx="82296" cy="457200"/>
+          </a:xfrm>
+          <a:prstGeom prst="rect">
+            <a:avLst/>
+          </a:prstGeom>
+          <a:solidFill>
+            <a:srgbClr val="3D2B1B"/>
+          </a:solidFill>
+          <a:ln>
+            <a:noFill/>
+          </a:ln>
+          <a:effectLst/>
+        </p:spPr>
+        <p:style>
+          <a:lnRef idx="1">
+            <a:schemeClr val="accent1"/>
+          </a:lnRef>
+          <a:fillRef idx="3">
+            <a:schemeClr val="accent1"/>
+          </a:fillRef>
+          <a:effectRef idx="2">
+            <a:schemeClr val="accent1"/>
+          </a:effectRef>
+          <a:fontRef idx="minor">
+            <a:schemeClr val="lt1"/>
+          </a:fontRef>
+        </p:style>
+        <p:txBody>
+          <a:bodyPr rtlCol="0" anchor="ctr"/>
+          <a:lstStyle/>
+          <a:p>
+            <a:pPr algn="ctr"/>
           </a:p>
         </p:txBody>
       </p:sp>
@@ -17368,30 +18960,30 @@
         </p:nvSpPr>
         <p:spPr>
           <a:xfrm>
-            <a:off x="822960" y="6492240"/>
-            <a:ext cx="10543032" cy="274320"/>
-          </a:xfrm>
-          <a:prstGeom prst="rect">
-            <a:avLst/>
-          </a:prstGeom>
-          <a:noFill/>
-        </p:spPr>
-        <p:txBody>
-          <a:bodyPr wrap="square" anchor="t" lIns="0" rIns="0" tIns="0" bIns="0">
-            <a:spAutoFit/>
-          </a:bodyPr>
-          <a:lstStyle/>
-          <a:p>
-            <a:pPr algn="l"/>
-            <a:r>
-              <a:rPr sz="850" b="0" spc="-100">
-                <a:solidFill>
-                  <a:srgbClr val="868680"/>
-                </a:solidFill>
-                <a:latin typeface="Pretendard"/>
-                <a:ea typeface="Pretendard"/>
-              </a:rPr>
-              <a:t>※ GEO=생성형 AI 답변 출처 선택 최적화 / AEO=AI 요약 답변 출처 반영 최적화 · 2026 검색 트렌드 + BAT 내부 프로토콜 기반</a:t>
+            <a:off x="1097280" y="6144768"/>
+            <a:ext cx="10058400" cy="457200"/>
+          </a:xfrm>
+          <a:prstGeom prst="rect">
+            <a:avLst/>
+          </a:prstGeom>
+          <a:noFill/>
+        </p:spPr>
+        <p:txBody>
+          <a:bodyPr wrap="square" anchor="ctr" lIns="0" rIns="0" tIns="0" bIns="0">
+            <a:spAutoFit/>
+          </a:bodyPr>
+          <a:lstStyle/>
+          <a:p>
+            <a:pPr algn="ctr"/>
+            <a:r>
+              <a:rPr sz="1250" b="1" spc="-100">
+                <a:solidFill>
+                  <a:srgbClr val="141412"/>
+                </a:solidFill>
+                <a:latin typeface="Pretendard"/>
+                <a:ea typeface="Pretendard"/>
+              </a:rPr>
+              <a:t>‘검색 1위’가 아니라 ‘AI 답변에 인용’ — 탐색 순간을 Pull로 선점한다</a:t>
             </a:r>
           </a:p>
         </p:txBody>
@@ -17604,17 +19196,395 @@
           </a:p>
         </p:txBody>
       </p:sp>
+      <p:sp>
+        <p:nvSpPr>
+          <p:cNvPr id="6" name="Rounded Rectangle 5"/>
+          <p:cNvSpPr/>
+          <p:nvPr/>
+        </p:nvSpPr>
+        <p:spPr>
+          <a:xfrm>
+            <a:off x="822960" y="2121408"/>
+            <a:ext cx="3383280" cy="548640"/>
+          </a:xfrm>
+          <a:prstGeom prst="roundRect">
+            <a:avLst>
+              <a:gd name="adj" fmla="val 8000"/>
+            </a:avLst>
+          </a:prstGeom>
+          <a:solidFill>
+            <a:srgbClr val="F3F2E7"/>
+          </a:solidFill>
+          <a:ln>
+            <a:noFill/>
+          </a:ln>
+          <a:effectLst/>
+        </p:spPr>
+        <p:style>
+          <a:lnRef idx="1">
+            <a:schemeClr val="accent1"/>
+          </a:lnRef>
+          <a:fillRef idx="3">
+            <a:schemeClr val="accent1"/>
+          </a:fillRef>
+          <a:effectRef idx="2">
+            <a:schemeClr val="accent1"/>
+          </a:effectRef>
+          <a:fontRef idx="minor">
+            <a:schemeClr val="lt1"/>
+          </a:fontRef>
+        </p:style>
+        <p:txBody>
+          <a:bodyPr rtlCol="0" anchor="ctr"/>
+          <a:lstStyle/>
+          <a:p>
+            <a:pPr algn="ctr"/>
+          </a:p>
+        </p:txBody>
+      </p:sp>
+      <p:sp>
+        <p:nvSpPr>
+          <p:cNvPr id="7" name="Rectangle 6"/>
+          <p:cNvSpPr/>
+          <p:nvPr/>
+        </p:nvSpPr>
+        <p:spPr>
+          <a:xfrm>
+            <a:off x="822960" y="2121408"/>
+            <a:ext cx="73152" cy="548640"/>
+          </a:xfrm>
+          <a:prstGeom prst="rect">
+            <a:avLst/>
+          </a:prstGeom>
+          <a:solidFill>
+            <a:srgbClr val="0E5A30"/>
+          </a:solidFill>
+          <a:ln>
+            <a:noFill/>
+          </a:ln>
+          <a:effectLst/>
+        </p:spPr>
+        <p:style>
+          <a:lnRef idx="1">
+            <a:schemeClr val="accent1"/>
+          </a:lnRef>
+          <a:fillRef idx="3">
+            <a:schemeClr val="accent1"/>
+          </a:fillRef>
+          <a:effectRef idx="2">
+            <a:schemeClr val="accent1"/>
+          </a:effectRef>
+          <a:fontRef idx="minor">
+            <a:schemeClr val="lt1"/>
+          </a:fontRef>
+        </p:style>
+        <p:txBody>
+          <a:bodyPr rtlCol="0" anchor="ctr"/>
+          <a:lstStyle/>
+          <a:p>
+            <a:pPr algn="ctr"/>
+          </a:p>
+        </p:txBody>
+      </p:sp>
+      <p:sp>
+        <p:nvSpPr>
+          <p:cNvPr id="8" name="TextBox 7"/>
+          <p:cNvSpPr txBox="1"/>
+          <p:nvPr/>
+        </p:nvSpPr>
+        <p:spPr>
+          <a:xfrm>
+            <a:off x="1078992" y="2121408"/>
+            <a:ext cx="3108960" cy="548640"/>
+          </a:xfrm>
+          <a:prstGeom prst="rect">
+            <a:avLst/>
+          </a:prstGeom>
+          <a:noFill/>
+        </p:spPr>
+        <p:txBody>
+          <a:bodyPr wrap="square" anchor="ctr" lIns="0" rIns="0" tIns="0" bIns="0">
+            <a:spAutoFit/>
+          </a:bodyPr>
+          <a:lstStyle/>
+          <a:p>
+            <a:pPr algn="l"/>
+            <a:r>
+              <a:rPr sz="1050" b="1" spc="-100">
+                <a:solidFill>
+                  <a:srgbClr val="141412"/>
+                </a:solidFill>
+                <a:latin typeface="Pretendard"/>
+                <a:ea typeface="Pretendard"/>
+              </a:rPr>
+              <a:t>✓  올영 앱 내 ‘발견 → 구매’ 직결</a:t>
+            </a:r>
+          </a:p>
+        </p:txBody>
+      </p:sp>
+      <p:sp>
+        <p:nvSpPr>
+          <p:cNvPr id="9" name="Rounded Rectangle 8"/>
+          <p:cNvSpPr/>
+          <p:nvPr/>
+        </p:nvSpPr>
+        <p:spPr>
+          <a:xfrm>
+            <a:off x="4393692" y="2121408"/>
+            <a:ext cx="3383280" cy="548640"/>
+          </a:xfrm>
+          <a:prstGeom prst="roundRect">
+            <a:avLst>
+              <a:gd name="adj" fmla="val 8000"/>
+            </a:avLst>
+          </a:prstGeom>
+          <a:solidFill>
+            <a:srgbClr val="F3F2E7"/>
+          </a:solidFill>
+          <a:ln>
+            <a:noFill/>
+          </a:ln>
+          <a:effectLst/>
+        </p:spPr>
+        <p:style>
+          <a:lnRef idx="1">
+            <a:schemeClr val="accent1"/>
+          </a:lnRef>
+          <a:fillRef idx="3">
+            <a:schemeClr val="accent1"/>
+          </a:fillRef>
+          <a:effectRef idx="2">
+            <a:schemeClr val="accent1"/>
+          </a:effectRef>
+          <a:fontRef idx="minor">
+            <a:schemeClr val="lt1"/>
+          </a:fontRef>
+        </p:style>
+        <p:txBody>
+          <a:bodyPr rtlCol="0" anchor="ctr"/>
+          <a:lstStyle/>
+          <a:p>
+            <a:pPr algn="ctr"/>
+          </a:p>
+        </p:txBody>
+      </p:sp>
+      <p:sp>
+        <p:nvSpPr>
+          <p:cNvPr id="10" name="Rectangle 9"/>
+          <p:cNvSpPr/>
+          <p:nvPr/>
+        </p:nvSpPr>
+        <p:spPr>
+          <a:xfrm>
+            <a:off x="4393692" y="2121408"/>
+            <a:ext cx="73152" cy="548640"/>
+          </a:xfrm>
+          <a:prstGeom prst="rect">
+            <a:avLst/>
+          </a:prstGeom>
+          <a:solidFill>
+            <a:srgbClr val="0E5A30"/>
+          </a:solidFill>
+          <a:ln>
+            <a:noFill/>
+          </a:ln>
+          <a:effectLst/>
+        </p:spPr>
+        <p:style>
+          <a:lnRef idx="1">
+            <a:schemeClr val="accent1"/>
+          </a:lnRef>
+          <a:fillRef idx="3">
+            <a:schemeClr val="accent1"/>
+          </a:fillRef>
+          <a:effectRef idx="2">
+            <a:schemeClr val="accent1"/>
+          </a:effectRef>
+          <a:fontRef idx="minor">
+            <a:schemeClr val="lt1"/>
+          </a:fontRef>
+        </p:style>
+        <p:txBody>
+          <a:bodyPr rtlCol="0" anchor="ctr"/>
+          <a:lstStyle/>
+          <a:p>
+            <a:pPr algn="ctr"/>
+          </a:p>
+        </p:txBody>
+      </p:sp>
+      <p:sp>
+        <p:nvSpPr>
+          <p:cNvPr id="11" name="TextBox 10"/>
+          <p:cNvSpPr txBox="1"/>
+          <p:nvPr/>
+        </p:nvSpPr>
+        <p:spPr>
+          <a:xfrm>
+            <a:off x="4649724" y="2121408"/>
+            <a:ext cx="3108960" cy="548640"/>
+          </a:xfrm>
+          <a:prstGeom prst="rect">
+            <a:avLst/>
+          </a:prstGeom>
+          <a:noFill/>
+        </p:spPr>
+        <p:txBody>
+          <a:bodyPr wrap="square" anchor="ctr" lIns="0" rIns="0" tIns="0" bIns="0">
+            <a:spAutoFit/>
+          </a:bodyPr>
+          <a:lstStyle/>
+          <a:p>
+            <a:pPr algn="l"/>
+            <a:r>
+              <a:rPr sz="1050" b="1" spc="-100">
+                <a:solidFill>
+                  <a:srgbClr val="141412"/>
+                </a:solidFill>
+                <a:latin typeface="Pretendard"/>
+                <a:ea typeface="Pretendard"/>
+              </a:rPr>
+              <a:t>✓  세일 기간 랭킹·매출 견인</a:t>
+            </a:r>
+          </a:p>
+        </p:txBody>
+      </p:sp>
+      <p:sp>
+        <p:nvSpPr>
+          <p:cNvPr id="12" name="Rounded Rectangle 11"/>
+          <p:cNvSpPr/>
+          <p:nvPr/>
+        </p:nvSpPr>
+        <p:spPr>
+          <a:xfrm>
+            <a:off x="7964423" y="2121408"/>
+            <a:ext cx="3383280" cy="548640"/>
+          </a:xfrm>
+          <a:prstGeom prst="roundRect">
+            <a:avLst>
+              <a:gd name="adj" fmla="val 8000"/>
+            </a:avLst>
+          </a:prstGeom>
+          <a:solidFill>
+            <a:srgbClr val="F3F2E7"/>
+          </a:solidFill>
+          <a:ln>
+            <a:noFill/>
+          </a:ln>
+          <a:effectLst/>
+        </p:spPr>
+        <p:style>
+          <a:lnRef idx="1">
+            <a:schemeClr val="accent1"/>
+          </a:lnRef>
+          <a:fillRef idx="3">
+            <a:schemeClr val="accent1"/>
+          </a:fillRef>
+          <a:effectRef idx="2">
+            <a:schemeClr val="accent1"/>
+          </a:effectRef>
+          <a:fontRef idx="minor">
+            <a:schemeClr val="lt1"/>
+          </a:fontRef>
+        </p:style>
+        <p:txBody>
+          <a:bodyPr rtlCol="0" anchor="ctr"/>
+          <a:lstStyle/>
+          <a:p>
+            <a:pPr algn="ctr"/>
+          </a:p>
+        </p:txBody>
+      </p:sp>
+      <p:sp>
+        <p:nvSpPr>
+          <p:cNvPr id="13" name="Rectangle 12"/>
+          <p:cNvSpPr/>
+          <p:nvPr/>
+        </p:nvSpPr>
+        <p:spPr>
+          <a:xfrm>
+            <a:off x="7964423" y="2121408"/>
+            <a:ext cx="73152" cy="548640"/>
+          </a:xfrm>
+          <a:prstGeom prst="rect">
+            <a:avLst/>
+          </a:prstGeom>
+          <a:solidFill>
+            <a:srgbClr val="0E5A30"/>
+          </a:solidFill>
+          <a:ln>
+            <a:noFill/>
+          </a:ln>
+          <a:effectLst/>
+        </p:spPr>
+        <p:style>
+          <a:lnRef idx="1">
+            <a:schemeClr val="accent1"/>
+          </a:lnRef>
+          <a:fillRef idx="3">
+            <a:schemeClr val="accent1"/>
+          </a:fillRef>
+          <a:effectRef idx="2">
+            <a:schemeClr val="accent1"/>
+          </a:effectRef>
+          <a:fontRef idx="minor">
+            <a:schemeClr val="lt1"/>
+          </a:fontRef>
+        </p:style>
+        <p:txBody>
+          <a:bodyPr rtlCol="0" anchor="ctr"/>
+          <a:lstStyle/>
+          <a:p>
+            <a:pPr algn="ctr"/>
+          </a:p>
+        </p:txBody>
+      </p:sp>
+      <p:sp>
+        <p:nvSpPr>
+          <p:cNvPr id="14" name="TextBox 13"/>
+          <p:cNvSpPr txBox="1"/>
+          <p:nvPr/>
+        </p:nvSpPr>
+        <p:spPr>
+          <a:xfrm>
+            <a:off x="8220455" y="2121408"/>
+            <a:ext cx="3108960" cy="548640"/>
+          </a:xfrm>
+          <a:prstGeom prst="rect">
+            <a:avLst/>
+          </a:prstGeom>
+          <a:noFill/>
+        </p:spPr>
+        <p:txBody>
+          <a:bodyPr wrap="square" anchor="ctr" lIns="0" rIns="0" tIns="0" bIns="0">
+            <a:spAutoFit/>
+          </a:bodyPr>
+          <a:lstStyle/>
+          <a:p>
+            <a:pPr algn="l"/>
+            <a:r>
+              <a:rPr sz="1050" b="1" spc="-100">
+                <a:solidFill>
+                  <a:srgbClr val="141412"/>
+                </a:solidFill>
+                <a:latin typeface="Pretendard"/>
+                <a:ea typeface="Pretendard"/>
+              </a:rPr>
+              <a:t>✓  고객 참여형 진성 추천 자산</a:t>
+            </a:r>
+          </a:p>
+        </p:txBody>
+      </p:sp>
       <p:graphicFrame>
         <p:nvGraphicFramePr>
-          <p:cNvPr id="6" name="Table 5"/>
+          <p:cNvPr id="15" name="Table 14"/>
           <p:cNvGraphicFramePr>
             <a:graphicFrameLocks noGrp="1"/>
           </p:cNvGraphicFramePr>
           <p:nvPr/>
         </p:nvGraphicFramePr>
         <p:xfrm>
-          <a:off x="822960" y="2286000"/>
-          <a:ext cx="10543030" cy="3291840"/>
+          <a:off x="822960" y="2852928"/>
+          <a:ext cx="10543030" cy="2377440"/>
         </p:xfrm>
         <a:graphic>
           <a:graphicData uri="http://schemas.openxmlformats.org/drawingml/2006/table">
@@ -17627,7 +19597,7 @@
                 <a:gridCol w="4559148"/>
                 <a:gridCol w="4274202"/>
               </a:tblGrid>
-              <a:tr h="658368">
+              <a:tr h="475488">
                 <a:tc>
                   <a:txBody>
                     <a:bodyPr wrap="square"/>
@@ -17635,7 +19605,7 @@
                     <a:p>
                       <a:pPr algn="l"/>
                       <a:r>
-                        <a:rPr sz="1150" b="1" spc="-100">
+                        <a:rPr sz="1100" b="1" spc="-100">
                           <a:solidFill>
                             <a:srgbClr val="FFFFFF"/>
                           </a:solidFill>
@@ -17659,14 +19629,14 @@
                     <a:p>
                       <a:pPr algn="l"/>
                       <a:r>
-                        <a:rPr sz="1150" b="1" spc="-100">
+                        <a:rPr sz="1100" b="1" spc="-100">
                           <a:solidFill>
                             <a:srgbClr val="FFFFFF"/>
                           </a:solidFill>
                           <a:latin typeface="Pretendard"/>
                           <a:ea typeface="Pretendard"/>
                         </a:rPr>
-                        <a:t>올리브영 쇼핑 큐레이터</a:t>
+                        <a:t>★ 올리브영 쇼핑 큐레이터 (코어)</a:t>
                       </a:r>
                     </a:p>
                   </a:txBody>
@@ -17683,7 +19653,7 @@
                     <a:p>
                       <a:pPr algn="l"/>
                       <a:r>
-                        <a:rPr sz="1150" b="1" spc="-100">
+                        <a:rPr sz="1100" b="1" spc="-100">
                           <a:solidFill>
                             <a:srgbClr val="FFFFFF"/>
                           </a:solidFill>
@@ -17701,7 +19671,7 @@
                   </a:tcPr>
                 </a:tc>
               </a:tr>
-              <a:tr h="658368">
+              <a:tr h="475488">
                 <a:tc>
                   <a:txBody>
                     <a:bodyPr wrap="square"/>
@@ -17709,7 +19679,7 @@
                     <a:p>
                       <a:pPr algn="l"/>
                       <a:r>
-                        <a:rPr sz="1050" b="1" spc="-100">
+                        <a:rPr sz="1000" b="1" spc="-100">
                           <a:solidFill>
                             <a:srgbClr val="141412"/>
                           </a:solidFill>
@@ -17733,7 +19703,7 @@
                     <a:p>
                       <a:pPr algn="l"/>
                       <a:r>
-                        <a:rPr sz="1050" b="0" spc="-100">
+                        <a:rPr sz="1000" b="0" spc="-100">
                           <a:solidFill>
                             <a:srgbClr val="141412"/>
                           </a:solidFill>
@@ -17757,7 +19727,7 @@
                     <a:p>
                       <a:pPr algn="l"/>
                       <a:r>
-                        <a:rPr sz="1050" b="0" spc="-100">
+                        <a:rPr sz="1000" b="0" spc="-100">
                           <a:solidFill>
                             <a:srgbClr val="141412"/>
                           </a:solidFill>
@@ -17775,7 +19745,7 @@
                   </a:tcPr>
                 </a:tc>
               </a:tr>
-              <a:tr h="658368">
+              <a:tr h="475488">
                 <a:tc>
                   <a:txBody>
                     <a:bodyPr wrap="square"/>
@@ -17783,7 +19753,7 @@
                     <a:p>
                       <a:pPr algn="l"/>
                       <a:r>
-                        <a:rPr sz="1050" b="1" spc="-100">
+                        <a:rPr sz="1000" b="1" spc="-100">
                           <a:solidFill>
                             <a:srgbClr val="141412"/>
                           </a:solidFill>
@@ -17807,7 +19777,7 @@
                     <a:p>
                       <a:pPr algn="l"/>
                       <a:r>
-                        <a:rPr sz="1050" b="0" spc="-100">
+                        <a:rPr sz="1000" b="0" spc="-100">
                           <a:solidFill>
                             <a:srgbClr val="141412"/>
                           </a:solidFill>
@@ -17831,14 +19801,14 @@
                     <a:p>
                       <a:pPr algn="l"/>
                       <a:r>
-                        <a:rPr sz="1050" b="0" spc="-100">
+                        <a:rPr sz="1000" b="0" spc="-100">
                           <a:solidFill>
                             <a:srgbClr val="141412"/>
                           </a:solidFill>
                           <a:latin typeface="Pretendard"/>
                           <a:ea typeface="Pretendard"/>
                         </a:rPr>
-                        <a:t>고유 추적 링크 기반 외부 트래픽</a:t>
+                        <a:t>고유 추적 링크 기반 외부 트래픽 확보</a:t>
                       </a:r>
                     </a:p>
                   </a:txBody>
@@ -17849,7 +19819,7 @@
                   </a:tcPr>
                 </a:tc>
               </a:tr>
-              <a:tr h="658368">
+              <a:tr h="475488">
                 <a:tc>
                   <a:txBody>
                     <a:bodyPr wrap="square"/>
@@ -17857,7 +19827,7 @@
                     <a:p>
                       <a:pPr algn="l"/>
                       <a:r>
-                        <a:rPr sz="1050" b="1" spc="-100">
+                        <a:rPr sz="1000" b="1" spc="-100">
                           <a:solidFill>
                             <a:srgbClr val="141412"/>
                           </a:solidFill>
@@ -17881,7 +19851,7 @@
                     <a:p>
                       <a:pPr algn="l"/>
                       <a:r>
-                        <a:rPr sz="1050" b="0" spc="-100">
+                        <a:rPr sz="1000" b="0" spc="-100">
                           <a:solidFill>
                             <a:srgbClr val="141412"/>
                           </a:solidFill>
@@ -17905,7 +19875,7 @@
                     <a:p>
                       <a:pPr algn="l"/>
                       <a:r>
-                        <a:rPr sz="1050" b="0" spc="-100">
+                        <a:rPr sz="1000" b="0" spc="-100">
                           <a:solidFill>
                             <a:srgbClr val="141412"/>
                           </a:solidFill>
@@ -17923,7 +19893,7 @@
                   </a:tcPr>
                 </a:tc>
               </a:tr>
-              <a:tr h="658368">
+              <a:tr h="475488">
                 <a:tc>
                   <a:txBody>
                     <a:bodyPr wrap="square"/>
@@ -17931,7 +19901,7 @@
                     <a:p>
                       <a:pPr algn="l"/>
                       <a:r>
-                        <a:rPr sz="1050" b="1" spc="-100">
+                        <a:rPr sz="1000" b="1" spc="-100">
                           <a:solidFill>
                             <a:srgbClr val="141412"/>
                           </a:solidFill>
@@ -17955,7 +19925,7 @@
                     <a:p>
                       <a:pPr algn="l"/>
                       <a:r>
-                        <a:rPr sz="1050" b="0" spc="-100">
+                        <a:rPr sz="1000" b="0" spc="-100">
                           <a:solidFill>
                             <a:srgbClr val="141412"/>
                           </a:solidFill>
@@ -17979,7 +19949,7 @@
                     <a:p>
                       <a:pPr algn="l"/>
                       <a:r>
-                        <a:rPr sz="1050" b="0" spc="-100">
+                        <a:rPr sz="1000" b="0" spc="-100">
                           <a:solidFill>
                             <a:srgbClr val="141412"/>
                           </a:solidFill>
@@ -18003,7 +19973,365 @@
       </p:graphicFrame>
       <p:sp>
         <p:nvSpPr>
-          <p:cNvPr id="7" name="TextBox 6"/>
+          <p:cNvPr id="16" name="Rectangle 15"/>
+          <p:cNvSpPr/>
+          <p:nvPr/>
+        </p:nvSpPr>
+        <p:spPr>
+          <a:xfrm>
+            <a:off x="2532640" y="2852928"/>
+            <a:ext cx="4559148" cy="2377440"/>
+          </a:xfrm>
+          <a:prstGeom prst="rect">
+            <a:avLst/>
+          </a:prstGeom>
+          <a:noFill/>
+          <a:ln w="31750">
+            <a:solidFill>
+              <a:srgbClr val="0E5A30"/>
+            </a:solidFill>
+          </a:ln>
+          <a:effectLst/>
+        </p:spPr>
+        <p:style>
+          <a:lnRef idx="1">
+            <a:schemeClr val="accent1"/>
+          </a:lnRef>
+          <a:fillRef idx="3">
+            <a:schemeClr val="accent1"/>
+          </a:fillRef>
+          <a:effectRef idx="2">
+            <a:schemeClr val="accent1"/>
+          </a:effectRef>
+          <a:fontRef idx="minor">
+            <a:schemeClr val="lt1"/>
+          </a:fontRef>
+        </p:style>
+        <p:txBody>
+          <a:bodyPr rtlCol="0" anchor="ctr"/>
+          <a:lstStyle/>
+          <a:p>
+            <a:pPr algn="ctr"/>
+          </a:p>
+        </p:txBody>
+      </p:sp>
+      <p:sp>
+        <p:nvSpPr>
+          <p:cNvPr id="17" name="Rounded Rectangle 16"/>
+          <p:cNvSpPr/>
+          <p:nvPr/>
+        </p:nvSpPr>
+        <p:spPr>
+          <a:xfrm>
+            <a:off x="822960" y="5486400"/>
+            <a:ext cx="10543032" cy="457200"/>
+          </a:xfrm>
+          <a:prstGeom prst="roundRect">
+            <a:avLst>
+              <a:gd name="adj" fmla="val 8000"/>
+            </a:avLst>
+          </a:prstGeom>
+          <a:solidFill>
+            <a:srgbClr val="F3F2E7"/>
+          </a:solidFill>
+          <a:ln>
+            <a:noFill/>
+          </a:ln>
+          <a:effectLst/>
+        </p:spPr>
+        <p:style>
+          <a:lnRef idx="1">
+            <a:schemeClr val="accent1"/>
+          </a:lnRef>
+          <a:fillRef idx="3">
+            <a:schemeClr val="accent1"/>
+          </a:fillRef>
+          <a:effectRef idx="2">
+            <a:schemeClr val="accent1"/>
+          </a:effectRef>
+          <a:fontRef idx="minor">
+            <a:schemeClr val="lt1"/>
+          </a:fontRef>
+        </p:style>
+        <p:txBody>
+          <a:bodyPr rtlCol="0" anchor="ctr"/>
+          <a:lstStyle/>
+          <a:p>
+            <a:pPr algn="ctr"/>
+          </a:p>
+        </p:txBody>
+      </p:sp>
+      <p:sp>
+        <p:nvSpPr>
+          <p:cNvPr id="18" name="TextBox 17"/>
+          <p:cNvSpPr txBox="1"/>
+          <p:nvPr/>
+        </p:nvSpPr>
+        <p:spPr>
+          <a:xfrm>
+            <a:off x="1097280" y="5486400"/>
+            <a:ext cx="2194560" cy="457200"/>
+          </a:xfrm>
+          <a:prstGeom prst="rect">
+            <a:avLst/>
+          </a:prstGeom>
+          <a:noFill/>
+        </p:spPr>
+        <p:txBody>
+          <a:bodyPr wrap="square" anchor="ctr" lIns="0" rIns="0" tIns="0" bIns="0">
+            <a:spAutoFit/>
+          </a:bodyPr>
+          <a:lstStyle/>
+          <a:p>
+            <a:pPr algn="l"/>
+            <a:r>
+              <a:rPr sz="1050" b="1" spc="-100">
+                <a:solidFill>
+                  <a:srgbClr val="3D2B1B"/>
+                </a:solidFill>
+                <a:latin typeface="Pretendard"/>
+                <a:ea typeface="Pretendard"/>
+              </a:rPr>
+              <a:t>추천 콘텐츠</a:t>
+            </a:r>
+          </a:p>
+        </p:txBody>
+      </p:sp>
+      <p:sp>
+        <p:nvSpPr>
+          <p:cNvPr id="19" name="TextBox 18"/>
+          <p:cNvSpPr txBox="1"/>
+          <p:nvPr/>
+        </p:nvSpPr>
+        <p:spPr>
+          <a:xfrm>
+            <a:off x="3794760" y="5486400"/>
+            <a:ext cx="2194560" cy="457200"/>
+          </a:xfrm>
+          <a:prstGeom prst="rect">
+            <a:avLst/>
+          </a:prstGeom>
+          <a:noFill/>
+        </p:spPr>
+        <p:txBody>
+          <a:bodyPr wrap="square" anchor="ctr" lIns="0" rIns="0" tIns="0" bIns="0">
+            <a:spAutoFit/>
+          </a:bodyPr>
+          <a:lstStyle/>
+          <a:p>
+            <a:pPr algn="l"/>
+            <a:r>
+              <a:rPr sz="1050" b="1" spc="-100">
+                <a:solidFill>
+                  <a:srgbClr val="3D2B1B"/>
+                </a:solidFill>
+                <a:latin typeface="Pretendard"/>
+                <a:ea typeface="Pretendard"/>
+              </a:rPr>
+              <a:t>→  개인 URL·셔터</a:t>
+            </a:r>
+          </a:p>
+        </p:txBody>
+      </p:sp>
+      <p:sp>
+        <p:nvSpPr>
+          <p:cNvPr id="20" name="TextBox 19"/>
+          <p:cNvSpPr txBox="1"/>
+          <p:nvPr/>
+        </p:nvSpPr>
+        <p:spPr>
+          <a:xfrm>
+            <a:off x="6492240" y="5486400"/>
+            <a:ext cx="2194560" cy="457200"/>
+          </a:xfrm>
+          <a:prstGeom prst="rect">
+            <a:avLst/>
+          </a:prstGeom>
+          <a:noFill/>
+        </p:spPr>
+        <p:txBody>
+          <a:bodyPr wrap="square" anchor="ctr" lIns="0" rIns="0" tIns="0" bIns="0">
+            <a:spAutoFit/>
+          </a:bodyPr>
+          <a:lstStyle/>
+          <a:p>
+            <a:pPr algn="l"/>
+            <a:r>
+              <a:rPr sz="1050" b="1" spc="-100">
+                <a:solidFill>
+                  <a:srgbClr val="3D2B1B"/>
+                </a:solidFill>
+                <a:latin typeface="Pretendard"/>
+                <a:ea typeface="Pretendard"/>
+              </a:rPr>
+              <a:t>→  앱 내 발견</a:t>
+            </a:r>
+          </a:p>
+        </p:txBody>
+      </p:sp>
+      <p:sp>
+        <p:nvSpPr>
+          <p:cNvPr id="21" name="TextBox 20"/>
+          <p:cNvSpPr txBox="1"/>
+          <p:nvPr/>
+        </p:nvSpPr>
+        <p:spPr>
+          <a:xfrm>
+            <a:off x="9189720" y="5486400"/>
+            <a:ext cx="2194560" cy="457200"/>
+          </a:xfrm>
+          <a:prstGeom prst="rect">
+            <a:avLst/>
+          </a:prstGeom>
+          <a:noFill/>
+        </p:spPr>
+        <p:txBody>
+          <a:bodyPr wrap="square" anchor="ctr" lIns="0" rIns="0" tIns="0" bIns="0">
+            <a:spAutoFit/>
+          </a:bodyPr>
+          <a:lstStyle/>
+          <a:p>
+            <a:pPr algn="l"/>
+            <a:r>
+              <a:rPr sz="1050" b="1" spc="-100">
+                <a:solidFill>
+                  <a:srgbClr val="3D2B1B"/>
+                </a:solidFill>
+                <a:latin typeface="Pretendard"/>
+                <a:ea typeface="Pretendard"/>
+              </a:rPr>
+              <a:t>→  구매·랭킹 견인</a:t>
+            </a:r>
+          </a:p>
+        </p:txBody>
+      </p:sp>
+      <p:sp>
+        <p:nvSpPr>
+          <p:cNvPr id="22" name="Rectangle 21"/>
+          <p:cNvSpPr/>
+          <p:nvPr/>
+        </p:nvSpPr>
+        <p:spPr>
+          <a:xfrm>
+            <a:off x="822960" y="6144768"/>
+            <a:ext cx="10543032" cy="457200"/>
+          </a:xfrm>
+          <a:prstGeom prst="rect">
+            <a:avLst/>
+          </a:prstGeom>
+          <a:solidFill>
+            <a:srgbClr val="F3F2E7"/>
+          </a:solidFill>
+          <a:ln>
+            <a:noFill/>
+          </a:ln>
+          <a:effectLst/>
+        </p:spPr>
+        <p:style>
+          <a:lnRef idx="1">
+            <a:schemeClr val="accent1"/>
+          </a:lnRef>
+          <a:fillRef idx="3">
+            <a:schemeClr val="accent1"/>
+          </a:fillRef>
+          <a:effectRef idx="2">
+            <a:schemeClr val="accent1"/>
+          </a:effectRef>
+          <a:fontRef idx="minor">
+            <a:schemeClr val="lt1"/>
+          </a:fontRef>
+        </p:style>
+        <p:txBody>
+          <a:bodyPr rtlCol="0" anchor="ctr"/>
+          <a:lstStyle/>
+          <a:p>
+            <a:pPr algn="ctr"/>
+          </a:p>
+        </p:txBody>
+      </p:sp>
+      <p:sp>
+        <p:nvSpPr>
+          <p:cNvPr id="23" name="Rectangle 22"/>
+          <p:cNvSpPr/>
+          <p:nvPr/>
+        </p:nvSpPr>
+        <p:spPr>
+          <a:xfrm>
+            <a:off x="822960" y="6144768"/>
+            <a:ext cx="82296" cy="457200"/>
+          </a:xfrm>
+          <a:prstGeom prst="rect">
+            <a:avLst/>
+          </a:prstGeom>
+          <a:solidFill>
+            <a:srgbClr val="3D2B1B"/>
+          </a:solidFill>
+          <a:ln>
+            <a:noFill/>
+          </a:ln>
+          <a:effectLst/>
+        </p:spPr>
+        <p:style>
+          <a:lnRef idx="1">
+            <a:schemeClr val="accent1"/>
+          </a:lnRef>
+          <a:fillRef idx="3">
+            <a:schemeClr val="accent1"/>
+          </a:fillRef>
+          <a:effectRef idx="2">
+            <a:schemeClr val="accent1"/>
+          </a:effectRef>
+          <a:fontRef idx="minor">
+            <a:schemeClr val="lt1"/>
+          </a:fontRef>
+        </p:style>
+        <p:txBody>
+          <a:bodyPr rtlCol="0" anchor="ctr"/>
+          <a:lstStyle/>
+          <a:p>
+            <a:pPr algn="ctr"/>
+          </a:p>
+        </p:txBody>
+      </p:sp>
+      <p:sp>
+        <p:nvSpPr>
+          <p:cNvPr id="24" name="TextBox 23"/>
+          <p:cNvSpPr txBox="1"/>
+          <p:nvPr/>
+        </p:nvSpPr>
+        <p:spPr>
+          <a:xfrm>
+            <a:off x="1097280" y="6144768"/>
+            <a:ext cx="10058400" cy="457200"/>
+          </a:xfrm>
+          <a:prstGeom prst="rect">
+            <a:avLst/>
+          </a:prstGeom>
+          <a:noFill/>
+        </p:spPr>
+        <p:txBody>
+          <a:bodyPr wrap="square" anchor="ctr" lIns="0" rIns="0" tIns="0" bIns="0">
+            <a:spAutoFit/>
+          </a:bodyPr>
+          <a:lstStyle/>
+          <a:p>
+            <a:pPr algn="ctr"/>
+            <a:r>
+              <a:rPr sz="1250" b="1" spc="-100">
+                <a:solidFill>
+                  <a:srgbClr val="141412"/>
+                </a:solidFill>
+                <a:latin typeface="Pretendard"/>
+                <a:ea typeface="Pretendard"/>
+              </a:rPr>
+              <a:t>올영 쇼핑 큐레이터를 코어로 — 추천이 앱 내 발견·구매·랭킹으로 직결된다</a:t>
+            </a:r>
+          </a:p>
+        </p:txBody>
+      </p:sp>
+      <p:sp>
+        <p:nvSpPr>
+          <p:cNvPr id="25" name="TextBox 24"/>
           <p:cNvSpPr txBox="1"/>
           <p:nvPr/>
         </p:nvSpPr>
